--- a/project_slides.pptx
+++ b/project_slides.pptx
@@ -17566,15 +17566,8 @@
                 <a:ea typeface="Consolas" pitchFamily="34" charset="-122"/>
                 <a:cs typeface="Consolas" pitchFamily="34" charset="-120"/>
               </a:rPr>
-              <a:t>unsigned long
-</a:t>
-            </a:r>
-            <a:endParaRPr lang="en-US" sz="1200" dirty="0"/>
-          </a:p>
-          <a:p>
-            <a:pPr marL="0" indent="0">
-              <a:buNone/>
-            </a:pPr>
+              <a:t>unsigned long</a:t>
+            </a:r>
             <a:r>
               <a:rPr lang="en-US" sz="1200" dirty="0">
                 <a:solidFill>
@@ -17585,8 +17578,6 @@
                 <a:cs typeface="Calibri" pitchFamily="34" charset="-120"/>
               </a:rPr>
               <a:t>
-Input must be non-negative integers.
-Negatives are skipped with a warning.
 </a:t>
             </a:r>
             <a:endParaRPr lang="en-US" sz="1200" dirty="0"/>
@@ -18004,11 +17995,10 @@
             <a:endParaRPr lang="en-US" sz="1080" dirty="0"/>
           </a:p>
           <a:p>
-            <a:pPr marL="0" indent="0">
+            <a:pPr>
               <a:spcAft>
                 <a:spcPts val="100"/>
               </a:spcAft>
-              <a:buNone/>
             </a:pPr>
             <a:r>
               <a:rPr lang="en-US" sz="1080" dirty="0">
@@ -18019,16 +18009,94 @@
                 <a:ea typeface="Consolas" pitchFamily="34" charset="-122"/>
                 <a:cs typeface="Consolas" pitchFamily="34" charset="-120"/>
               </a:rPr>
-              <a:t>6. result = f(partials[0..n-1])</a:t>
-            </a:r>
-            <a:endParaRPr lang="en-US" sz="1080" dirty="0"/>
-          </a:p>
-          <a:p>
-            <a:pPr marL="0" indent="0">
+              <a:t>6. result = partials[0]</a:t>
+            </a:r>
+          </a:p>
+          <a:p>
+            <a:pPr>
               <a:spcAft>
                 <a:spcPts val="100"/>
               </a:spcAft>
-              <a:buNone/>
+            </a:pPr>
+            <a:r>
+              <a:rPr lang="en-US" sz="1080" dirty="0">
+                <a:solidFill>
+                  <a:srgbClr val="79C0FF"/>
+                </a:solidFill>
+                <a:latin typeface="Consolas" pitchFamily="34" charset="0"/>
+                <a:ea typeface="Consolas" pitchFamily="34" charset="-122"/>
+                <a:cs typeface="Consolas" pitchFamily="34" charset="-120"/>
+              </a:rPr>
+              <a:t>   FOR </a:t>
+            </a:r>
+            <a:r>
+              <a:rPr lang="en-US" sz="1080" dirty="0" err="1">
+                <a:solidFill>
+                  <a:srgbClr val="79C0FF"/>
+                </a:solidFill>
+                <a:latin typeface="Consolas" pitchFamily="34" charset="0"/>
+                <a:ea typeface="Consolas" pitchFamily="34" charset="-122"/>
+                <a:cs typeface="Consolas" pitchFamily="34" charset="-120"/>
+              </a:rPr>
+              <a:t>i</a:t>
+            </a:r>
+            <a:r>
+              <a:rPr lang="en-US" sz="1080" dirty="0">
+                <a:solidFill>
+                  <a:srgbClr val="79C0FF"/>
+                </a:solidFill>
+                <a:latin typeface="Consolas" pitchFamily="34" charset="0"/>
+                <a:ea typeface="Consolas" pitchFamily="34" charset="-122"/>
+                <a:cs typeface="Consolas" pitchFamily="34" charset="-120"/>
+              </a:rPr>
+              <a:t> = 1 to n_proc-1:</a:t>
+            </a:r>
+          </a:p>
+          <a:p>
+            <a:pPr>
+              <a:spcAft>
+                <a:spcPts val="100"/>
+              </a:spcAft>
+            </a:pPr>
+            <a:r>
+              <a:rPr lang="en-US" sz="1080" dirty="0">
+                <a:solidFill>
+                  <a:srgbClr val="79C0FF"/>
+                </a:solidFill>
+                <a:latin typeface="Consolas" pitchFamily="34" charset="0"/>
+                <a:ea typeface="Consolas" pitchFamily="34" charset="-122"/>
+                <a:cs typeface="Consolas" pitchFamily="34" charset="-120"/>
+              </a:rPr>
+              <a:t>     result = f((int)result, (int)partials[</a:t>
+            </a:r>
+            <a:r>
+              <a:rPr lang="en-US" sz="1080" dirty="0" err="1">
+                <a:solidFill>
+                  <a:srgbClr val="79C0FF"/>
+                </a:solidFill>
+                <a:latin typeface="Consolas" pitchFamily="34" charset="0"/>
+                <a:ea typeface="Consolas" pitchFamily="34" charset="-122"/>
+                <a:cs typeface="Consolas" pitchFamily="34" charset="-120"/>
+              </a:rPr>
+              <a:t>i</a:t>
+            </a:r>
+            <a:r>
+              <a:rPr lang="en-US" sz="1080" dirty="0">
+                <a:solidFill>
+                  <a:srgbClr val="79C0FF"/>
+                </a:solidFill>
+                <a:latin typeface="Consolas" pitchFamily="34" charset="0"/>
+                <a:ea typeface="Consolas" pitchFamily="34" charset="-122"/>
+                <a:cs typeface="Consolas" pitchFamily="34" charset="-120"/>
+              </a:rPr>
+              <a:t>])</a:t>
+            </a:r>
+          </a:p>
+          <a:p>
+            <a:pPr>
+              <a:spcAft>
+                <a:spcPts val="100"/>
+              </a:spcAft>
             </a:pPr>
             <a:r>
               <a:rPr lang="en-US" sz="1080" dirty="0">
@@ -18600,11 +18668,10 @@
             <a:endParaRPr lang="en-US" sz="1080" dirty="0"/>
           </a:p>
           <a:p>
-            <a:pPr marL="0" indent="0">
+            <a:pPr>
               <a:spcAft>
                 <a:spcPts val="100"/>
               </a:spcAft>
-              <a:buNone/>
             </a:pPr>
             <a:r>
               <a:rPr lang="en-US" sz="1080" dirty="0">
@@ -18615,16 +18682,36 @@
                 <a:ea typeface="Consolas" pitchFamily="34" charset="-122"/>
                 <a:cs typeface="Consolas" pitchFamily="34" charset="-120"/>
               </a:rPr>
-              <a:t>4. FOR i = 0 to n_threads-1:</a:t>
-            </a:r>
-            <a:endParaRPr lang="en-US" sz="1080" dirty="0"/>
-          </a:p>
-          <a:p>
-            <a:pPr marL="0" indent="0">
+              <a:t>4. FOR </a:t>
+            </a:r>
+            <a:r>
+              <a:rPr lang="en-US" sz="1080" dirty="0" err="1">
+                <a:solidFill>
+                  <a:srgbClr val="79C0FF"/>
+                </a:solidFill>
+                <a:latin typeface="Consolas" pitchFamily="34" charset="0"/>
+                <a:ea typeface="Consolas" pitchFamily="34" charset="-122"/>
+                <a:cs typeface="Consolas" pitchFamily="34" charset="-120"/>
+              </a:rPr>
+              <a:t>i</a:t>
+            </a:r>
+            <a:r>
+              <a:rPr lang="en-US" sz="1080" dirty="0">
+                <a:solidFill>
+                  <a:srgbClr val="79C0FF"/>
+                </a:solidFill>
+                <a:latin typeface="Consolas" pitchFamily="34" charset="0"/>
+                <a:ea typeface="Consolas" pitchFamily="34" charset="-122"/>
+                <a:cs typeface="Consolas" pitchFamily="34" charset="-120"/>
+              </a:rPr>
+              <a:t> = 0 to n_threads-1:</a:t>
+            </a:r>
+          </a:p>
+          <a:p>
+            <a:pPr>
               <a:spcAft>
                 <a:spcPts val="100"/>
               </a:spcAft>
-              <a:buNone/>
             </a:pPr>
             <a:r>
               <a:rPr lang="en-US" sz="1080" dirty="0">
@@ -18635,16 +18722,36 @@
                 <a:ea typeface="Consolas" pitchFamily="34" charset="-122"/>
                 <a:cs typeface="Consolas" pitchFamily="34" charset="-120"/>
               </a:rPr>
-              <a:t>     args[i] = { nums, start, end,</a:t>
-            </a:r>
-            <a:endParaRPr lang="en-US" sz="1080" dirty="0"/>
-          </a:p>
-          <a:p>
-            <a:pPr marL="0" indent="0">
+              <a:t>     start = </a:t>
+            </a:r>
+            <a:r>
+              <a:rPr lang="en-US" sz="1080" dirty="0" err="1">
+                <a:solidFill>
+                  <a:srgbClr val="79C0FF"/>
+                </a:solidFill>
+                <a:latin typeface="Consolas" pitchFamily="34" charset="0"/>
+                <a:ea typeface="Consolas" pitchFamily="34" charset="-122"/>
+                <a:cs typeface="Consolas" pitchFamily="34" charset="-120"/>
+              </a:rPr>
+              <a:t>i</a:t>
+            </a:r>
+            <a:r>
+              <a:rPr lang="en-US" sz="1080" dirty="0">
+                <a:solidFill>
+                  <a:srgbClr val="79C0FF"/>
+                </a:solidFill>
+                <a:latin typeface="Consolas" pitchFamily="34" charset="0"/>
+                <a:ea typeface="Consolas" pitchFamily="34" charset="-122"/>
+                <a:cs typeface="Consolas" pitchFamily="34" charset="-120"/>
+              </a:rPr>
+              <a:t> * chunk</a:t>
+            </a:r>
+          </a:p>
+          <a:p>
+            <a:pPr>
               <a:spcAft>
                 <a:spcPts val="100"/>
               </a:spcAft>
-              <a:buNone/>
             </a:pPr>
             <a:r>
               <a:rPr lang="en-US" sz="1080" dirty="0">
@@ -18655,16 +18762,14 @@
                 <a:ea typeface="Consolas" pitchFamily="34" charset="-122"/>
                 <a:cs typeface="Consolas" pitchFamily="34" charset="-120"/>
               </a:rPr>
-              <a:t>                  f, &amp;partials[i] }</a:t>
-            </a:r>
-            <a:endParaRPr lang="en-US" sz="1080" dirty="0"/>
-          </a:p>
-          <a:p>
-            <a:pPr marL="0" indent="0">
+              <a:t>     end = start + chunk - 1</a:t>
+            </a:r>
+          </a:p>
+          <a:p>
+            <a:pPr>
               <a:spcAft>
                 <a:spcPts val="100"/>
               </a:spcAft>
-              <a:buNone/>
             </a:pPr>
             <a:r>
               <a:rPr lang="en-US" sz="1080" dirty="0">
@@ -18677,34 +18782,118 @@
               </a:rPr>
               <a:t>     if last: end += remainder</a:t>
             </a:r>
-            <a:endParaRPr lang="en-US" sz="1080" dirty="0"/>
-          </a:p>
-          <a:p>
-            <a:pPr marL="0" indent="0">
+          </a:p>
+          <a:p>
+            <a:pPr>
               <a:spcAft>
                 <a:spcPts val="100"/>
               </a:spcAft>
-              <a:buNone/>
             </a:pPr>
             <a:r>
               <a:rPr lang="en-US" sz="1080" dirty="0">
                 <a:solidFill>
-                  <a:srgbClr val="FFA552"/>
+                  <a:srgbClr val="79C0FF"/>
                 </a:solidFill>
                 <a:latin typeface="Consolas" pitchFamily="34" charset="0"/>
                 <a:ea typeface="Consolas" pitchFamily="34" charset="-122"/>
                 <a:cs typeface="Consolas" pitchFamily="34" charset="-120"/>
               </a:rPr>
-              <a:t>     pthread_create(worker, args[i])</a:t>
-            </a:r>
-            <a:endParaRPr lang="en-US" sz="1080" dirty="0"/>
-          </a:p>
-          <a:p>
-            <a:pPr marL="0" indent="0">
+              <a:t>     </a:t>
+            </a:r>
+            <a:r>
+              <a:rPr lang="en-US" sz="1080" dirty="0" err="1">
+                <a:solidFill>
+                  <a:srgbClr val="79C0FF"/>
+                </a:solidFill>
+                <a:latin typeface="Consolas" pitchFamily="34" charset="0"/>
+                <a:ea typeface="Consolas" pitchFamily="34" charset="-122"/>
+                <a:cs typeface="Consolas" pitchFamily="34" charset="-120"/>
+              </a:rPr>
+              <a:t>args</a:t>
+            </a:r>
+            <a:r>
+              <a:rPr lang="en-US" sz="1080" dirty="0">
+                <a:solidFill>
+                  <a:srgbClr val="79C0FF"/>
+                </a:solidFill>
+                <a:latin typeface="Consolas" pitchFamily="34" charset="0"/>
+                <a:ea typeface="Consolas" pitchFamily="34" charset="-122"/>
+                <a:cs typeface="Consolas" pitchFamily="34" charset="-120"/>
+              </a:rPr>
+              <a:t>[</a:t>
+            </a:r>
+            <a:r>
+              <a:rPr lang="en-US" sz="1080" dirty="0" err="1">
+                <a:solidFill>
+                  <a:srgbClr val="79C0FF"/>
+                </a:solidFill>
+                <a:latin typeface="Consolas" pitchFamily="34" charset="0"/>
+                <a:ea typeface="Consolas" pitchFamily="34" charset="-122"/>
+                <a:cs typeface="Consolas" pitchFamily="34" charset="-120"/>
+              </a:rPr>
+              <a:t>i</a:t>
+            </a:r>
+            <a:r>
+              <a:rPr lang="en-US" sz="1080" dirty="0">
+                <a:solidFill>
+                  <a:srgbClr val="79C0FF"/>
+                </a:solidFill>
+                <a:latin typeface="Consolas" pitchFamily="34" charset="0"/>
+                <a:ea typeface="Consolas" pitchFamily="34" charset="-122"/>
+                <a:cs typeface="Consolas" pitchFamily="34" charset="-120"/>
+              </a:rPr>
+              <a:t>] = { </a:t>
+            </a:r>
+            <a:r>
+              <a:rPr lang="en-US" sz="1080" dirty="0" err="1">
+                <a:solidFill>
+                  <a:srgbClr val="79C0FF"/>
+                </a:solidFill>
+                <a:latin typeface="Consolas" pitchFamily="34" charset="0"/>
+                <a:ea typeface="Consolas" pitchFamily="34" charset="-122"/>
+                <a:cs typeface="Consolas" pitchFamily="34" charset="-120"/>
+              </a:rPr>
+              <a:t>nums</a:t>
+            </a:r>
+            <a:r>
+              <a:rPr lang="en-US" sz="1080" dirty="0">
+                <a:solidFill>
+                  <a:srgbClr val="79C0FF"/>
+                </a:solidFill>
+                <a:latin typeface="Consolas" pitchFamily="34" charset="0"/>
+                <a:ea typeface="Consolas" pitchFamily="34" charset="-122"/>
+                <a:cs typeface="Consolas" pitchFamily="34" charset="-120"/>
+              </a:rPr>
+              <a:t>, start, end, f, &amp;partials[</a:t>
+            </a:r>
+            <a:r>
+              <a:rPr lang="en-US" sz="1080" dirty="0" err="1">
+                <a:solidFill>
+                  <a:srgbClr val="79C0FF"/>
+                </a:solidFill>
+                <a:latin typeface="Consolas" pitchFamily="34" charset="0"/>
+                <a:ea typeface="Consolas" pitchFamily="34" charset="-122"/>
+                <a:cs typeface="Consolas" pitchFamily="34" charset="-120"/>
+              </a:rPr>
+              <a:t>i</a:t>
+            </a:r>
+            <a:r>
+              <a:rPr lang="en-US" sz="1080" dirty="0">
+                <a:solidFill>
+                  <a:srgbClr val="79C0FF"/>
+                </a:solidFill>
+                <a:latin typeface="Consolas" pitchFamily="34" charset="0"/>
+                <a:ea typeface="Consolas" pitchFamily="34" charset="-122"/>
+                <a:cs typeface="Consolas" pitchFamily="34" charset="-120"/>
+              </a:rPr>
+              <a:t>] }</a:t>
+            </a:r>
+          </a:p>
+          <a:p>
+            <a:pPr>
               <a:spcAft>
                 <a:spcPts val="100"/>
               </a:spcAft>
-              <a:buNone/>
             </a:pPr>
             <a:r>
               <a:rPr lang="en-US" sz="1080" dirty="0">
@@ -18715,16 +18904,80 @@
                 <a:ea typeface="Consolas" pitchFamily="34" charset="-122"/>
                 <a:cs typeface="Consolas" pitchFamily="34" charset="-120"/>
               </a:rPr>
-              <a:t>5. pthread_join all threads</a:t>
-            </a:r>
-            <a:endParaRPr lang="en-US" sz="1080" dirty="0"/>
-          </a:p>
-          <a:p>
-            <a:pPr marL="0" indent="0">
+              <a:t>     </a:t>
+            </a:r>
+            <a:r>
+              <a:rPr lang="en-US" sz="1080" dirty="0" err="1">
+                <a:solidFill>
+                  <a:srgbClr val="79C0FF"/>
+                </a:solidFill>
+                <a:latin typeface="Consolas" pitchFamily="34" charset="0"/>
+                <a:ea typeface="Consolas" pitchFamily="34" charset="-122"/>
+                <a:cs typeface="Consolas" pitchFamily="34" charset="-120"/>
+              </a:rPr>
+              <a:t>pthread_create</a:t>
+            </a:r>
+            <a:r>
+              <a:rPr lang="en-US" sz="1080" dirty="0">
+                <a:solidFill>
+                  <a:srgbClr val="79C0FF"/>
+                </a:solidFill>
+                <a:latin typeface="Consolas" pitchFamily="34" charset="0"/>
+                <a:ea typeface="Consolas" pitchFamily="34" charset="-122"/>
+                <a:cs typeface="Consolas" pitchFamily="34" charset="-120"/>
+              </a:rPr>
+              <a:t>(worker, </a:t>
+            </a:r>
+            <a:r>
+              <a:rPr lang="en-US" sz="1080" dirty="0" err="1">
+                <a:solidFill>
+                  <a:srgbClr val="79C0FF"/>
+                </a:solidFill>
+                <a:latin typeface="Consolas" pitchFamily="34" charset="0"/>
+                <a:ea typeface="Consolas" pitchFamily="34" charset="-122"/>
+                <a:cs typeface="Consolas" pitchFamily="34" charset="-120"/>
+              </a:rPr>
+              <a:t>args</a:t>
+            </a:r>
+            <a:r>
+              <a:rPr lang="en-US" sz="1080" dirty="0">
+                <a:solidFill>
+                  <a:srgbClr val="79C0FF"/>
+                </a:solidFill>
+                <a:latin typeface="Consolas" pitchFamily="34" charset="0"/>
+                <a:ea typeface="Consolas" pitchFamily="34" charset="-122"/>
+                <a:cs typeface="Consolas" pitchFamily="34" charset="-120"/>
+              </a:rPr>
+              <a:t>[</a:t>
+            </a:r>
+            <a:r>
+              <a:rPr lang="en-US" sz="1080" dirty="0" err="1">
+                <a:solidFill>
+                  <a:srgbClr val="79C0FF"/>
+                </a:solidFill>
+                <a:latin typeface="Consolas" pitchFamily="34" charset="0"/>
+                <a:ea typeface="Consolas" pitchFamily="34" charset="-122"/>
+                <a:cs typeface="Consolas" pitchFamily="34" charset="-120"/>
+              </a:rPr>
+              <a:t>i</a:t>
+            </a:r>
+            <a:r>
+              <a:rPr lang="en-US" sz="1080" dirty="0">
+                <a:solidFill>
+                  <a:srgbClr val="79C0FF"/>
+                </a:solidFill>
+                <a:latin typeface="Consolas" pitchFamily="34" charset="0"/>
+                <a:ea typeface="Consolas" pitchFamily="34" charset="-122"/>
+                <a:cs typeface="Consolas" pitchFamily="34" charset="-120"/>
+              </a:rPr>
+              <a:t>])</a:t>
+            </a:r>
+          </a:p>
+          <a:p>
+            <a:pPr>
               <a:spcAft>
                 <a:spcPts val="100"/>
               </a:spcAft>
-              <a:buNone/>
             </a:pPr>
             <a:r>
               <a:rPr lang="en-US" sz="1080" dirty="0">
@@ -18735,16 +18988,215 @@
                 <a:ea typeface="Consolas" pitchFamily="34" charset="-122"/>
                 <a:cs typeface="Consolas" pitchFamily="34" charset="-120"/>
               </a:rPr>
-              <a:t>6. result = f(partials[0..n-1])</a:t>
+              <a:t>5. </a:t>
+            </a:r>
+            <a:r>
+              <a:rPr lang="en-US" sz="1080" dirty="0" err="1">
+                <a:solidFill>
+                  <a:srgbClr val="79C0FF"/>
+                </a:solidFill>
+                <a:latin typeface="Consolas" pitchFamily="34" charset="0"/>
+                <a:ea typeface="Consolas" pitchFamily="34" charset="-122"/>
+                <a:cs typeface="Consolas" pitchFamily="34" charset="-120"/>
+              </a:rPr>
+              <a:t>pthread_join</a:t>
+            </a:r>
+            <a:r>
+              <a:rPr lang="en-US" sz="1080" dirty="0">
+                <a:solidFill>
+                  <a:srgbClr val="79C0FF"/>
+                </a:solidFill>
+                <a:latin typeface="Consolas" pitchFamily="34" charset="0"/>
+                <a:ea typeface="Consolas" pitchFamily="34" charset="-122"/>
+                <a:cs typeface="Consolas" pitchFamily="34" charset="-120"/>
+              </a:rPr>
+              <a:t> all threads</a:t>
             </a:r>
             <a:endParaRPr lang="en-US" sz="1080" dirty="0"/>
           </a:p>
           <a:p>
-            <a:pPr marL="0" indent="0">
+            <a:pPr>
               <a:spcAft>
                 <a:spcPts val="100"/>
               </a:spcAft>
-              <a:buNone/>
+            </a:pPr>
+            <a:r>
+              <a:rPr lang="en-US" sz="1080" dirty="0">
+                <a:solidFill>
+                  <a:srgbClr val="79C0FF"/>
+                </a:solidFill>
+                <a:latin typeface="Consolas" pitchFamily="34" charset="0"/>
+                <a:ea typeface="Consolas" pitchFamily="34" charset="-122"/>
+                <a:cs typeface="Consolas" pitchFamily="34" charset="-120"/>
+              </a:rPr>
+              <a:t>6. result = </a:t>
+            </a:r>
+            <a:r>
+              <a:rPr lang="en-US" sz="1080" dirty="0" err="1">
+                <a:solidFill>
+                  <a:srgbClr val="79C0FF"/>
+                </a:solidFill>
+                <a:latin typeface="Consolas" pitchFamily="34" charset="0"/>
+                <a:ea typeface="Consolas" pitchFamily="34" charset="-122"/>
+                <a:cs typeface="Consolas" pitchFamily="34" charset="-120"/>
+              </a:rPr>
+              <a:t>thread_worker</a:t>
+            </a:r>
+            <a:r>
+              <a:rPr lang="en-US" sz="1080" dirty="0">
+                <a:solidFill>
+                  <a:srgbClr val="79C0FF"/>
+                </a:solidFill>
+                <a:latin typeface="Consolas" pitchFamily="34" charset="0"/>
+                <a:ea typeface="Consolas" pitchFamily="34" charset="-122"/>
+                <a:cs typeface="Consolas" pitchFamily="34" charset="-120"/>
+              </a:rPr>
+              <a:t>(</a:t>
+            </a:r>
+            <a:r>
+              <a:rPr lang="en-US" sz="1080" dirty="0" err="1">
+                <a:solidFill>
+                  <a:srgbClr val="79C0FF"/>
+                </a:solidFill>
+                <a:latin typeface="Consolas" pitchFamily="34" charset="0"/>
+                <a:ea typeface="Consolas" pitchFamily="34" charset="-122"/>
+                <a:cs typeface="Consolas" pitchFamily="34" charset="-120"/>
+              </a:rPr>
+              <a:t>arg</a:t>
+            </a:r>
+            <a:r>
+              <a:rPr lang="en-US" sz="1080" dirty="0">
+                <a:solidFill>
+                  <a:srgbClr val="79C0FF"/>
+                </a:solidFill>
+                <a:latin typeface="Consolas" pitchFamily="34" charset="0"/>
+                <a:ea typeface="Consolas" pitchFamily="34" charset="-122"/>
+                <a:cs typeface="Consolas" pitchFamily="34" charset="-120"/>
+              </a:rPr>
+              <a:t>):</a:t>
+            </a:r>
+          </a:p>
+          <a:p>
+            <a:pPr>
+              <a:spcAft>
+                <a:spcPts val="100"/>
+              </a:spcAft>
+            </a:pPr>
+            <a:r>
+              <a:rPr lang="en-US" sz="1080" dirty="0">
+                <a:solidFill>
+                  <a:srgbClr val="79C0FF"/>
+                </a:solidFill>
+                <a:latin typeface="Consolas" pitchFamily="34" charset="0"/>
+                <a:ea typeface="Consolas" pitchFamily="34" charset="-122"/>
+                <a:cs typeface="Consolas" pitchFamily="34" charset="-120"/>
+              </a:rPr>
+              <a:t>  partial = </a:t>
+            </a:r>
+            <a:r>
+              <a:rPr lang="en-US" sz="1080" dirty="0" err="1">
+                <a:solidFill>
+                  <a:srgbClr val="79C0FF"/>
+                </a:solidFill>
+                <a:latin typeface="Consolas" pitchFamily="34" charset="0"/>
+                <a:ea typeface="Consolas" pitchFamily="34" charset="-122"/>
+                <a:cs typeface="Consolas" pitchFamily="34" charset="-120"/>
+              </a:rPr>
+              <a:t>nums</a:t>
+            </a:r>
+            <a:r>
+              <a:rPr lang="en-US" sz="1080" dirty="0">
+                <a:solidFill>
+                  <a:srgbClr val="79C0FF"/>
+                </a:solidFill>
+                <a:latin typeface="Consolas" pitchFamily="34" charset="0"/>
+                <a:ea typeface="Consolas" pitchFamily="34" charset="-122"/>
+                <a:cs typeface="Consolas" pitchFamily="34" charset="-120"/>
+              </a:rPr>
+              <a:t>[start]</a:t>
+            </a:r>
+          </a:p>
+          <a:p>
+            <a:pPr>
+              <a:spcAft>
+                <a:spcPts val="100"/>
+              </a:spcAft>
+            </a:pPr>
+            <a:r>
+              <a:rPr lang="en-US" sz="1080" dirty="0">
+                <a:solidFill>
+                  <a:srgbClr val="79C0FF"/>
+                </a:solidFill>
+                <a:latin typeface="Consolas" pitchFamily="34" charset="0"/>
+                <a:ea typeface="Consolas" pitchFamily="34" charset="-122"/>
+                <a:cs typeface="Consolas" pitchFamily="34" charset="-120"/>
+              </a:rPr>
+              <a:t>  FOR k = start+1 to end:</a:t>
+            </a:r>
+          </a:p>
+          <a:p>
+            <a:pPr>
+              <a:spcAft>
+                <a:spcPts val="100"/>
+              </a:spcAft>
+            </a:pPr>
+            <a:r>
+              <a:rPr lang="en-US" sz="1080" dirty="0">
+                <a:solidFill>
+                  <a:srgbClr val="79C0FF"/>
+                </a:solidFill>
+                <a:latin typeface="Consolas" pitchFamily="34" charset="0"/>
+                <a:ea typeface="Consolas" pitchFamily="34" charset="-122"/>
+                <a:cs typeface="Consolas" pitchFamily="34" charset="-120"/>
+              </a:rPr>
+              <a:t>    partial = f((int)partial, </a:t>
+            </a:r>
+            <a:r>
+              <a:rPr lang="en-US" sz="1080" dirty="0" err="1">
+                <a:solidFill>
+                  <a:srgbClr val="79C0FF"/>
+                </a:solidFill>
+                <a:latin typeface="Consolas" pitchFamily="34" charset="0"/>
+                <a:ea typeface="Consolas" pitchFamily="34" charset="-122"/>
+                <a:cs typeface="Consolas" pitchFamily="34" charset="-120"/>
+              </a:rPr>
+              <a:t>nums</a:t>
+            </a:r>
+            <a:r>
+              <a:rPr lang="en-US" sz="1080" dirty="0">
+                <a:solidFill>
+                  <a:srgbClr val="79C0FF"/>
+                </a:solidFill>
+                <a:latin typeface="Consolas" pitchFamily="34" charset="0"/>
+                <a:ea typeface="Consolas" pitchFamily="34" charset="-122"/>
+                <a:cs typeface="Consolas" pitchFamily="34" charset="-120"/>
+              </a:rPr>
+              <a:t>[k])</a:t>
+            </a:r>
+          </a:p>
+          <a:p>
+            <a:pPr>
+              <a:spcAft>
+                <a:spcPts val="100"/>
+              </a:spcAft>
+            </a:pPr>
+            <a:r>
+              <a:rPr lang="en-US" sz="1080" dirty="0">
+                <a:solidFill>
+                  <a:srgbClr val="79C0FF"/>
+                </a:solidFill>
+                <a:latin typeface="Consolas" pitchFamily="34" charset="0"/>
+                <a:ea typeface="Consolas" pitchFamily="34" charset="-122"/>
+                <a:cs typeface="Consolas" pitchFamily="34" charset="-120"/>
+              </a:rPr>
+              <a:t>  *result = partial</a:t>
+            </a:r>
+          </a:p>
+          <a:p>
+            <a:pPr>
+              <a:spcAft>
+                <a:spcPts val="100"/>
+              </a:spcAft>
             </a:pPr>
             <a:r>
               <a:rPr lang="en-US" sz="1080" dirty="0">

--- a/project_slides.pptx
+++ b/project_slides.pptx
@@ -5,7 +5,7 @@
     <p:sldMasterId id="2147483648" r:id="rId1"/>
   </p:sldMasterIdLst>
   <p:notesMasterIdLst>
-    <p:notesMasterId r:id="rId21"/>
+    <p:notesMasterId r:id="rId26"/>
   </p:notesMasterIdLst>
   <p:sldIdLst>
     <p:sldId id="256" r:id="rId2"/>
@@ -27,6 +27,11 @@
     <p:sldId id="277" r:id="rId18"/>
     <p:sldId id="276" r:id="rId19"/>
     <p:sldId id="275" r:id="rId20"/>
+    <p:sldId id="270" r:id="rId21"/>
+    <p:sldId id="271" r:id="rId22"/>
+    <p:sldId id="278" r:id="rId23"/>
+    <p:sldId id="279" r:id="rId24"/>
+    <p:sldId id="280" r:id="rId25"/>
   </p:sldIdLst>
   <p:sldSz cx="9144000" cy="5143500" type="screen16x9"/>
   <p:notesSz cx="5143500" cy="9144000"/>
@@ -128,6 +133,5602 @@
     </p:ext>
   </p:extLst>
 </p:presentation>
+</file>
+
+<file path=ppt/charts/chart1.xml><?xml version="1.0" encoding="utf-8"?>
+<c:chartSpace xmlns:c="http://schemas.openxmlformats.org/drawingml/2006/chart" xmlns:a="http://schemas.openxmlformats.org/drawingml/2006/main" xmlns:r="http://schemas.openxmlformats.org/officeDocument/2006/relationships" xmlns:c16r2="http://schemas.microsoft.com/office/drawing/2015/06/chart">
+  <c:date1904 val="0"/>
+  <c:lang val="en-US"/>
+  <c:roundedCorners val="0"/>
+  <mc:AlternateContent xmlns:mc="http://schemas.openxmlformats.org/markup-compatibility/2006">
+    <mc:Choice xmlns:c14="http://schemas.microsoft.com/office/drawing/2007/8/2/chart" Requires="c14">
+      <c14:style val="102"/>
+    </mc:Choice>
+    <mc:Fallback>
+      <c:style val="2"/>
+    </mc:Fallback>
+  </mc:AlternateContent>
+  <c:chart>
+    <c:title>
+      <c:tx>
+        <c:rich>
+          <a:bodyPr rot="0" spcFirstLastPara="1" vertOverflow="ellipsis" vert="horz" wrap="square" anchor="ctr" anchorCtr="1"/>
+          <a:lstStyle/>
+          <a:p>
+            <a:pPr>
+              <a:defRPr sz="1400" b="0" i="0" u="none" strike="noStrike" kern="1200" spc="0" baseline="0">
+                <a:solidFill>
+                  <a:schemeClr val="dk1"/>
+                </a:solidFill>
+                <a:latin typeface="+mn-lt"/>
+                <a:ea typeface="+mn-ea"/>
+                <a:cs typeface="+mn-cs"/>
+              </a:defRPr>
+            </a:pPr>
+            <a:r>
+              <a:rPr lang="en-US"/>
+              <a:t>Fixed n_proc</a:t>
+            </a:r>
+          </a:p>
+        </c:rich>
+      </c:tx>
+      <c:overlay val="0"/>
+      <c:spPr>
+        <a:noFill/>
+        <a:ln>
+          <a:noFill/>
+        </a:ln>
+        <a:effectLst/>
+      </c:spPr>
+      <c:txPr>
+        <a:bodyPr rot="0" spcFirstLastPara="1" vertOverflow="ellipsis" vert="horz" wrap="square" anchor="ctr" anchorCtr="1"/>
+        <a:lstStyle/>
+        <a:p>
+          <a:pPr>
+            <a:defRPr sz="1400" b="0" i="0" u="none" strike="noStrike" kern="1200" spc="0" baseline="0">
+              <a:solidFill>
+                <a:schemeClr val="dk1"/>
+              </a:solidFill>
+              <a:latin typeface="+mn-lt"/>
+              <a:ea typeface="+mn-ea"/>
+              <a:cs typeface="+mn-cs"/>
+            </a:defRPr>
+          </a:pPr>
+          <a:endParaRPr lang="en-US"/>
+        </a:p>
+      </c:txPr>
+    </c:title>
+    <c:autoTitleDeleted val="0"/>
+    <c:plotArea>
+      <c:layout/>
+      <c:lineChart>
+        <c:grouping val="standard"/>
+        <c:varyColors val="0"/>
+        <c:ser>
+          <c:idx val="1"/>
+          <c:order val="1"/>
+          <c:tx>
+            <c:strRef>
+              <c:f>'Exp 1'!$B$1</c:f>
+              <c:strCache>
+                <c:ptCount val="1"/>
+                <c:pt idx="0">
+                  <c:v>Sequential</c:v>
+                </c:pt>
+              </c:strCache>
+            </c:strRef>
+          </c:tx>
+          <c:spPr>
+            <a:ln w="28575" cap="rnd">
+              <a:solidFill>
+                <a:schemeClr val="accent2"/>
+              </a:solidFill>
+              <a:round/>
+            </a:ln>
+            <a:effectLst/>
+          </c:spPr>
+          <c:marker>
+            <c:symbol val="none"/>
+          </c:marker>
+          <c:cat>
+            <c:numRef>
+              <c:f>'Exp 1'!$A$2:$A$101</c:f>
+              <c:numCache>
+                <c:formatCode>General</c:formatCode>
+                <c:ptCount val="100"/>
+                <c:pt idx="0">
+                  <c:v>500000</c:v>
+                </c:pt>
+                <c:pt idx="1">
+                  <c:v>1000000</c:v>
+                </c:pt>
+                <c:pt idx="2">
+                  <c:v>1500000</c:v>
+                </c:pt>
+                <c:pt idx="3">
+                  <c:v>2000000</c:v>
+                </c:pt>
+                <c:pt idx="4">
+                  <c:v>2500000</c:v>
+                </c:pt>
+                <c:pt idx="5">
+                  <c:v>3000000</c:v>
+                </c:pt>
+                <c:pt idx="6">
+                  <c:v>3500000</c:v>
+                </c:pt>
+                <c:pt idx="7">
+                  <c:v>4000000</c:v>
+                </c:pt>
+                <c:pt idx="8">
+                  <c:v>4500000</c:v>
+                </c:pt>
+                <c:pt idx="9">
+                  <c:v>5000000</c:v>
+                </c:pt>
+                <c:pt idx="10">
+                  <c:v>5500000</c:v>
+                </c:pt>
+                <c:pt idx="11">
+                  <c:v>6000000</c:v>
+                </c:pt>
+                <c:pt idx="12">
+                  <c:v>6500000</c:v>
+                </c:pt>
+                <c:pt idx="13">
+                  <c:v>7000000</c:v>
+                </c:pt>
+                <c:pt idx="14">
+                  <c:v>7500000</c:v>
+                </c:pt>
+                <c:pt idx="15">
+                  <c:v>8000000</c:v>
+                </c:pt>
+                <c:pt idx="16">
+                  <c:v>8500000</c:v>
+                </c:pt>
+                <c:pt idx="17">
+                  <c:v>9000000</c:v>
+                </c:pt>
+                <c:pt idx="18">
+                  <c:v>9500000</c:v>
+                </c:pt>
+                <c:pt idx="19">
+                  <c:v>10000000</c:v>
+                </c:pt>
+                <c:pt idx="20">
+                  <c:v>10500000</c:v>
+                </c:pt>
+                <c:pt idx="21">
+                  <c:v>11000000</c:v>
+                </c:pt>
+                <c:pt idx="22">
+                  <c:v>11500000</c:v>
+                </c:pt>
+                <c:pt idx="23">
+                  <c:v>12000000</c:v>
+                </c:pt>
+                <c:pt idx="24">
+                  <c:v>12500000</c:v>
+                </c:pt>
+                <c:pt idx="25">
+                  <c:v>13000000</c:v>
+                </c:pt>
+                <c:pt idx="26">
+                  <c:v>13500000</c:v>
+                </c:pt>
+                <c:pt idx="27">
+                  <c:v>14000000</c:v>
+                </c:pt>
+                <c:pt idx="28">
+                  <c:v>14500000</c:v>
+                </c:pt>
+                <c:pt idx="29">
+                  <c:v>15000000</c:v>
+                </c:pt>
+                <c:pt idx="30">
+                  <c:v>15500000</c:v>
+                </c:pt>
+                <c:pt idx="31">
+                  <c:v>16000000</c:v>
+                </c:pt>
+                <c:pt idx="32">
+                  <c:v>16500000</c:v>
+                </c:pt>
+                <c:pt idx="33">
+                  <c:v>17000000</c:v>
+                </c:pt>
+                <c:pt idx="34">
+                  <c:v>17500000</c:v>
+                </c:pt>
+                <c:pt idx="35">
+                  <c:v>18000000</c:v>
+                </c:pt>
+                <c:pt idx="36">
+                  <c:v>18500000</c:v>
+                </c:pt>
+                <c:pt idx="37">
+                  <c:v>19000000</c:v>
+                </c:pt>
+                <c:pt idx="38">
+                  <c:v>19500000</c:v>
+                </c:pt>
+                <c:pt idx="39">
+                  <c:v>20000000</c:v>
+                </c:pt>
+                <c:pt idx="40">
+                  <c:v>20500000</c:v>
+                </c:pt>
+                <c:pt idx="41">
+                  <c:v>21000000</c:v>
+                </c:pt>
+                <c:pt idx="42">
+                  <c:v>21500000</c:v>
+                </c:pt>
+                <c:pt idx="43">
+                  <c:v>22000000</c:v>
+                </c:pt>
+                <c:pt idx="44">
+                  <c:v>22500000</c:v>
+                </c:pt>
+                <c:pt idx="45">
+                  <c:v>23000000</c:v>
+                </c:pt>
+                <c:pt idx="46">
+                  <c:v>23500000</c:v>
+                </c:pt>
+                <c:pt idx="47">
+                  <c:v>24000000</c:v>
+                </c:pt>
+                <c:pt idx="48">
+                  <c:v>24500000</c:v>
+                </c:pt>
+                <c:pt idx="49">
+                  <c:v>25000000</c:v>
+                </c:pt>
+                <c:pt idx="50">
+                  <c:v>25500000</c:v>
+                </c:pt>
+                <c:pt idx="51">
+                  <c:v>26000000</c:v>
+                </c:pt>
+                <c:pt idx="52">
+                  <c:v>26500000</c:v>
+                </c:pt>
+                <c:pt idx="53">
+                  <c:v>27000000</c:v>
+                </c:pt>
+                <c:pt idx="54">
+                  <c:v>27500000</c:v>
+                </c:pt>
+                <c:pt idx="55">
+                  <c:v>28000000</c:v>
+                </c:pt>
+                <c:pt idx="56">
+                  <c:v>28500000</c:v>
+                </c:pt>
+                <c:pt idx="57">
+                  <c:v>29000000</c:v>
+                </c:pt>
+                <c:pt idx="58">
+                  <c:v>29500000</c:v>
+                </c:pt>
+                <c:pt idx="59">
+                  <c:v>30000000</c:v>
+                </c:pt>
+                <c:pt idx="60">
+                  <c:v>30500000</c:v>
+                </c:pt>
+                <c:pt idx="61">
+                  <c:v>31000000</c:v>
+                </c:pt>
+                <c:pt idx="62">
+                  <c:v>31500000</c:v>
+                </c:pt>
+                <c:pt idx="63">
+                  <c:v>32000000</c:v>
+                </c:pt>
+                <c:pt idx="64">
+                  <c:v>32500000</c:v>
+                </c:pt>
+                <c:pt idx="65">
+                  <c:v>33000000</c:v>
+                </c:pt>
+                <c:pt idx="66">
+                  <c:v>33500000</c:v>
+                </c:pt>
+                <c:pt idx="67">
+                  <c:v>34000000</c:v>
+                </c:pt>
+                <c:pt idx="68">
+                  <c:v>34500000</c:v>
+                </c:pt>
+                <c:pt idx="69">
+                  <c:v>35000000</c:v>
+                </c:pt>
+                <c:pt idx="70">
+                  <c:v>35500000</c:v>
+                </c:pt>
+                <c:pt idx="71">
+                  <c:v>36000000</c:v>
+                </c:pt>
+                <c:pt idx="72">
+                  <c:v>36500000</c:v>
+                </c:pt>
+                <c:pt idx="73">
+                  <c:v>37000000</c:v>
+                </c:pt>
+                <c:pt idx="74">
+                  <c:v>37500000</c:v>
+                </c:pt>
+                <c:pt idx="75">
+                  <c:v>38000000</c:v>
+                </c:pt>
+                <c:pt idx="76">
+                  <c:v>38500000</c:v>
+                </c:pt>
+                <c:pt idx="77">
+                  <c:v>39000000</c:v>
+                </c:pt>
+                <c:pt idx="78">
+                  <c:v>39500000</c:v>
+                </c:pt>
+                <c:pt idx="79">
+                  <c:v>40000000</c:v>
+                </c:pt>
+                <c:pt idx="80">
+                  <c:v>40500000</c:v>
+                </c:pt>
+                <c:pt idx="81">
+                  <c:v>41000000</c:v>
+                </c:pt>
+                <c:pt idx="82">
+                  <c:v>41500000</c:v>
+                </c:pt>
+                <c:pt idx="83">
+                  <c:v>42000000</c:v>
+                </c:pt>
+                <c:pt idx="84">
+                  <c:v>42500000</c:v>
+                </c:pt>
+                <c:pt idx="85">
+                  <c:v>43000000</c:v>
+                </c:pt>
+                <c:pt idx="86">
+                  <c:v>43500000</c:v>
+                </c:pt>
+                <c:pt idx="87">
+                  <c:v>44000000</c:v>
+                </c:pt>
+                <c:pt idx="88">
+                  <c:v>44500000</c:v>
+                </c:pt>
+                <c:pt idx="89">
+                  <c:v>45000000</c:v>
+                </c:pt>
+                <c:pt idx="90">
+                  <c:v>45500000</c:v>
+                </c:pt>
+                <c:pt idx="91">
+                  <c:v>46000000</c:v>
+                </c:pt>
+                <c:pt idx="92">
+                  <c:v>46500000</c:v>
+                </c:pt>
+                <c:pt idx="93">
+                  <c:v>47000000</c:v>
+                </c:pt>
+                <c:pt idx="94">
+                  <c:v>47500000</c:v>
+                </c:pt>
+                <c:pt idx="95">
+                  <c:v>48000000</c:v>
+                </c:pt>
+                <c:pt idx="96">
+                  <c:v>48500000</c:v>
+                </c:pt>
+                <c:pt idx="97">
+                  <c:v>49000000</c:v>
+                </c:pt>
+                <c:pt idx="98">
+                  <c:v>49500000</c:v>
+                </c:pt>
+                <c:pt idx="99">
+                  <c:v>50000000</c:v>
+                </c:pt>
+              </c:numCache>
+            </c:numRef>
+          </c:cat>
+          <c:val>
+            <c:numRef>
+              <c:f>'Exp 1'!$B$3:$B$101</c:f>
+              <c:numCache>
+                <c:formatCode>General</c:formatCode>
+                <c:ptCount val="99"/>
+                <c:pt idx="0">
+                  <c:v>6.2026999999999999E-2</c:v>
+                </c:pt>
+                <c:pt idx="1">
+                  <c:v>8.5169999999999996E-2</c:v>
+                </c:pt>
+                <c:pt idx="2">
+                  <c:v>0.110913</c:v>
+                </c:pt>
+                <c:pt idx="3">
+                  <c:v>0.15968099999999999</c:v>
+                </c:pt>
+                <c:pt idx="4">
+                  <c:v>0.18318599999999999</c:v>
+                </c:pt>
+                <c:pt idx="5">
+                  <c:v>0.205348</c:v>
+                </c:pt>
+                <c:pt idx="6">
+                  <c:v>0.245113</c:v>
+                </c:pt>
+                <c:pt idx="7">
+                  <c:v>0.26358300000000001</c:v>
+                </c:pt>
+                <c:pt idx="8">
+                  <c:v>0.29702499999999998</c:v>
+                </c:pt>
+                <c:pt idx="9">
+                  <c:v>0.33330599999999999</c:v>
+                </c:pt>
+                <c:pt idx="10">
+                  <c:v>0.35206700000000002</c:v>
+                </c:pt>
+                <c:pt idx="11">
+                  <c:v>0.39884199999999997</c:v>
+                </c:pt>
+                <c:pt idx="12">
+                  <c:v>0.42039300000000002</c:v>
+                </c:pt>
+                <c:pt idx="13">
+                  <c:v>0.44503700000000002</c:v>
+                </c:pt>
+                <c:pt idx="14">
+                  <c:v>0.47263100000000002</c:v>
+                </c:pt>
+                <c:pt idx="15">
+                  <c:v>0.50235600000000002</c:v>
+                </c:pt>
+                <c:pt idx="16">
+                  <c:v>0.54351799999999995</c:v>
+                </c:pt>
+                <c:pt idx="17">
+                  <c:v>0.56235900000000005</c:v>
+                </c:pt>
+                <c:pt idx="18">
+                  <c:v>0.60281300000000004</c:v>
+                </c:pt>
+                <c:pt idx="19">
+                  <c:v>0.62828499999999998</c:v>
+                </c:pt>
+                <c:pt idx="20">
+                  <c:v>0.64965799999999996</c:v>
+                </c:pt>
+                <c:pt idx="21">
+                  <c:v>0.67461099999999996</c:v>
+                </c:pt>
+                <c:pt idx="22">
+                  <c:v>0.70666700000000005</c:v>
+                </c:pt>
+                <c:pt idx="23">
+                  <c:v>0.73380400000000001</c:v>
+                </c:pt>
+                <c:pt idx="24">
+                  <c:v>0.76539699999999999</c:v>
+                </c:pt>
+                <c:pt idx="25">
+                  <c:v>0.79929700000000004</c:v>
+                </c:pt>
+                <c:pt idx="26">
+                  <c:v>0.818882</c:v>
+                </c:pt>
+                <c:pt idx="27">
+                  <c:v>0.84865299999999999</c:v>
+                </c:pt>
+                <c:pt idx="28">
+                  <c:v>0.901891</c:v>
+                </c:pt>
+                <c:pt idx="29">
+                  <c:v>0.92798000000000003</c:v>
+                </c:pt>
+                <c:pt idx="30">
+                  <c:v>0.95086800000000005</c:v>
+                </c:pt>
+                <c:pt idx="31">
+                  <c:v>0.98433700000000002</c:v>
+                </c:pt>
+                <c:pt idx="32">
+                  <c:v>1.0121020000000001</c:v>
+                </c:pt>
+                <c:pt idx="33">
+                  <c:v>1.028707</c:v>
+                </c:pt>
+                <c:pt idx="34">
+                  <c:v>1.0811010000000001</c:v>
+                </c:pt>
+                <c:pt idx="35">
+                  <c:v>1.0954839999999999</c:v>
+                </c:pt>
+                <c:pt idx="36">
+                  <c:v>1.120709</c:v>
+                </c:pt>
+                <c:pt idx="37">
+                  <c:v>1.1365510000000001</c:v>
+                </c:pt>
+                <c:pt idx="38">
+                  <c:v>1.184545</c:v>
+                </c:pt>
+                <c:pt idx="39">
+                  <c:v>1.2153750000000001</c:v>
+                </c:pt>
+                <c:pt idx="40">
+                  <c:v>1.256985</c:v>
+                </c:pt>
+                <c:pt idx="41">
+                  <c:v>1.2545310000000001</c:v>
+                </c:pt>
+                <c:pt idx="42">
+                  <c:v>1.2844949999999999</c:v>
+                </c:pt>
+                <c:pt idx="43">
+                  <c:v>1.346163</c:v>
+                </c:pt>
+                <c:pt idx="44">
+                  <c:v>1.3596900000000001</c:v>
+                </c:pt>
+                <c:pt idx="45">
+                  <c:v>1.3774660000000001</c:v>
+                </c:pt>
+                <c:pt idx="46">
+                  <c:v>1.42157</c:v>
+                </c:pt>
+                <c:pt idx="47">
+                  <c:v>1.4542079999999999</c:v>
+                </c:pt>
+                <c:pt idx="48">
+                  <c:v>1.4590179999999999</c:v>
+                </c:pt>
+                <c:pt idx="49">
+                  <c:v>1.5192939999999999</c:v>
+                </c:pt>
+                <c:pt idx="50">
+                  <c:v>1.523709</c:v>
+                </c:pt>
+                <c:pt idx="51">
+                  <c:v>1.581318</c:v>
+                </c:pt>
+                <c:pt idx="52">
+                  <c:v>1.5936170000000001</c:v>
+                </c:pt>
+                <c:pt idx="53">
+                  <c:v>1.61609</c:v>
+                </c:pt>
+                <c:pt idx="54">
+                  <c:v>1.6397440000000001</c:v>
+                </c:pt>
+                <c:pt idx="55">
+                  <c:v>1.6757200000000001</c:v>
+                </c:pt>
+                <c:pt idx="56">
+                  <c:v>1.736923</c:v>
+                </c:pt>
+                <c:pt idx="57">
+                  <c:v>1.7335119999999999</c:v>
+                </c:pt>
+                <c:pt idx="58">
+                  <c:v>1.8030949999999999</c:v>
+                </c:pt>
+                <c:pt idx="59">
+                  <c:v>1.8049500000000001</c:v>
+                </c:pt>
+                <c:pt idx="60">
+                  <c:v>1.8312349999999999</c:v>
+                </c:pt>
+                <c:pt idx="61">
+                  <c:v>1.8395170000000001</c:v>
+                </c:pt>
+                <c:pt idx="62">
+                  <c:v>1.906908</c:v>
+                </c:pt>
+                <c:pt idx="63">
+                  <c:v>1.9099870000000001</c:v>
+                </c:pt>
+                <c:pt idx="64">
+                  <c:v>1.947319</c:v>
+                </c:pt>
+                <c:pt idx="65">
+                  <c:v>2.0158809999999998</c:v>
+                </c:pt>
+                <c:pt idx="66">
+                  <c:v>2.0044200000000001</c:v>
+                </c:pt>
+                <c:pt idx="67">
+                  <c:v>2.0359219999999998</c:v>
+                </c:pt>
+                <c:pt idx="68">
+                  <c:v>2.0626350000000002</c:v>
+                </c:pt>
+                <c:pt idx="69">
+                  <c:v>2.0926999999999998</c:v>
+                </c:pt>
+                <c:pt idx="70">
+                  <c:v>2.1121490000000001</c:v>
+                </c:pt>
+                <c:pt idx="71">
+                  <c:v>2.1711290000000001</c:v>
+                </c:pt>
+                <c:pt idx="72">
+                  <c:v>2.2014079999999998</c:v>
+                </c:pt>
+                <c:pt idx="73">
+                  <c:v>2.2236989999999999</c:v>
+                </c:pt>
+                <c:pt idx="74">
+                  <c:v>2.2370369999999999</c:v>
+                </c:pt>
+                <c:pt idx="75">
+                  <c:v>2.2860019999999999</c:v>
+                </c:pt>
+                <c:pt idx="76">
+                  <c:v>2.3098169999999998</c:v>
+                </c:pt>
+                <c:pt idx="77">
+                  <c:v>2.3442720000000001</c:v>
+                </c:pt>
+                <c:pt idx="78">
+                  <c:v>2.3815879999999998</c:v>
+                </c:pt>
+                <c:pt idx="79">
+                  <c:v>2.4074179999999998</c:v>
+                </c:pt>
+                <c:pt idx="80">
+                  <c:v>2.4292400000000001</c:v>
+                </c:pt>
+                <c:pt idx="81">
+                  <c:v>2.4305569999999999</c:v>
+                </c:pt>
+                <c:pt idx="82">
+                  <c:v>2.480702</c:v>
+                </c:pt>
+                <c:pt idx="83">
+                  <c:v>2.532759</c:v>
+                </c:pt>
+                <c:pt idx="84">
+                  <c:v>2.5350190000000001</c:v>
+                </c:pt>
+                <c:pt idx="85">
+                  <c:v>2.5400459999999998</c:v>
+                </c:pt>
+                <c:pt idx="86">
+                  <c:v>2.5742020000000001</c:v>
+                </c:pt>
+                <c:pt idx="87">
+                  <c:v>2.7138179999999998</c:v>
+                </c:pt>
+                <c:pt idx="88">
+                  <c:v>2.6593740000000001</c:v>
+                </c:pt>
+                <c:pt idx="89">
+                  <c:v>2.6623070000000002</c:v>
+                </c:pt>
+                <c:pt idx="90">
+                  <c:v>2.7060089999999999</c:v>
+                </c:pt>
+                <c:pt idx="91">
+                  <c:v>2.748551</c:v>
+                </c:pt>
+                <c:pt idx="92">
+                  <c:v>2.7732389999999998</c:v>
+                </c:pt>
+                <c:pt idx="93">
+                  <c:v>2.7697959999999999</c:v>
+                </c:pt>
+                <c:pt idx="94">
+                  <c:v>2.804719</c:v>
+                </c:pt>
+                <c:pt idx="95">
+                  <c:v>2.833933</c:v>
+                </c:pt>
+                <c:pt idx="96">
+                  <c:v>2.8727420000000001</c:v>
+                </c:pt>
+                <c:pt idx="97">
+                  <c:v>2.926866</c:v>
+                </c:pt>
+                <c:pt idx="98">
+                  <c:v>2.9146290000000001</c:v>
+                </c:pt>
+              </c:numCache>
+              <c:extLst/>
+            </c:numRef>
+          </c:val>
+          <c:smooth val="0"/>
+          <c:extLst>
+            <c:ext xmlns:c16="http://schemas.microsoft.com/office/drawing/2014/chart" uri="{C3380CC4-5D6E-409C-BE32-E72D297353CC}">
+              <c16:uniqueId val="{00000000-9FCA-457D-9EB9-544A1D58B267}"/>
+            </c:ext>
+          </c:extLst>
+        </c:ser>
+        <c:ser>
+          <c:idx val="2"/>
+          <c:order val="2"/>
+          <c:tx>
+            <c:strRef>
+              <c:f>'Exp 1'!$C$1</c:f>
+              <c:strCache>
+                <c:ptCount val="1"/>
+                <c:pt idx="0">
+                  <c:v>Pipes</c:v>
+                </c:pt>
+              </c:strCache>
+            </c:strRef>
+          </c:tx>
+          <c:spPr>
+            <a:ln w="28575" cap="rnd">
+              <a:solidFill>
+                <a:schemeClr val="accent3"/>
+              </a:solidFill>
+              <a:round/>
+            </a:ln>
+            <a:effectLst/>
+          </c:spPr>
+          <c:marker>
+            <c:symbol val="none"/>
+          </c:marker>
+          <c:cat>
+            <c:numRef>
+              <c:f>'Exp 1'!$A$2:$A$101</c:f>
+              <c:numCache>
+                <c:formatCode>General</c:formatCode>
+                <c:ptCount val="100"/>
+                <c:pt idx="0">
+                  <c:v>500000</c:v>
+                </c:pt>
+                <c:pt idx="1">
+                  <c:v>1000000</c:v>
+                </c:pt>
+                <c:pt idx="2">
+                  <c:v>1500000</c:v>
+                </c:pt>
+                <c:pt idx="3">
+                  <c:v>2000000</c:v>
+                </c:pt>
+                <c:pt idx="4">
+                  <c:v>2500000</c:v>
+                </c:pt>
+                <c:pt idx="5">
+                  <c:v>3000000</c:v>
+                </c:pt>
+                <c:pt idx="6">
+                  <c:v>3500000</c:v>
+                </c:pt>
+                <c:pt idx="7">
+                  <c:v>4000000</c:v>
+                </c:pt>
+                <c:pt idx="8">
+                  <c:v>4500000</c:v>
+                </c:pt>
+                <c:pt idx="9">
+                  <c:v>5000000</c:v>
+                </c:pt>
+                <c:pt idx="10">
+                  <c:v>5500000</c:v>
+                </c:pt>
+                <c:pt idx="11">
+                  <c:v>6000000</c:v>
+                </c:pt>
+                <c:pt idx="12">
+                  <c:v>6500000</c:v>
+                </c:pt>
+                <c:pt idx="13">
+                  <c:v>7000000</c:v>
+                </c:pt>
+                <c:pt idx="14">
+                  <c:v>7500000</c:v>
+                </c:pt>
+                <c:pt idx="15">
+                  <c:v>8000000</c:v>
+                </c:pt>
+                <c:pt idx="16">
+                  <c:v>8500000</c:v>
+                </c:pt>
+                <c:pt idx="17">
+                  <c:v>9000000</c:v>
+                </c:pt>
+                <c:pt idx="18">
+                  <c:v>9500000</c:v>
+                </c:pt>
+                <c:pt idx="19">
+                  <c:v>10000000</c:v>
+                </c:pt>
+                <c:pt idx="20">
+                  <c:v>10500000</c:v>
+                </c:pt>
+                <c:pt idx="21">
+                  <c:v>11000000</c:v>
+                </c:pt>
+                <c:pt idx="22">
+                  <c:v>11500000</c:v>
+                </c:pt>
+                <c:pt idx="23">
+                  <c:v>12000000</c:v>
+                </c:pt>
+                <c:pt idx="24">
+                  <c:v>12500000</c:v>
+                </c:pt>
+                <c:pt idx="25">
+                  <c:v>13000000</c:v>
+                </c:pt>
+                <c:pt idx="26">
+                  <c:v>13500000</c:v>
+                </c:pt>
+                <c:pt idx="27">
+                  <c:v>14000000</c:v>
+                </c:pt>
+                <c:pt idx="28">
+                  <c:v>14500000</c:v>
+                </c:pt>
+                <c:pt idx="29">
+                  <c:v>15000000</c:v>
+                </c:pt>
+                <c:pt idx="30">
+                  <c:v>15500000</c:v>
+                </c:pt>
+                <c:pt idx="31">
+                  <c:v>16000000</c:v>
+                </c:pt>
+                <c:pt idx="32">
+                  <c:v>16500000</c:v>
+                </c:pt>
+                <c:pt idx="33">
+                  <c:v>17000000</c:v>
+                </c:pt>
+                <c:pt idx="34">
+                  <c:v>17500000</c:v>
+                </c:pt>
+                <c:pt idx="35">
+                  <c:v>18000000</c:v>
+                </c:pt>
+                <c:pt idx="36">
+                  <c:v>18500000</c:v>
+                </c:pt>
+                <c:pt idx="37">
+                  <c:v>19000000</c:v>
+                </c:pt>
+                <c:pt idx="38">
+                  <c:v>19500000</c:v>
+                </c:pt>
+                <c:pt idx="39">
+                  <c:v>20000000</c:v>
+                </c:pt>
+                <c:pt idx="40">
+                  <c:v>20500000</c:v>
+                </c:pt>
+                <c:pt idx="41">
+                  <c:v>21000000</c:v>
+                </c:pt>
+                <c:pt idx="42">
+                  <c:v>21500000</c:v>
+                </c:pt>
+                <c:pt idx="43">
+                  <c:v>22000000</c:v>
+                </c:pt>
+                <c:pt idx="44">
+                  <c:v>22500000</c:v>
+                </c:pt>
+                <c:pt idx="45">
+                  <c:v>23000000</c:v>
+                </c:pt>
+                <c:pt idx="46">
+                  <c:v>23500000</c:v>
+                </c:pt>
+                <c:pt idx="47">
+                  <c:v>24000000</c:v>
+                </c:pt>
+                <c:pt idx="48">
+                  <c:v>24500000</c:v>
+                </c:pt>
+                <c:pt idx="49">
+                  <c:v>25000000</c:v>
+                </c:pt>
+                <c:pt idx="50">
+                  <c:v>25500000</c:v>
+                </c:pt>
+                <c:pt idx="51">
+                  <c:v>26000000</c:v>
+                </c:pt>
+                <c:pt idx="52">
+                  <c:v>26500000</c:v>
+                </c:pt>
+                <c:pt idx="53">
+                  <c:v>27000000</c:v>
+                </c:pt>
+                <c:pt idx="54">
+                  <c:v>27500000</c:v>
+                </c:pt>
+                <c:pt idx="55">
+                  <c:v>28000000</c:v>
+                </c:pt>
+                <c:pt idx="56">
+                  <c:v>28500000</c:v>
+                </c:pt>
+                <c:pt idx="57">
+                  <c:v>29000000</c:v>
+                </c:pt>
+                <c:pt idx="58">
+                  <c:v>29500000</c:v>
+                </c:pt>
+                <c:pt idx="59">
+                  <c:v>30000000</c:v>
+                </c:pt>
+                <c:pt idx="60">
+                  <c:v>30500000</c:v>
+                </c:pt>
+                <c:pt idx="61">
+                  <c:v>31000000</c:v>
+                </c:pt>
+                <c:pt idx="62">
+                  <c:v>31500000</c:v>
+                </c:pt>
+                <c:pt idx="63">
+                  <c:v>32000000</c:v>
+                </c:pt>
+                <c:pt idx="64">
+                  <c:v>32500000</c:v>
+                </c:pt>
+                <c:pt idx="65">
+                  <c:v>33000000</c:v>
+                </c:pt>
+                <c:pt idx="66">
+                  <c:v>33500000</c:v>
+                </c:pt>
+                <c:pt idx="67">
+                  <c:v>34000000</c:v>
+                </c:pt>
+                <c:pt idx="68">
+                  <c:v>34500000</c:v>
+                </c:pt>
+                <c:pt idx="69">
+                  <c:v>35000000</c:v>
+                </c:pt>
+                <c:pt idx="70">
+                  <c:v>35500000</c:v>
+                </c:pt>
+                <c:pt idx="71">
+                  <c:v>36000000</c:v>
+                </c:pt>
+                <c:pt idx="72">
+                  <c:v>36500000</c:v>
+                </c:pt>
+                <c:pt idx="73">
+                  <c:v>37000000</c:v>
+                </c:pt>
+                <c:pt idx="74">
+                  <c:v>37500000</c:v>
+                </c:pt>
+                <c:pt idx="75">
+                  <c:v>38000000</c:v>
+                </c:pt>
+                <c:pt idx="76">
+                  <c:v>38500000</c:v>
+                </c:pt>
+                <c:pt idx="77">
+                  <c:v>39000000</c:v>
+                </c:pt>
+                <c:pt idx="78">
+                  <c:v>39500000</c:v>
+                </c:pt>
+                <c:pt idx="79">
+                  <c:v>40000000</c:v>
+                </c:pt>
+                <c:pt idx="80">
+                  <c:v>40500000</c:v>
+                </c:pt>
+                <c:pt idx="81">
+                  <c:v>41000000</c:v>
+                </c:pt>
+                <c:pt idx="82">
+                  <c:v>41500000</c:v>
+                </c:pt>
+                <c:pt idx="83">
+                  <c:v>42000000</c:v>
+                </c:pt>
+                <c:pt idx="84">
+                  <c:v>42500000</c:v>
+                </c:pt>
+                <c:pt idx="85">
+                  <c:v>43000000</c:v>
+                </c:pt>
+                <c:pt idx="86">
+                  <c:v>43500000</c:v>
+                </c:pt>
+                <c:pt idx="87">
+                  <c:v>44000000</c:v>
+                </c:pt>
+                <c:pt idx="88">
+                  <c:v>44500000</c:v>
+                </c:pt>
+                <c:pt idx="89">
+                  <c:v>45000000</c:v>
+                </c:pt>
+                <c:pt idx="90">
+                  <c:v>45500000</c:v>
+                </c:pt>
+                <c:pt idx="91">
+                  <c:v>46000000</c:v>
+                </c:pt>
+                <c:pt idx="92">
+                  <c:v>46500000</c:v>
+                </c:pt>
+                <c:pt idx="93">
+                  <c:v>47000000</c:v>
+                </c:pt>
+                <c:pt idx="94">
+                  <c:v>47500000</c:v>
+                </c:pt>
+                <c:pt idx="95">
+                  <c:v>48000000</c:v>
+                </c:pt>
+                <c:pt idx="96">
+                  <c:v>48500000</c:v>
+                </c:pt>
+                <c:pt idx="97">
+                  <c:v>49000000</c:v>
+                </c:pt>
+                <c:pt idx="98">
+                  <c:v>49500000</c:v>
+                </c:pt>
+                <c:pt idx="99">
+                  <c:v>50000000</c:v>
+                </c:pt>
+              </c:numCache>
+            </c:numRef>
+          </c:cat>
+          <c:val>
+            <c:numRef>
+              <c:f>'Exp 1'!$C$3:$C$101</c:f>
+              <c:numCache>
+                <c:formatCode>General</c:formatCode>
+                <c:ptCount val="99"/>
+                <c:pt idx="0">
+                  <c:v>5.7369000000000003E-2</c:v>
+                </c:pt>
+                <c:pt idx="1">
+                  <c:v>7.7443999999999999E-2</c:v>
+                </c:pt>
+                <c:pt idx="2">
+                  <c:v>0.10519000000000001</c:v>
+                </c:pt>
+                <c:pt idx="3">
+                  <c:v>0.141235</c:v>
+                </c:pt>
+                <c:pt idx="4">
+                  <c:v>0.16212299999999999</c:v>
+                </c:pt>
+                <c:pt idx="5">
+                  <c:v>0.19031300000000001</c:v>
+                </c:pt>
+                <c:pt idx="6">
+                  <c:v>0.216007</c:v>
+                </c:pt>
+                <c:pt idx="7">
+                  <c:v>0.24682999999999999</c:v>
+                </c:pt>
+                <c:pt idx="8">
+                  <c:v>0.27104200000000001</c:v>
+                </c:pt>
+                <c:pt idx="9">
+                  <c:v>0.30373800000000001</c:v>
+                </c:pt>
+                <c:pt idx="10">
+                  <c:v>0.32888699999999998</c:v>
+                </c:pt>
+                <c:pt idx="11">
+                  <c:v>0.35206700000000002</c:v>
+                </c:pt>
+                <c:pt idx="12">
+                  <c:v>0.38367099999999998</c:v>
+                </c:pt>
+                <c:pt idx="13">
+                  <c:v>0.42525499999999999</c:v>
+                </c:pt>
+                <c:pt idx="14">
+                  <c:v>0.42996400000000001</c:v>
+                </c:pt>
+                <c:pt idx="15">
+                  <c:v>0.45899499999999999</c:v>
+                </c:pt>
+                <c:pt idx="16">
+                  <c:v>0.48621900000000001</c:v>
+                </c:pt>
+                <c:pt idx="17">
+                  <c:v>0.51826799999999995</c:v>
+                </c:pt>
+                <c:pt idx="18">
+                  <c:v>0.54452800000000001</c:v>
+                </c:pt>
+                <c:pt idx="19">
+                  <c:v>0.57940000000000003</c:v>
+                </c:pt>
+                <c:pt idx="20">
+                  <c:v>0.58825499999999997</c:v>
+                </c:pt>
+                <c:pt idx="21">
+                  <c:v>0.62415799999999999</c:v>
+                </c:pt>
+                <c:pt idx="22">
+                  <c:v>0.63791100000000001</c:v>
+                </c:pt>
+                <c:pt idx="23">
+                  <c:v>0.68166499999999997</c:v>
+                </c:pt>
+                <c:pt idx="24">
+                  <c:v>0.71145599999999998</c:v>
+                </c:pt>
+                <c:pt idx="25">
+                  <c:v>0.71885600000000005</c:v>
+                </c:pt>
+                <c:pt idx="26">
+                  <c:v>0.75280599999999998</c:v>
+                </c:pt>
+                <c:pt idx="27">
+                  <c:v>0.78059699999999999</c:v>
+                </c:pt>
+                <c:pt idx="28">
+                  <c:v>0.81652499999999995</c:v>
+                </c:pt>
+                <c:pt idx="29">
+                  <c:v>0.84878299999999995</c:v>
+                </c:pt>
+                <c:pt idx="30">
+                  <c:v>0.85994400000000004</c:v>
+                </c:pt>
+                <c:pt idx="31">
+                  <c:v>0.88193100000000002</c:v>
+                </c:pt>
+                <c:pt idx="32">
+                  <c:v>0.92116299999999995</c:v>
+                </c:pt>
+                <c:pt idx="33">
+                  <c:v>0.93709299999999995</c:v>
+                </c:pt>
+                <c:pt idx="34">
+                  <c:v>0.96216800000000002</c:v>
+                </c:pt>
+                <c:pt idx="35">
+                  <c:v>1.010942</c:v>
+                </c:pt>
+                <c:pt idx="36">
+                  <c:v>1.015746</c:v>
+                </c:pt>
+                <c:pt idx="37">
+                  <c:v>1.0570459999999999</c:v>
+                </c:pt>
+                <c:pt idx="38">
+                  <c:v>1.072551</c:v>
+                </c:pt>
+                <c:pt idx="39">
+                  <c:v>1.095601</c:v>
+                </c:pt>
+                <c:pt idx="40">
+                  <c:v>1.139667</c:v>
+                </c:pt>
+                <c:pt idx="41">
+                  <c:v>1.1555949999999999</c:v>
+                </c:pt>
+                <c:pt idx="42">
+                  <c:v>1.187589</c:v>
+                </c:pt>
+                <c:pt idx="43">
+                  <c:v>1.2178359999999999</c:v>
+                </c:pt>
+                <c:pt idx="44">
+                  <c:v>1.2381759999999999</c:v>
+                </c:pt>
+                <c:pt idx="45">
+                  <c:v>1.2723500000000001</c:v>
+                </c:pt>
+                <c:pt idx="46">
+                  <c:v>1.3016749999999999</c:v>
+                </c:pt>
+                <c:pt idx="47">
+                  <c:v>1.3274729999999999</c:v>
+                </c:pt>
+                <c:pt idx="48">
+                  <c:v>1.3540650000000001</c:v>
+                </c:pt>
+                <c:pt idx="49">
+                  <c:v>1.37758</c:v>
+                </c:pt>
+                <c:pt idx="50">
+                  <c:v>1.393418</c:v>
+                </c:pt>
+                <c:pt idx="51">
+                  <c:v>1.419049</c:v>
+                </c:pt>
+                <c:pt idx="52">
+                  <c:v>1.454285</c:v>
+                </c:pt>
+                <c:pt idx="53">
+                  <c:v>1.4942800000000001</c:v>
+                </c:pt>
+                <c:pt idx="54">
+                  <c:v>1.5150159999999999</c:v>
+                </c:pt>
+                <c:pt idx="55">
+                  <c:v>1.529784</c:v>
+                </c:pt>
+                <c:pt idx="56">
+                  <c:v>1.6841170000000001</c:v>
+                </c:pt>
+                <c:pt idx="57">
+                  <c:v>1.5890880000000001</c:v>
+                </c:pt>
+                <c:pt idx="58">
+                  <c:v>1.6553389999999999</c:v>
+                </c:pt>
+                <c:pt idx="59">
+                  <c:v>1.615567</c:v>
+                </c:pt>
+                <c:pt idx="60">
+                  <c:v>1.6687749999999999</c:v>
+                </c:pt>
+                <c:pt idx="61">
+                  <c:v>1.681773</c:v>
+                </c:pt>
+                <c:pt idx="62">
+                  <c:v>1.731492</c:v>
+                </c:pt>
+                <c:pt idx="63">
+                  <c:v>1.770057</c:v>
+                </c:pt>
+                <c:pt idx="64">
+                  <c:v>1.799704</c:v>
+                </c:pt>
+                <c:pt idx="65">
+                  <c:v>1.8033189999999999</c:v>
+                </c:pt>
+                <c:pt idx="66">
+                  <c:v>1.8254840000000001</c:v>
+                </c:pt>
+                <c:pt idx="67">
+                  <c:v>1.866878</c:v>
+                </c:pt>
+                <c:pt idx="68">
+                  <c:v>1.9137999999999999</c:v>
+                </c:pt>
+                <c:pt idx="69">
+                  <c:v>1.917789</c:v>
+                </c:pt>
+                <c:pt idx="70">
+                  <c:v>1.9526159999999999</c:v>
+                </c:pt>
+                <c:pt idx="71">
+                  <c:v>1.963705</c:v>
+                </c:pt>
+                <c:pt idx="72">
+                  <c:v>2.00447</c:v>
+                </c:pt>
+                <c:pt idx="73">
+                  <c:v>2.0333320000000001</c:v>
+                </c:pt>
+                <c:pt idx="74">
+                  <c:v>2.0585450000000001</c:v>
+                </c:pt>
+                <c:pt idx="75">
+                  <c:v>2.097604</c:v>
+                </c:pt>
+                <c:pt idx="76">
+                  <c:v>2.1264470000000002</c:v>
+                </c:pt>
+                <c:pt idx="77">
+                  <c:v>2.165044</c:v>
+                </c:pt>
+                <c:pt idx="78">
+                  <c:v>2.1372939999999998</c:v>
+                </c:pt>
+                <c:pt idx="79">
+                  <c:v>2.1959680000000001</c:v>
+                </c:pt>
+                <c:pt idx="80">
+                  <c:v>2.223322</c:v>
+                </c:pt>
+                <c:pt idx="81">
+                  <c:v>2.2615780000000001</c:v>
+                </c:pt>
+                <c:pt idx="82">
+                  <c:v>2.2654019999999999</c:v>
+                </c:pt>
+                <c:pt idx="83">
+                  <c:v>2.3333930000000001</c:v>
+                </c:pt>
+                <c:pt idx="84">
+                  <c:v>2.3235640000000002</c:v>
+                </c:pt>
+                <c:pt idx="85">
+                  <c:v>2.3352469999999999</c:v>
+                </c:pt>
+                <c:pt idx="86">
+                  <c:v>2.357065</c:v>
+                </c:pt>
+                <c:pt idx="87">
+                  <c:v>2.4188649999999998</c:v>
+                </c:pt>
+                <c:pt idx="88">
+                  <c:v>2.4079739999999998</c:v>
+                </c:pt>
+                <c:pt idx="89">
+                  <c:v>2.42428</c:v>
+                </c:pt>
+                <c:pt idx="90">
+                  <c:v>2.506135</c:v>
+                </c:pt>
+                <c:pt idx="91">
+                  <c:v>2.514713</c:v>
+                </c:pt>
+                <c:pt idx="92">
+                  <c:v>2.542843</c:v>
+                </c:pt>
+                <c:pt idx="93">
+                  <c:v>2.5552990000000002</c:v>
+                </c:pt>
+                <c:pt idx="94">
+                  <c:v>2.6045970000000001</c:v>
+                </c:pt>
+                <c:pt idx="95">
+                  <c:v>2.6057540000000001</c:v>
+                </c:pt>
+                <c:pt idx="96">
+                  <c:v>2.6277699999999999</c:v>
+                </c:pt>
+                <c:pt idx="97">
+                  <c:v>2.6666989999999999</c:v>
+                </c:pt>
+                <c:pt idx="98">
+                  <c:v>2.7145570000000001</c:v>
+                </c:pt>
+              </c:numCache>
+              <c:extLst/>
+            </c:numRef>
+          </c:val>
+          <c:smooth val="0"/>
+          <c:extLst>
+            <c:ext xmlns:c16="http://schemas.microsoft.com/office/drawing/2014/chart" uri="{C3380CC4-5D6E-409C-BE32-E72D297353CC}">
+              <c16:uniqueId val="{00000001-9FCA-457D-9EB9-544A1D58B267}"/>
+            </c:ext>
+          </c:extLst>
+        </c:ser>
+        <c:ser>
+          <c:idx val="3"/>
+          <c:order val="3"/>
+          <c:tx>
+            <c:strRef>
+              <c:f>'Exp 1'!$D$1</c:f>
+              <c:strCache>
+                <c:ptCount val="1"/>
+                <c:pt idx="0">
+                  <c:v>MMap</c:v>
+                </c:pt>
+              </c:strCache>
+            </c:strRef>
+          </c:tx>
+          <c:spPr>
+            <a:ln w="28575" cap="rnd">
+              <a:solidFill>
+                <a:schemeClr val="accent4"/>
+              </a:solidFill>
+              <a:round/>
+            </a:ln>
+            <a:effectLst/>
+          </c:spPr>
+          <c:marker>
+            <c:symbol val="none"/>
+          </c:marker>
+          <c:cat>
+            <c:numRef>
+              <c:f>'Exp 1'!$A$2:$A$101</c:f>
+              <c:numCache>
+                <c:formatCode>General</c:formatCode>
+                <c:ptCount val="100"/>
+                <c:pt idx="0">
+                  <c:v>500000</c:v>
+                </c:pt>
+                <c:pt idx="1">
+                  <c:v>1000000</c:v>
+                </c:pt>
+                <c:pt idx="2">
+                  <c:v>1500000</c:v>
+                </c:pt>
+                <c:pt idx="3">
+                  <c:v>2000000</c:v>
+                </c:pt>
+                <c:pt idx="4">
+                  <c:v>2500000</c:v>
+                </c:pt>
+                <c:pt idx="5">
+                  <c:v>3000000</c:v>
+                </c:pt>
+                <c:pt idx="6">
+                  <c:v>3500000</c:v>
+                </c:pt>
+                <c:pt idx="7">
+                  <c:v>4000000</c:v>
+                </c:pt>
+                <c:pt idx="8">
+                  <c:v>4500000</c:v>
+                </c:pt>
+                <c:pt idx="9">
+                  <c:v>5000000</c:v>
+                </c:pt>
+                <c:pt idx="10">
+                  <c:v>5500000</c:v>
+                </c:pt>
+                <c:pt idx="11">
+                  <c:v>6000000</c:v>
+                </c:pt>
+                <c:pt idx="12">
+                  <c:v>6500000</c:v>
+                </c:pt>
+                <c:pt idx="13">
+                  <c:v>7000000</c:v>
+                </c:pt>
+                <c:pt idx="14">
+                  <c:v>7500000</c:v>
+                </c:pt>
+                <c:pt idx="15">
+                  <c:v>8000000</c:v>
+                </c:pt>
+                <c:pt idx="16">
+                  <c:v>8500000</c:v>
+                </c:pt>
+                <c:pt idx="17">
+                  <c:v>9000000</c:v>
+                </c:pt>
+                <c:pt idx="18">
+                  <c:v>9500000</c:v>
+                </c:pt>
+                <c:pt idx="19">
+                  <c:v>10000000</c:v>
+                </c:pt>
+                <c:pt idx="20">
+                  <c:v>10500000</c:v>
+                </c:pt>
+                <c:pt idx="21">
+                  <c:v>11000000</c:v>
+                </c:pt>
+                <c:pt idx="22">
+                  <c:v>11500000</c:v>
+                </c:pt>
+                <c:pt idx="23">
+                  <c:v>12000000</c:v>
+                </c:pt>
+                <c:pt idx="24">
+                  <c:v>12500000</c:v>
+                </c:pt>
+                <c:pt idx="25">
+                  <c:v>13000000</c:v>
+                </c:pt>
+                <c:pt idx="26">
+                  <c:v>13500000</c:v>
+                </c:pt>
+                <c:pt idx="27">
+                  <c:v>14000000</c:v>
+                </c:pt>
+                <c:pt idx="28">
+                  <c:v>14500000</c:v>
+                </c:pt>
+                <c:pt idx="29">
+                  <c:v>15000000</c:v>
+                </c:pt>
+                <c:pt idx="30">
+                  <c:v>15500000</c:v>
+                </c:pt>
+                <c:pt idx="31">
+                  <c:v>16000000</c:v>
+                </c:pt>
+                <c:pt idx="32">
+                  <c:v>16500000</c:v>
+                </c:pt>
+                <c:pt idx="33">
+                  <c:v>17000000</c:v>
+                </c:pt>
+                <c:pt idx="34">
+                  <c:v>17500000</c:v>
+                </c:pt>
+                <c:pt idx="35">
+                  <c:v>18000000</c:v>
+                </c:pt>
+                <c:pt idx="36">
+                  <c:v>18500000</c:v>
+                </c:pt>
+                <c:pt idx="37">
+                  <c:v>19000000</c:v>
+                </c:pt>
+                <c:pt idx="38">
+                  <c:v>19500000</c:v>
+                </c:pt>
+                <c:pt idx="39">
+                  <c:v>20000000</c:v>
+                </c:pt>
+                <c:pt idx="40">
+                  <c:v>20500000</c:v>
+                </c:pt>
+                <c:pt idx="41">
+                  <c:v>21000000</c:v>
+                </c:pt>
+                <c:pt idx="42">
+                  <c:v>21500000</c:v>
+                </c:pt>
+                <c:pt idx="43">
+                  <c:v>22000000</c:v>
+                </c:pt>
+                <c:pt idx="44">
+                  <c:v>22500000</c:v>
+                </c:pt>
+                <c:pt idx="45">
+                  <c:v>23000000</c:v>
+                </c:pt>
+                <c:pt idx="46">
+                  <c:v>23500000</c:v>
+                </c:pt>
+                <c:pt idx="47">
+                  <c:v>24000000</c:v>
+                </c:pt>
+                <c:pt idx="48">
+                  <c:v>24500000</c:v>
+                </c:pt>
+                <c:pt idx="49">
+                  <c:v>25000000</c:v>
+                </c:pt>
+                <c:pt idx="50">
+                  <c:v>25500000</c:v>
+                </c:pt>
+                <c:pt idx="51">
+                  <c:v>26000000</c:v>
+                </c:pt>
+                <c:pt idx="52">
+                  <c:v>26500000</c:v>
+                </c:pt>
+                <c:pt idx="53">
+                  <c:v>27000000</c:v>
+                </c:pt>
+                <c:pt idx="54">
+                  <c:v>27500000</c:v>
+                </c:pt>
+                <c:pt idx="55">
+                  <c:v>28000000</c:v>
+                </c:pt>
+                <c:pt idx="56">
+                  <c:v>28500000</c:v>
+                </c:pt>
+                <c:pt idx="57">
+                  <c:v>29000000</c:v>
+                </c:pt>
+                <c:pt idx="58">
+                  <c:v>29500000</c:v>
+                </c:pt>
+                <c:pt idx="59">
+                  <c:v>30000000</c:v>
+                </c:pt>
+                <c:pt idx="60">
+                  <c:v>30500000</c:v>
+                </c:pt>
+                <c:pt idx="61">
+                  <c:v>31000000</c:v>
+                </c:pt>
+                <c:pt idx="62">
+                  <c:v>31500000</c:v>
+                </c:pt>
+                <c:pt idx="63">
+                  <c:v>32000000</c:v>
+                </c:pt>
+                <c:pt idx="64">
+                  <c:v>32500000</c:v>
+                </c:pt>
+                <c:pt idx="65">
+                  <c:v>33000000</c:v>
+                </c:pt>
+                <c:pt idx="66">
+                  <c:v>33500000</c:v>
+                </c:pt>
+                <c:pt idx="67">
+                  <c:v>34000000</c:v>
+                </c:pt>
+                <c:pt idx="68">
+                  <c:v>34500000</c:v>
+                </c:pt>
+                <c:pt idx="69">
+                  <c:v>35000000</c:v>
+                </c:pt>
+                <c:pt idx="70">
+                  <c:v>35500000</c:v>
+                </c:pt>
+                <c:pt idx="71">
+                  <c:v>36000000</c:v>
+                </c:pt>
+                <c:pt idx="72">
+                  <c:v>36500000</c:v>
+                </c:pt>
+                <c:pt idx="73">
+                  <c:v>37000000</c:v>
+                </c:pt>
+                <c:pt idx="74">
+                  <c:v>37500000</c:v>
+                </c:pt>
+                <c:pt idx="75">
+                  <c:v>38000000</c:v>
+                </c:pt>
+                <c:pt idx="76">
+                  <c:v>38500000</c:v>
+                </c:pt>
+                <c:pt idx="77">
+                  <c:v>39000000</c:v>
+                </c:pt>
+                <c:pt idx="78">
+                  <c:v>39500000</c:v>
+                </c:pt>
+                <c:pt idx="79">
+                  <c:v>40000000</c:v>
+                </c:pt>
+                <c:pt idx="80">
+                  <c:v>40500000</c:v>
+                </c:pt>
+                <c:pt idx="81">
+                  <c:v>41000000</c:v>
+                </c:pt>
+                <c:pt idx="82">
+                  <c:v>41500000</c:v>
+                </c:pt>
+                <c:pt idx="83">
+                  <c:v>42000000</c:v>
+                </c:pt>
+                <c:pt idx="84">
+                  <c:v>42500000</c:v>
+                </c:pt>
+                <c:pt idx="85">
+                  <c:v>43000000</c:v>
+                </c:pt>
+                <c:pt idx="86">
+                  <c:v>43500000</c:v>
+                </c:pt>
+                <c:pt idx="87">
+                  <c:v>44000000</c:v>
+                </c:pt>
+                <c:pt idx="88">
+                  <c:v>44500000</c:v>
+                </c:pt>
+                <c:pt idx="89">
+                  <c:v>45000000</c:v>
+                </c:pt>
+                <c:pt idx="90">
+                  <c:v>45500000</c:v>
+                </c:pt>
+                <c:pt idx="91">
+                  <c:v>46000000</c:v>
+                </c:pt>
+                <c:pt idx="92">
+                  <c:v>46500000</c:v>
+                </c:pt>
+                <c:pt idx="93">
+                  <c:v>47000000</c:v>
+                </c:pt>
+                <c:pt idx="94">
+                  <c:v>47500000</c:v>
+                </c:pt>
+                <c:pt idx="95">
+                  <c:v>48000000</c:v>
+                </c:pt>
+                <c:pt idx="96">
+                  <c:v>48500000</c:v>
+                </c:pt>
+                <c:pt idx="97">
+                  <c:v>49000000</c:v>
+                </c:pt>
+                <c:pt idx="98">
+                  <c:v>49500000</c:v>
+                </c:pt>
+                <c:pt idx="99">
+                  <c:v>50000000</c:v>
+                </c:pt>
+              </c:numCache>
+            </c:numRef>
+          </c:cat>
+          <c:val>
+            <c:numRef>
+              <c:f>'Exp 1'!$D$3:$D$101</c:f>
+              <c:numCache>
+                <c:formatCode>General</c:formatCode>
+                <c:ptCount val="99"/>
+                <c:pt idx="0">
+                  <c:v>5.8618999999999997E-2</c:v>
+                </c:pt>
+                <c:pt idx="1">
+                  <c:v>8.2194000000000003E-2</c:v>
+                </c:pt>
+                <c:pt idx="2">
+                  <c:v>0.111233</c:v>
+                </c:pt>
+                <c:pt idx="3">
+                  <c:v>0.15257399999999999</c:v>
+                </c:pt>
+                <c:pt idx="4">
+                  <c:v>0.17727599999999999</c:v>
+                </c:pt>
+                <c:pt idx="5">
+                  <c:v>0.203372</c:v>
+                </c:pt>
+                <c:pt idx="6">
+                  <c:v>0.22347600000000001</c:v>
+                </c:pt>
+                <c:pt idx="7">
+                  <c:v>0.26661000000000001</c:v>
+                </c:pt>
+                <c:pt idx="8">
+                  <c:v>0.27961900000000001</c:v>
+                </c:pt>
+                <c:pt idx="9">
+                  <c:v>0.31645099999999998</c:v>
+                </c:pt>
+                <c:pt idx="10">
+                  <c:v>0.34278599999999998</c:v>
+                </c:pt>
+                <c:pt idx="11">
+                  <c:v>0.36995600000000001</c:v>
+                </c:pt>
+                <c:pt idx="12">
+                  <c:v>0.40579599999999999</c:v>
+                </c:pt>
+                <c:pt idx="13">
+                  <c:v>0.438253</c:v>
+                </c:pt>
+                <c:pt idx="14">
+                  <c:v>0.44382300000000002</c:v>
+                </c:pt>
+                <c:pt idx="15">
+                  <c:v>0.48359099999999999</c:v>
+                </c:pt>
+                <c:pt idx="16">
+                  <c:v>0.49770199999999998</c:v>
+                </c:pt>
+                <c:pt idx="17">
+                  <c:v>0.54272900000000002</c:v>
+                </c:pt>
+                <c:pt idx="18">
+                  <c:v>0.56437899999999996</c:v>
+                </c:pt>
+                <c:pt idx="19">
+                  <c:v>0.60303799999999996</c:v>
+                </c:pt>
+                <c:pt idx="20">
+                  <c:v>0.61129299999999998</c:v>
+                </c:pt>
+                <c:pt idx="21">
+                  <c:v>0.65112400000000004</c:v>
+                </c:pt>
+                <c:pt idx="22">
+                  <c:v>0.69210300000000002</c:v>
+                </c:pt>
+                <c:pt idx="23">
+                  <c:v>0.70136399999999999</c:v>
+                </c:pt>
+                <c:pt idx="24">
+                  <c:v>0.727877</c:v>
+                </c:pt>
+                <c:pt idx="25">
+                  <c:v>0.76249299999999998</c:v>
+                </c:pt>
+                <c:pt idx="26">
+                  <c:v>0.79197799999999996</c:v>
+                </c:pt>
+                <c:pt idx="27">
+                  <c:v>0.817334</c:v>
+                </c:pt>
+                <c:pt idx="28">
+                  <c:v>0.856209</c:v>
+                </c:pt>
+                <c:pt idx="29">
+                  <c:v>0.86851500000000004</c:v>
+                </c:pt>
+                <c:pt idx="30">
+                  <c:v>0.89895000000000003</c:v>
+                </c:pt>
+                <c:pt idx="31">
+                  <c:v>0.91461400000000004</c:v>
+                </c:pt>
+                <c:pt idx="32">
+                  <c:v>0.95457199999999998</c:v>
+                </c:pt>
+                <c:pt idx="33">
+                  <c:v>0.97121999999999997</c:v>
+                </c:pt>
+                <c:pt idx="34">
+                  <c:v>1.0075970000000001</c:v>
+                </c:pt>
+                <c:pt idx="35">
+                  <c:v>1.0426569999999999</c:v>
+                </c:pt>
+                <c:pt idx="36">
+                  <c:v>1.0618460000000001</c:v>
+                </c:pt>
+                <c:pt idx="37">
+                  <c:v>1.1013090000000001</c:v>
+                </c:pt>
+                <c:pt idx="38">
+                  <c:v>1.1180399999999999</c:v>
+                </c:pt>
+                <c:pt idx="39">
+                  <c:v>1.148045</c:v>
+                </c:pt>
+                <c:pt idx="40">
+                  <c:v>1.1702170000000001</c:v>
+                </c:pt>
+                <c:pt idx="41">
+                  <c:v>1.188912</c:v>
+                </c:pt>
+                <c:pt idx="42">
+                  <c:v>1.225082</c:v>
+                </c:pt>
+                <c:pt idx="43">
+                  <c:v>1.261666</c:v>
+                </c:pt>
+                <c:pt idx="44">
+                  <c:v>1.283374</c:v>
+                </c:pt>
+                <c:pt idx="45">
+                  <c:v>1.3220719999999999</c:v>
+                </c:pt>
+                <c:pt idx="46">
+                  <c:v>1.346849</c:v>
+                </c:pt>
+                <c:pt idx="47">
+                  <c:v>1.4005160000000001</c:v>
+                </c:pt>
+                <c:pt idx="48">
+                  <c:v>1.381327</c:v>
+                </c:pt>
+                <c:pt idx="49">
+                  <c:v>1.4250499999999999</c:v>
+                </c:pt>
+                <c:pt idx="50">
+                  <c:v>1.4482489999999999</c:v>
+                </c:pt>
+                <c:pt idx="51">
+                  <c:v>1.4867429999999999</c:v>
+                </c:pt>
+                <c:pt idx="52">
+                  <c:v>1.5132030000000001</c:v>
+                </c:pt>
+                <c:pt idx="53">
+                  <c:v>1.5265660000000001</c:v>
+                </c:pt>
+                <c:pt idx="54">
+                  <c:v>1.5553920000000001</c:v>
+                </c:pt>
+                <c:pt idx="55">
+                  <c:v>1.5878410000000001</c:v>
+                </c:pt>
+                <c:pt idx="56">
+                  <c:v>1.626546</c:v>
+                </c:pt>
+                <c:pt idx="57">
+                  <c:v>1.6628309999999999</c:v>
+                </c:pt>
+                <c:pt idx="58">
+                  <c:v>1.6576150000000001</c:v>
+                </c:pt>
+                <c:pt idx="59">
+                  <c:v>1.6855469999999999</c:v>
+                </c:pt>
+                <c:pt idx="60">
+                  <c:v>1.7081379999999999</c:v>
+                </c:pt>
+                <c:pt idx="61">
+                  <c:v>1.7368760000000001</c:v>
+                </c:pt>
+                <c:pt idx="62">
+                  <c:v>1.7642420000000001</c:v>
+                </c:pt>
+                <c:pt idx="63">
+                  <c:v>1.7858830000000001</c:v>
+                </c:pt>
+                <c:pt idx="64">
+                  <c:v>1.8399589999999999</c:v>
+                </c:pt>
+                <c:pt idx="65">
+                  <c:v>1.8754120000000001</c:v>
+                </c:pt>
+                <c:pt idx="66">
+                  <c:v>1.8713200000000001</c:v>
+                </c:pt>
+                <c:pt idx="67">
+                  <c:v>1.895246</c:v>
+                </c:pt>
+                <c:pt idx="68">
+                  <c:v>1.9418610000000001</c:v>
+                </c:pt>
+                <c:pt idx="69">
+                  <c:v>1.973252</c:v>
+                </c:pt>
+                <c:pt idx="70">
+                  <c:v>2.0045320000000002</c:v>
+                </c:pt>
+                <c:pt idx="71">
+                  <c:v>2.0220470000000001</c:v>
+                </c:pt>
+                <c:pt idx="72">
+                  <c:v>2.042249</c:v>
+                </c:pt>
+                <c:pt idx="73">
+                  <c:v>2.089426</c:v>
+                </c:pt>
+                <c:pt idx="74">
+                  <c:v>2.1049159999999998</c:v>
+                </c:pt>
+                <c:pt idx="75">
+                  <c:v>2.1257190000000001</c:v>
+                </c:pt>
+                <c:pt idx="76">
+                  <c:v>2.154379</c:v>
+                </c:pt>
+                <c:pt idx="77">
+                  <c:v>2.1869160000000001</c:v>
+                </c:pt>
+                <c:pt idx="78">
+                  <c:v>2.2079049999999998</c:v>
+                </c:pt>
+                <c:pt idx="79">
+                  <c:v>2.2378550000000001</c:v>
+                </c:pt>
+                <c:pt idx="80">
+                  <c:v>2.2630330000000001</c:v>
+                </c:pt>
+                <c:pt idx="81">
+                  <c:v>2.312573</c:v>
+                </c:pt>
+                <c:pt idx="82">
+                  <c:v>2.3556339999999998</c:v>
+                </c:pt>
+                <c:pt idx="83">
+                  <c:v>2.3545129999999999</c:v>
+                </c:pt>
+                <c:pt idx="84">
+                  <c:v>2.3825750000000001</c:v>
+                </c:pt>
+                <c:pt idx="85">
+                  <c:v>2.413332</c:v>
+                </c:pt>
+                <c:pt idx="86">
+                  <c:v>2.4302630000000001</c:v>
+                </c:pt>
+                <c:pt idx="87">
+                  <c:v>2.4783559999999998</c:v>
+                </c:pt>
+                <c:pt idx="88">
+                  <c:v>2.469964</c:v>
+                </c:pt>
+                <c:pt idx="89">
+                  <c:v>2.5085999999999999</c:v>
+                </c:pt>
+                <c:pt idx="90">
+                  <c:v>2.5416089999999998</c:v>
+                </c:pt>
+                <c:pt idx="91">
+                  <c:v>2.5440109999999998</c:v>
+                </c:pt>
+                <c:pt idx="92">
+                  <c:v>2.5815039999999998</c:v>
+                </c:pt>
+                <c:pt idx="93">
+                  <c:v>2.6072099999999998</c:v>
+                </c:pt>
+                <c:pt idx="94">
+                  <c:v>2.6601210000000002</c:v>
+                </c:pt>
+                <c:pt idx="95">
+                  <c:v>2.6859350000000002</c:v>
+                </c:pt>
+                <c:pt idx="96">
+                  <c:v>2.688097</c:v>
+                </c:pt>
+                <c:pt idx="97">
+                  <c:v>2.727328</c:v>
+                </c:pt>
+                <c:pt idx="98">
+                  <c:v>2.7668879999999998</c:v>
+                </c:pt>
+              </c:numCache>
+              <c:extLst/>
+            </c:numRef>
+          </c:val>
+          <c:smooth val="0"/>
+          <c:extLst>
+            <c:ext xmlns:c16="http://schemas.microsoft.com/office/drawing/2014/chart" uri="{C3380CC4-5D6E-409C-BE32-E72D297353CC}">
+              <c16:uniqueId val="{00000002-9FCA-457D-9EB9-544A1D58B267}"/>
+            </c:ext>
+          </c:extLst>
+        </c:ser>
+        <c:ser>
+          <c:idx val="4"/>
+          <c:order val="4"/>
+          <c:tx>
+            <c:strRef>
+              <c:f>'Exp 1'!$E$1</c:f>
+              <c:strCache>
+                <c:ptCount val="1"/>
+                <c:pt idx="0">
+                  <c:v>Threads</c:v>
+                </c:pt>
+              </c:strCache>
+            </c:strRef>
+          </c:tx>
+          <c:spPr>
+            <a:ln w="28575" cap="rnd">
+              <a:solidFill>
+                <a:schemeClr val="accent5"/>
+              </a:solidFill>
+              <a:round/>
+            </a:ln>
+            <a:effectLst/>
+          </c:spPr>
+          <c:marker>
+            <c:symbol val="none"/>
+          </c:marker>
+          <c:cat>
+            <c:numRef>
+              <c:f>'Exp 1'!$A$2:$A$101</c:f>
+              <c:numCache>
+                <c:formatCode>General</c:formatCode>
+                <c:ptCount val="100"/>
+                <c:pt idx="0">
+                  <c:v>500000</c:v>
+                </c:pt>
+                <c:pt idx="1">
+                  <c:v>1000000</c:v>
+                </c:pt>
+                <c:pt idx="2">
+                  <c:v>1500000</c:v>
+                </c:pt>
+                <c:pt idx="3">
+                  <c:v>2000000</c:v>
+                </c:pt>
+                <c:pt idx="4">
+                  <c:v>2500000</c:v>
+                </c:pt>
+                <c:pt idx="5">
+                  <c:v>3000000</c:v>
+                </c:pt>
+                <c:pt idx="6">
+                  <c:v>3500000</c:v>
+                </c:pt>
+                <c:pt idx="7">
+                  <c:v>4000000</c:v>
+                </c:pt>
+                <c:pt idx="8">
+                  <c:v>4500000</c:v>
+                </c:pt>
+                <c:pt idx="9">
+                  <c:v>5000000</c:v>
+                </c:pt>
+                <c:pt idx="10">
+                  <c:v>5500000</c:v>
+                </c:pt>
+                <c:pt idx="11">
+                  <c:v>6000000</c:v>
+                </c:pt>
+                <c:pt idx="12">
+                  <c:v>6500000</c:v>
+                </c:pt>
+                <c:pt idx="13">
+                  <c:v>7000000</c:v>
+                </c:pt>
+                <c:pt idx="14">
+                  <c:v>7500000</c:v>
+                </c:pt>
+                <c:pt idx="15">
+                  <c:v>8000000</c:v>
+                </c:pt>
+                <c:pt idx="16">
+                  <c:v>8500000</c:v>
+                </c:pt>
+                <c:pt idx="17">
+                  <c:v>9000000</c:v>
+                </c:pt>
+                <c:pt idx="18">
+                  <c:v>9500000</c:v>
+                </c:pt>
+                <c:pt idx="19">
+                  <c:v>10000000</c:v>
+                </c:pt>
+                <c:pt idx="20">
+                  <c:v>10500000</c:v>
+                </c:pt>
+                <c:pt idx="21">
+                  <c:v>11000000</c:v>
+                </c:pt>
+                <c:pt idx="22">
+                  <c:v>11500000</c:v>
+                </c:pt>
+                <c:pt idx="23">
+                  <c:v>12000000</c:v>
+                </c:pt>
+                <c:pt idx="24">
+                  <c:v>12500000</c:v>
+                </c:pt>
+                <c:pt idx="25">
+                  <c:v>13000000</c:v>
+                </c:pt>
+                <c:pt idx="26">
+                  <c:v>13500000</c:v>
+                </c:pt>
+                <c:pt idx="27">
+                  <c:v>14000000</c:v>
+                </c:pt>
+                <c:pt idx="28">
+                  <c:v>14500000</c:v>
+                </c:pt>
+                <c:pt idx="29">
+                  <c:v>15000000</c:v>
+                </c:pt>
+                <c:pt idx="30">
+                  <c:v>15500000</c:v>
+                </c:pt>
+                <c:pt idx="31">
+                  <c:v>16000000</c:v>
+                </c:pt>
+                <c:pt idx="32">
+                  <c:v>16500000</c:v>
+                </c:pt>
+                <c:pt idx="33">
+                  <c:v>17000000</c:v>
+                </c:pt>
+                <c:pt idx="34">
+                  <c:v>17500000</c:v>
+                </c:pt>
+                <c:pt idx="35">
+                  <c:v>18000000</c:v>
+                </c:pt>
+                <c:pt idx="36">
+                  <c:v>18500000</c:v>
+                </c:pt>
+                <c:pt idx="37">
+                  <c:v>19000000</c:v>
+                </c:pt>
+                <c:pt idx="38">
+                  <c:v>19500000</c:v>
+                </c:pt>
+                <c:pt idx="39">
+                  <c:v>20000000</c:v>
+                </c:pt>
+                <c:pt idx="40">
+                  <c:v>20500000</c:v>
+                </c:pt>
+                <c:pt idx="41">
+                  <c:v>21000000</c:v>
+                </c:pt>
+                <c:pt idx="42">
+                  <c:v>21500000</c:v>
+                </c:pt>
+                <c:pt idx="43">
+                  <c:v>22000000</c:v>
+                </c:pt>
+                <c:pt idx="44">
+                  <c:v>22500000</c:v>
+                </c:pt>
+                <c:pt idx="45">
+                  <c:v>23000000</c:v>
+                </c:pt>
+                <c:pt idx="46">
+                  <c:v>23500000</c:v>
+                </c:pt>
+                <c:pt idx="47">
+                  <c:v>24000000</c:v>
+                </c:pt>
+                <c:pt idx="48">
+                  <c:v>24500000</c:v>
+                </c:pt>
+                <c:pt idx="49">
+                  <c:v>25000000</c:v>
+                </c:pt>
+                <c:pt idx="50">
+                  <c:v>25500000</c:v>
+                </c:pt>
+                <c:pt idx="51">
+                  <c:v>26000000</c:v>
+                </c:pt>
+                <c:pt idx="52">
+                  <c:v>26500000</c:v>
+                </c:pt>
+                <c:pt idx="53">
+                  <c:v>27000000</c:v>
+                </c:pt>
+                <c:pt idx="54">
+                  <c:v>27500000</c:v>
+                </c:pt>
+                <c:pt idx="55">
+                  <c:v>28000000</c:v>
+                </c:pt>
+                <c:pt idx="56">
+                  <c:v>28500000</c:v>
+                </c:pt>
+                <c:pt idx="57">
+                  <c:v>29000000</c:v>
+                </c:pt>
+                <c:pt idx="58">
+                  <c:v>29500000</c:v>
+                </c:pt>
+                <c:pt idx="59">
+                  <c:v>30000000</c:v>
+                </c:pt>
+                <c:pt idx="60">
+                  <c:v>30500000</c:v>
+                </c:pt>
+                <c:pt idx="61">
+                  <c:v>31000000</c:v>
+                </c:pt>
+                <c:pt idx="62">
+                  <c:v>31500000</c:v>
+                </c:pt>
+                <c:pt idx="63">
+                  <c:v>32000000</c:v>
+                </c:pt>
+                <c:pt idx="64">
+                  <c:v>32500000</c:v>
+                </c:pt>
+                <c:pt idx="65">
+                  <c:v>33000000</c:v>
+                </c:pt>
+                <c:pt idx="66">
+                  <c:v>33500000</c:v>
+                </c:pt>
+                <c:pt idx="67">
+                  <c:v>34000000</c:v>
+                </c:pt>
+                <c:pt idx="68">
+                  <c:v>34500000</c:v>
+                </c:pt>
+                <c:pt idx="69">
+                  <c:v>35000000</c:v>
+                </c:pt>
+                <c:pt idx="70">
+                  <c:v>35500000</c:v>
+                </c:pt>
+                <c:pt idx="71">
+                  <c:v>36000000</c:v>
+                </c:pt>
+                <c:pt idx="72">
+                  <c:v>36500000</c:v>
+                </c:pt>
+                <c:pt idx="73">
+                  <c:v>37000000</c:v>
+                </c:pt>
+                <c:pt idx="74">
+                  <c:v>37500000</c:v>
+                </c:pt>
+                <c:pt idx="75">
+                  <c:v>38000000</c:v>
+                </c:pt>
+                <c:pt idx="76">
+                  <c:v>38500000</c:v>
+                </c:pt>
+                <c:pt idx="77">
+                  <c:v>39000000</c:v>
+                </c:pt>
+                <c:pt idx="78">
+                  <c:v>39500000</c:v>
+                </c:pt>
+                <c:pt idx="79">
+                  <c:v>40000000</c:v>
+                </c:pt>
+                <c:pt idx="80">
+                  <c:v>40500000</c:v>
+                </c:pt>
+                <c:pt idx="81">
+                  <c:v>41000000</c:v>
+                </c:pt>
+                <c:pt idx="82">
+                  <c:v>41500000</c:v>
+                </c:pt>
+                <c:pt idx="83">
+                  <c:v>42000000</c:v>
+                </c:pt>
+                <c:pt idx="84">
+                  <c:v>42500000</c:v>
+                </c:pt>
+                <c:pt idx="85">
+                  <c:v>43000000</c:v>
+                </c:pt>
+                <c:pt idx="86">
+                  <c:v>43500000</c:v>
+                </c:pt>
+                <c:pt idx="87">
+                  <c:v>44000000</c:v>
+                </c:pt>
+                <c:pt idx="88">
+                  <c:v>44500000</c:v>
+                </c:pt>
+                <c:pt idx="89">
+                  <c:v>45000000</c:v>
+                </c:pt>
+                <c:pt idx="90">
+                  <c:v>45500000</c:v>
+                </c:pt>
+                <c:pt idx="91">
+                  <c:v>46000000</c:v>
+                </c:pt>
+                <c:pt idx="92">
+                  <c:v>46500000</c:v>
+                </c:pt>
+                <c:pt idx="93">
+                  <c:v>47000000</c:v>
+                </c:pt>
+                <c:pt idx="94">
+                  <c:v>47500000</c:v>
+                </c:pt>
+                <c:pt idx="95">
+                  <c:v>48000000</c:v>
+                </c:pt>
+                <c:pt idx="96">
+                  <c:v>48500000</c:v>
+                </c:pt>
+                <c:pt idx="97">
+                  <c:v>49000000</c:v>
+                </c:pt>
+                <c:pt idx="98">
+                  <c:v>49500000</c:v>
+                </c:pt>
+                <c:pt idx="99">
+                  <c:v>50000000</c:v>
+                </c:pt>
+              </c:numCache>
+            </c:numRef>
+          </c:cat>
+          <c:val>
+            <c:numRef>
+              <c:f>'Exp 1'!$E$3:$E$101</c:f>
+              <c:numCache>
+                <c:formatCode>General</c:formatCode>
+                <c:ptCount val="99"/>
+                <c:pt idx="0">
+                  <c:v>5.3289999999999997E-2</c:v>
+                </c:pt>
+                <c:pt idx="1">
+                  <c:v>7.9217999999999997E-2</c:v>
+                </c:pt>
+                <c:pt idx="2">
+                  <c:v>0.109012</c:v>
+                </c:pt>
+                <c:pt idx="3">
+                  <c:v>0.14522699999999999</c:v>
+                </c:pt>
+                <c:pt idx="4">
+                  <c:v>0.16145100000000001</c:v>
+                </c:pt>
+                <c:pt idx="5">
+                  <c:v>0.196302</c:v>
+                </c:pt>
+                <c:pt idx="6">
+                  <c:v>0.21415300000000001</c:v>
+                </c:pt>
+                <c:pt idx="7">
+                  <c:v>0.25148100000000001</c:v>
+                </c:pt>
+                <c:pt idx="8">
+                  <c:v>0.27489999999999998</c:v>
+                </c:pt>
+                <c:pt idx="9">
+                  <c:v>0.295261</c:v>
+                </c:pt>
+                <c:pt idx="10">
+                  <c:v>0.32780900000000002</c:v>
+                </c:pt>
+                <c:pt idx="11">
+                  <c:v>0.354244</c:v>
+                </c:pt>
+                <c:pt idx="12">
+                  <c:v>0.397424</c:v>
+                </c:pt>
+                <c:pt idx="13">
+                  <c:v>0.39885500000000002</c:v>
+                </c:pt>
+                <c:pt idx="14">
+                  <c:v>0.43803500000000001</c:v>
+                </c:pt>
+                <c:pt idx="15">
+                  <c:v>0.46173799999999998</c:v>
+                </c:pt>
+                <c:pt idx="16">
+                  <c:v>0.49012800000000001</c:v>
+                </c:pt>
+                <c:pt idx="17">
+                  <c:v>0.51591699999999996</c:v>
+                </c:pt>
+                <c:pt idx="18">
+                  <c:v>0.53611399999999998</c:v>
+                </c:pt>
+                <c:pt idx="19">
+                  <c:v>0.56408999999999998</c:v>
+                </c:pt>
+                <c:pt idx="20">
+                  <c:v>0.60104599999999997</c:v>
+                </c:pt>
+                <c:pt idx="21">
+                  <c:v>0.61880000000000002</c:v>
+                </c:pt>
+                <c:pt idx="22">
+                  <c:v>0.64387799999999995</c:v>
+                </c:pt>
+                <c:pt idx="23">
+                  <c:v>0.66903299999999999</c:v>
+                </c:pt>
+                <c:pt idx="24">
+                  <c:v>0.70337400000000005</c:v>
+                </c:pt>
+                <c:pt idx="25">
+                  <c:v>0.72353500000000004</c:v>
+                </c:pt>
+                <c:pt idx="26">
+                  <c:v>0.76117999999999997</c:v>
+                </c:pt>
+                <c:pt idx="27">
+                  <c:v>0.77522400000000002</c:v>
+                </c:pt>
+                <c:pt idx="28">
+                  <c:v>0.80827899999999997</c:v>
+                </c:pt>
+                <c:pt idx="29">
+                  <c:v>0.84438299999999999</c:v>
+                </c:pt>
+                <c:pt idx="30">
+                  <c:v>0.86160499999999995</c:v>
+                </c:pt>
+                <c:pt idx="31">
+                  <c:v>0.89542999999999995</c:v>
+                </c:pt>
+                <c:pt idx="32">
+                  <c:v>0.91664000000000001</c:v>
+                </c:pt>
+                <c:pt idx="33">
+                  <c:v>0.94433100000000003</c:v>
+                </c:pt>
+                <c:pt idx="34">
+                  <c:v>0.96606800000000004</c:v>
+                </c:pt>
+                <c:pt idx="35">
+                  <c:v>0.99819599999999997</c:v>
+                </c:pt>
+                <c:pt idx="36">
+                  <c:v>1.029094</c:v>
+                </c:pt>
+                <c:pt idx="37">
+                  <c:v>1.058076</c:v>
+                </c:pt>
+                <c:pt idx="38">
+                  <c:v>1.0663549999999999</c:v>
+                </c:pt>
+                <c:pt idx="39">
+                  <c:v>1.126058</c:v>
+                </c:pt>
+                <c:pt idx="40">
+                  <c:v>1.138196</c:v>
+                </c:pt>
+                <c:pt idx="41">
+                  <c:v>1.144215</c:v>
+                </c:pt>
+                <c:pt idx="42">
+                  <c:v>1.186728</c:v>
+                </c:pt>
+                <c:pt idx="43">
+                  <c:v>1.2166079999999999</c:v>
+                </c:pt>
+                <c:pt idx="44">
+                  <c:v>1.2366010000000001</c:v>
+                </c:pt>
+                <c:pt idx="45">
+                  <c:v>1.2546079999999999</c:v>
+                </c:pt>
+                <c:pt idx="46">
+                  <c:v>1.2959970000000001</c:v>
+                </c:pt>
+                <c:pt idx="47">
+                  <c:v>1.3118529999999999</c:v>
+                </c:pt>
+                <c:pt idx="48">
+                  <c:v>1.335755</c:v>
+                </c:pt>
+                <c:pt idx="49">
+                  <c:v>1.367164</c:v>
+                </c:pt>
+                <c:pt idx="50">
+                  <c:v>1.406207</c:v>
+                </c:pt>
+                <c:pt idx="51">
+                  <c:v>1.428399</c:v>
+                </c:pt>
+                <c:pt idx="52">
+                  <c:v>1.457174</c:v>
+                </c:pt>
+                <c:pt idx="53">
+                  <c:v>1.4804710000000001</c:v>
+                </c:pt>
+                <c:pt idx="54">
+                  <c:v>1.509018</c:v>
+                </c:pt>
+                <c:pt idx="55">
+                  <c:v>1.5441149999999999</c:v>
+                </c:pt>
+                <c:pt idx="56">
+                  <c:v>1.567728</c:v>
+                </c:pt>
+                <c:pt idx="57">
+                  <c:v>1.585277</c:v>
+                </c:pt>
+                <c:pt idx="58">
+                  <c:v>1.636412</c:v>
+                </c:pt>
+                <c:pt idx="59">
+                  <c:v>1.633589</c:v>
+                </c:pt>
+                <c:pt idx="60">
+                  <c:v>1.6553340000000001</c:v>
+                </c:pt>
+                <c:pt idx="61">
+                  <c:v>1.683122</c:v>
+                </c:pt>
+                <c:pt idx="62">
+                  <c:v>1.702078</c:v>
+                </c:pt>
+                <c:pt idx="63">
+                  <c:v>1.7254179999999999</c:v>
+                </c:pt>
+                <c:pt idx="64">
+                  <c:v>1.765452</c:v>
+                </c:pt>
+                <c:pt idx="65">
+                  <c:v>1.8127899999999999</c:v>
+                </c:pt>
+                <c:pt idx="66">
+                  <c:v>1.837412</c:v>
+                </c:pt>
+                <c:pt idx="67">
+                  <c:v>1.849577</c:v>
+                </c:pt>
+                <c:pt idx="68">
+                  <c:v>1.879203</c:v>
+                </c:pt>
+                <c:pt idx="69">
+                  <c:v>1.884093</c:v>
+                </c:pt>
+                <c:pt idx="70">
+                  <c:v>1.9216150000000001</c:v>
+                </c:pt>
+                <c:pt idx="71">
+                  <c:v>1.975814</c:v>
+                </c:pt>
+                <c:pt idx="72">
+                  <c:v>1.971433</c:v>
+                </c:pt>
+                <c:pt idx="73">
+                  <c:v>1.989989</c:v>
+                </c:pt>
+                <c:pt idx="74">
+                  <c:v>2.0437059999999998</c:v>
+                </c:pt>
+                <c:pt idx="75">
+                  <c:v>2.0536370000000002</c:v>
+                </c:pt>
+                <c:pt idx="76">
+                  <c:v>2.093807</c:v>
+                </c:pt>
+                <c:pt idx="77">
+                  <c:v>2.1350639999999999</c:v>
+                </c:pt>
+                <c:pt idx="78">
+                  <c:v>2.137159</c:v>
+                </c:pt>
+                <c:pt idx="79">
+                  <c:v>2.1433059999999999</c:v>
+                </c:pt>
+                <c:pt idx="80">
+                  <c:v>2.1959080000000002</c:v>
+                </c:pt>
+                <c:pt idx="81">
+                  <c:v>2.2292200000000002</c:v>
+                </c:pt>
+                <c:pt idx="82">
+                  <c:v>2.2653319999999999</c:v>
+                </c:pt>
+                <c:pt idx="83">
+                  <c:v>2.289069</c:v>
+                </c:pt>
+                <c:pt idx="84">
+                  <c:v>2.3017530000000002</c:v>
+                </c:pt>
+                <c:pt idx="85">
+                  <c:v>2.319502</c:v>
+                </c:pt>
+                <c:pt idx="86">
+                  <c:v>2.350749</c:v>
+                </c:pt>
+                <c:pt idx="87">
+                  <c:v>2.3710529999999999</c:v>
+                </c:pt>
+                <c:pt idx="88">
+                  <c:v>2.3860389999999998</c:v>
+                </c:pt>
+                <c:pt idx="89">
+                  <c:v>2.4083920000000001</c:v>
+                </c:pt>
+                <c:pt idx="90">
+                  <c:v>2.4460440000000001</c:v>
+                </c:pt>
+                <c:pt idx="91">
+                  <c:v>2.4663050000000002</c:v>
+                </c:pt>
+                <c:pt idx="92">
+                  <c:v>2.5113159999999999</c:v>
+                </c:pt>
+                <c:pt idx="93">
+                  <c:v>2.5284089999999999</c:v>
+                </c:pt>
+                <c:pt idx="94">
+                  <c:v>2.5605419999999999</c:v>
+                </c:pt>
+                <c:pt idx="95">
+                  <c:v>2.5626820000000001</c:v>
+                </c:pt>
+                <c:pt idx="96">
+                  <c:v>2.6060319999999999</c:v>
+                </c:pt>
+                <c:pt idx="97">
+                  <c:v>2.6376569999999999</c:v>
+                </c:pt>
+                <c:pt idx="98">
+                  <c:v>2.6528800000000001</c:v>
+                </c:pt>
+              </c:numCache>
+              <c:extLst/>
+            </c:numRef>
+          </c:val>
+          <c:smooth val="0"/>
+          <c:extLst>
+            <c:ext xmlns:c16="http://schemas.microsoft.com/office/drawing/2014/chart" uri="{C3380CC4-5D6E-409C-BE32-E72D297353CC}">
+              <c16:uniqueId val="{00000003-9FCA-457D-9EB9-544A1D58B267}"/>
+            </c:ext>
+          </c:extLst>
+        </c:ser>
+        <c:dLbls>
+          <c:showLegendKey val="0"/>
+          <c:showVal val="0"/>
+          <c:showCatName val="0"/>
+          <c:showSerName val="0"/>
+          <c:showPercent val="0"/>
+          <c:showBubbleSize val="0"/>
+        </c:dLbls>
+        <c:smooth val="0"/>
+        <c:axId val="391343168"/>
+        <c:axId val="391344128"/>
+        <c:extLst>
+          <c:ext xmlns:c15="http://schemas.microsoft.com/office/drawing/2012/chart" uri="{02D57815-91ED-43cb-92C2-25804820EDAC}">
+            <c15:filteredLineSeries>
+              <c15:ser>
+                <c:idx val="0"/>
+                <c:order val="0"/>
+                <c:tx>
+                  <c:strRef>
+                    <c:extLst>
+                      <c:ext uri="{02D57815-91ED-43cb-92C2-25804820EDAC}">
+                        <c15:formulaRef>
+                          <c15:sqref>'Exp 1'!$A$1</c15:sqref>
+                        </c15:formulaRef>
+                      </c:ext>
+                    </c:extLst>
+                    <c:strCache>
+                      <c:ptCount val="1"/>
+                      <c:pt idx="0">
+                        <c:v>N</c:v>
+                      </c:pt>
+                    </c:strCache>
+                  </c:strRef>
+                </c:tx>
+                <c:spPr>
+                  <a:ln w="28575" cap="rnd">
+                    <a:solidFill>
+                      <a:schemeClr val="accent1"/>
+                    </a:solidFill>
+                    <a:round/>
+                  </a:ln>
+                  <a:effectLst/>
+                </c:spPr>
+                <c:marker>
+                  <c:symbol val="none"/>
+                </c:marker>
+                <c:cat>
+                  <c:numRef>
+                    <c:extLst>
+                      <c:ext uri="{02D57815-91ED-43cb-92C2-25804820EDAC}">
+                        <c15:formulaRef>
+                          <c15:sqref>'Exp 1'!$A$2:$A$101</c15:sqref>
+                        </c15:formulaRef>
+                      </c:ext>
+                    </c:extLst>
+                    <c:numCache>
+                      <c:formatCode>General</c:formatCode>
+                      <c:ptCount val="100"/>
+                      <c:pt idx="0">
+                        <c:v>500000</c:v>
+                      </c:pt>
+                      <c:pt idx="1">
+                        <c:v>1000000</c:v>
+                      </c:pt>
+                      <c:pt idx="2">
+                        <c:v>1500000</c:v>
+                      </c:pt>
+                      <c:pt idx="3">
+                        <c:v>2000000</c:v>
+                      </c:pt>
+                      <c:pt idx="4">
+                        <c:v>2500000</c:v>
+                      </c:pt>
+                      <c:pt idx="5">
+                        <c:v>3000000</c:v>
+                      </c:pt>
+                      <c:pt idx="6">
+                        <c:v>3500000</c:v>
+                      </c:pt>
+                      <c:pt idx="7">
+                        <c:v>4000000</c:v>
+                      </c:pt>
+                      <c:pt idx="8">
+                        <c:v>4500000</c:v>
+                      </c:pt>
+                      <c:pt idx="9">
+                        <c:v>5000000</c:v>
+                      </c:pt>
+                      <c:pt idx="10">
+                        <c:v>5500000</c:v>
+                      </c:pt>
+                      <c:pt idx="11">
+                        <c:v>6000000</c:v>
+                      </c:pt>
+                      <c:pt idx="12">
+                        <c:v>6500000</c:v>
+                      </c:pt>
+                      <c:pt idx="13">
+                        <c:v>7000000</c:v>
+                      </c:pt>
+                      <c:pt idx="14">
+                        <c:v>7500000</c:v>
+                      </c:pt>
+                      <c:pt idx="15">
+                        <c:v>8000000</c:v>
+                      </c:pt>
+                      <c:pt idx="16">
+                        <c:v>8500000</c:v>
+                      </c:pt>
+                      <c:pt idx="17">
+                        <c:v>9000000</c:v>
+                      </c:pt>
+                      <c:pt idx="18">
+                        <c:v>9500000</c:v>
+                      </c:pt>
+                      <c:pt idx="19">
+                        <c:v>10000000</c:v>
+                      </c:pt>
+                      <c:pt idx="20">
+                        <c:v>10500000</c:v>
+                      </c:pt>
+                      <c:pt idx="21">
+                        <c:v>11000000</c:v>
+                      </c:pt>
+                      <c:pt idx="22">
+                        <c:v>11500000</c:v>
+                      </c:pt>
+                      <c:pt idx="23">
+                        <c:v>12000000</c:v>
+                      </c:pt>
+                      <c:pt idx="24">
+                        <c:v>12500000</c:v>
+                      </c:pt>
+                      <c:pt idx="25">
+                        <c:v>13000000</c:v>
+                      </c:pt>
+                      <c:pt idx="26">
+                        <c:v>13500000</c:v>
+                      </c:pt>
+                      <c:pt idx="27">
+                        <c:v>14000000</c:v>
+                      </c:pt>
+                      <c:pt idx="28">
+                        <c:v>14500000</c:v>
+                      </c:pt>
+                      <c:pt idx="29">
+                        <c:v>15000000</c:v>
+                      </c:pt>
+                      <c:pt idx="30">
+                        <c:v>15500000</c:v>
+                      </c:pt>
+                      <c:pt idx="31">
+                        <c:v>16000000</c:v>
+                      </c:pt>
+                      <c:pt idx="32">
+                        <c:v>16500000</c:v>
+                      </c:pt>
+                      <c:pt idx="33">
+                        <c:v>17000000</c:v>
+                      </c:pt>
+                      <c:pt idx="34">
+                        <c:v>17500000</c:v>
+                      </c:pt>
+                      <c:pt idx="35">
+                        <c:v>18000000</c:v>
+                      </c:pt>
+                      <c:pt idx="36">
+                        <c:v>18500000</c:v>
+                      </c:pt>
+                      <c:pt idx="37">
+                        <c:v>19000000</c:v>
+                      </c:pt>
+                      <c:pt idx="38">
+                        <c:v>19500000</c:v>
+                      </c:pt>
+                      <c:pt idx="39">
+                        <c:v>20000000</c:v>
+                      </c:pt>
+                      <c:pt idx="40">
+                        <c:v>20500000</c:v>
+                      </c:pt>
+                      <c:pt idx="41">
+                        <c:v>21000000</c:v>
+                      </c:pt>
+                      <c:pt idx="42">
+                        <c:v>21500000</c:v>
+                      </c:pt>
+                      <c:pt idx="43">
+                        <c:v>22000000</c:v>
+                      </c:pt>
+                      <c:pt idx="44">
+                        <c:v>22500000</c:v>
+                      </c:pt>
+                      <c:pt idx="45">
+                        <c:v>23000000</c:v>
+                      </c:pt>
+                      <c:pt idx="46">
+                        <c:v>23500000</c:v>
+                      </c:pt>
+                      <c:pt idx="47">
+                        <c:v>24000000</c:v>
+                      </c:pt>
+                      <c:pt idx="48">
+                        <c:v>24500000</c:v>
+                      </c:pt>
+                      <c:pt idx="49">
+                        <c:v>25000000</c:v>
+                      </c:pt>
+                      <c:pt idx="50">
+                        <c:v>25500000</c:v>
+                      </c:pt>
+                      <c:pt idx="51">
+                        <c:v>26000000</c:v>
+                      </c:pt>
+                      <c:pt idx="52">
+                        <c:v>26500000</c:v>
+                      </c:pt>
+                      <c:pt idx="53">
+                        <c:v>27000000</c:v>
+                      </c:pt>
+                      <c:pt idx="54">
+                        <c:v>27500000</c:v>
+                      </c:pt>
+                      <c:pt idx="55">
+                        <c:v>28000000</c:v>
+                      </c:pt>
+                      <c:pt idx="56">
+                        <c:v>28500000</c:v>
+                      </c:pt>
+                      <c:pt idx="57">
+                        <c:v>29000000</c:v>
+                      </c:pt>
+                      <c:pt idx="58">
+                        <c:v>29500000</c:v>
+                      </c:pt>
+                      <c:pt idx="59">
+                        <c:v>30000000</c:v>
+                      </c:pt>
+                      <c:pt idx="60">
+                        <c:v>30500000</c:v>
+                      </c:pt>
+                      <c:pt idx="61">
+                        <c:v>31000000</c:v>
+                      </c:pt>
+                      <c:pt idx="62">
+                        <c:v>31500000</c:v>
+                      </c:pt>
+                      <c:pt idx="63">
+                        <c:v>32000000</c:v>
+                      </c:pt>
+                      <c:pt idx="64">
+                        <c:v>32500000</c:v>
+                      </c:pt>
+                      <c:pt idx="65">
+                        <c:v>33000000</c:v>
+                      </c:pt>
+                      <c:pt idx="66">
+                        <c:v>33500000</c:v>
+                      </c:pt>
+                      <c:pt idx="67">
+                        <c:v>34000000</c:v>
+                      </c:pt>
+                      <c:pt idx="68">
+                        <c:v>34500000</c:v>
+                      </c:pt>
+                      <c:pt idx="69">
+                        <c:v>35000000</c:v>
+                      </c:pt>
+                      <c:pt idx="70">
+                        <c:v>35500000</c:v>
+                      </c:pt>
+                      <c:pt idx="71">
+                        <c:v>36000000</c:v>
+                      </c:pt>
+                      <c:pt idx="72">
+                        <c:v>36500000</c:v>
+                      </c:pt>
+                      <c:pt idx="73">
+                        <c:v>37000000</c:v>
+                      </c:pt>
+                      <c:pt idx="74">
+                        <c:v>37500000</c:v>
+                      </c:pt>
+                      <c:pt idx="75">
+                        <c:v>38000000</c:v>
+                      </c:pt>
+                      <c:pt idx="76">
+                        <c:v>38500000</c:v>
+                      </c:pt>
+                      <c:pt idx="77">
+                        <c:v>39000000</c:v>
+                      </c:pt>
+                      <c:pt idx="78">
+                        <c:v>39500000</c:v>
+                      </c:pt>
+                      <c:pt idx="79">
+                        <c:v>40000000</c:v>
+                      </c:pt>
+                      <c:pt idx="80">
+                        <c:v>40500000</c:v>
+                      </c:pt>
+                      <c:pt idx="81">
+                        <c:v>41000000</c:v>
+                      </c:pt>
+                      <c:pt idx="82">
+                        <c:v>41500000</c:v>
+                      </c:pt>
+                      <c:pt idx="83">
+                        <c:v>42000000</c:v>
+                      </c:pt>
+                      <c:pt idx="84">
+                        <c:v>42500000</c:v>
+                      </c:pt>
+                      <c:pt idx="85">
+                        <c:v>43000000</c:v>
+                      </c:pt>
+                      <c:pt idx="86">
+                        <c:v>43500000</c:v>
+                      </c:pt>
+                      <c:pt idx="87">
+                        <c:v>44000000</c:v>
+                      </c:pt>
+                      <c:pt idx="88">
+                        <c:v>44500000</c:v>
+                      </c:pt>
+                      <c:pt idx="89">
+                        <c:v>45000000</c:v>
+                      </c:pt>
+                      <c:pt idx="90">
+                        <c:v>45500000</c:v>
+                      </c:pt>
+                      <c:pt idx="91">
+                        <c:v>46000000</c:v>
+                      </c:pt>
+                      <c:pt idx="92">
+                        <c:v>46500000</c:v>
+                      </c:pt>
+                      <c:pt idx="93">
+                        <c:v>47000000</c:v>
+                      </c:pt>
+                      <c:pt idx="94">
+                        <c:v>47500000</c:v>
+                      </c:pt>
+                      <c:pt idx="95">
+                        <c:v>48000000</c:v>
+                      </c:pt>
+                      <c:pt idx="96">
+                        <c:v>48500000</c:v>
+                      </c:pt>
+                      <c:pt idx="97">
+                        <c:v>49000000</c:v>
+                      </c:pt>
+                      <c:pt idx="98">
+                        <c:v>49500000</c:v>
+                      </c:pt>
+                      <c:pt idx="99">
+                        <c:v>50000000</c:v>
+                      </c:pt>
+                    </c:numCache>
+                  </c:numRef>
+                </c:cat>
+                <c:val>
+                  <c:numRef>
+                    <c:extLst>
+                      <c:ext uri="{02D57815-91ED-43cb-92C2-25804820EDAC}">
+                        <c15:formulaRef>
+                          <c15:sqref>'Exp 1'!$A$3:$A$101</c15:sqref>
+                        </c15:formulaRef>
+                      </c:ext>
+                    </c:extLst>
+                    <c:numCache>
+                      <c:formatCode>General</c:formatCode>
+                      <c:ptCount val="99"/>
+                      <c:pt idx="0">
+                        <c:v>1000000</c:v>
+                      </c:pt>
+                      <c:pt idx="1">
+                        <c:v>1500000</c:v>
+                      </c:pt>
+                      <c:pt idx="2">
+                        <c:v>2000000</c:v>
+                      </c:pt>
+                      <c:pt idx="3">
+                        <c:v>2500000</c:v>
+                      </c:pt>
+                      <c:pt idx="4">
+                        <c:v>3000000</c:v>
+                      </c:pt>
+                      <c:pt idx="5">
+                        <c:v>3500000</c:v>
+                      </c:pt>
+                      <c:pt idx="6">
+                        <c:v>4000000</c:v>
+                      </c:pt>
+                      <c:pt idx="7">
+                        <c:v>4500000</c:v>
+                      </c:pt>
+                      <c:pt idx="8">
+                        <c:v>5000000</c:v>
+                      </c:pt>
+                      <c:pt idx="9">
+                        <c:v>5500000</c:v>
+                      </c:pt>
+                      <c:pt idx="10">
+                        <c:v>6000000</c:v>
+                      </c:pt>
+                      <c:pt idx="11">
+                        <c:v>6500000</c:v>
+                      </c:pt>
+                      <c:pt idx="12">
+                        <c:v>7000000</c:v>
+                      </c:pt>
+                      <c:pt idx="13">
+                        <c:v>7500000</c:v>
+                      </c:pt>
+                      <c:pt idx="14">
+                        <c:v>8000000</c:v>
+                      </c:pt>
+                      <c:pt idx="15">
+                        <c:v>8500000</c:v>
+                      </c:pt>
+                      <c:pt idx="16">
+                        <c:v>9000000</c:v>
+                      </c:pt>
+                      <c:pt idx="17">
+                        <c:v>9500000</c:v>
+                      </c:pt>
+                      <c:pt idx="18">
+                        <c:v>10000000</c:v>
+                      </c:pt>
+                      <c:pt idx="19">
+                        <c:v>10500000</c:v>
+                      </c:pt>
+                      <c:pt idx="20">
+                        <c:v>11000000</c:v>
+                      </c:pt>
+                      <c:pt idx="21">
+                        <c:v>11500000</c:v>
+                      </c:pt>
+                      <c:pt idx="22">
+                        <c:v>12000000</c:v>
+                      </c:pt>
+                      <c:pt idx="23">
+                        <c:v>12500000</c:v>
+                      </c:pt>
+                      <c:pt idx="24">
+                        <c:v>13000000</c:v>
+                      </c:pt>
+                      <c:pt idx="25">
+                        <c:v>13500000</c:v>
+                      </c:pt>
+                      <c:pt idx="26">
+                        <c:v>14000000</c:v>
+                      </c:pt>
+                      <c:pt idx="27">
+                        <c:v>14500000</c:v>
+                      </c:pt>
+                      <c:pt idx="28">
+                        <c:v>15000000</c:v>
+                      </c:pt>
+                      <c:pt idx="29">
+                        <c:v>15500000</c:v>
+                      </c:pt>
+                      <c:pt idx="30">
+                        <c:v>16000000</c:v>
+                      </c:pt>
+                      <c:pt idx="31">
+                        <c:v>16500000</c:v>
+                      </c:pt>
+                      <c:pt idx="32">
+                        <c:v>17000000</c:v>
+                      </c:pt>
+                      <c:pt idx="33">
+                        <c:v>17500000</c:v>
+                      </c:pt>
+                      <c:pt idx="34">
+                        <c:v>18000000</c:v>
+                      </c:pt>
+                      <c:pt idx="35">
+                        <c:v>18500000</c:v>
+                      </c:pt>
+                      <c:pt idx="36">
+                        <c:v>19000000</c:v>
+                      </c:pt>
+                      <c:pt idx="37">
+                        <c:v>19500000</c:v>
+                      </c:pt>
+                      <c:pt idx="38">
+                        <c:v>20000000</c:v>
+                      </c:pt>
+                      <c:pt idx="39">
+                        <c:v>20500000</c:v>
+                      </c:pt>
+                      <c:pt idx="40">
+                        <c:v>21000000</c:v>
+                      </c:pt>
+                      <c:pt idx="41">
+                        <c:v>21500000</c:v>
+                      </c:pt>
+                      <c:pt idx="42">
+                        <c:v>22000000</c:v>
+                      </c:pt>
+                      <c:pt idx="43">
+                        <c:v>22500000</c:v>
+                      </c:pt>
+                      <c:pt idx="44">
+                        <c:v>23000000</c:v>
+                      </c:pt>
+                      <c:pt idx="45">
+                        <c:v>23500000</c:v>
+                      </c:pt>
+                      <c:pt idx="46">
+                        <c:v>24000000</c:v>
+                      </c:pt>
+                      <c:pt idx="47">
+                        <c:v>24500000</c:v>
+                      </c:pt>
+                      <c:pt idx="48">
+                        <c:v>25000000</c:v>
+                      </c:pt>
+                      <c:pt idx="49">
+                        <c:v>25500000</c:v>
+                      </c:pt>
+                      <c:pt idx="50">
+                        <c:v>26000000</c:v>
+                      </c:pt>
+                      <c:pt idx="51">
+                        <c:v>26500000</c:v>
+                      </c:pt>
+                      <c:pt idx="52">
+                        <c:v>27000000</c:v>
+                      </c:pt>
+                      <c:pt idx="53">
+                        <c:v>27500000</c:v>
+                      </c:pt>
+                      <c:pt idx="54">
+                        <c:v>28000000</c:v>
+                      </c:pt>
+                      <c:pt idx="55">
+                        <c:v>28500000</c:v>
+                      </c:pt>
+                      <c:pt idx="56">
+                        <c:v>29000000</c:v>
+                      </c:pt>
+                      <c:pt idx="57">
+                        <c:v>29500000</c:v>
+                      </c:pt>
+                      <c:pt idx="58">
+                        <c:v>30000000</c:v>
+                      </c:pt>
+                      <c:pt idx="59">
+                        <c:v>30500000</c:v>
+                      </c:pt>
+                      <c:pt idx="60">
+                        <c:v>31000000</c:v>
+                      </c:pt>
+                      <c:pt idx="61">
+                        <c:v>31500000</c:v>
+                      </c:pt>
+                      <c:pt idx="62">
+                        <c:v>32000000</c:v>
+                      </c:pt>
+                      <c:pt idx="63">
+                        <c:v>32500000</c:v>
+                      </c:pt>
+                      <c:pt idx="64">
+                        <c:v>33000000</c:v>
+                      </c:pt>
+                      <c:pt idx="65">
+                        <c:v>33500000</c:v>
+                      </c:pt>
+                      <c:pt idx="66">
+                        <c:v>34000000</c:v>
+                      </c:pt>
+                      <c:pt idx="67">
+                        <c:v>34500000</c:v>
+                      </c:pt>
+                      <c:pt idx="68">
+                        <c:v>35000000</c:v>
+                      </c:pt>
+                      <c:pt idx="69">
+                        <c:v>35500000</c:v>
+                      </c:pt>
+                      <c:pt idx="70">
+                        <c:v>36000000</c:v>
+                      </c:pt>
+                      <c:pt idx="71">
+                        <c:v>36500000</c:v>
+                      </c:pt>
+                      <c:pt idx="72">
+                        <c:v>37000000</c:v>
+                      </c:pt>
+                      <c:pt idx="73">
+                        <c:v>37500000</c:v>
+                      </c:pt>
+                      <c:pt idx="74">
+                        <c:v>38000000</c:v>
+                      </c:pt>
+                      <c:pt idx="75">
+                        <c:v>38500000</c:v>
+                      </c:pt>
+                      <c:pt idx="76">
+                        <c:v>39000000</c:v>
+                      </c:pt>
+                      <c:pt idx="77">
+                        <c:v>39500000</c:v>
+                      </c:pt>
+                      <c:pt idx="78">
+                        <c:v>40000000</c:v>
+                      </c:pt>
+                      <c:pt idx="79">
+                        <c:v>40500000</c:v>
+                      </c:pt>
+                      <c:pt idx="80">
+                        <c:v>41000000</c:v>
+                      </c:pt>
+                      <c:pt idx="81">
+                        <c:v>41500000</c:v>
+                      </c:pt>
+                      <c:pt idx="82">
+                        <c:v>42000000</c:v>
+                      </c:pt>
+                      <c:pt idx="83">
+                        <c:v>42500000</c:v>
+                      </c:pt>
+                      <c:pt idx="84">
+                        <c:v>43000000</c:v>
+                      </c:pt>
+                      <c:pt idx="85">
+                        <c:v>43500000</c:v>
+                      </c:pt>
+                      <c:pt idx="86">
+                        <c:v>44000000</c:v>
+                      </c:pt>
+                      <c:pt idx="87">
+                        <c:v>44500000</c:v>
+                      </c:pt>
+                      <c:pt idx="88">
+                        <c:v>45000000</c:v>
+                      </c:pt>
+                      <c:pt idx="89">
+                        <c:v>45500000</c:v>
+                      </c:pt>
+                      <c:pt idx="90">
+                        <c:v>46000000</c:v>
+                      </c:pt>
+                      <c:pt idx="91">
+                        <c:v>46500000</c:v>
+                      </c:pt>
+                      <c:pt idx="92">
+                        <c:v>47000000</c:v>
+                      </c:pt>
+                      <c:pt idx="93">
+                        <c:v>47500000</c:v>
+                      </c:pt>
+                      <c:pt idx="94">
+                        <c:v>48000000</c:v>
+                      </c:pt>
+                      <c:pt idx="95">
+                        <c:v>48500000</c:v>
+                      </c:pt>
+                      <c:pt idx="96">
+                        <c:v>49000000</c:v>
+                      </c:pt>
+                      <c:pt idx="97">
+                        <c:v>49500000</c:v>
+                      </c:pt>
+                      <c:pt idx="98">
+                        <c:v>50000000</c:v>
+                      </c:pt>
+                    </c:numCache>
+                  </c:numRef>
+                </c:val>
+                <c:smooth val="0"/>
+                <c:extLst>
+                  <c:ext xmlns:c16="http://schemas.microsoft.com/office/drawing/2014/chart" uri="{C3380CC4-5D6E-409C-BE32-E72D297353CC}">
+                    <c16:uniqueId val="{00000004-9FCA-457D-9EB9-544A1D58B267}"/>
+                  </c:ext>
+                </c:extLst>
+              </c15:ser>
+            </c15:filteredLineSeries>
+          </c:ext>
+        </c:extLst>
+      </c:lineChart>
+      <c:catAx>
+        <c:axId val="391343168"/>
+        <c:scaling>
+          <c:orientation val="minMax"/>
+        </c:scaling>
+        <c:delete val="0"/>
+        <c:axPos val="b"/>
+        <c:title>
+          <c:tx>
+            <c:rich>
+              <a:bodyPr rot="0" spcFirstLastPara="1" vertOverflow="ellipsis" vert="horz" wrap="square" anchor="ctr" anchorCtr="1"/>
+              <a:lstStyle/>
+              <a:p>
+                <a:pPr>
+                  <a:defRPr sz="1000" b="0" i="0" u="none" strike="noStrike" kern="1200" baseline="0">
+                    <a:solidFill>
+                      <a:schemeClr val="dk1"/>
+                    </a:solidFill>
+                    <a:latin typeface="+mn-lt"/>
+                    <a:ea typeface="+mn-ea"/>
+                    <a:cs typeface="+mn-cs"/>
+                  </a:defRPr>
+                </a:pPr>
+                <a:r>
+                  <a:rPr lang="en-US" dirty="0"/>
+                  <a:t>N</a:t>
+                </a:r>
+              </a:p>
+            </c:rich>
+          </c:tx>
+          <c:overlay val="0"/>
+          <c:spPr>
+            <a:noFill/>
+            <a:ln>
+              <a:noFill/>
+            </a:ln>
+            <a:effectLst/>
+          </c:spPr>
+          <c:txPr>
+            <a:bodyPr rot="0" spcFirstLastPara="1" vertOverflow="ellipsis" vert="horz" wrap="square" anchor="ctr" anchorCtr="1"/>
+            <a:lstStyle/>
+            <a:p>
+              <a:pPr>
+                <a:defRPr sz="1000" b="0" i="0" u="none" strike="noStrike" kern="1200" baseline="0">
+                  <a:solidFill>
+                    <a:schemeClr val="dk1"/>
+                  </a:solidFill>
+                  <a:latin typeface="+mn-lt"/>
+                  <a:ea typeface="+mn-ea"/>
+                  <a:cs typeface="+mn-cs"/>
+                </a:defRPr>
+              </a:pPr>
+              <a:endParaRPr lang="en-US"/>
+            </a:p>
+          </c:txPr>
+        </c:title>
+        <c:numFmt formatCode="General" sourceLinked="1"/>
+        <c:majorTickMark val="none"/>
+        <c:minorTickMark val="none"/>
+        <c:tickLblPos val="nextTo"/>
+        <c:spPr>
+          <a:noFill/>
+          <a:ln w="9525" cap="flat" cmpd="sng" algn="ctr">
+            <a:solidFill>
+              <a:schemeClr val="tx1">
+                <a:lumMod val="15000"/>
+                <a:lumOff val="85000"/>
+              </a:schemeClr>
+            </a:solidFill>
+            <a:round/>
+          </a:ln>
+          <a:effectLst/>
+        </c:spPr>
+        <c:txPr>
+          <a:bodyPr rot="-60000000" spcFirstLastPara="1" vertOverflow="ellipsis" vert="horz" wrap="square" anchor="ctr" anchorCtr="1"/>
+          <a:lstStyle/>
+          <a:p>
+            <a:pPr>
+              <a:defRPr sz="900" b="0" i="0" u="none" strike="noStrike" kern="1200" baseline="0">
+                <a:solidFill>
+                  <a:schemeClr val="dk1"/>
+                </a:solidFill>
+                <a:latin typeface="+mn-lt"/>
+                <a:ea typeface="+mn-ea"/>
+                <a:cs typeface="+mn-cs"/>
+              </a:defRPr>
+            </a:pPr>
+            <a:endParaRPr lang="en-US"/>
+          </a:p>
+        </c:txPr>
+        <c:crossAx val="391344128"/>
+        <c:crosses val="autoZero"/>
+        <c:auto val="1"/>
+        <c:lblAlgn val="ctr"/>
+        <c:lblOffset val="100"/>
+        <c:noMultiLvlLbl val="0"/>
+      </c:catAx>
+      <c:valAx>
+        <c:axId val="391344128"/>
+        <c:scaling>
+          <c:orientation val="minMax"/>
+          <c:max val="3"/>
+        </c:scaling>
+        <c:delete val="0"/>
+        <c:axPos val="l"/>
+        <c:majorGridlines>
+          <c:spPr>
+            <a:ln w="9525" cap="flat" cmpd="sng" algn="ctr">
+              <a:solidFill>
+                <a:schemeClr val="tx1">
+                  <a:lumMod val="15000"/>
+                  <a:lumOff val="85000"/>
+                </a:schemeClr>
+              </a:solidFill>
+              <a:round/>
+            </a:ln>
+            <a:effectLst/>
+          </c:spPr>
+        </c:majorGridlines>
+        <c:numFmt formatCode="General" sourceLinked="1"/>
+        <c:majorTickMark val="none"/>
+        <c:minorTickMark val="none"/>
+        <c:tickLblPos val="nextTo"/>
+        <c:spPr>
+          <a:noFill/>
+          <a:ln>
+            <a:noFill/>
+          </a:ln>
+          <a:effectLst/>
+        </c:spPr>
+        <c:txPr>
+          <a:bodyPr rot="-60000000" spcFirstLastPara="1" vertOverflow="ellipsis" vert="horz" wrap="square" anchor="ctr" anchorCtr="1"/>
+          <a:lstStyle/>
+          <a:p>
+            <a:pPr>
+              <a:defRPr sz="900" b="0" i="0" u="none" strike="noStrike" kern="1200" baseline="0">
+                <a:solidFill>
+                  <a:schemeClr val="dk1"/>
+                </a:solidFill>
+                <a:latin typeface="+mn-lt"/>
+                <a:ea typeface="+mn-ea"/>
+                <a:cs typeface="+mn-cs"/>
+              </a:defRPr>
+            </a:pPr>
+            <a:endParaRPr lang="en-US"/>
+          </a:p>
+        </c:txPr>
+        <c:crossAx val="391343168"/>
+        <c:crosses val="autoZero"/>
+        <c:crossBetween val="between"/>
+      </c:valAx>
+      <c:spPr>
+        <a:noFill/>
+        <a:ln>
+          <a:noFill/>
+        </a:ln>
+        <a:effectLst/>
+      </c:spPr>
+    </c:plotArea>
+    <c:legend>
+      <c:legendPos val="b"/>
+      <c:overlay val="0"/>
+      <c:spPr>
+        <a:noFill/>
+        <a:ln>
+          <a:noFill/>
+        </a:ln>
+        <a:effectLst/>
+      </c:spPr>
+      <c:txPr>
+        <a:bodyPr rot="0" spcFirstLastPara="1" vertOverflow="ellipsis" vert="horz" wrap="square" anchor="ctr" anchorCtr="1"/>
+        <a:lstStyle/>
+        <a:p>
+          <a:pPr>
+            <a:defRPr sz="900" b="0" i="0" u="none" strike="noStrike" kern="1200" baseline="0">
+              <a:solidFill>
+                <a:schemeClr val="dk1"/>
+              </a:solidFill>
+              <a:latin typeface="+mn-lt"/>
+              <a:ea typeface="+mn-ea"/>
+              <a:cs typeface="+mn-cs"/>
+            </a:defRPr>
+          </a:pPr>
+          <a:endParaRPr lang="en-US"/>
+        </a:p>
+      </c:txPr>
+    </c:legend>
+    <c:plotVisOnly val="1"/>
+    <c:dispBlanksAs val="gap"/>
+    <c:showDLblsOverMax val="0"/>
+    <c:extLst>
+      <c:ext xmlns:c16r3="http://schemas.microsoft.com/office/drawing/2017/03/chart" uri="{56B9EC1D-385E-4148-901F-78D8002777C0}">
+        <c16r3:dataDisplayOptions16>
+          <c16r3:dispNaAsBlank val="1"/>
+        </c16r3:dataDisplayOptions16>
+      </c:ext>
+    </c:extLst>
+  </c:chart>
+  <c:spPr>
+    <a:solidFill>
+      <a:schemeClr val="lt1"/>
+    </a:solidFill>
+    <a:ln w="12700" cap="flat" cmpd="sng" algn="ctr">
+      <a:solidFill>
+        <a:schemeClr val="dk1"/>
+      </a:solidFill>
+      <a:prstDash val="solid"/>
+      <a:miter lim="800000"/>
+    </a:ln>
+    <a:effectLst/>
+  </c:spPr>
+  <c:txPr>
+    <a:bodyPr/>
+    <a:lstStyle/>
+    <a:p>
+      <a:pPr>
+        <a:defRPr>
+          <a:solidFill>
+            <a:schemeClr val="dk1"/>
+          </a:solidFill>
+          <a:latin typeface="+mn-lt"/>
+          <a:ea typeface="+mn-ea"/>
+          <a:cs typeface="+mn-cs"/>
+        </a:defRPr>
+      </a:pPr>
+      <a:endParaRPr lang="en-US"/>
+    </a:p>
+  </c:txPr>
+  <c:externalData r:id="rId3">
+    <c:autoUpdate val="0"/>
+  </c:externalData>
+</c:chartSpace>
+</file>
+
+<file path=ppt/charts/chart2.xml><?xml version="1.0" encoding="utf-8"?>
+<c:chartSpace xmlns:c="http://schemas.openxmlformats.org/drawingml/2006/chart" xmlns:a="http://schemas.openxmlformats.org/drawingml/2006/main" xmlns:r="http://schemas.openxmlformats.org/officeDocument/2006/relationships" xmlns:c16r2="http://schemas.microsoft.com/office/drawing/2015/06/chart">
+  <c:date1904 val="0"/>
+  <c:lang val="en-US"/>
+  <c:roundedCorners val="0"/>
+  <mc:AlternateContent xmlns:mc="http://schemas.openxmlformats.org/markup-compatibility/2006">
+    <mc:Choice xmlns:c14="http://schemas.microsoft.com/office/drawing/2007/8/2/chart" Requires="c14">
+      <c14:style val="102"/>
+    </mc:Choice>
+    <mc:Fallback>
+      <c:style val="2"/>
+    </mc:Fallback>
+  </mc:AlternateContent>
+  <c:chart>
+    <c:title>
+      <c:tx>
+        <c:rich>
+          <a:bodyPr rot="0" spcFirstLastPara="1" vertOverflow="ellipsis" vert="horz" wrap="square" anchor="ctr" anchorCtr="1"/>
+          <a:lstStyle/>
+          <a:p>
+            <a:pPr>
+              <a:defRPr sz="1400" b="0" i="0" u="none" strike="noStrike" kern="1200" spc="0" baseline="0">
+                <a:solidFill>
+                  <a:schemeClr val="dk1"/>
+                </a:solidFill>
+                <a:latin typeface="+mn-lt"/>
+                <a:ea typeface="+mn-ea"/>
+                <a:cs typeface="+mn-cs"/>
+              </a:defRPr>
+            </a:pPr>
+            <a:r>
+              <a:rPr lang="en-US"/>
+              <a:t>Fixed N</a:t>
+            </a:r>
+          </a:p>
+        </c:rich>
+      </c:tx>
+      <c:overlay val="0"/>
+      <c:spPr>
+        <a:noFill/>
+        <a:ln>
+          <a:noFill/>
+        </a:ln>
+        <a:effectLst/>
+      </c:spPr>
+      <c:txPr>
+        <a:bodyPr rot="0" spcFirstLastPara="1" vertOverflow="ellipsis" vert="horz" wrap="square" anchor="ctr" anchorCtr="1"/>
+        <a:lstStyle/>
+        <a:p>
+          <a:pPr>
+            <a:defRPr sz="1400" b="0" i="0" u="none" strike="noStrike" kern="1200" spc="0" baseline="0">
+              <a:solidFill>
+                <a:schemeClr val="dk1"/>
+              </a:solidFill>
+              <a:latin typeface="+mn-lt"/>
+              <a:ea typeface="+mn-ea"/>
+              <a:cs typeface="+mn-cs"/>
+            </a:defRPr>
+          </a:pPr>
+          <a:endParaRPr lang="en-US"/>
+        </a:p>
+      </c:txPr>
+    </c:title>
+    <c:autoTitleDeleted val="0"/>
+    <c:plotArea>
+      <c:layout/>
+      <c:lineChart>
+        <c:grouping val="standard"/>
+        <c:varyColors val="0"/>
+        <c:ser>
+          <c:idx val="1"/>
+          <c:order val="1"/>
+          <c:tx>
+            <c:strRef>
+              <c:f>'Exp 2'!$B$1</c:f>
+              <c:strCache>
+                <c:ptCount val="1"/>
+                <c:pt idx="0">
+                  <c:v>Sequential</c:v>
+                </c:pt>
+              </c:strCache>
+            </c:strRef>
+          </c:tx>
+          <c:spPr>
+            <a:ln w="28575" cap="rnd">
+              <a:solidFill>
+                <a:schemeClr val="accent2"/>
+              </a:solidFill>
+              <a:round/>
+            </a:ln>
+            <a:effectLst/>
+          </c:spPr>
+          <c:marker>
+            <c:symbol val="none"/>
+          </c:marker>
+          <c:val>
+            <c:numRef>
+              <c:f>'Exp 2'!$B$2:$B$25</c:f>
+              <c:numCache>
+                <c:formatCode>General</c:formatCode>
+                <c:ptCount val="24"/>
+                <c:pt idx="0">
+                  <c:v>0.28225299999999998</c:v>
+                </c:pt>
+                <c:pt idx="1">
+                  <c:v>0.28156799999999998</c:v>
+                </c:pt>
+                <c:pt idx="2">
+                  <c:v>0.28218577083333302</c:v>
+                </c:pt>
+                <c:pt idx="3">
+                  <c:v>0.28072900000000001</c:v>
+                </c:pt>
+                <c:pt idx="4">
+                  <c:v>0.28165600000000002</c:v>
+                </c:pt>
+                <c:pt idx="5">
+                  <c:v>0.28201599999999999</c:v>
+                </c:pt>
+                <c:pt idx="6">
+                  <c:v>0.28221099999999999</c:v>
+                </c:pt>
+                <c:pt idx="7">
+                  <c:v>0.28252300000000002</c:v>
+                </c:pt>
+                <c:pt idx="8">
+                  <c:v>0.28204899999999999</c:v>
+                </c:pt>
+                <c:pt idx="9">
+                  <c:v>0.28205000000000002</c:v>
+                </c:pt>
+                <c:pt idx="10">
+                  <c:v>0.28207700000000002</c:v>
+                </c:pt>
+                <c:pt idx="11">
+                  <c:v>0.28183900000000001</c:v>
+                </c:pt>
+                <c:pt idx="12">
+                  <c:v>0.282414</c:v>
+                </c:pt>
+                <c:pt idx="13">
+                  <c:v>0.28236800000000001</c:v>
+                </c:pt>
+                <c:pt idx="14">
+                  <c:v>0.28185300000000002</c:v>
+                </c:pt>
+                <c:pt idx="15">
+                  <c:v>0.281804</c:v>
+                </c:pt>
+                <c:pt idx="16">
+                  <c:v>0.28081200000000001</c:v>
+                </c:pt>
+                <c:pt idx="17">
+                  <c:v>0.28087420000000002</c:v>
+                </c:pt>
+                <c:pt idx="18">
+                  <c:v>0.28079599999999999</c:v>
+                </c:pt>
+                <c:pt idx="19">
+                  <c:v>0.281275</c:v>
+                </c:pt>
+                <c:pt idx="20">
+                  <c:v>0.280642</c:v>
+                </c:pt>
+                <c:pt idx="21">
+                  <c:v>0.28025299999999997</c:v>
+                </c:pt>
+                <c:pt idx="22">
+                  <c:v>0.28026899999999999</c:v>
+                </c:pt>
+                <c:pt idx="23">
+                  <c:v>0.28142800000000001</c:v>
+                </c:pt>
+              </c:numCache>
+            </c:numRef>
+          </c:val>
+          <c:smooth val="0"/>
+          <c:extLst>
+            <c:ext xmlns:c16="http://schemas.microsoft.com/office/drawing/2014/chart" uri="{C3380CC4-5D6E-409C-BE32-E72D297353CC}">
+              <c16:uniqueId val="{00000000-C184-4F96-9541-99F663C8D14B}"/>
+            </c:ext>
+          </c:extLst>
+        </c:ser>
+        <c:ser>
+          <c:idx val="2"/>
+          <c:order val="2"/>
+          <c:tx>
+            <c:strRef>
+              <c:f>'Exp 2'!$C$1</c:f>
+              <c:strCache>
+                <c:ptCount val="1"/>
+                <c:pt idx="0">
+                  <c:v>Pipes</c:v>
+                </c:pt>
+              </c:strCache>
+            </c:strRef>
+          </c:tx>
+          <c:spPr>
+            <a:ln w="28575" cap="rnd">
+              <a:solidFill>
+                <a:schemeClr val="accent3"/>
+              </a:solidFill>
+              <a:round/>
+            </a:ln>
+            <a:effectLst/>
+          </c:spPr>
+          <c:marker>
+            <c:symbol val="none"/>
+          </c:marker>
+          <c:val>
+            <c:numRef>
+              <c:f>'Exp 2'!$C$2:$C$25</c:f>
+              <c:numCache>
+                <c:formatCode>General</c:formatCode>
+                <c:ptCount val="24"/>
+                <c:pt idx="0">
+                  <c:v>0.28263300000000002</c:v>
+                </c:pt>
+                <c:pt idx="1">
+                  <c:v>0.27790500000000001</c:v>
+                </c:pt>
+                <c:pt idx="2">
+                  <c:v>0.27591399999999999</c:v>
+                </c:pt>
+                <c:pt idx="3">
+                  <c:v>0.27645399999999998</c:v>
+                </c:pt>
+                <c:pt idx="4">
+                  <c:v>0.27756500000000001</c:v>
+                </c:pt>
+                <c:pt idx="5">
+                  <c:v>0.27786499999999997</c:v>
+                </c:pt>
+                <c:pt idx="6">
+                  <c:v>0.278115</c:v>
+                </c:pt>
+                <c:pt idx="7">
+                  <c:v>0.278285</c:v>
+                </c:pt>
+                <c:pt idx="8">
+                  <c:v>0.27588400000000002</c:v>
+                </c:pt>
+                <c:pt idx="9">
+                  <c:v>0.27787800000000001</c:v>
+                </c:pt>
+                <c:pt idx="10">
+                  <c:v>0.27984500000000001</c:v>
+                </c:pt>
+                <c:pt idx="11">
+                  <c:v>0.277924</c:v>
+                </c:pt>
+                <c:pt idx="12">
+                  <c:v>0.27978599999999998</c:v>
+                </c:pt>
+                <c:pt idx="13">
+                  <c:v>0.28027200000000002</c:v>
+                </c:pt>
+                <c:pt idx="14">
+                  <c:v>0.28288000000000002</c:v>
+                </c:pt>
+                <c:pt idx="15">
+                  <c:v>0.282138</c:v>
+                </c:pt>
+                <c:pt idx="16">
+                  <c:v>0.28079599999999999</c:v>
+                </c:pt>
+                <c:pt idx="17">
+                  <c:v>0.279777</c:v>
+                </c:pt>
+                <c:pt idx="18">
+                  <c:v>0.28098299999999998</c:v>
+                </c:pt>
+                <c:pt idx="19">
+                  <c:v>0.279636</c:v>
+                </c:pt>
+                <c:pt idx="20">
+                  <c:v>0.281333</c:v>
+                </c:pt>
+                <c:pt idx="21">
+                  <c:v>0.28220499999999998</c:v>
+                </c:pt>
+                <c:pt idx="22">
+                  <c:v>0.28246599999999999</c:v>
+                </c:pt>
+                <c:pt idx="23">
+                  <c:v>0.281248</c:v>
+                </c:pt>
+              </c:numCache>
+            </c:numRef>
+          </c:val>
+          <c:smooth val="0"/>
+          <c:extLst>
+            <c:ext xmlns:c16="http://schemas.microsoft.com/office/drawing/2014/chart" uri="{C3380CC4-5D6E-409C-BE32-E72D297353CC}">
+              <c16:uniqueId val="{00000001-C184-4F96-9541-99F663C8D14B}"/>
+            </c:ext>
+          </c:extLst>
+        </c:ser>
+        <c:ser>
+          <c:idx val="3"/>
+          <c:order val="3"/>
+          <c:tx>
+            <c:strRef>
+              <c:f>'Exp 2'!$D$1</c:f>
+              <c:strCache>
+                <c:ptCount val="1"/>
+                <c:pt idx="0">
+                  <c:v>MMap</c:v>
+                </c:pt>
+              </c:strCache>
+            </c:strRef>
+          </c:tx>
+          <c:spPr>
+            <a:ln w="28575" cap="rnd">
+              <a:solidFill>
+                <a:schemeClr val="accent4"/>
+              </a:solidFill>
+              <a:round/>
+            </a:ln>
+            <a:effectLst/>
+          </c:spPr>
+          <c:marker>
+            <c:symbol val="none"/>
+          </c:marker>
+          <c:val>
+            <c:numRef>
+              <c:f>'Exp 2'!$D$2:$D$25</c:f>
+              <c:numCache>
+                <c:formatCode>General</c:formatCode>
+                <c:ptCount val="24"/>
+                <c:pt idx="0">
+                  <c:v>0.28223799999999999</c:v>
+                </c:pt>
+                <c:pt idx="1">
+                  <c:v>0.27848699999999998</c:v>
+                </c:pt>
+                <c:pt idx="2">
+                  <c:v>0.27849000000000002</c:v>
+                </c:pt>
+                <c:pt idx="3">
+                  <c:v>0.278005</c:v>
+                </c:pt>
+                <c:pt idx="4">
+                  <c:v>0.27478799999999998</c:v>
+                </c:pt>
+                <c:pt idx="5">
+                  <c:v>0.27620400000000001</c:v>
+                </c:pt>
+                <c:pt idx="6">
+                  <c:v>0.27620299999999998</c:v>
+                </c:pt>
+                <c:pt idx="7">
+                  <c:v>0.27633099999999999</c:v>
+                </c:pt>
+                <c:pt idx="8">
+                  <c:v>0.27407999999999999</c:v>
+                </c:pt>
+                <c:pt idx="9">
+                  <c:v>0.27826000000000001</c:v>
+                </c:pt>
+                <c:pt idx="10">
+                  <c:v>0.27804800000000002</c:v>
+                </c:pt>
+                <c:pt idx="11">
+                  <c:v>0.27988499999999999</c:v>
+                </c:pt>
+                <c:pt idx="12">
+                  <c:v>0.279366</c:v>
+                </c:pt>
+                <c:pt idx="13">
+                  <c:v>0.28143699999999999</c:v>
+                </c:pt>
+                <c:pt idx="14">
+                  <c:v>0.28143299999999999</c:v>
+                </c:pt>
+                <c:pt idx="15">
+                  <c:v>0.28029399999999999</c:v>
+                </c:pt>
+                <c:pt idx="16">
+                  <c:v>0.278256</c:v>
+                </c:pt>
+                <c:pt idx="17">
+                  <c:v>0.27795700000000001</c:v>
+                </c:pt>
+                <c:pt idx="18">
+                  <c:v>0.27789399999999997</c:v>
+                </c:pt>
+                <c:pt idx="19">
+                  <c:v>0.27739000000000003</c:v>
+                </c:pt>
+                <c:pt idx="20">
+                  <c:v>0.27824100000000002</c:v>
+                </c:pt>
+                <c:pt idx="21">
+                  <c:v>0.2777</c:v>
+                </c:pt>
+                <c:pt idx="22">
+                  <c:v>0.28068500000000002</c:v>
+                </c:pt>
+                <c:pt idx="23">
+                  <c:v>0.278449</c:v>
+                </c:pt>
+              </c:numCache>
+            </c:numRef>
+          </c:val>
+          <c:smooth val="0"/>
+          <c:extLst>
+            <c:ext xmlns:c16="http://schemas.microsoft.com/office/drawing/2014/chart" uri="{C3380CC4-5D6E-409C-BE32-E72D297353CC}">
+              <c16:uniqueId val="{00000002-C184-4F96-9541-99F663C8D14B}"/>
+            </c:ext>
+          </c:extLst>
+        </c:ser>
+        <c:ser>
+          <c:idx val="4"/>
+          <c:order val="4"/>
+          <c:tx>
+            <c:strRef>
+              <c:f>'Exp 2'!$E$1</c:f>
+              <c:strCache>
+                <c:ptCount val="1"/>
+                <c:pt idx="0">
+                  <c:v>Threads</c:v>
+                </c:pt>
+              </c:strCache>
+            </c:strRef>
+          </c:tx>
+          <c:spPr>
+            <a:ln w="28575" cap="rnd">
+              <a:solidFill>
+                <a:schemeClr val="accent5"/>
+              </a:solidFill>
+              <a:round/>
+            </a:ln>
+            <a:effectLst/>
+          </c:spPr>
+          <c:marker>
+            <c:symbol val="none"/>
+          </c:marker>
+          <c:val>
+            <c:numRef>
+              <c:f>'Exp 2'!$E$2:$E$25</c:f>
+              <c:numCache>
+                <c:formatCode>General</c:formatCode>
+                <c:ptCount val="24"/>
+                <c:pt idx="0">
+                  <c:v>0.28157900000000002</c:v>
+                </c:pt>
+                <c:pt idx="1">
+                  <c:v>0.27211200000000002</c:v>
+                </c:pt>
+                <c:pt idx="2">
+                  <c:v>0.27316099999999999</c:v>
+                </c:pt>
+                <c:pt idx="3">
+                  <c:v>0.27377899999999999</c:v>
+                </c:pt>
+                <c:pt idx="4">
+                  <c:v>0.27332200000000001</c:v>
+                </c:pt>
+                <c:pt idx="5">
+                  <c:v>0.27370899999999998</c:v>
+                </c:pt>
+                <c:pt idx="6">
+                  <c:v>0.27446399999999999</c:v>
+                </c:pt>
+                <c:pt idx="7">
+                  <c:v>0.27331</c:v>
+                </c:pt>
+                <c:pt idx="8">
+                  <c:v>0.27202599999999999</c:v>
+                </c:pt>
+                <c:pt idx="9">
+                  <c:v>0.27495700000000001</c:v>
+                </c:pt>
+                <c:pt idx="10">
+                  <c:v>0.27425500000000003</c:v>
+                </c:pt>
+                <c:pt idx="11">
+                  <c:v>0.27397199999999999</c:v>
+                </c:pt>
+                <c:pt idx="12">
+                  <c:v>0.27804299999999998</c:v>
+                </c:pt>
+                <c:pt idx="13">
+                  <c:v>0.27741900000000003</c:v>
+                </c:pt>
+                <c:pt idx="14">
+                  <c:v>0.27903299999999998</c:v>
+                </c:pt>
+                <c:pt idx="15">
+                  <c:v>0.27724700000000002</c:v>
+                </c:pt>
+                <c:pt idx="16">
+                  <c:v>0.27668799999999999</c:v>
+                </c:pt>
+                <c:pt idx="17">
+                  <c:v>0.27668599999999999</c:v>
+                </c:pt>
+                <c:pt idx="18">
+                  <c:v>0.27655200000000002</c:v>
+                </c:pt>
+                <c:pt idx="19">
+                  <c:v>0.27630900000000003</c:v>
+                </c:pt>
+                <c:pt idx="20">
+                  <c:v>0.27530300000000002</c:v>
+                </c:pt>
+                <c:pt idx="21">
+                  <c:v>0.275258</c:v>
+                </c:pt>
+                <c:pt idx="22">
+                  <c:v>0.27519100000000002</c:v>
+                </c:pt>
+                <c:pt idx="23">
+                  <c:v>0.27677800000000002</c:v>
+                </c:pt>
+              </c:numCache>
+            </c:numRef>
+          </c:val>
+          <c:smooth val="0"/>
+          <c:extLst>
+            <c:ext xmlns:c16="http://schemas.microsoft.com/office/drawing/2014/chart" uri="{C3380CC4-5D6E-409C-BE32-E72D297353CC}">
+              <c16:uniqueId val="{00000003-C184-4F96-9541-99F663C8D14B}"/>
+            </c:ext>
+          </c:extLst>
+        </c:ser>
+        <c:dLbls>
+          <c:showLegendKey val="0"/>
+          <c:showVal val="0"/>
+          <c:showCatName val="0"/>
+          <c:showSerName val="0"/>
+          <c:showPercent val="0"/>
+          <c:showBubbleSize val="0"/>
+        </c:dLbls>
+        <c:smooth val="0"/>
+        <c:axId val="32601552"/>
+        <c:axId val="32612112"/>
+        <c:extLst>
+          <c:ext xmlns:c15="http://schemas.microsoft.com/office/drawing/2012/chart" uri="{02D57815-91ED-43cb-92C2-25804820EDAC}">
+            <c15:filteredLineSeries>
+              <c15:ser>
+                <c:idx val="0"/>
+                <c:order val="0"/>
+                <c:tx>
+                  <c:strRef>
+                    <c:extLst>
+                      <c:ext uri="{02D57815-91ED-43cb-92C2-25804820EDAC}">
+                        <c15:formulaRef>
+                          <c15:sqref>'Exp 2'!$A$1</c15:sqref>
+                        </c15:formulaRef>
+                      </c:ext>
+                    </c:extLst>
+                    <c:strCache>
+                      <c:ptCount val="1"/>
+                      <c:pt idx="0">
+                        <c:v>n_proc</c:v>
+                      </c:pt>
+                    </c:strCache>
+                  </c:strRef>
+                </c:tx>
+                <c:spPr>
+                  <a:ln w="28575" cap="rnd">
+                    <a:solidFill>
+                      <a:schemeClr val="accent1"/>
+                    </a:solidFill>
+                    <a:round/>
+                  </a:ln>
+                  <a:effectLst/>
+                </c:spPr>
+                <c:marker>
+                  <c:symbol val="none"/>
+                </c:marker>
+                <c:val>
+                  <c:numRef>
+                    <c:extLst>
+                      <c:ext uri="{02D57815-91ED-43cb-92C2-25804820EDAC}">
+                        <c15:formulaRef>
+                          <c15:sqref>'Exp 2'!$A$2:$A$25</c15:sqref>
+                        </c15:formulaRef>
+                      </c:ext>
+                    </c:extLst>
+                    <c:numCache>
+                      <c:formatCode>General</c:formatCode>
+                      <c:ptCount val="24"/>
+                      <c:pt idx="0">
+                        <c:v>1</c:v>
+                      </c:pt>
+                      <c:pt idx="1">
+                        <c:v>2</c:v>
+                      </c:pt>
+                      <c:pt idx="2">
+                        <c:v>3</c:v>
+                      </c:pt>
+                      <c:pt idx="3">
+                        <c:v>4</c:v>
+                      </c:pt>
+                      <c:pt idx="4">
+                        <c:v>5</c:v>
+                      </c:pt>
+                      <c:pt idx="5">
+                        <c:v>6</c:v>
+                      </c:pt>
+                      <c:pt idx="6">
+                        <c:v>7</c:v>
+                      </c:pt>
+                      <c:pt idx="7">
+                        <c:v>8</c:v>
+                      </c:pt>
+                      <c:pt idx="8">
+                        <c:v>9</c:v>
+                      </c:pt>
+                      <c:pt idx="9">
+                        <c:v>10</c:v>
+                      </c:pt>
+                      <c:pt idx="10">
+                        <c:v>11</c:v>
+                      </c:pt>
+                      <c:pt idx="11">
+                        <c:v>12</c:v>
+                      </c:pt>
+                      <c:pt idx="12">
+                        <c:v>13</c:v>
+                      </c:pt>
+                      <c:pt idx="13">
+                        <c:v>14</c:v>
+                      </c:pt>
+                      <c:pt idx="14">
+                        <c:v>15</c:v>
+                      </c:pt>
+                      <c:pt idx="15">
+                        <c:v>16</c:v>
+                      </c:pt>
+                      <c:pt idx="16">
+                        <c:v>17</c:v>
+                      </c:pt>
+                      <c:pt idx="17">
+                        <c:v>18</c:v>
+                      </c:pt>
+                      <c:pt idx="18">
+                        <c:v>19</c:v>
+                      </c:pt>
+                      <c:pt idx="19">
+                        <c:v>20</c:v>
+                      </c:pt>
+                      <c:pt idx="20">
+                        <c:v>21</c:v>
+                      </c:pt>
+                      <c:pt idx="21">
+                        <c:v>22</c:v>
+                      </c:pt>
+                      <c:pt idx="22">
+                        <c:v>23</c:v>
+                      </c:pt>
+                      <c:pt idx="23">
+                        <c:v>24</c:v>
+                      </c:pt>
+                    </c:numCache>
+                  </c:numRef>
+                </c:val>
+                <c:smooth val="0"/>
+                <c:extLst>
+                  <c:ext xmlns:c16="http://schemas.microsoft.com/office/drawing/2014/chart" uri="{C3380CC4-5D6E-409C-BE32-E72D297353CC}">
+                    <c16:uniqueId val="{00000004-C184-4F96-9541-99F663C8D14B}"/>
+                  </c:ext>
+                </c:extLst>
+              </c15:ser>
+            </c15:filteredLineSeries>
+          </c:ext>
+        </c:extLst>
+      </c:lineChart>
+      <c:catAx>
+        <c:axId val="32601552"/>
+        <c:scaling>
+          <c:orientation val="minMax"/>
+        </c:scaling>
+        <c:delete val="0"/>
+        <c:axPos val="b"/>
+        <c:title>
+          <c:tx>
+            <c:rich>
+              <a:bodyPr rot="0" spcFirstLastPara="1" vertOverflow="ellipsis" vert="horz" wrap="square" anchor="ctr" anchorCtr="1"/>
+              <a:lstStyle/>
+              <a:p>
+                <a:pPr>
+                  <a:defRPr sz="1000" b="0" i="0" u="none" strike="noStrike" kern="1200" baseline="0">
+                    <a:solidFill>
+                      <a:schemeClr val="dk1"/>
+                    </a:solidFill>
+                    <a:latin typeface="+mn-lt"/>
+                    <a:ea typeface="+mn-ea"/>
+                    <a:cs typeface="+mn-cs"/>
+                  </a:defRPr>
+                </a:pPr>
+                <a:r>
+                  <a:rPr lang="en-US"/>
+                  <a:t>n_proc/n_thread</a:t>
+                </a:r>
+              </a:p>
+            </c:rich>
+          </c:tx>
+          <c:overlay val="0"/>
+          <c:spPr>
+            <a:noFill/>
+            <a:ln>
+              <a:noFill/>
+            </a:ln>
+            <a:effectLst/>
+          </c:spPr>
+          <c:txPr>
+            <a:bodyPr rot="0" spcFirstLastPara="1" vertOverflow="ellipsis" vert="horz" wrap="square" anchor="ctr" anchorCtr="1"/>
+            <a:lstStyle/>
+            <a:p>
+              <a:pPr>
+                <a:defRPr sz="1000" b="0" i="0" u="none" strike="noStrike" kern="1200" baseline="0">
+                  <a:solidFill>
+                    <a:schemeClr val="dk1"/>
+                  </a:solidFill>
+                  <a:latin typeface="+mn-lt"/>
+                  <a:ea typeface="+mn-ea"/>
+                  <a:cs typeface="+mn-cs"/>
+                </a:defRPr>
+              </a:pPr>
+              <a:endParaRPr lang="en-US"/>
+            </a:p>
+          </c:txPr>
+        </c:title>
+        <c:majorTickMark val="none"/>
+        <c:minorTickMark val="none"/>
+        <c:tickLblPos val="nextTo"/>
+        <c:spPr>
+          <a:noFill/>
+          <a:ln w="9525" cap="flat" cmpd="sng" algn="ctr">
+            <a:solidFill>
+              <a:schemeClr val="tx1">
+                <a:lumMod val="15000"/>
+                <a:lumOff val="85000"/>
+              </a:schemeClr>
+            </a:solidFill>
+            <a:round/>
+          </a:ln>
+          <a:effectLst/>
+        </c:spPr>
+        <c:txPr>
+          <a:bodyPr rot="-60000000" spcFirstLastPara="1" vertOverflow="ellipsis" vert="horz" wrap="square" anchor="ctr" anchorCtr="1"/>
+          <a:lstStyle/>
+          <a:p>
+            <a:pPr>
+              <a:defRPr sz="900" b="0" i="0" u="none" strike="noStrike" kern="1200" baseline="0">
+                <a:solidFill>
+                  <a:schemeClr val="dk1"/>
+                </a:solidFill>
+                <a:latin typeface="+mn-lt"/>
+                <a:ea typeface="+mn-ea"/>
+                <a:cs typeface="+mn-cs"/>
+              </a:defRPr>
+            </a:pPr>
+            <a:endParaRPr lang="en-US"/>
+          </a:p>
+        </c:txPr>
+        <c:crossAx val="32612112"/>
+        <c:crosses val="autoZero"/>
+        <c:auto val="1"/>
+        <c:lblAlgn val="ctr"/>
+        <c:lblOffset val="100"/>
+        <c:noMultiLvlLbl val="0"/>
+      </c:catAx>
+      <c:valAx>
+        <c:axId val="32612112"/>
+        <c:scaling>
+          <c:orientation val="minMax"/>
+        </c:scaling>
+        <c:delete val="0"/>
+        <c:axPos val="l"/>
+        <c:majorGridlines>
+          <c:spPr>
+            <a:ln w="9525" cap="flat" cmpd="sng" algn="ctr">
+              <a:solidFill>
+                <a:schemeClr val="tx1">
+                  <a:lumMod val="15000"/>
+                  <a:lumOff val="85000"/>
+                </a:schemeClr>
+              </a:solidFill>
+              <a:round/>
+            </a:ln>
+            <a:effectLst/>
+          </c:spPr>
+        </c:majorGridlines>
+        <c:numFmt formatCode="General" sourceLinked="1"/>
+        <c:majorTickMark val="none"/>
+        <c:minorTickMark val="none"/>
+        <c:tickLblPos val="nextTo"/>
+        <c:spPr>
+          <a:noFill/>
+          <a:ln>
+            <a:noFill/>
+          </a:ln>
+          <a:effectLst/>
+        </c:spPr>
+        <c:txPr>
+          <a:bodyPr rot="-60000000" spcFirstLastPara="1" vertOverflow="ellipsis" vert="horz" wrap="square" anchor="ctr" anchorCtr="1"/>
+          <a:lstStyle/>
+          <a:p>
+            <a:pPr>
+              <a:defRPr sz="900" b="0" i="0" u="none" strike="noStrike" kern="1200" baseline="0">
+                <a:solidFill>
+                  <a:schemeClr val="dk1"/>
+                </a:solidFill>
+                <a:latin typeface="+mn-lt"/>
+                <a:ea typeface="+mn-ea"/>
+                <a:cs typeface="+mn-cs"/>
+              </a:defRPr>
+            </a:pPr>
+            <a:endParaRPr lang="en-US"/>
+          </a:p>
+        </c:txPr>
+        <c:crossAx val="32601552"/>
+        <c:crosses val="autoZero"/>
+        <c:crossBetween val="between"/>
+      </c:valAx>
+      <c:spPr>
+        <a:noFill/>
+        <a:ln>
+          <a:noFill/>
+        </a:ln>
+        <a:effectLst/>
+      </c:spPr>
+    </c:plotArea>
+    <c:legend>
+      <c:legendPos val="b"/>
+      <c:overlay val="0"/>
+      <c:spPr>
+        <a:noFill/>
+        <a:ln>
+          <a:noFill/>
+        </a:ln>
+        <a:effectLst/>
+      </c:spPr>
+      <c:txPr>
+        <a:bodyPr rot="0" spcFirstLastPara="1" vertOverflow="ellipsis" vert="horz" wrap="square" anchor="ctr" anchorCtr="1"/>
+        <a:lstStyle/>
+        <a:p>
+          <a:pPr>
+            <a:defRPr sz="900" b="0" i="0" u="none" strike="noStrike" kern="1200" baseline="0">
+              <a:solidFill>
+                <a:schemeClr val="dk1"/>
+              </a:solidFill>
+              <a:latin typeface="+mn-lt"/>
+              <a:ea typeface="+mn-ea"/>
+              <a:cs typeface="+mn-cs"/>
+            </a:defRPr>
+          </a:pPr>
+          <a:endParaRPr lang="en-US"/>
+        </a:p>
+      </c:txPr>
+    </c:legend>
+    <c:plotVisOnly val="1"/>
+    <c:dispBlanksAs val="gap"/>
+    <c:showDLblsOverMax val="0"/>
+    <c:extLst>
+      <c:ext xmlns:c16r3="http://schemas.microsoft.com/office/drawing/2017/03/chart" uri="{56B9EC1D-385E-4148-901F-78D8002777C0}">
+        <c16r3:dataDisplayOptions16>
+          <c16r3:dispNaAsBlank val="1"/>
+        </c16r3:dataDisplayOptions16>
+      </c:ext>
+    </c:extLst>
+  </c:chart>
+  <c:spPr>
+    <a:solidFill>
+      <a:schemeClr val="lt1"/>
+    </a:solidFill>
+    <a:ln w="12700" cap="flat" cmpd="sng" algn="ctr">
+      <a:solidFill>
+        <a:schemeClr val="dk1"/>
+      </a:solidFill>
+      <a:prstDash val="solid"/>
+      <a:miter lim="800000"/>
+    </a:ln>
+    <a:effectLst/>
+  </c:spPr>
+  <c:txPr>
+    <a:bodyPr/>
+    <a:lstStyle/>
+    <a:p>
+      <a:pPr>
+        <a:defRPr>
+          <a:solidFill>
+            <a:schemeClr val="dk1"/>
+          </a:solidFill>
+          <a:latin typeface="+mn-lt"/>
+          <a:ea typeface="+mn-ea"/>
+          <a:cs typeface="+mn-cs"/>
+        </a:defRPr>
+      </a:pPr>
+      <a:endParaRPr lang="en-US"/>
+    </a:p>
+  </c:txPr>
+  <c:externalData r:id="rId3">
+    <c:autoUpdate val="0"/>
+  </c:externalData>
+</c:chartSpace>
+</file>
+
+<file path=ppt/charts/colors1.xml><?xml version="1.0" encoding="utf-8"?>
+<cs:colorStyle xmlns:cs="http://schemas.microsoft.com/office/drawing/2012/chartStyle" xmlns:a="http://schemas.openxmlformats.org/drawingml/2006/main" meth="cycle" id="10">
+  <a:schemeClr val="accent1"/>
+  <a:schemeClr val="accent2"/>
+  <a:schemeClr val="accent3"/>
+  <a:schemeClr val="accent4"/>
+  <a:schemeClr val="accent5"/>
+  <a:schemeClr val="accent6"/>
+  <cs:variation/>
+  <cs:variation>
+    <a:lumMod val="60000"/>
+  </cs:variation>
+  <cs:variation>
+    <a:lumMod val="80000"/>
+    <a:lumOff val="20000"/>
+  </cs:variation>
+  <cs:variation>
+    <a:lumMod val="80000"/>
+  </cs:variation>
+  <cs:variation>
+    <a:lumMod val="60000"/>
+    <a:lumOff val="40000"/>
+  </cs:variation>
+  <cs:variation>
+    <a:lumMod val="50000"/>
+  </cs:variation>
+  <cs:variation>
+    <a:lumMod val="70000"/>
+    <a:lumOff val="30000"/>
+  </cs:variation>
+  <cs:variation>
+    <a:lumMod val="70000"/>
+  </cs:variation>
+  <cs:variation>
+    <a:lumMod val="50000"/>
+    <a:lumOff val="50000"/>
+  </cs:variation>
+</cs:colorStyle>
+</file>
+
+<file path=ppt/charts/colors2.xml><?xml version="1.0" encoding="utf-8"?>
+<cs:colorStyle xmlns:cs="http://schemas.microsoft.com/office/drawing/2012/chartStyle" xmlns:a="http://schemas.openxmlformats.org/drawingml/2006/main" meth="cycle" id="10">
+  <a:schemeClr val="accent1"/>
+  <a:schemeClr val="accent2"/>
+  <a:schemeClr val="accent3"/>
+  <a:schemeClr val="accent4"/>
+  <a:schemeClr val="accent5"/>
+  <a:schemeClr val="accent6"/>
+  <cs:variation/>
+  <cs:variation>
+    <a:lumMod val="60000"/>
+  </cs:variation>
+  <cs:variation>
+    <a:lumMod val="80000"/>
+    <a:lumOff val="20000"/>
+  </cs:variation>
+  <cs:variation>
+    <a:lumMod val="80000"/>
+  </cs:variation>
+  <cs:variation>
+    <a:lumMod val="60000"/>
+    <a:lumOff val="40000"/>
+  </cs:variation>
+  <cs:variation>
+    <a:lumMod val="50000"/>
+  </cs:variation>
+  <cs:variation>
+    <a:lumMod val="70000"/>
+    <a:lumOff val="30000"/>
+  </cs:variation>
+  <cs:variation>
+    <a:lumMod val="70000"/>
+  </cs:variation>
+  <cs:variation>
+    <a:lumMod val="50000"/>
+    <a:lumOff val="50000"/>
+  </cs:variation>
+</cs:colorStyle>
+</file>
+
+<file path=ppt/charts/style1.xml><?xml version="1.0" encoding="utf-8"?>
+<cs:chartStyle xmlns:cs="http://schemas.microsoft.com/office/drawing/2012/chartStyle" xmlns:a="http://schemas.openxmlformats.org/drawingml/2006/main" id="227">
+  <cs:axisTitle>
+    <cs:lnRef idx="0"/>
+    <cs:fillRef idx="0"/>
+    <cs:effectRef idx="0"/>
+    <cs:fontRef idx="minor">
+      <a:schemeClr val="tx1">
+        <a:lumMod val="65000"/>
+        <a:lumOff val="35000"/>
+      </a:schemeClr>
+    </cs:fontRef>
+    <cs:defRPr sz="1000" kern="1200"/>
+  </cs:axisTitle>
+  <cs:categoryAxis>
+    <cs:lnRef idx="0"/>
+    <cs:fillRef idx="0"/>
+    <cs:effectRef idx="0"/>
+    <cs:fontRef idx="minor">
+      <a:schemeClr val="tx1">
+        <a:lumMod val="65000"/>
+        <a:lumOff val="35000"/>
+      </a:schemeClr>
+    </cs:fontRef>
+    <cs:spPr>
+      <a:ln w="9525" cap="flat" cmpd="sng" algn="ctr">
+        <a:solidFill>
+          <a:schemeClr val="tx1">
+            <a:lumMod val="15000"/>
+            <a:lumOff val="85000"/>
+          </a:schemeClr>
+        </a:solidFill>
+        <a:round/>
+      </a:ln>
+    </cs:spPr>
+    <cs:defRPr sz="900" kern="1200"/>
+  </cs:categoryAxis>
+  <cs:chartArea mods="allowNoFillOverride allowNoLineOverride">
+    <cs:lnRef idx="0"/>
+    <cs:fillRef idx="0"/>
+    <cs:effectRef idx="0"/>
+    <cs:fontRef idx="minor">
+      <a:schemeClr val="tx1"/>
+    </cs:fontRef>
+    <cs:spPr>
+      <a:solidFill>
+        <a:schemeClr val="bg1"/>
+      </a:solidFill>
+      <a:ln w="9525" cap="flat" cmpd="sng" algn="ctr">
+        <a:solidFill>
+          <a:schemeClr val="tx1">
+            <a:lumMod val="15000"/>
+            <a:lumOff val="85000"/>
+          </a:schemeClr>
+        </a:solidFill>
+        <a:round/>
+      </a:ln>
+    </cs:spPr>
+    <cs:defRPr sz="1000" kern="1200"/>
+  </cs:chartArea>
+  <cs:dataLabel>
+    <cs:lnRef idx="0"/>
+    <cs:fillRef idx="0"/>
+    <cs:effectRef idx="0"/>
+    <cs:fontRef idx="minor">
+      <a:schemeClr val="tx1">
+        <a:lumMod val="75000"/>
+        <a:lumOff val="25000"/>
+      </a:schemeClr>
+    </cs:fontRef>
+    <cs:defRPr sz="900" kern="1200"/>
+  </cs:dataLabel>
+  <cs:dataLabelCallout>
+    <cs:lnRef idx="0"/>
+    <cs:fillRef idx="0"/>
+    <cs:effectRef idx="0"/>
+    <cs:fontRef idx="minor">
+      <a:schemeClr val="dk1">
+        <a:lumMod val="65000"/>
+        <a:lumOff val="35000"/>
+      </a:schemeClr>
+    </cs:fontRef>
+    <cs:spPr>
+      <a:solidFill>
+        <a:schemeClr val="lt1"/>
+      </a:solidFill>
+      <a:ln>
+        <a:solidFill>
+          <a:schemeClr val="dk1">
+            <a:lumMod val="25000"/>
+            <a:lumOff val="75000"/>
+          </a:schemeClr>
+        </a:solidFill>
+      </a:ln>
+    </cs:spPr>
+    <cs:defRPr sz="900" kern="1200"/>
+    <cs:bodyPr rot="0" spcFirstLastPara="1" vertOverflow="clip" horzOverflow="clip" vert="horz" wrap="square" lIns="36576" tIns="18288" rIns="36576" bIns="18288" anchor="ctr" anchorCtr="1">
+      <a:spAutoFit/>
+    </cs:bodyPr>
+  </cs:dataLabelCallout>
+  <cs:dataPoint>
+    <cs:lnRef idx="0"/>
+    <cs:fillRef idx="1">
+      <cs:styleClr val="auto"/>
+    </cs:fillRef>
+    <cs:effectRef idx="0"/>
+    <cs:fontRef idx="minor">
+      <a:schemeClr val="tx1"/>
+    </cs:fontRef>
+    <cs:spPr>
+      <a:solidFill>
+        <a:schemeClr val="phClr"/>
+      </a:solidFill>
+    </cs:spPr>
+  </cs:dataPoint>
+  <cs:dataPoint3D>
+    <cs:lnRef idx="0"/>
+    <cs:fillRef idx="1">
+      <cs:styleClr val="auto"/>
+    </cs:fillRef>
+    <cs:effectRef idx="0"/>
+    <cs:fontRef idx="minor">
+      <a:schemeClr val="tx1"/>
+    </cs:fontRef>
+    <cs:spPr>
+      <a:solidFill>
+        <a:schemeClr val="phClr"/>
+      </a:solidFill>
+    </cs:spPr>
+  </cs:dataPoint3D>
+  <cs:dataPointLine>
+    <cs:lnRef idx="0">
+      <cs:styleClr val="auto"/>
+    </cs:lnRef>
+    <cs:fillRef idx="1"/>
+    <cs:effectRef idx="0"/>
+    <cs:fontRef idx="minor">
+      <a:schemeClr val="tx1"/>
+    </cs:fontRef>
+    <cs:spPr>
+      <a:ln w="28575" cap="rnd">
+        <a:solidFill>
+          <a:schemeClr val="phClr"/>
+        </a:solidFill>
+        <a:round/>
+      </a:ln>
+    </cs:spPr>
+  </cs:dataPointLine>
+  <cs:dataPointMarker>
+    <cs:lnRef idx="0">
+      <cs:styleClr val="auto"/>
+    </cs:lnRef>
+    <cs:fillRef idx="1">
+      <cs:styleClr val="auto"/>
+    </cs:fillRef>
+    <cs:effectRef idx="0"/>
+    <cs:fontRef idx="minor">
+      <a:schemeClr val="tx1"/>
+    </cs:fontRef>
+    <cs:spPr>
+      <a:solidFill>
+        <a:schemeClr val="phClr"/>
+      </a:solidFill>
+      <a:ln w="9525">
+        <a:solidFill>
+          <a:schemeClr val="phClr"/>
+        </a:solidFill>
+      </a:ln>
+    </cs:spPr>
+  </cs:dataPointMarker>
+  <cs:dataPointMarkerLayout symbol="circle" size="5"/>
+  <cs:dataPointWireframe>
+    <cs:lnRef idx="0">
+      <cs:styleClr val="auto"/>
+    </cs:lnRef>
+    <cs:fillRef idx="1"/>
+    <cs:effectRef idx="0"/>
+    <cs:fontRef idx="minor">
+      <a:schemeClr val="tx1"/>
+    </cs:fontRef>
+    <cs:spPr>
+      <a:ln w="9525" cap="rnd">
+        <a:solidFill>
+          <a:schemeClr val="phClr"/>
+        </a:solidFill>
+        <a:round/>
+      </a:ln>
+    </cs:spPr>
+  </cs:dataPointWireframe>
+  <cs:dataTable>
+    <cs:lnRef idx="0"/>
+    <cs:fillRef idx="0"/>
+    <cs:effectRef idx="0"/>
+    <cs:fontRef idx="minor">
+      <a:schemeClr val="tx1">
+        <a:lumMod val="65000"/>
+        <a:lumOff val="35000"/>
+      </a:schemeClr>
+    </cs:fontRef>
+    <cs:spPr>
+      <a:noFill/>
+      <a:ln w="9525" cap="flat" cmpd="sng" algn="ctr">
+        <a:solidFill>
+          <a:schemeClr val="tx1">
+            <a:lumMod val="15000"/>
+            <a:lumOff val="85000"/>
+          </a:schemeClr>
+        </a:solidFill>
+        <a:round/>
+      </a:ln>
+    </cs:spPr>
+    <cs:defRPr sz="900" kern="1200"/>
+  </cs:dataTable>
+  <cs:downBar>
+    <cs:lnRef idx="0"/>
+    <cs:fillRef idx="0"/>
+    <cs:effectRef idx="0"/>
+    <cs:fontRef idx="minor">
+      <a:schemeClr val="dk1"/>
+    </cs:fontRef>
+    <cs:spPr>
+      <a:solidFill>
+        <a:schemeClr val="dk1">
+          <a:lumMod val="65000"/>
+          <a:lumOff val="35000"/>
+        </a:schemeClr>
+      </a:solidFill>
+      <a:ln w="9525">
+        <a:solidFill>
+          <a:schemeClr val="tx1">
+            <a:lumMod val="65000"/>
+            <a:lumOff val="35000"/>
+          </a:schemeClr>
+        </a:solidFill>
+      </a:ln>
+    </cs:spPr>
+  </cs:downBar>
+  <cs:dropLine>
+    <cs:lnRef idx="0"/>
+    <cs:fillRef idx="0"/>
+    <cs:effectRef idx="0"/>
+    <cs:fontRef idx="minor">
+      <a:schemeClr val="tx1"/>
+    </cs:fontRef>
+    <cs:spPr>
+      <a:ln w="9525" cap="flat" cmpd="sng" algn="ctr">
+        <a:solidFill>
+          <a:schemeClr val="tx1">
+            <a:lumMod val="35000"/>
+            <a:lumOff val="65000"/>
+          </a:schemeClr>
+        </a:solidFill>
+        <a:round/>
+      </a:ln>
+    </cs:spPr>
+  </cs:dropLine>
+  <cs:errorBar>
+    <cs:lnRef idx="0"/>
+    <cs:fillRef idx="0"/>
+    <cs:effectRef idx="0"/>
+    <cs:fontRef idx="minor">
+      <a:schemeClr val="tx1"/>
+    </cs:fontRef>
+    <cs:spPr>
+      <a:ln w="9525" cap="flat" cmpd="sng" algn="ctr">
+        <a:solidFill>
+          <a:schemeClr val="tx1">
+            <a:lumMod val="65000"/>
+            <a:lumOff val="35000"/>
+          </a:schemeClr>
+        </a:solidFill>
+        <a:round/>
+      </a:ln>
+    </cs:spPr>
+  </cs:errorBar>
+  <cs:floor>
+    <cs:lnRef idx="0"/>
+    <cs:fillRef idx="0"/>
+    <cs:effectRef idx="0"/>
+    <cs:fontRef idx="minor">
+      <a:schemeClr val="tx1"/>
+    </cs:fontRef>
+    <cs:spPr>
+      <a:noFill/>
+      <a:ln>
+        <a:noFill/>
+      </a:ln>
+    </cs:spPr>
+  </cs:floor>
+  <cs:gridlineMajor>
+    <cs:lnRef idx="0"/>
+    <cs:fillRef idx="0"/>
+    <cs:effectRef idx="0"/>
+    <cs:fontRef idx="minor">
+      <a:schemeClr val="tx1"/>
+    </cs:fontRef>
+    <cs:spPr>
+      <a:ln w="9525" cap="flat" cmpd="sng" algn="ctr">
+        <a:solidFill>
+          <a:schemeClr val="tx1">
+            <a:lumMod val="15000"/>
+            <a:lumOff val="85000"/>
+          </a:schemeClr>
+        </a:solidFill>
+        <a:round/>
+      </a:ln>
+    </cs:spPr>
+  </cs:gridlineMajor>
+  <cs:gridlineMinor>
+    <cs:lnRef idx="0"/>
+    <cs:fillRef idx="0"/>
+    <cs:effectRef idx="0"/>
+    <cs:fontRef idx="minor">
+      <a:schemeClr val="tx1"/>
+    </cs:fontRef>
+    <cs:spPr>
+      <a:ln w="9525" cap="flat" cmpd="sng" algn="ctr">
+        <a:solidFill>
+          <a:schemeClr val="tx1">
+            <a:lumMod val="5000"/>
+            <a:lumOff val="95000"/>
+          </a:schemeClr>
+        </a:solidFill>
+        <a:round/>
+      </a:ln>
+    </cs:spPr>
+  </cs:gridlineMinor>
+  <cs:hiLoLine>
+    <cs:lnRef idx="0"/>
+    <cs:fillRef idx="0"/>
+    <cs:effectRef idx="0"/>
+    <cs:fontRef idx="minor">
+      <a:schemeClr val="tx1"/>
+    </cs:fontRef>
+    <cs:spPr>
+      <a:ln w="9525" cap="flat" cmpd="sng" algn="ctr">
+        <a:solidFill>
+          <a:schemeClr val="tx1">
+            <a:lumMod val="75000"/>
+            <a:lumOff val="25000"/>
+          </a:schemeClr>
+        </a:solidFill>
+        <a:round/>
+      </a:ln>
+    </cs:spPr>
+  </cs:hiLoLine>
+  <cs:leaderLine>
+    <cs:lnRef idx="0"/>
+    <cs:fillRef idx="0"/>
+    <cs:effectRef idx="0"/>
+    <cs:fontRef idx="minor">
+      <a:schemeClr val="tx1"/>
+    </cs:fontRef>
+    <cs:spPr>
+      <a:ln w="9525" cap="flat" cmpd="sng" algn="ctr">
+        <a:solidFill>
+          <a:schemeClr val="tx1">
+            <a:lumMod val="35000"/>
+            <a:lumOff val="65000"/>
+          </a:schemeClr>
+        </a:solidFill>
+        <a:round/>
+      </a:ln>
+    </cs:spPr>
+  </cs:leaderLine>
+  <cs:legend>
+    <cs:lnRef idx="0"/>
+    <cs:fillRef idx="0"/>
+    <cs:effectRef idx="0"/>
+    <cs:fontRef idx="minor">
+      <a:schemeClr val="tx1">
+        <a:lumMod val="65000"/>
+        <a:lumOff val="35000"/>
+      </a:schemeClr>
+    </cs:fontRef>
+    <cs:defRPr sz="900" kern="1200"/>
+  </cs:legend>
+  <cs:plotArea mods="allowNoFillOverride allowNoLineOverride">
+    <cs:lnRef idx="0"/>
+    <cs:fillRef idx="0"/>
+    <cs:effectRef idx="0"/>
+    <cs:fontRef idx="minor">
+      <a:schemeClr val="tx1"/>
+    </cs:fontRef>
+  </cs:plotArea>
+  <cs:plotArea3D mods="allowNoFillOverride allowNoLineOverride">
+    <cs:lnRef idx="0"/>
+    <cs:fillRef idx="0"/>
+    <cs:effectRef idx="0"/>
+    <cs:fontRef idx="minor">
+      <a:schemeClr val="tx1"/>
+    </cs:fontRef>
+  </cs:plotArea3D>
+  <cs:seriesAxis>
+    <cs:lnRef idx="0"/>
+    <cs:fillRef idx="0"/>
+    <cs:effectRef idx="0"/>
+    <cs:fontRef idx="minor">
+      <a:schemeClr val="tx1">
+        <a:lumMod val="65000"/>
+        <a:lumOff val="35000"/>
+      </a:schemeClr>
+    </cs:fontRef>
+    <cs:defRPr sz="900" kern="1200"/>
+  </cs:seriesAxis>
+  <cs:seriesLine>
+    <cs:lnRef idx="0"/>
+    <cs:fillRef idx="0"/>
+    <cs:effectRef idx="0"/>
+    <cs:fontRef idx="minor">
+      <a:schemeClr val="tx1"/>
+    </cs:fontRef>
+    <cs:spPr>
+      <a:ln w="9525" cap="flat" cmpd="sng" algn="ctr">
+        <a:solidFill>
+          <a:schemeClr val="tx1">
+            <a:lumMod val="35000"/>
+            <a:lumOff val="65000"/>
+          </a:schemeClr>
+        </a:solidFill>
+        <a:round/>
+      </a:ln>
+    </cs:spPr>
+  </cs:seriesLine>
+  <cs:title>
+    <cs:lnRef idx="0"/>
+    <cs:fillRef idx="0"/>
+    <cs:effectRef idx="0"/>
+    <cs:fontRef idx="minor">
+      <a:schemeClr val="tx1">
+        <a:lumMod val="65000"/>
+        <a:lumOff val="35000"/>
+      </a:schemeClr>
+    </cs:fontRef>
+    <cs:defRPr sz="1400" b="0" kern="1200" spc="0" baseline="0"/>
+  </cs:title>
+  <cs:trendline>
+    <cs:lnRef idx="0">
+      <cs:styleClr val="auto"/>
+    </cs:lnRef>
+    <cs:fillRef idx="0"/>
+    <cs:effectRef idx="0"/>
+    <cs:fontRef idx="minor">
+      <a:schemeClr val="tx1"/>
+    </cs:fontRef>
+    <cs:spPr>
+      <a:ln w="19050" cap="rnd">
+        <a:solidFill>
+          <a:schemeClr val="phClr"/>
+        </a:solidFill>
+        <a:prstDash val="sysDot"/>
+      </a:ln>
+    </cs:spPr>
+  </cs:trendline>
+  <cs:trendlineLabel>
+    <cs:lnRef idx="0"/>
+    <cs:fillRef idx="0"/>
+    <cs:effectRef idx="0"/>
+    <cs:fontRef idx="minor">
+      <a:schemeClr val="tx1">
+        <a:lumMod val="65000"/>
+        <a:lumOff val="35000"/>
+      </a:schemeClr>
+    </cs:fontRef>
+    <cs:defRPr sz="900" kern="1200"/>
+  </cs:trendlineLabel>
+  <cs:upBar>
+    <cs:lnRef idx="0"/>
+    <cs:fillRef idx="0"/>
+    <cs:effectRef idx="0"/>
+    <cs:fontRef idx="minor">
+      <a:schemeClr val="dk1"/>
+    </cs:fontRef>
+    <cs:spPr>
+      <a:solidFill>
+        <a:schemeClr val="lt1"/>
+      </a:solidFill>
+      <a:ln w="9525">
+        <a:solidFill>
+          <a:schemeClr val="tx1">
+            <a:lumMod val="15000"/>
+            <a:lumOff val="85000"/>
+          </a:schemeClr>
+        </a:solidFill>
+      </a:ln>
+    </cs:spPr>
+  </cs:upBar>
+  <cs:valueAxis>
+    <cs:lnRef idx="0"/>
+    <cs:fillRef idx="0"/>
+    <cs:effectRef idx="0"/>
+    <cs:fontRef idx="minor">
+      <a:schemeClr val="tx1">
+        <a:lumMod val="65000"/>
+        <a:lumOff val="35000"/>
+      </a:schemeClr>
+    </cs:fontRef>
+    <cs:defRPr sz="900" kern="1200"/>
+  </cs:valueAxis>
+  <cs:wall>
+    <cs:lnRef idx="0"/>
+    <cs:fillRef idx="0"/>
+    <cs:effectRef idx="0"/>
+    <cs:fontRef idx="minor">
+      <a:schemeClr val="tx1"/>
+    </cs:fontRef>
+    <cs:spPr>
+      <a:noFill/>
+      <a:ln>
+        <a:noFill/>
+      </a:ln>
+    </cs:spPr>
+  </cs:wall>
+</cs:chartStyle>
+</file>
+
+<file path=ppt/charts/style2.xml><?xml version="1.0" encoding="utf-8"?>
+<cs:chartStyle xmlns:cs="http://schemas.microsoft.com/office/drawing/2012/chartStyle" xmlns:a="http://schemas.openxmlformats.org/drawingml/2006/main" id="227">
+  <cs:axisTitle>
+    <cs:lnRef idx="0"/>
+    <cs:fillRef idx="0"/>
+    <cs:effectRef idx="0"/>
+    <cs:fontRef idx="minor">
+      <a:schemeClr val="tx1">
+        <a:lumMod val="65000"/>
+        <a:lumOff val="35000"/>
+      </a:schemeClr>
+    </cs:fontRef>
+    <cs:defRPr sz="1000" kern="1200"/>
+  </cs:axisTitle>
+  <cs:categoryAxis>
+    <cs:lnRef idx="0"/>
+    <cs:fillRef idx="0"/>
+    <cs:effectRef idx="0"/>
+    <cs:fontRef idx="minor">
+      <a:schemeClr val="tx1">
+        <a:lumMod val="65000"/>
+        <a:lumOff val="35000"/>
+      </a:schemeClr>
+    </cs:fontRef>
+    <cs:spPr>
+      <a:ln w="9525" cap="flat" cmpd="sng" algn="ctr">
+        <a:solidFill>
+          <a:schemeClr val="tx1">
+            <a:lumMod val="15000"/>
+            <a:lumOff val="85000"/>
+          </a:schemeClr>
+        </a:solidFill>
+        <a:round/>
+      </a:ln>
+    </cs:spPr>
+    <cs:defRPr sz="900" kern="1200"/>
+  </cs:categoryAxis>
+  <cs:chartArea mods="allowNoFillOverride allowNoLineOverride">
+    <cs:lnRef idx="0"/>
+    <cs:fillRef idx="0"/>
+    <cs:effectRef idx="0"/>
+    <cs:fontRef idx="minor">
+      <a:schemeClr val="tx1"/>
+    </cs:fontRef>
+    <cs:spPr>
+      <a:solidFill>
+        <a:schemeClr val="bg1"/>
+      </a:solidFill>
+      <a:ln w="9525" cap="flat" cmpd="sng" algn="ctr">
+        <a:solidFill>
+          <a:schemeClr val="tx1">
+            <a:lumMod val="15000"/>
+            <a:lumOff val="85000"/>
+          </a:schemeClr>
+        </a:solidFill>
+        <a:round/>
+      </a:ln>
+    </cs:spPr>
+    <cs:defRPr sz="1000" kern="1200"/>
+  </cs:chartArea>
+  <cs:dataLabel>
+    <cs:lnRef idx="0"/>
+    <cs:fillRef idx="0"/>
+    <cs:effectRef idx="0"/>
+    <cs:fontRef idx="minor">
+      <a:schemeClr val="tx1">
+        <a:lumMod val="75000"/>
+        <a:lumOff val="25000"/>
+      </a:schemeClr>
+    </cs:fontRef>
+    <cs:defRPr sz="900" kern="1200"/>
+  </cs:dataLabel>
+  <cs:dataLabelCallout>
+    <cs:lnRef idx="0"/>
+    <cs:fillRef idx="0"/>
+    <cs:effectRef idx="0"/>
+    <cs:fontRef idx="minor">
+      <a:schemeClr val="dk1">
+        <a:lumMod val="65000"/>
+        <a:lumOff val="35000"/>
+      </a:schemeClr>
+    </cs:fontRef>
+    <cs:spPr>
+      <a:solidFill>
+        <a:schemeClr val="lt1"/>
+      </a:solidFill>
+      <a:ln>
+        <a:solidFill>
+          <a:schemeClr val="dk1">
+            <a:lumMod val="25000"/>
+            <a:lumOff val="75000"/>
+          </a:schemeClr>
+        </a:solidFill>
+      </a:ln>
+    </cs:spPr>
+    <cs:defRPr sz="900" kern="1200"/>
+    <cs:bodyPr rot="0" spcFirstLastPara="1" vertOverflow="clip" horzOverflow="clip" vert="horz" wrap="square" lIns="36576" tIns="18288" rIns="36576" bIns="18288" anchor="ctr" anchorCtr="1">
+      <a:spAutoFit/>
+    </cs:bodyPr>
+  </cs:dataLabelCallout>
+  <cs:dataPoint>
+    <cs:lnRef idx="0"/>
+    <cs:fillRef idx="1">
+      <cs:styleClr val="auto"/>
+    </cs:fillRef>
+    <cs:effectRef idx="0"/>
+    <cs:fontRef idx="minor">
+      <a:schemeClr val="tx1"/>
+    </cs:fontRef>
+    <cs:spPr>
+      <a:solidFill>
+        <a:schemeClr val="phClr"/>
+      </a:solidFill>
+    </cs:spPr>
+  </cs:dataPoint>
+  <cs:dataPoint3D>
+    <cs:lnRef idx="0"/>
+    <cs:fillRef idx="1">
+      <cs:styleClr val="auto"/>
+    </cs:fillRef>
+    <cs:effectRef idx="0"/>
+    <cs:fontRef idx="minor">
+      <a:schemeClr val="tx1"/>
+    </cs:fontRef>
+    <cs:spPr>
+      <a:solidFill>
+        <a:schemeClr val="phClr"/>
+      </a:solidFill>
+    </cs:spPr>
+  </cs:dataPoint3D>
+  <cs:dataPointLine>
+    <cs:lnRef idx="0">
+      <cs:styleClr val="auto"/>
+    </cs:lnRef>
+    <cs:fillRef idx="1"/>
+    <cs:effectRef idx="0"/>
+    <cs:fontRef idx="minor">
+      <a:schemeClr val="tx1"/>
+    </cs:fontRef>
+    <cs:spPr>
+      <a:ln w="28575" cap="rnd">
+        <a:solidFill>
+          <a:schemeClr val="phClr"/>
+        </a:solidFill>
+        <a:round/>
+      </a:ln>
+    </cs:spPr>
+  </cs:dataPointLine>
+  <cs:dataPointMarker>
+    <cs:lnRef idx="0">
+      <cs:styleClr val="auto"/>
+    </cs:lnRef>
+    <cs:fillRef idx="1">
+      <cs:styleClr val="auto"/>
+    </cs:fillRef>
+    <cs:effectRef idx="0"/>
+    <cs:fontRef idx="minor">
+      <a:schemeClr val="tx1"/>
+    </cs:fontRef>
+    <cs:spPr>
+      <a:solidFill>
+        <a:schemeClr val="phClr"/>
+      </a:solidFill>
+      <a:ln w="9525">
+        <a:solidFill>
+          <a:schemeClr val="phClr"/>
+        </a:solidFill>
+      </a:ln>
+    </cs:spPr>
+  </cs:dataPointMarker>
+  <cs:dataPointMarkerLayout symbol="circle" size="5"/>
+  <cs:dataPointWireframe>
+    <cs:lnRef idx="0">
+      <cs:styleClr val="auto"/>
+    </cs:lnRef>
+    <cs:fillRef idx="1"/>
+    <cs:effectRef idx="0"/>
+    <cs:fontRef idx="minor">
+      <a:schemeClr val="tx1"/>
+    </cs:fontRef>
+    <cs:spPr>
+      <a:ln w="9525" cap="rnd">
+        <a:solidFill>
+          <a:schemeClr val="phClr"/>
+        </a:solidFill>
+        <a:round/>
+      </a:ln>
+    </cs:spPr>
+  </cs:dataPointWireframe>
+  <cs:dataTable>
+    <cs:lnRef idx="0"/>
+    <cs:fillRef idx="0"/>
+    <cs:effectRef idx="0"/>
+    <cs:fontRef idx="minor">
+      <a:schemeClr val="tx1">
+        <a:lumMod val="65000"/>
+        <a:lumOff val="35000"/>
+      </a:schemeClr>
+    </cs:fontRef>
+    <cs:spPr>
+      <a:noFill/>
+      <a:ln w="9525" cap="flat" cmpd="sng" algn="ctr">
+        <a:solidFill>
+          <a:schemeClr val="tx1">
+            <a:lumMod val="15000"/>
+            <a:lumOff val="85000"/>
+          </a:schemeClr>
+        </a:solidFill>
+        <a:round/>
+      </a:ln>
+    </cs:spPr>
+    <cs:defRPr sz="900" kern="1200"/>
+  </cs:dataTable>
+  <cs:downBar>
+    <cs:lnRef idx="0"/>
+    <cs:fillRef idx="0"/>
+    <cs:effectRef idx="0"/>
+    <cs:fontRef idx="minor">
+      <a:schemeClr val="dk1"/>
+    </cs:fontRef>
+    <cs:spPr>
+      <a:solidFill>
+        <a:schemeClr val="dk1">
+          <a:lumMod val="65000"/>
+          <a:lumOff val="35000"/>
+        </a:schemeClr>
+      </a:solidFill>
+      <a:ln w="9525">
+        <a:solidFill>
+          <a:schemeClr val="tx1">
+            <a:lumMod val="65000"/>
+            <a:lumOff val="35000"/>
+          </a:schemeClr>
+        </a:solidFill>
+      </a:ln>
+    </cs:spPr>
+  </cs:downBar>
+  <cs:dropLine>
+    <cs:lnRef idx="0"/>
+    <cs:fillRef idx="0"/>
+    <cs:effectRef idx="0"/>
+    <cs:fontRef idx="minor">
+      <a:schemeClr val="tx1"/>
+    </cs:fontRef>
+    <cs:spPr>
+      <a:ln w="9525" cap="flat" cmpd="sng" algn="ctr">
+        <a:solidFill>
+          <a:schemeClr val="tx1">
+            <a:lumMod val="35000"/>
+            <a:lumOff val="65000"/>
+          </a:schemeClr>
+        </a:solidFill>
+        <a:round/>
+      </a:ln>
+    </cs:spPr>
+  </cs:dropLine>
+  <cs:errorBar>
+    <cs:lnRef idx="0"/>
+    <cs:fillRef idx="0"/>
+    <cs:effectRef idx="0"/>
+    <cs:fontRef idx="minor">
+      <a:schemeClr val="tx1"/>
+    </cs:fontRef>
+    <cs:spPr>
+      <a:ln w="9525" cap="flat" cmpd="sng" algn="ctr">
+        <a:solidFill>
+          <a:schemeClr val="tx1">
+            <a:lumMod val="65000"/>
+            <a:lumOff val="35000"/>
+          </a:schemeClr>
+        </a:solidFill>
+        <a:round/>
+      </a:ln>
+    </cs:spPr>
+  </cs:errorBar>
+  <cs:floor>
+    <cs:lnRef idx="0"/>
+    <cs:fillRef idx="0"/>
+    <cs:effectRef idx="0"/>
+    <cs:fontRef idx="minor">
+      <a:schemeClr val="tx1"/>
+    </cs:fontRef>
+    <cs:spPr>
+      <a:noFill/>
+      <a:ln>
+        <a:noFill/>
+      </a:ln>
+    </cs:spPr>
+  </cs:floor>
+  <cs:gridlineMajor>
+    <cs:lnRef idx="0"/>
+    <cs:fillRef idx="0"/>
+    <cs:effectRef idx="0"/>
+    <cs:fontRef idx="minor">
+      <a:schemeClr val="tx1"/>
+    </cs:fontRef>
+    <cs:spPr>
+      <a:ln w="9525" cap="flat" cmpd="sng" algn="ctr">
+        <a:solidFill>
+          <a:schemeClr val="tx1">
+            <a:lumMod val="15000"/>
+            <a:lumOff val="85000"/>
+          </a:schemeClr>
+        </a:solidFill>
+        <a:round/>
+      </a:ln>
+    </cs:spPr>
+  </cs:gridlineMajor>
+  <cs:gridlineMinor>
+    <cs:lnRef idx="0"/>
+    <cs:fillRef idx="0"/>
+    <cs:effectRef idx="0"/>
+    <cs:fontRef idx="minor">
+      <a:schemeClr val="tx1"/>
+    </cs:fontRef>
+    <cs:spPr>
+      <a:ln w="9525" cap="flat" cmpd="sng" algn="ctr">
+        <a:solidFill>
+          <a:schemeClr val="tx1">
+            <a:lumMod val="5000"/>
+            <a:lumOff val="95000"/>
+          </a:schemeClr>
+        </a:solidFill>
+        <a:round/>
+      </a:ln>
+    </cs:spPr>
+  </cs:gridlineMinor>
+  <cs:hiLoLine>
+    <cs:lnRef idx="0"/>
+    <cs:fillRef idx="0"/>
+    <cs:effectRef idx="0"/>
+    <cs:fontRef idx="minor">
+      <a:schemeClr val="tx1"/>
+    </cs:fontRef>
+    <cs:spPr>
+      <a:ln w="9525" cap="flat" cmpd="sng" algn="ctr">
+        <a:solidFill>
+          <a:schemeClr val="tx1">
+            <a:lumMod val="75000"/>
+            <a:lumOff val="25000"/>
+          </a:schemeClr>
+        </a:solidFill>
+        <a:round/>
+      </a:ln>
+    </cs:spPr>
+  </cs:hiLoLine>
+  <cs:leaderLine>
+    <cs:lnRef idx="0"/>
+    <cs:fillRef idx="0"/>
+    <cs:effectRef idx="0"/>
+    <cs:fontRef idx="minor">
+      <a:schemeClr val="tx1"/>
+    </cs:fontRef>
+    <cs:spPr>
+      <a:ln w="9525" cap="flat" cmpd="sng" algn="ctr">
+        <a:solidFill>
+          <a:schemeClr val="tx1">
+            <a:lumMod val="35000"/>
+            <a:lumOff val="65000"/>
+          </a:schemeClr>
+        </a:solidFill>
+        <a:round/>
+      </a:ln>
+    </cs:spPr>
+  </cs:leaderLine>
+  <cs:legend>
+    <cs:lnRef idx="0"/>
+    <cs:fillRef idx="0"/>
+    <cs:effectRef idx="0"/>
+    <cs:fontRef idx="minor">
+      <a:schemeClr val="tx1">
+        <a:lumMod val="65000"/>
+        <a:lumOff val="35000"/>
+      </a:schemeClr>
+    </cs:fontRef>
+    <cs:defRPr sz="900" kern="1200"/>
+  </cs:legend>
+  <cs:plotArea mods="allowNoFillOverride allowNoLineOverride">
+    <cs:lnRef idx="0"/>
+    <cs:fillRef idx="0"/>
+    <cs:effectRef idx="0"/>
+    <cs:fontRef idx="minor">
+      <a:schemeClr val="tx1"/>
+    </cs:fontRef>
+  </cs:plotArea>
+  <cs:plotArea3D mods="allowNoFillOverride allowNoLineOverride">
+    <cs:lnRef idx="0"/>
+    <cs:fillRef idx="0"/>
+    <cs:effectRef idx="0"/>
+    <cs:fontRef idx="minor">
+      <a:schemeClr val="tx1"/>
+    </cs:fontRef>
+  </cs:plotArea3D>
+  <cs:seriesAxis>
+    <cs:lnRef idx="0"/>
+    <cs:fillRef idx="0"/>
+    <cs:effectRef idx="0"/>
+    <cs:fontRef idx="minor">
+      <a:schemeClr val="tx1">
+        <a:lumMod val="65000"/>
+        <a:lumOff val="35000"/>
+      </a:schemeClr>
+    </cs:fontRef>
+    <cs:defRPr sz="900" kern="1200"/>
+  </cs:seriesAxis>
+  <cs:seriesLine>
+    <cs:lnRef idx="0"/>
+    <cs:fillRef idx="0"/>
+    <cs:effectRef idx="0"/>
+    <cs:fontRef idx="minor">
+      <a:schemeClr val="tx1"/>
+    </cs:fontRef>
+    <cs:spPr>
+      <a:ln w="9525" cap="flat" cmpd="sng" algn="ctr">
+        <a:solidFill>
+          <a:schemeClr val="tx1">
+            <a:lumMod val="35000"/>
+            <a:lumOff val="65000"/>
+          </a:schemeClr>
+        </a:solidFill>
+        <a:round/>
+      </a:ln>
+    </cs:spPr>
+  </cs:seriesLine>
+  <cs:title>
+    <cs:lnRef idx="0"/>
+    <cs:fillRef idx="0"/>
+    <cs:effectRef idx="0"/>
+    <cs:fontRef idx="minor">
+      <a:schemeClr val="tx1">
+        <a:lumMod val="65000"/>
+        <a:lumOff val="35000"/>
+      </a:schemeClr>
+    </cs:fontRef>
+    <cs:defRPr sz="1400" b="0" kern="1200" spc="0" baseline="0"/>
+  </cs:title>
+  <cs:trendline>
+    <cs:lnRef idx="0">
+      <cs:styleClr val="auto"/>
+    </cs:lnRef>
+    <cs:fillRef idx="0"/>
+    <cs:effectRef idx="0"/>
+    <cs:fontRef idx="minor">
+      <a:schemeClr val="tx1"/>
+    </cs:fontRef>
+    <cs:spPr>
+      <a:ln w="19050" cap="rnd">
+        <a:solidFill>
+          <a:schemeClr val="phClr"/>
+        </a:solidFill>
+        <a:prstDash val="sysDot"/>
+      </a:ln>
+    </cs:spPr>
+  </cs:trendline>
+  <cs:trendlineLabel>
+    <cs:lnRef idx="0"/>
+    <cs:fillRef idx="0"/>
+    <cs:effectRef idx="0"/>
+    <cs:fontRef idx="minor">
+      <a:schemeClr val="tx1">
+        <a:lumMod val="65000"/>
+        <a:lumOff val="35000"/>
+      </a:schemeClr>
+    </cs:fontRef>
+    <cs:defRPr sz="900" kern="1200"/>
+  </cs:trendlineLabel>
+  <cs:upBar>
+    <cs:lnRef idx="0"/>
+    <cs:fillRef idx="0"/>
+    <cs:effectRef idx="0"/>
+    <cs:fontRef idx="minor">
+      <a:schemeClr val="dk1"/>
+    </cs:fontRef>
+    <cs:spPr>
+      <a:solidFill>
+        <a:schemeClr val="lt1"/>
+      </a:solidFill>
+      <a:ln w="9525">
+        <a:solidFill>
+          <a:schemeClr val="tx1">
+            <a:lumMod val="15000"/>
+            <a:lumOff val="85000"/>
+          </a:schemeClr>
+        </a:solidFill>
+      </a:ln>
+    </cs:spPr>
+  </cs:upBar>
+  <cs:valueAxis>
+    <cs:lnRef idx="0"/>
+    <cs:fillRef idx="0"/>
+    <cs:effectRef idx="0"/>
+    <cs:fontRef idx="minor">
+      <a:schemeClr val="tx1">
+        <a:lumMod val="65000"/>
+        <a:lumOff val="35000"/>
+      </a:schemeClr>
+    </cs:fontRef>
+    <cs:defRPr sz="900" kern="1200"/>
+  </cs:valueAxis>
+  <cs:wall>
+    <cs:lnRef idx="0"/>
+    <cs:fillRef idx="0"/>
+    <cs:effectRef idx="0"/>
+    <cs:fontRef idx="minor">
+      <a:schemeClr val="tx1"/>
+    </cs:fontRef>
+    <cs:spPr>
+      <a:noFill/>
+      <a:ln>
+        <a:noFill/>
+      </a:ln>
+    </cs:spPr>
+  </cs:wall>
+</cs:chartStyle>
 </file>
 
 <file path=ppt/notesMasters/notesMaster1.xml><?xml version="1.0" encoding="utf-8"?>
@@ -1422,6 +7023,606 @@
     <p:extLst>
       <p:ext uri="{BB962C8B-B14F-4D97-AF65-F5344CB8AC3E}">
         <p14:creationId xmlns:p14="http://schemas.microsoft.com/office/powerpoint/2010/main" val="1024086991"/>
+      </p:ext>
+    </p:extLst>
+  </p:cSld>
+  <p:clrMapOvr>
+    <a:masterClrMapping/>
+  </p:clrMapOvr>
+</p:notes>
+</file>
+
+<file path=ppt/notesSlides/notesSlide20.xml><?xml version="1.0" encoding="utf-8"?>
+<p:notes xmlns:a="http://schemas.openxmlformats.org/drawingml/2006/main" xmlns:r="http://schemas.openxmlformats.org/officeDocument/2006/relationships" xmlns:p="http://schemas.openxmlformats.org/presentationml/2006/main">
+  <p:cSld>
+    <p:spTree>
+      <p:nvGrpSpPr>
+        <p:cNvPr id="1" name="">
+          <a:extLst>
+            <a:ext uri="{FF2B5EF4-FFF2-40B4-BE49-F238E27FC236}">
+              <a16:creationId xmlns:a16="http://schemas.microsoft.com/office/drawing/2014/main" id="{D1A1F5A7-A541-300A-1F24-A26340151008}"/>
+            </a:ext>
+          </a:extLst>
+        </p:cNvPr>
+        <p:cNvGrpSpPr/>
+        <p:nvPr/>
+      </p:nvGrpSpPr>
+      <p:grpSpPr>
+        <a:xfrm>
+          <a:off x="0" y="0"/>
+          <a:ext cx="0" cy="0"/>
+          <a:chOff x="0" y="0"/>
+          <a:chExt cx="0" cy="0"/>
+        </a:xfrm>
+      </p:grpSpPr>
+      <p:sp>
+        <p:nvSpPr>
+          <p:cNvPr id="2" name="Slide Image Placeholder 1">
+            <a:extLst>
+              <a:ext uri="{FF2B5EF4-FFF2-40B4-BE49-F238E27FC236}">
+                <a16:creationId xmlns:a16="http://schemas.microsoft.com/office/drawing/2014/main" id="{27633D75-3FDA-4445-8C5B-77F23074F321}"/>
+              </a:ext>
+            </a:extLst>
+          </p:cNvPr>
+          <p:cNvSpPr>
+            <a:spLocks noGrp="1" noRot="1" noChangeAspect="1"/>
+          </p:cNvSpPr>
+          <p:nvPr>
+            <p:ph type="sldImg"/>
+          </p:nvPr>
+        </p:nvSpPr>
+        <p:spPr/>
+      </p:sp>
+      <p:sp>
+        <p:nvSpPr>
+          <p:cNvPr id="3" name="Notes Placeholder 2">
+            <a:extLst>
+              <a:ext uri="{FF2B5EF4-FFF2-40B4-BE49-F238E27FC236}">
+                <a16:creationId xmlns:a16="http://schemas.microsoft.com/office/drawing/2014/main" id="{7558953A-C582-5D8C-353E-E2F02981829E}"/>
+              </a:ext>
+            </a:extLst>
+          </p:cNvPr>
+          <p:cNvSpPr>
+            <a:spLocks noGrp="1"/>
+          </p:cNvSpPr>
+          <p:nvPr>
+            <p:ph type="body" idx="1"/>
+          </p:nvPr>
+        </p:nvSpPr>
+        <p:spPr/>
+        <p:txBody>
+          <a:bodyPr/>
+          <a:lstStyle/>
+          <a:p>
+            <a:endParaRPr lang="en-US" dirty="0"/>
+          </a:p>
+        </p:txBody>
+      </p:sp>
+      <p:sp>
+        <p:nvSpPr>
+          <p:cNvPr id="4" name="Slide Number Placeholder 3">
+            <a:extLst>
+              <a:ext uri="{FF2B5EF4-FFF2-40B4-BE49-F238E27FC236}">
+                <a16:creationId xmlns:a16="http://schemas.microsoft.com/office/drawing/2014/main" id="{BEBE1D88-728E-A6B2-484C-B3F8EA5732E1}"/>
+              </a:ext>
+            </a:extLst>
+          </p:cNvPr>
+          <p:cNvSpPr>
+            <a:spLocks noGrp="1"/>
+          </p:cNvSpPr>
+          <p:nvPr>
+            <p:ph type="sldNum" sz="quarter" idx="10"/>
+          </p:nvPr>
+        </p:nvSpPr>
+        <p:spPr/>
+        <p:txBody>
+          <a:bodyPr/>
+          <a:lstStyle/>
+          <a:p>
+            <a:pPr marL="0" marR="0" lvl="0" indent="0" algn="l" defTabSz="914400" rtl="0" eaLnBrk="1" fontAlgn="auto" latinLnBrk="0" hangingPunct="1">
+              <a:lnSpc>
+                <a:spcPct val="100000"/>
+              </a:lnSpc>
+              <a:spcBef>
+                <a:spcPts val="0"/>
+              </a:spcBef>
+              <a:spcAft>
+                <a:spcPts val="0"/>
+              </a:spcAft>
+              <a:buClrTx/>
+              <a:buSzTx/>
+              <a:buFontTx/>
+              <a:buNone/>
+              <a:tabLst/>
+              <a:defRPr/>
+            </a:pPr>
+            <a:fld id="{F7021451-1387-4CA6-816F-3879F97B5CBC}" type="slidenum">
+              <a:rPr kumimoji="0" lang="en-US" sz="1800" b="0" i="0" u="none" strike="noStrike" kern="1200" cap="none" spc="0" normalizeH="0" baseline="0" noProof="0">
+                <a:ln>
+                  <a:noFill/>
+                </a:ln>
+                <a:solidFill>
+                  <a:prstClr val="black"/>
+                </a:solidFill>
+                <a:effectLst/>
+                <a:uLnTx/>
+                <a:uFillTx/>
+                <a:latin typeface="Aptos" panose="02110004020202020204"/>
+                <a:ea typeface="+mn-ea"/>
+                <a:cs typeface="+mn-cs"/>
+              </a:rPr>
+              <a:pPr marL="0" marR="0" lvl="0" indent="0" algn="l" defTabSz="914400" rtl="0" eaLnBrk="1" fontAlgn="auto" latinLnBrk="0" hangingPunct="1">
+                <a:lnSpc>
+                  <a:spcPct val="100000"/>
+                </a:lnSpc>
+                <a:spcBef>
+                  <a:spcPts val="0"/>
+                </a:spcBef>
+                <a:spcAft>
+                  <a:spcPts val="0"/>
+                </a:spcAft>
+                <a:buClrTx/>
+                <a:buSzTx/>
+                <a:buFontTx/>
+                <a:buNone/>
+                <a:tabLst/>
+                <a:defRPr/>
+              </a:pPr>
+              <a:t>20</a:t>
+            </a:fld>
+            <a:endParaRPr kumimoji="0" lang="en-US" sz="1800" b="0" i="0" u="none" strike="noStrike" kern="1200" cap="none" spc="0" normalizeH="0" baseline="0" noProof="0">
+              <a:ln>
+                <a:noFill/>
+              </a:ln>
+              <a:solidFill>
+                <a:prstClr val="black"/>
+              </a:solidFill>
+              <a:effectLst/>
+              <a:uLnTx/>
+              <a:uFillTx/>
+              <a:latin typeface="Aptos" panose="02110004020202020204"/>
+              <a:ea typeface="+mn-ea"/>
+              <a:cs typeface="+mn-cs"/>
+            </a:endParaRPr>
+          </a:p>
+        </p:txBody>
+      </p:sp>
+    </p:spTree>
+    <p:extLst>
+      <p:ext uri="{BB962C8B-B14F-4D97-AF65-F5344CB8AC3E}">
+        <p14:creationId xmlns:p14="http://schemas.microsoft.com/office/powerpoint/2010/main" val="3586492357"/>
+      </p:ext>
+    </p:extLst>
+  </p:cSld>
+  <p:clrMapOvr>
+    <a:masterClrMapping/>
+  </p:clrMapOvr>
+</p:notes>
+</file>
+
+<file path=ppt/notesSlides/notesSlide21.xml><?xml version="1.0" encoding="utf-8"?>
+<p:notes xmlns:a="http://schemas.openxmlformats.org/drawingml/2006/main" xmlns:r="http://schemas.openxmlformats.org/officeDocument/2006/relationships" xmlns:p="http://schemas.openxmlformats.org/presentationml/2006/main">
+  <p:cSld>
+    <p:spTree>
+      <p:nvGrpSpPr>
+        <p:cNvPr id="1" name="">
+          <a:extLst>
+            <a:ext uri="{FF2B5EF4-FFF2-40B4-BE49-F238E27FC236}">
+              <a16:creationId xmlns:a16="http://schemas.microsoft.com/office/drawing/2014/main" id="{83296808-B2AF-E4AE-3550-8F695D75A722}"/>
+            </a:ext>
+          </a:extLst>
+        </p:cNvPr>
+        <p:cNvGrpSpPr/>
+        <p:nvPr/>
+      </p:nvGrpSpPr>
+      <p:grpSpPr>
+        <a:xfrm>
+          <a:off x="0" y="0"/>
+          <a:ext cx="0" cy="0"/>
+          <a:chOff x="0" y="0"/>
+          <a:chExt cx="0" cy="0"/>
+        </a:xfrm>
+      </p:grpSpPr>
+      <p:sp>
+        <p:nvSpPr>
+          <p:cNvPr id="2" name="Slide Image Placeholder 1">
+            <a:extLst>
+              <a:ext uri="{FF2B5EF4-FFF2-40B4-BE49-F238E27FC236}">
+                <a16:creationId xmlns:a16="http://schemas.microsoft.com/office/drawing/2014/main" id="{E0F9D691-9EF1-5EC9-5DCA-A18F43077FD5}"/>
+              </a:ext>
+            </a:extLst>
+          </p:cNvPr>
+          <p:cNvSpPr>
+            <a:spLocks noGrp="1" noRot="1" noChangeAspect="1"/>
+          </p:cNvSpPr>
+          <p:nvPr>
+            <p:ph type="sldImg"/>
+          </p:nvPr>
+        </p:nvSpPr>
+        <p:spPr/>
+      </p:sp>
+      <p:sp>
+        <p:nvSpPr>
+          <p:cNvPr id="3" name="Notes Placeholder 2">
+            <a:extLst>
+              <a:ext uri="{FF2B5EF4-FFF2-40B4-BE49-F238E27FC236}">
+                <a16:creationId xmlns:a16="http://schemas.microsoft.com/office/drawing/2014/main" id="{BDDFE3AB-E1B3-9739-EB1F-4CEAACB5EE39}"/>
+              </a:ext>
+            </a:extLst>
+          </p:cNvPr>
+          <p:cNvSpPr>
+            <a:spLocks noGrp="1"/>
+          </p:cNvSpPr>
+          <p:nvPr>
+            <p:ph type="body" idx="1"/>
+          </p:nvPr>
+        </p:nvSpPr>
+        <p:spPr/>
+        <p:txBody>
+          <a:bodyPr/>
+          <a:lstStyle/>
+          <a:p>
+            <a:endParaRPr lang="en-US" dirty="0"/>
+          </a:p>
+        </p:txBody>
+      </p:sp>
+      <p:sp>
+        <p:nvSpPr>
+          <p:cNvPr id="4" name="Slide Number Placeholder 3">
+            <a:extLst>
+              <a:ext uri="{FF2B5EF4-FFF2-40B4-BE49-F238E27FC236}">
+                <a16:creationId xmlns:a16="http://schemas.microsoft.com/office/drawing/2014/main" id="{759FC930-0456-7D5A-5667-F62D0C24B236}"/>
+              </a:ext>
+            </a:extLst>
+          </p:cNvPr>
+          <p:cNvSpPr>
+            <a:spLocks noGrp="1"/>
+          </p:cNvSpPr>
+          <p:nvPr>
+            <p:ph type="sldNum" sz="quarter" idx="10"/>
+          </p:nvPr>
+        </p:nvSpPr>
+        <p:spPr/>
+        <p:txBody>
+          <a:bodyPr/>
+          <a:lstStyle/>
+          <a:p>
+            <a:fld id="{F7021451-1387-4CA6-816F-3879F97B5CBC}" type="slidenum">
+              <a:rPr lang="en-US"/>
+              <a:t>21</a:t>
+            </a:fld>
+            <a:endParaRPr lang="en-US"/>
+          </a:p>
+        </p:txBody>
+      </p:sp>
+    </p:spTree>
+    <p:extLst>
+      <p:ext uri="{BB962C8B-B14F-4D97-AF65-F5344CB8AC3E}">
+        <p14:creationId xmlns:p14="http://schemas.microsoft.com/office/powerpoint/2010/main" val="2386446909"/>
+      </p:ext>
+    </p:extLst>
+  </p:cSld>
+  <p:clrMapOvr>
+    <a:masterClrMapping/>
+  </p:clrMapOvr>
+</p:notes>
+</file>
+
+<file path=ppt/notesSlides/notesSlide22.xml><?xml version="1.0" encoding="utf-8"?>
+<p:notes xmlns:a="http://schemas.openxmlformats.org/drawingml/2006/main" xmlns:r="http://schemas.openxmlformats.org/officeDocument/2006/relationships" xmlns:p="http://schemas.openxmlformats.org/presentationml/2006/main">
+  <p:cSld>
+    <p:spTree>
+      <p:nvGrpSpPr>
+        <p:cNvPr id="1" name="">
+          <a:extLst>
+            <a:ext uri="{FF2B5EF4-FFF2-40B4-BE49-F238E27FC236}">
+              <a16:creationId xmlns:a16="http://schemas.microsoft.com/office/drawing/2014/main" id="{CBF65E28-9120-0541-E408-8A8D04866E4A}"/>
+            </a:ext>
+          </a:extLst>
+        </p:cNvPr>
+        <p:cNvGrpSpPr/>
+        <p:nvPr/>
+      </p:nvGrpSpPr>
+      <p:grpSpPr>
+        <a:xfrm>
+          <a:off x="0" y="0"/>
+          <a:ext cx="0" cy="0"/>
+          <a:chOff x="0" y="0"/>
+          <a:chExt cx="0" cy="0"/>
+        </a:xfrm>
+      </p:grpSpPr>
+      <p:sp>
+        <p:nvSpPr>
+          <p:cNvPr id="2" name="Slide Image Placeholder 1">
+            <a:extLst>
+              <a:ext uri="{FF2B5EF4-FFF2-40B4-BE49-F238E27FC236}">
+                <a16:creationId xmlns:a16="http://schemas.microsoft.com/office/drawing/2014/main" id="{E78504F6-CAE7-D386-EAAB-384FD90F8907}"/>
+              </a:ext>
+            </a:extLst>
+          </p:cNvPr>
+          <p:cNvSpPr>
+            <a:spLocks noGrp="1" noRot="1" noChangeAspect="1"/>
+          </p:cNvSpPr>
+          <p:nvPr>
+            <p:ph type="sldImg"/>
+          </p:nvPr>
+        </p:nvSpPr>
+        <p:spPr/>
+      </p:sp>
+      <p:sp>
+        <p:nvSpPr>
+          <p:cNvPr id="3" name="Notes Placeholder 2">
+            <a:extLst>
+              <a:ext uri="{FF2B5EF4-FFF2-40B4-BE49-F238E27FC236}">
+                <a16:creationId xmlns:a16="http://schemas.microsoft.com/office/drawing/2014/main" id="{E91A4C6F-0729-8B95-E7CA-D90EE5412C68}"/>
+              </a:ext>
+            </a:extLst>
+          </p:cNvPr>
+          <p:cNvSpPr>
+            <a:spLocks noGrp="1"/>
+          </p:cNvSpPr>
+          <p:nvPr>
+            <p:ph type="body" idx="1"/>
+          </p:nvPr>
+        </p:nvSpPr>
+        <p:spPr/>
+        <p:txBody>
+          <a:bodyPr/>
+          <a:lstStyle/>
+          <a:p>
+            <a:endParaRPr lang="en-US" dirty="0"/>
+          </a:p>
+        </p:txBody>
+      </p:sp>
+      <p:sp>
+        <p:nvSpPr>
+          <p:cNvPr id="4" name="Slide Number Placeholder 3">
+            <a:extLst>
+              <a:ext uri="{FF2B5EF4-FFF2-40B4-BE49-F238E27FC236}">
+                <a16:creationId xmlns:a16="http://schemas.microsoft.com/office/drawing/2014/main" id="{415D25AB-CEE7-598C-8002-5974DBF4C81A}"/>
+              </a:ext>
+            </a:extLst>
+          </p:cNvPr>
+          <p:cNvSpPr>
+            <a:spLocks noGrp="1"/>
+          </p:cNvSpPr>
+          <p:nvPr>
+            <p:ph type="sldNum" sz="quarter" idx="10"/>
+          </p:nvPr>
+        </p:nvSpPr>
+        <p:spPr/>
+        <p:txBody>
+          <a:bodyPr/>
+          <a:lstStyle/>
+          <a:p>
+            <a:fld id="{F7021451-1387-4CA6-816F-3879F97B5CBC}" type="slidenum">
+              <a:rPr lang="en-US"/>
+              <a:t>22</a:t>
+            </a:fld>
+            <a:endParaRPr lang="en-US"/>
+          </a:p>
+        </p:txBody>
+      </p:sp>
+    </p:spTree>
+    <p:extLst>
+      <p:ext uri="{BB962C8B-B14F-4D97-AF65-F5344CB8AC3E}">
+        <p14:creationId xmlns:p14="http://schemas.microsoft.com/office/powerpoint/2010/main" val="769910835"/>
+      </p:ext>
+    </p:extLst>
+  </p:cSld>
+  <p:clrMapOvr>
+    <a:masterClrMapping/>
+  </p:clrMapOvr>
+</p:notes>
+</file>
+
+<file path=ppt/notesSlides/notesSlide23.xml><?xml version="1.0" encoding="utf-8"?>
+<p:notes xmlns:a="http://schemas.openxmlformats.org/drawingml/2006/main" xmlns:r="http://schemas.openxmlformats.org/officeDocument/2006/relationships" xmlns:p="http://schemas.openxmlformats.org/presentationml/2006/main">
+  <p:cSld>
+    <p:spTree>
+      <p:nvGrpSpPr>
+        <p:cNvPr id="1" name="">
+          <a:extLst>
+            <a:ext uri="{FF2B5EF4-FFF2-40B4-BE49-F238E27FC236}">
+              <a16:creationId xmlns:a16="http://schemas.microsoft.com/office/drawing/2014/main" id="{A420D90F-A8A8-C6EB-FAA7-9D68F72674EF}"/>
+            </a:ext>
+          </a:extLst>
+        </p:cNvPr>
+        <p:cNvGrpSpPr/>
+        <p:nvPr/>
+      </p:nvGrpSpPr>
+      <p:grpSpPr>
+        <a:xfrm>
+          <a:off x="0" y="0"/>
+          <a:ext cx="0" cy="0"/>
+          <a:chOff x="0" y="0"/>
+          <a:chExt cx="0" cy="0"/>
+        </a:xfrm>
+      </p:grpSpPr>
+      <p:sp>
+        <p:nvSpPr>
+          <p:cNvPr id="2" name="Slide Image Placeholder 1">
+            <a:extLst>
+              <a:ext uri="{FF2B5EF4-FFF2-40B4-BE49-F238E27FC236}">
+                <a16:creationId xmlns:a16="http://schemas.microsoft.com/office/drawing/2014/main" id="{450191E1-98C1-E2ED-26DC-546423C1EAA9}"/>
+              </a:ext>
+            </a:extLst>
+          </p:cNvPr>
+          <p:cNvSpPr>
+            <a:spLocks noGrp="1" noRot="1" noChangeAspect="1"/>
+          </p:cNvSpPr>
+          <p:nvPr>
+            <p:ph type="sldImg"/>
+          </p:nvPr>
+        </p:nvSpPr>
+        <p:spPr/>
+      </p:sp>
+      <p:sp>
+        <p:nvSpPr>
+          <p:cNvPr id="3" name="Notes Placeholder 2">
+            <a:extLst>
+              <a:ext uri="{FF2B5EF4-FFF2-40B4-BE49-F238E27FC236}">
+                <a16:creationId xmlns:a16="http://schemas.microsoft.com/office/drawing/2014/main" id="{0A592794-1B4B-C01E-AA1B-A20223634AA7}"/>
+              </a:ext>
+            </a:extLst>
+          </p:cNvPr>
+          <p:cNvSpPr>
+            <a:spLocks noGrp="1"/>
+          </p:cNvSpPr>
+          <p:nvPr>
+            <p:ph type="body" idx="1"/>
+          </p:nvPr>
+        </p:nvSpPr>
+        <p:spPr/>
+        <p:txBody>
+          <a:bodyPr/>
+          <a:lstStyle/>
+          <a:p>
+            <a:endParaRPr lang="en-US" dirty="0"/>
+          </a:p>
+        </p:txBody>
+      </p:sp>
+      <p:sp>
+        <p:nvSpPr>
+          <p:cNvPr id="4" name="Slide Number Placeholder 3">
+            <a:extLst>
+              <a:ext uri="{FF2B5EF4-FFF2-40B4-BE49-F238E27FC236}">
+                <a16:creationId xmlns:a16="http://schemas.microsoft.com/office/drawing/2014/main" id="{E905B037-D931-003C-6854-DC530A7280A7}"/>
+              </a:ext>
+            </a:extLst>
+          </p:cNvPr>
+          <p:cNvSpPr>
+            <a:spLocks noGrp="1"/>
+          </p:cNvSpPr>
+          <p:nvPr>
+            <p:ph type="sldNum" sz="quarter" idx="10"/>
+          </p:nvPr>
+        </p:nvSpPr>
+        <p:spPr/>
+        <p:txBody>
+          <a:bodyPr/>
+          <a:lstStyle/>
+          <a:p>
+            <a:fld id="{F7021451-1387-4CA6-816F-3879F97B5CBC}" type="slidenum">
+              <a:rPr lang="en-US"/>
+              <a:t>23</a:t>
+            </a:fld>
+            <a:endParaRPr lang="en-US"/>
+          </a:p>
+        </p:txBody>
+      </p:sp>
+    </p:spTree>
+    <p:extLst>
+      <p:ext uri="{BB962C8B-B14F-4D97-AF65-F5344CB8AC3E}">
+        <p14:creationId xmlns:p14="http://schemas.microsoft.com/office/powerpoint/2010/main" val="3524433979"/>
+      </p:ext>
+    </p:extLst>
+  </p:cSld>
+  <p:clrMapOvr>
+    <a:masterClrMapping/>
+  </p:clrMapOvr>
+</p:notes>
+</file>
+
+<file path=ppt/notesSlides/notesSlide24.xml><?xml version="1.0" encoding="utf-8"?>
+<p:notes xmlns:a="http://schemas.openxmlformats.org/drawingml/2006/main" xmlns:r="http://schemas.openxmlformats.org/officeDocument/2006/relationships" xmlns:p="http://schemas.openxmlformats.org/presentationml/2006/main">
+  <p:cSld>
+    <p:spTree>
+      <p:nvGrpSpPr>
+        <p:cNvPr id="1" name="">
+          <a:extLst>
+            <a:ext uri="{FF2B5EF4-FFF2-40B4-BE49-F238E27FC236}">
+              <a16:creationId xmlns:a16="http://schemas.microsoft.com/office/drawing/2014/main" id="{4165EC77-58BF-C13A-19A4-F7BAFE2B63C1}"/>
+            </a:ext>
+          </a:extLst>
+        </p:cNvPr>
+        <p:cNvGrpSpPr/>
+        <p:nvPr/>
+      </p:nvGrpSpPr>
+      <p:grpSpPr>
+        <a:xfrm>
+          <a:off x="0" y="0"/>
+          <a:ext cx="0" cy="0"/>
+          <a:chOff x="0" y="0"/>
+          <a:chExt cx="0" cy="0"/>
+        </a:xfrm>
+      </p:grpSpPr>
+      <p:sp>
+        <p:nvSpPr>
+          <p:cNvPr id="2" name="Slide Image Placeholder 1">
+            <a:extLst>
+              <a:ext uri="{FF2B5EF4-FFF2-40B4-BE49-F238E27FC236}">
+                <a16:creationId xmlns:a16="http://schemas.microsoft.com/office/drawing/2014/main" id="{351112A7-32B2-7703-C582-E2E1B3000AC5}"/>
+              </a:ext>
+            </a:extLst>
+          </p:cNvPr>
+          <p:cNvSpPr>
+            <a:spLocks noGrp="1" noRot="1" noChangeAspect="1"/>
+          </p:cNvSpPr>
+          <p:nvPr>
+            <p:ph type="sldImg"/>
+          </p:nvPr>
+        </p:nvSpPr>
+        <p:spPr/>
+      </p:sp>
+      <p:sp>
+        <p:nvSpPr>
+          <p:cNvPr id="3" name="Notes Placeholder 2">
+            <a:extLst>
+              <a:ext uri="{FF2B5EF4-FFF2-40B4-BE49-F238E27FC236}">
+                <a16:creationId xmlns:a16="http://schemas.microsoft.com/office/drawing/2014/main" id="{07C7289E-051A-625B-57D3-BB7F35651026}"/>
+              </a:ext>
+            </a:extLst>
+          </p:cNvPr>
+          <p:cNvSpPr>
+            <a:spLocks noGrp="1"/>
+          </p:cNvSpPr>
+          <p:nvPr>
+            <p:ph type="body" idx="1"/>
+          </p:nvPr>
+        </p:nvSpPr>
+        <p:spPr/>
+        <p:txBody>
+          <a:bodyPr/>
+          <a:lstStyle/>
+          <a:p>
+            <a:endParaRPr lang="en-US" dirty="0"/>
+          </a:p>
+        </p:txBody>
+      </p:sp>
+      <p:sp>
+        <p:nvSpPr>
+          <p:cNvPr id="4" name="Slide Number Placeholder 3">
+            <a:extLst>
+              <a:ext uri="{FF2B5EF4-FFF2-40B4-BE49-F238E27FC236}">
+                <a16:creationId xmlns:a16="http://schemas.microsoft.com/office/drawing/2014/main" id="{8B68BA92-3CAC-BEE0-FFE2-6260CC6309D1}"/>
+              </a:ext>
+            </a:extLst>
+          </p:cNvPr>
+          <p:cNvSpPr>
+            <a:spLocks noGrp="1"/>
+          </p:cNvSpPr>
+          <p:nvPr>
+            <p:ph type="sldNum" sz="quarter" idx="10"/>
+          </p:nvPr>
+        </p:nvSpPr>
+        <p:spPr/>
+        <p:txBody>
+          <a:bodyPr/>
+          <a:lstStyle/>
+          <a:p>
+            <a:fld id="{F7021451-1387-4CA6-816F-3879F97B5CBC}" type="slidenum">
+              <a:rPr lang="en-US"/>
+              <a:t>24</a:t>
+            </a:fld>
+            <a:endParaRPr lang="en-US"/>
+          </a:p>
+        </p:txBody>
+      </p:sp>
+    </p:spTree>
+    <p:extLst>
+      <p:ext uri="{BB962C8B-B14F-4D97-AF65-F5344CB8AC3E}">
+        <p14:creationId xmlns:p14="http://schemas.microsoft.com/office/powerpoint/2010/main" val="813819368"/>
       </p:ext>
     </p:extLst>
   </p:cSld>
@@ -7004,7 +13205,7 @@
           <a:bodyPr/>
           <a:lstStyle/>
           <a:p>
-            <a:endParaRPr lang="en-US"/>
+            <a:endParaRPr lang="en-US" dirty="0"/>
           </a:p>
         </p:txBody>
       </p:sp>
@@ -7180,7 +13381,2115 @@
           </a:p>
         </p:txBody>
       </p:sp>
+      <p:sp>
+        <p:nvSpPr>
+          <p:cNvPr id="16" name="Text 7">
+            <a:extLst>
+              <a:ext uri="{FF2B5EF4-FFF2-40B4-BE49-F238E27FC236}">
+                <a16:creationId xmlns:a16="http://schemas.microsoft.com/office/drawing/2014/main" id="{87550E9F-D30B-F08A-054A-E036FBD0C477}"/>
+              </a:ext>
+            </a:extLst>
+          </p:cNvPr>
+          <p:cNvSpPr/>
+          <p:nvPr/>
+        </p:nvSpPr>
+        <p:spPr>
+          <a:xfrm>
+            <a:off x="5047488" y="1828800"/>
+            <a:ext cx="3657600" cy="2651760"/>
+          </a:xfrm>
+          <a:prstGeom prst="rect">
+            <a:avLst/>
+          </a:prstGeom>
+          <a:noFill/>
+          <a:ln/>
+        </p:spPr>
+        <p:txBody>
+          <a:bodyPr wrap="square" lIns="0" tIns="0" rIns="0" bIns="0" rtlCol="0" anchor="ctr"/>
+          <a:lstStyle/>
+          <a:p>
+            <a:pPr marL="342900" indent="-342900">
+              <a:spcAft>
+                <a:spcPts val="400"/>
+              </a:spcAft>
+              <a:buSzPct val="100000"/>
+              <a:buChar char="•"/>
+            </a:pPr>
+            <a:r>
+              <a:rPr lang="en-US" sz="1250" dirty="0">
+                <a:solidFill>
+                  <a:srgbClr val="1A1F36"/>
+                </a:solidFill>
+                <a:latin typeface="Calibri" pitchFamily="34" charset="0"/>
+                <a:ea typeface="Calibri" pitchFamily="34" charset="-122"/>
+                <a:cs typeface="Calibri" pitchFamily="34" charset="-120"/>
+              </a:rPr>
+              <a:t>Implemented Experiment_1</a:t>
+            </a:r>
+            <a:endParaRPr lang="en-US" sz="1250" dirty="0"/>
+          </a:p>
+          <a:p>
+            <a:pPr marL="342900" indent="-342900">
+              <a:spcAft>
+                <a:spcPts val="400"/>
+              </a:spcAft>
+              <a:buSzPct val="100000"/>
+              <a:buChar char="•"/>
+            </a:pPr>
+            <a:r>
+              <a:rPr lang="en-US" sz="1250" dirty="0">
+                <a:solidFill>
+                  <a:srgbClr val="1A1F36"/>
+                </a:solidFill>
+                <a:latin typeface="Calibri" pitchFamily="34" charset="0"/>
+                <a:ea typeface="Calibri" pitchFamily="34" charset="-122"/>
+                <a:cs typeface="Calibri" pitchFamily="34" charset="-120"/>
+              </a:rPr>
+              <a:t>Implemented Experiment_2</a:t>
+            </a:r>
+          </a:p>
+          <a:p>
+            <a:pPr marL="342900" indent="-342900">
+              <a:spcAft>
+                <a:spcPts val="400"/>
+              </a:spcAft>
+              <a:buSzPct val="100000"/>
+              <a:buChar char="•"/>
+            </a:pPr>
+            <a:r>
+              <a:rPr lang="en-US" sz="1250" dirty="0">
+                <a:solidFill>
+                  <a:srgbClr val="1A1F36"/>
+                </a:solidFill>
+                <a:latin typeface="Calibri" pitchFamily="34" charset="0"/>
+                <a:ea typeface="Calibri" pitchFamily="34" charset="-122"/>
+                <a:cs typeface="Calibri" pitchFamily="34" charset="-120"/>
+              </a:rPr>
+              <a:t>Ran both experiments and extracted results</a:t>
+            </a:r>
+            <a:endParaRPr lang="en-US" sz="1250" dirty="0"/>
+          </a:p>
+          <a:p>
+            <a:pPr marL="342900" indent="-342900">
+              <a:spcAft>
+                <a:spcPts val="400"/>
+              </a:spcAft>
+              <a:buSzPct val="100000"/>
+              <a:buChar char="•"/>
+            </a:pPr>
+            <a:r>
+              <a:rPr lang="en-US" sz="1250" dirty="0">
+                <a:solidFill>
+                  <a:srgbClr val="1A1F36"/>
+                </a:solidFill>
+                <a:latin typeface="Calibri" pitchFamily="34" charset="0"/>
+                <a:ea typeface="Calibri" pitchFamily="34" charset="-122"/>
+                <a:cs typeface="Calibri" pitchFamily="34" charset="-120"/>
+              </a:rPr>
+              <a:t>Updated sequential and parallel compute to match the new input function requirements</a:t>
+            </a:r>
+            <a:endParaRPr lang="en-US" sz="1250" dirty="0"/>
+          </a:p>
+        </p:txBody>
+      </p:sp>
     </p:spTree>
+  </p:cSld>
+  <p:clrMapOvr>
+    <a:masterClrMapping/>
+  </p:clrMapOvr>
+</p:sld>
+</file>
+
+<file path=ppt/slides/slide20.xml><?xml version="1.0" encoding="utf-8"?>
+<p:sld xmlns:a="http://schemas.openxmlformats.org/drawingml/2006/main" xmlns:r="http://schemas.openxmlformats.org/officeDocument/2006/relationships" xmlns:p="http://schemas.openxmlformats.org/presentationml/2006/main">
+  <p:cSld>
+    <p:spTree>
+      <p:nvGrpSpPr>
+        <p:cNvPr id="1" name="">
+          <a:extLst>
+            <a:ext uri="{FF2B5EF4-FFF2-40B4-BE49-F238E27FC236}">
+              <a16:creationId xmlns:a16="http://schemas.microsoft.com/office/drawing/2014/main" id="{5A0334C7-78AC-D6A1-6B86-05C3641B460A}"/>
+            </a:ext>
+          </a:extLst>
+        </p:cNvPr>
+        <p:cNvGrpSpPr/>
+        <p:nvPr/>
+      </p:nvGrpSpPr>
+      <p:grpSpPr>
+        <a:xfrm>
+          <a:off x="0" y="0"/>
+          <a:ext cx="0" cy="0"/>
+          <a:chOff x="0" y="0"/>
+          <a:chExt cx="0" cy="0"/>
+        </a:xfrm>
+      </p:grpSpPr>
+      <p:sp>
+        <p:nvSpPr>
+          <p:cNvPr id="2" name="Shape 0">
+            <a:extLst>
+              <a:ext uri="{FF2B5EF4-FFF2-40B4-BE49-F238E27FC236}">
+                <a16:creationId xmlns:a16="http://schemas.microsoft.com/office/drawing/2014/main" id="{ACB115F0-F90C-7DD0-3B03-5AADE8A8BFB5}"/>
+              </a:ext>
+            </a:extLst>
+          </p:cNvPr>
+          <p:cNvSpPr/>
+          <p:nvPr/>
+        </p:nvSpPr>
+        <p:spPr>
+          <a:xfrm>
+            <a:off x="0" y="2163536"/>
+            <a:ext cx="9144000" cy="777240"/>
+          </a:xfrm>
+          <a:prstGeom prst="rect">
+            <a:avLst/>
+          </a:prstGeom>
+          <a:solidFill>
+            <a:srgbClr val="00A896"/>
+          </a:solidFill>
+          <a:ln w="12700">
+            <a:solidFill>
+              <a:srgbClr val="00A896"/>
+            </a:solidFill>
+            <a:prstDash val="solid"/>
+          </a:ln>
+        </p:spPr>
+        <p:txBody>
+          <a:bodyPr/>
+          <a:lstStyle/>
+          <a:p>
+            <a:pPr marL="0" marR="0" lvl="0" indent="0" algn="l" defTabSz="914400" rtl="0" eaLnBrk="1" fontAlgn="auto" latinLnBrk="0" hangingPunct="1">
+              <a:lnSpc>
+                <a:spcPct val="100000"/>
+              </a:lnSpc>
+              <a:spcBef>
+                <a:spcPts val="0"/>
+              </a:spcBef>
+              <a:spcAft>
+                <a:spcPts val="0"/>
+              </a:spcAft>
+              <a:buClrTx/>
+              <a:buSzTx/>
+              <a:buFontTx/>
+              <a:buNone/>
+              <a:tabLst/>
+              <a:defRPr/>
+            </a:pPr>
+            <a:endParaRPr kumimoji="0" lang="en-US" sz="1800" b="0" i="0" u="none" strike="noStrike" kern="1200" cap="none" spc="0" normalizeH="0" baseline="0" noProof="0">
+              <a:ln>
+                <a:noFill/>
+              </a:ln>
+              <a:solidFill>
+                <a:prstClr val="black"/>
+              </a:solidFill>
+              <a:effectLst/>
+              <a:uLnTx/>
+              <a:uFillTx/>
+              <a:latin typeface="Calibri" panose="020F0502020204030204"/>
+              <a:ea typeface="+mn-ea"/>
+              <a:cs typeface="+mn-cs"/>
+            </a:endParaRPr>
+          </a:p>
+        </p:txBody>
+      </p:sp>
+      <p:sp>
+        <p:nvSpPr>
+          <p:cNvPr id="3" name="Text 1">
+            <a:extLst>
+              <a:ext uri="{FF2B5EF4-FFF2-40B4-BE49-F238E27FC236}">
+                <a16:creationId xmlns:a16="http://schemas.microsoft.com/office/drawing/2014/main" id="{33339E7A-F17F-17D8-ABDE-5D9C86FC5E04}"/>
+              </a:ext>
+            </a:extLst>
+          </p:cNvPr>
+          <p:cNvSpPr/>
+          <p:nvPr/>
+        </p:nvSpPr>
+        <p:spPr>
+          <a:xfrm>
+            <a:off x="316775" y="2197009"/>
+            <a:ext cx="8412480" cy="777240"/>
+          </a:xfrm>
+          <a:prstGeom prst="rect">
+            <a:avLst/>
+          </a:prstGeom>
+          <a:noFill/>
+          <a:ln/>
+        </p:spPr>
+        <p:txBody>
+          <a:bodyPr wrap="square" lIns="0" tIns="0" rIns="0" bIns="0" rtlCol="0" anchor="ctr"/>
+          <a:lstStyle/>
+          <a:p>
+            <a:pPr marL="0" marR="0" lvl="0" indent="0" algn="ctr" defTabSz="914400" rtl="0" eaLnBrk="1" fontAlgn="auto" latinLnBrk="0" hangingPunct="1">
+              <a:lnSpc>
+                <a:spcPct val="100000"/>
+              </a:lnSpc>
+              <a:spcBef>
+                <a:spcPts val="0"/>
+              </a:spcBef>
+              <a:spcAft>
+                <a:spcPts val="0"/>
+              </a:spcAft>
+              <a:buClrTx/>
+              <a:buSzTx/>
+              <a:buFontTx/>
+              <a:buNone/>
+              <a:tabLst/>
+              <a:defRPr/>
+            </a:pPr>
+            <a:r>
+              <a:rPr kumimoji="0" lang="en-US" sz="2400" b="1" i="0" u="none" strike="noStrike" kern="1200" cap="none" spc="0" normalizeH="0" baseline="0" noProof="0" dirty="0">
+                <a:ln>
+                  <a:noFill/>
+                </a:ln>
+                <a:solidFill>
+                  <a:srgbClr val="FFFFFF"/>
+                </a:solidFill>
+                <a:effectLst/>
+                <a:uLnTx/>
+                <a:uFillTx/>
+                <a:latin typeface="Calibri" pitchFamily="34" charset="0"/>
+                <a:ea typeface="Calibri" pitchFamily="34" charset="-122"/>
+                <a:cs typeface="Calibri" pitchFamily="34" charset="-120"/>
+              </a:rPr>
+              <a:t>Comparisons Tests</a:t>
+            </a:r>
+            <a:endParaRPr kumimoji="0" lang="en-US" sz="2400" b="0" i="0" u="none" strike="noStrike" kern="1200" cap="none" spc="0" normalizeH="0" baseline="0" noProof="0" dirty="0">
+              <a:ln>
+                <a:noFill/>
+              </a:ln>
+              <a:solidFill>
+                <a:prstClr val="black"/>
+              </a:solidFill>
+              <a:effectLst/>
+              <a:uLnTx/>
+              <a:uFillTx/>
+              <a:latin typeface="Calibri" panose="020F0502020204030204"/>
+              <a:ea typeface="+mn-ea"/>
+              <a:cs typeface="+mn-cs"/>
+            </a:endParaRPr>
+          </a:p>
+        </p:txBody>
+      </p:sp>
+    </p:spTree>
+    <p:extLst>
+      <p:ext uri="{BB962C8B-B14F-4D97-AF65-F5344CB8AC3E}">
+        <p14:creationId xmlns:p14="http://schemas.microsoft.com/office/powerpoint/2010/main" val="198905872"/>
+      </p:ext>
+    </p:extLst>
+  </p:cSld>
+  <p:clrMapOvr>
+    <a:masterClrMapping/>
+  </p:clrMapOvr>
+</p:sld>
+</file>
+
+<file path=ppt/slides/slide21.xml><?xml version="1.0" encoding="utf-8"?>
+<p:sld xmlns:a="http://schemas.openxmlformats.org/drawingml/2006/main" xmlns:r="http://schemas.openxmlformats.org/officeDocument/2006/relationships" xmlns:p="http://schemas.openxmlformats.org/presentationml/2006/main">
+  <p:cSld>
+    <p:spTree>
+      <p:nvGrpSpPr>
+        <p:cNvPr id="1" name="">
+          <a:extLst>
+            <a:ext uri="{FF2B5EF4-FFF2-40B4-BE49-F238E27FC236}">
+              <a16:creationId xmlns:a16="http://schemas.microsoft.com/office/drawing/2014/main" id="{C1859805-ED48-DB27-3F3A-EBDC7779AD96}"/>
+            </a:ext>
+          </a:extLst>
+        </p:cNvPr>
+        <p:cNvGrpSpPr/>
+        <p:nvPr/>
+      </p:nvGrpSpPr>
+      <p:grpSpPr>
+        <a:xfrm>
+          <a:off x="0" y="0"/>
+          <a:ext cx="0" cy="0"/>
+          <a:chOff x="0" y="0"/>
+          <a:chExt cx="0" cy="0"/>
+        </a:xfrm>
+      </p:grpSpPr>
+      <p:sp>
+        <p:nvSpPr>
+          <p:cNvPr id="2" name="Shape 0">
+            <a:extLst>
+              <a:ext uri="{FF2B5EF4-FFF2-40B4-BE49-F238E27FC236}">
+                <a16:creationId xmlns:a16="http://schemas.microsoft.com/office/drawing/2014/main" id="{F727233C-9DA5-E073-41A7-C7DB1A65A735}"/>
+              </a:ext>
+            </a:extLst>
+          </p:cNvPr>
+          <p:cNvSpPr/>
+          <p:nvPr/>
+        </p:nvSpPr>
+        <p:spPr>
+          <a:xfrm>
+            <a:off x="0" y="0"/>
+            <a:ext cx="9144000" cy="777240"/>
+          </a:xfrm>
+          <a:prstGeom prst="rect">
+            <a:avLst/>
+          </a:prstGeom>
+          <a:solidFill>
+            <a:srgbClr val="00A896"/>
+          </a:solidFill>
+          <a:ln w="12700">
+            <a:solidFill>
+              <a:srgbClr val="00A896"/>
+            </a:solidFill>
+            <a:prstDash val="solid"/>
+          </a:ln>
+        </p:spPr>
+        <p:txBody>
+          <a:bodyPr/>
+          <a:lstStyle/>
+          <a:p>
+            <a:endParaRPr lang="en-US"/>
+          </a:p>
+        </p:txBody>
+      </p:sp>
+      <p:sp>
+        <p:nvSpPr>
+          <p:cNvPr id="3" name="Text 1">
+            <a:extLst>
+              <a:ext uri="{FF2B5EF4-FFF2-40B4-BE49-F238E27FC236}">
+                <a16:creationId xmlns:a16="http://schemas.microsoft.com/office/drawing/2014/main" id="{2F269DBF-390E-B4A4-ADE6-C1226B14A2FF}"/>
+              </a:ext>
+            </a:extLst>
+          </p:cNvPr>
+          <p:cNvSpPr/>
+          <p:nvPr/>
+        </p:nvSpPr>
+        <p:spPr>
+          <a:xfrm>
+            <a:off x="365760" y="0"/>
+            <a:ext cx="8412480" cy="777240"/>
+          </a:xfrm>
+          <a:prstGeom prst="rect">
+            <a:avLst/>
+          </a:prstGeom>
+          <a:noFill/>
+          <a:ln/>
+        </p:spPr>
+        <p:txBody>
+          <a:bodyPr wrap="square" lIns="0" tIns="0" rIns="0" bIns="0" rtlCol="0" anchor="ctr"/>
+          <a:lstStyle/>
+          <a:p>
+            <a:pPr marL="0" indent="0">
+              <a:buNone/>
+            </a:pPr>
+            <a:r>
+              <a:rPr lang="en-US" sz="2400" b="1" dirty="0">
+                <a:solidFill>
+                  <a:srgbClr val="FFFFFF"/>
+                </a:solidFill>
+                <a:latin typeface="Calibri" pitchFamily="34" charset="0"/>
+                <a:ea typeface="Calibri" pitchFamily="34" charset="-122"/>
+                <a:cs typeface="Calibri" pitchFamily="34" charset="-120"/>
+              </a:rPr>
+              <a:t>Tests Design and Chosen Ranges</a:t>
+            </a:r>
+            <a:endParaRPr lang="en-US" sz="2400" dirty="0"/>
+          </a:p>
+        </p:txBody>
+      </p:sp>
+      <p:sp>
+        <p:nvSpPr>
+          <p:cNvPr id="4" name="TextBox 3">
+            <a:extLst>
+              <a:ext uri="{FF2B5EF4-FFF2-40B4-BE49-F238E27FC236}">
+                <a16:creationId xmlns:a16="http://schemas.microsoft.com/office/drawing/2014/main" id="{FC803A90-C91D-5CD2-99BA-B1E35AAF18FD}"/>
+              </a:ext>
+            </a:extLst>
+          </p:cNvPr>
+          <p:cNvSpPr txBox="1"/>
+          <p:nvPr/>
+        </p:nvSpPr>
+        <p:spPr>
+          <a:xfrm>
+            <a:off x="419450" y="1027651"/>
+            <a:ext cx="4265801" cy="3693319"/>
+          </a:xfrm>
+          <a:prstGeom prst="rect">
+            <a:avLst/>
+          </a:prstGeom>
+          <a:noFill/>
+        </p:spPr>
+        <p:txBody>
+          <a:bodyPr wrap="square" rtlCol="0">
+            <a:spAutoFit/>
+          </a:bodyPr>
+          <a:lstStyle/>
+          <a:p>
+            <a:r>
+              <a:rPr lang="en-US" b="1" dirty="0"/>
+              <a:t>Test 1:</a:t>
+            </a:r>
+          </a:p>
+          <a:p>
+            <a:r>
+              <a:rPr lang="en-US" dirty="0"/>
+              <a:t>The number of processes fixed for the test was </a:t>
+            </a:r>
+            <a:r>
+              <a:rPr lang="en-US" dirty="0">
+                <a:solidFill>
+                  <a:srgbClr val="00B050"/>
+                </a:solidFill>
+              </a:rPr>
+              <a:t>8</a:t>
+            </a:r>
+            <a:r>
+              <a:rPr lang="en-US" dirty="0"/>
+              <a:t> as this was the number of idle processes at the time of testing.</a:t>
+            </a:r>
+          </a:p>
+          <a:p>
+            <a:r>
+              <a:rPr lang="en-US" dirty="0">
+                <a:solidFill>
+                  <a:srgbClr val="00B050"/>
+                </a:solidFill>
+              </a:rPr>
+              <a:t>100</a:t>
+            </a:r>
+            <a:r>
+              <a:rPr lang="en-US" dirty="0"/>
+              <a:t> Readings were conducted going by increments of </a:t>
+            </a:r>
+            <a:r>
+              <a:rPr lang="en-US" dirty="0">
+                <a:solidFill>
+                  <a:srgbClr val="00B050"/>
+                </a:solidFill>
+              </a:rPr>
+              <a:t>50,000 </a:t>
+            </a:r>
+            <a:r>
+              <a:rPr lang="en-US" dirty="0"/>
+              <a:t>for </a:t>
+            </a:r>
+            <a:r>
+              <a:rPr lang="en-US" dirty="0">
+                <a:solidFill>
+                  <a:srgbClr val="00B050"/>
+                </a:solidFill>
+              </a:rPr>
+              <a:t>N</a:t>
+            </a:r>
+            <a:r>
+              <a:rPr lang="en-US" dirty="0"/>
+              <a:t>. (Range: </a:t>
+            </a:r>
+            <a:r>
+              <a:rPr lang="en-US" dirty="0">
+                <a:solidFill>
+                  <a:srgbClr val="00B050"/>
+                </a:solidFill>
+              </a:rPr>
+              <a:t>50k</a:t>
+            </a:r>
+            <a:r>
+              <a:rPr lang="en-US" dirty="0"/>
+              <a:t> to </a:t>
+            </a:r>
+            <a:r>
+              <a:rPr lang="en-US" dirty="0">
+                <a:solidFill>
+                  <a:srgbClr val="00B050"/>
+                </a:solidFill>
+              </a:rPr>
+              <a:t>5M</a:t>
+            </a:r>
+            <a:r>
+              <a:rPr lang="en-US" dirty="0"/>
+              <a:t>)</a:t>
+            </a:r>
+          </a:p>
+          <a:p>
+            <a:endParaRPr lang="en-US" dirty="0">
+              <a:solidFill>
+                <a:srgbClr val="00B050"/>
+              </a:solidFill>
+            </a:endParaRPr>
+          </a:p>
+          <a:p>
+            <a:r>
+              <a:rPr lang="en-US" b="1" dirty="0"/>
+              <a:t>Test 2:</a:t>
+            </a:r>
+          </a:p>
+          <a:p>
+            <a:r>
+              <a:rPr lang="en-US" dirty="0"/>
+              <a:t>The parameter </a:t>
+            </a:r>
+            <a:r>
+              <a:rPr lang="en-US" dirty="0" err="1">
+                <a:solidFill>
+                  <a:srgbClr val="00B050"/>
+                </a:solidFill>
+              </a:rPr>
+              <a:t>n_proc</a:t>
+            </a:r>
+            <a:r>
+              <a:rPr lang="en-US" dirty="0">
+                <a:solidFill>
+                  <a:srgbClr val="00B050"/>
+                </a:solidFill>
+              </a:rPr>
+              <a:t> </a:t>
+            </a:r>
+            <a:r>
+              <a:rPr lang="en-US" dirty="0"/>
+              <a:t>was iterated from </a:t>
+            </a:r>
+            <a:r>
+              <a:rPr lang="en-US" dirty="0">
+                <a:solidFill>
+                  <a:srgbClr val="00B050"/>
+                </a:solidFill>
+              </a:rPr>
+              <a:t>1</a:t>
+            </a:r>
+            <a:r>
+              <a:rPr lang="en-US" dirty="0"/>
+              <a:t> to </a:t>
+            </a:r>
+            <a:r>
+              <a:rPr lang="en-US" dirty="0">
+                <a:solidFill>
+                  <a:srgbClr val="00B050"/>
+                </a:solidFill>
+              </a:rPr>
+              <a:t>24</a:t>
+            </a:r>
+            <a:r>
+              <a:rPr lang="en-US" dirty="0"/>
+              <a:t> to significantly exceed the number of logical processors of the machine which is </a:t>
+            </a:r>
+            <a:r>
+              <a:rPr lang="en-US" dirty="0">
+                <a:solidFill>
+                  <a:srgbClr val="00B050"/>
+                </a:solidFill>
+              </a:rPr>
+              <a:t>16</a:t>
+            </a:r>
+            <a:r>
+              <a:rPr lang="en-US" dirty="0"/>
+              <a:t>.</a:t>
+            </a:r>
+          </a:p>
+        </p:txBody>
+      </p:sp>
+      <p:sp>
+        <p:nvSpPr>
+          <p:cNvPr id="7" name="TextBox 6">
+            <a:extLst>
+              <a:ext uri="{FF2B5EF4-FFF2-40B4-BE49-F238E27FC236}">
+                <a16:creationId xmlns:a16="http://schemas.microsoft.com/office/drawing/2014/main" id="{2BF8CAA4-0BB7-E523-064F-D59C10526090}"/>
+              </a:ext>
+            </a:extLst>
+          </p:cNvPr>
+          <p:cNvSpPr txBox="1"/>
+          <p:nvPr/>
+        </p:nvSpPr>
+        <p:spPr>
+          <a:xfrm>
+            <a:off x="5777671" y="3245284"/>
+            <a:ext cx="3082954" cy="954107"/>
+          </a:xfrm>
+          <a:prstGeom prst="rect">
+            <a:avLst/>
+          </a:prstGeom>
+          <a:noFill/>
+        </p:spPr>
+        <p:txBody>
+          <a:bodyPr wrap="square" rtlCol="0">
+            <a:spAutoFit/>
+          </a:bodyPr>
+          <a:lstStyle/>
+          <a:p>
+            <a:r>
+              <a:rPr lang="en-US" sz="1400" dirty="0">
+                <a:solidFill>
+                  <a:schemeClr val="tx1">
+                    <a:lumMod val="75000"/>
+                    <a:lumOff val="25000"/>
+                  </a:schemeClr>
+                </a:solidFill>
+              </a:rPr>
+              <a:t>Note: For test 1, the range kept adjusting till reaching this range that showed a clear winner between the 4 functions.</a:t>
+            </a:r>
+          </a:p>
+        </p:txBody>
+      </p:sp>
+      <p:pic>
+        <p:nvPicPr>
+          <p:cNvPr id="9" name="Picture 8">
+            <a:extLst>
+              <a:ext uri="{FF2B5EF4-FFF2-40B4-BE49-F238E27FC236}">
+                <a16:creationId xmlns:a16="http://schemas.microsoft.com/office/drawing/2014/main" id="{53FCA52E-3B11-5AA2-4409-DA1D682502E1}"/>
+              </a:ext>
+            </a:extLst>
+          </p:cNvPr>
+          <p:cNvPicPr>
+            <a:picLocks noChangeAspect="1"/>
+          </p:cNvPicPr>
+          <p:nvPr/>
+        </p:nvPicPr>
+        <p:blipFill>
+          <a:blip r:embed="rId3"/>
+          <a:stretch>
+            <a:fillRect/>
+          </a:stretch>
+        </p:blipFill>
+        <p:spPr>
+          <a:xfrm>
+            <a:off x="5777670" y="4199391"/>
+            <a:ext cx="3082955" cy="515906"/>
+          </a:xfrm>
+          <a:prstGeom prst="rect">
+            <a:avLst/>
+          </a:prstGeom>
+        </p:spPr>
+      </p:pic>
+      <p:pic>
+        <p:nvPicPr>
+          <p:cNvPr id="11" name="Picture 10">
+            <a:extLst>
+              <a:ext uri="{FF2B5EF4-FFF2-40B4-BE49-F238E27FC236}">
+                <a16:creationId xmlns:a16="http://schemas.microsoft.com/office/drawing/2014/main" id="{6479216F-BC5A-66DA-E3F5-E19A36D8DE64}"/>
+              </a:ext>
+            </a:extLst>
+          </p:cNvPr>
+          <p:cNvPicPr>
+            <a:picLocks noChangeAspect="1"/>
+          </p:cNvPicPr>
+          <p:nvPr/>
+        </p:nvPicPr>
+        <p:blipFill>
+          <a:blip r:embed="rId4"/>
+          <a:srcRect b="1853"/>
+          <a:stretch>
+            <a:fillRect/>
+          </a:stretch>
+        </p:blipFill>
+        <p:spPr>
+          <a:xfrm>
+            <a:off x="5777671" y="865415"/>
+            <a:ext cx="2862686" cy="2379870"/>
+          </a:xfrm>
+          <a:prstGeom prst="rect">
+            <a:avLst/>
+          </a:prstGeom>
+        </p:spPr>
+      </p:pic>
+    </p:spTree>
+    <p:extLst>
+      <p:ext uri="{BB962C8B-B14F-4D97-AF65-F5344CB8AC3E}">
+        <p14:creationId xmlns:p14="http://schemas.microsoft.com/office/powerpoint/2010/main" val="2814906830"/>
+      </p:ext>
+    </p:extLst>
+  </p:cSld>
+  <p:clrMapOvr>
+    <a:masterClrMapping/>
+  </p:clrMapOvr>
+</p:sld>
+</file>
+
+<file path=ppt/slides/slide22.xml><?xml version="1.0" encoding="utf-8"?>
+<p:sld xmlns:a="http://schemas.openxmlformats.org/drawingml/2006/main" xmlns:r="http://schemas.openxmlformats.org/officeDocument/2006/relationships" xmlns:p="http://schemas.openxmlformats.org/presentationml/2006/main">
+  <p:cSld>
+    <p:spTree>
+      <p:nvGrpSpPr>
+        <p:cNvPr id="1" name="">
+          <a:extLst>
+            <a:ext uri="{FF2B5EF4-FFF2-40B4-BE49-F238E27FC236}">
+              <a16:creationId xmlns:a16="http://schemas.microsoft.com/office/drawing/2014/main" id="{E9D294C2-C145-A10C-63B9-C0F5A0C5B8FD}"/>
+            </a:ext>
+          </a:extLst>
+        </p:cNvPr>
+        <p:cNvGrpSpPr/>
+        <p:nvPr/>
+      </p:nvGrpSpPr>
+      <p:grpSpPr>
+        <a:xfrm>
+          <a:off x="0" y="0"/>
+          <a:ext cx="0" cy="0"/>
+          <a:chOff x="0" y="0"/>
+          <a:chExt cx="0" cy="0"/>
+        </a:xfrm>
+      </p:grpSpPr>
+      <p:sp>
+        <p:nvSpPr>
+          <p:cNvPr id="2" name="Shape 0">
+            <a:extLst>
+              <a:ext uri="{FF2B5EF4-FFF2-40B4-BE49-F238E27FC236}">
+                <a16:creationId xmlns:a16="http://schemas.microsoft.com/office/drawing/2014/main" id="{3B8D7D0A-3B9A-501A-CF0E-825216CCCED6}"/>
+              </a:ext>
+            </a:extLst>
+          </p:cNvPr>
+          <p:cNvSpPr/>
+          <p:nvPr/>
+        </p:nvSpPr>
+        <p:spPr>
+          <a:xfrm>
+            <a:off x="0" y="0"/>
+            <a:ext cx="9144000" cy="777240"/>
+          </a:xfrm>
+          <a:prstGeom prst="rect">
+            <a:avLst/>
+          </a:prstGeom>
+          <a:solidFill>
+            <a:srgbClr val="00A896"/>
+          </a:solidFill>
+          <a:ln w="12700">
+            <a:solidFill>
+              <a:srgbClr val="00A896"/>
+            </a:solidFill>
+            <a:prstDash val="solid"/>
+          </a:ln>
+        </p:spPr>
+        <p:txBody>
+          <a:bodyPr/>
+          <a:lstStyle/>
+          <a:p>
+            <a:endParaRPr lang="en-US"/>
+          </a:p>
+        </p:txBody>
+      </p:sp>
+      <p:sp>
+        <p:nvSpPr>
+          <p:cNvPr id="3" name="Text 1">
+            <a:extLst>
+              <a:ext uri="{FF2B5EF4-FFF2-40B4-BE49-F238E27FC236}">
+                <a16:creationId xmlns:a16="http://schemas.microsoft.com/office/drawing/2014/main" id="{C590B563-796D-A3B3-4B51-2BE9262A2194}"/>
+              </a:ext>
+            </a:extLst>
+          </p:cNvPr>
+          <p:cNvSpPr/>
+          <p:nvPr/>
+        </p:nvSpPr>
+        <p:spPr>
+          <a:xfrm>
+            <a:off x="365760" y="0"/>
+            <a:ext cx="8412480" cy="777240"/>
+          </a:xfrm>
+          <a:prstGeom prst="rect">
+            <a:avLst/>
+          </a:prstGeom>
+          <a:noFill/>
+          <a:ln/>
+        </p:spPr>
+        <p:txBody>
+          <a:bodyPr wrap="square" lIns="0" tIns="0" rIns="0" bIns="0" rtlCol="0" anchor="ctr"/>
+          <a:lstStyle/>
+          <a:p>
+            <a:pPr marL="0" indent="0">
+              <a:buNone/>
+            </a:pPr>
+            <a:r>
+              <a:rPr lang="en-US" sz="2400" b="1" dirty="0">
+                <a:solidFill>
+                  <a:srgbClr val="FFFFFF"/>
+                </a:solidFill>
+                <a:latin typeface="Calibri" pitchFamily="34" charset="0"/>
+                <a:ea typeface="Calibri" pitchFamily="34" charset="-122"/>
+                <a:cs typeface="Calibri" pitchFamily="34" charset="-120"/>
+              </a:rPr>
+              <a:t>Smoothing Techniques</a:t>
+            </a:r>
+            <a:endParaRPr lang="en-US" sz="2400" dirty="0"/>
+          </a:p>
+        </p:txBody>
+      </p:sp>
+      <p:pic>
+        <p:nvPicPr>
+          <p:cNvPr id="5" name="Picture 4">
+            <a:extLst>
+              <a:ext uri="{FF2B5EF4-FFF2-40B4-BE49-F238E27FC236}">
+                <a16:creationId xmlns:a16="http://schemas.microsoft.com/office/drawing/2014/main" id="{89F4E455-ADF0-D2A1-27C5-97F201EA1BD1}"/>
+              </a:ext>
+            </a:extLst>
+          </p:cNvPr>
+          <p:cNvPicPr>
+            <a:picLocks noChangeAspect="1"/>
+          </p:cNvPicPr>
+          <p:nvPr/>
+        </p:nvPicPr>
+        <p:blipFill>
+          <a:blip r:embed="rId3"/>
+          <a:stretch>
+            <a:fillRect/>
+          </a:stretch>
+        </p:blipFill>
+        <p:spPr>
+          <a:xfrm>
+            <a:off x="328009" y="3846063"/>
+            <a:ext cx="3619526" cy="304802"/>
+          </a:xfrm>
+          <a:prstGeom prst="rect">
+            <a:avLst/>
+          </a:prstGeom>
+        </p:spPr>
+      </p:pic>
+      <p:pic>
+        <p:nvPicPr>
+          <p:cNvPr id="11" name="Picture 10">
+            <a:extLst>
+              <a:ext uri="{FF2B5EF4-FFF2-40B4-BE49-F238E27FC236}">
+                <a16:creationId xmlns:a16="http://schemas.microsoft.com/office/drawing/2014/main" id="{71153B54-E528-805F-5D07-EAA828F4B244}"/>
+              </a:ext>
+            </a:extLst>
+          </p:cNvPr>
+          <p:cNvPicPr>
+            <a:picLocks noChangeAspect="1"/>
+          </p:cNvPicPr>
+          <p:nvPr/>
+        </p:nvPicPr>
+        <p:blipFill>
+          <a:blip r:embed="rId4"/>
+          <a:stretch>
+            <a:fillRect/>
+          </a:stretch>
+        </p:blipFill>
+        <p:spPr>
+          <a:xfrm>
+            <a:off x="328009" y="4363368"/>
+            <a:ext cx="2321183" cy="304802"/>
+          </a:xfrm>
+          <a:prstGeom prst="rect">
+            <a:avLst/>
+          </a:prstGeom>
+        </p:spPr>
+      </p:pic>
+      <p:sp>
+        <p:nvSpPr>
+          <p:cNvPr id="12" name="TextBox 11">
+            <a:extLst>
+              <a:ext uri="{FF2B5EF4-FFF2-40B4-BE49-F238E27FC236}">
+                <a16:creationId xmlns:a16="http://schemas.microsoft.com/office/drawing/2014/main" id="{A9FDEF69-BA27-C262-86B2-681849B8BE6E}"/>
+              </a:ext>
+            </a:extLst>
+          </p:cNvPr>
+          <p:cNvSpPr txBox="1"/>
+          <p:nvPr/>
+        </p:nvSpPr>
+        <p:spPr>
+          <a:xfrm>
+            <a:off x="245921" y="992635"/>
+            <a:ext cx="4472043" cy="1200329"/>
+          </a:xfrm>
+          <a:prstGeom prst="rect">
+            <a:avLst/>
+          </a:prstGeom>
+          <a:noFill/>
+        </p:spPr>
+        <p:txBody>
+          <a:bodyPr wrap="square" rtlCol="0">
+            <a:spAutoFit/>
+          </a:bodyPr>
+          <a:lstStyle/>
+          <a:p>
+            <a:r>
+              <a:rPr lang="en-US" dirty="0"/>
+              <a:t>Smoothing was done by repeating the experiment an odd number of times for each N/</a:t>
+            </a:r>
+            <a:r>
+              <a:rPr lang="en-US" dirty="0" err="1"/>
+              <a:t>n_proc</a:t>
+            </a:r>
+            <a:r>
+              <a:rPr lang="en-US" dirty="0"/>
+              <a:t>, then taking the </a:t>
+            </a:r>
+            <a:r>
+              <a:rPr lang="en-US" dirty="0">
+                <a:solidFill>
+                  <a:srgbClr val="00B050"/>
+                </a:solidFill>
+              </a:rPr>
+              <a:t>median</a:t>
+            </a:r>
+            <a:r>
+              <a:rPr lang="en-US" dirty="0"/>
+              <a:t> value by sorting.</a:t>
+            </a:r>
+          </a:p>
+        </p:txBody>
+      </p:sp>
+      <p:pic>
+        <p:nvPicPr>
+          <p:cNvPr id="14" name="Picture 13">
+            <a:extLst>
+              <a:ext uri="{FF2B5EF4-FFF2-40B4-BE49-F238E27FC236}">
+                <a16:creationId xmlns:a16="http://schemas.microsoft.com/office/drawing/2014/main" id="{83306F30-D9F7-8FC7-6D11-D8F18B4A1B0B}"/>
+              </a:ext>
+            </a:extLst>
+          </p:cNvPr>
+          <p:cNvPicPr>
+            <a:picLocks noChangeAspect="1"/>
+          </p:cNvPicPr>
+          <p:nvPr/>
+        </p:nvPicPr>
+        <p:blipFill>
+          <a:blip r:embed="rId5"/>
+          <a:stretch>
+            <a:fillRect/>
+          </a:stretch>
+        </p:blipFill>
+        <p:spPr>
+          <a:xfrm>
+            <a:off x="5023515" y="1058693"/>
+            <a:ext cx="3619527" cy="669668"/>
+          </a:xfrm>
+          <a:prstGeom prst="rect">
+            <a:avLst/>
+          </a:prstGeom>
+        </p:spPr>
+      </p:pic>
+      <p:sp>
+        <p:nvSpPr>
+          <p:cNvPr id="15" name="TextBox 14">
+            <a:extLst>
+              <a:ext uri="{FF2B5EF4-FFF2-40B4-BE49-F238E27FC236}">
+                <a16:creationId xmlns:a16="http://schemas.microsoft.com/office/drawing/2014/main" id="{E3EF1FEC-0012-C5DB-BE41-42B36B74F72B}"/>
+              </a:ext>
+            </a:extLst>
+          </p:cNvPr>
+          <p:cNvSpPr txBox="1"/>
+          <p:nvPr/>
+        </p:nvSpPr>
+        <p:spPr>
+          <a:xfrm>
+            <a:off x="260970" y="2265027"/>
+            <a:ext cx="3095538" cy="1477328"/>
+          </a:xfrm>
+          <a:prstGeom prst="rect">
+            <a:avLst/>
+          </a:prstGeom>
+          <a:noFill/>
+        </p:spPr>
+        <p:txBody>
+          <a:bodyPr wrap="square" rtlCol="0">
+            <a:spAutoFit/>
+          </a:bodyPr>
+          <a:lstStyle/>
+          <a:p>
+            <a:r>
+              <a:rPr lang="en-US" dirty="0"/>
+              <a:t>The experiment was repeated </a:t>
+            </a:r>
+            <a:r>
+              <a:rPr lang="en-US" dirty="0">
+                <a:solidFill>
+                  <a:srgbClr val="00B050"/>
+                </a:solidFill>
+              </a:rPr>
+              <a:t>7</a:t>
+            </a:r>
+            <a:r>
+              <a:rPr lang="en-US" dirty="0"/>
+              <a:t> times for each </a:t>
+            </a:r>
+            <a:r>
+              <a:rPr lang="en-US" dirty="0">
+                <a:solidFill>
+                  <a:srgbClr val="00B050"/>
+                </a:solidFill>
+              </a:rPr>
+              <a:t>N</a:t>
+            </a:r>
+            <a:r>
+              <a:rPr lang="en-US" dirty="0"/>
+              <a:t> in </a:t>
+            </a:r>
+            <a:r>
+              <a:rPr lang="en-US" u="sng" dirty="0"/>
+              <a:t>test 1</a:t>
+            </a:r>
+            <a:r>
+              <a:rPr lang="en-US" dirty="0"/>
+              <a:t> and </a:t>
+            </a:r>
+            <a:r>
+              <a:rPr lang="en-US" dirty="0">
+                <a:solidFill>
+                  <a:srgbClr val="00B050"/>
+                </a:solidFill>
+              </a:rPr>
+              <a:t>23</a:t>
+            </a:r>
+            <a:r>
+              <a:rPr lang="en-US" dirty="0"/>
+              <a:t> times for each </a:t>
+            </a:r>
+            <a:r>
+              <a:rPr lang="en-US" dirty="0" err="1">
+                <a:solidFill>
+                  <a:srgbClr val="00B050"/>
+                </a:solidFill>
+              </a:rPr>
+              <a:t>n_proc</a:t>
+            </a:r>
+            <a:r>
+              <a:rPr lang="en-US" dirty="0">
+                <a:solidFill>
+                  <a:srgbClr val="00B050"/>
+                </a:solidFill>
+              </a:rPr>
+              <a:t> </a:t>
+            </a:r>
+            <a:r>
+              <a:rPr lang="en-US" dirty="0"/>
+              <a:t>in </a:t>
+            </a:r>
+            <a:r>
+              <a:rPr lang="en-US" u="sng" dirty="0"/>
+              <a:t>test 2</a:t>
+            </a:r>
+            <a:r>
+              <a:rPr lang="en-US" dirty="0"/>
+              <a:t> as it had a relatively small number of iterations.</a:t>
+            </a:r>
+          </a:p>
+        </p:txBody>
+      </p:sp>
+      <p:pic>
+        <p:nvPicPr>
+          <p:cNvPr id="6" name="Picture 5">
+            <a:extLst>
+              <a:ext uri="{FF2B5EF4-FFF2-40B4-BE49-F238E27FC236}">
+                <a16:creationId xmlns:a16="http://schemas.microsoft.com/office/drawing/2014/main" id="{1F1DC4F2-6FAA-46D3-B5C7-CAB6813BFF97}"/>
+              </a:ext>
+            </a:extLst>
+          </p:cNvPr>
+          <p:cNvPicPr>
+            <a:picLocks noChangeAspect="1"/>
+          </p:cNvPicPr>
+          <p:nvPr/>
+        </p:nvPicPr>
+        <p:blipFill>
+          <a:blip r:embed="rId6"/>
+          <a:stretch>
+            <a:fillRect/>
+          </a:stretch>
+        </p:blipFill>
+        <p:spPr>
+          <a:xfrm>
+            <a:off x="4295914" y="2192964"/>
+            <a:ext cx="4609037" cy="2032032"/>
+          </a:xfrm>
+          <a:prstGeom prst="rect">
+            <a:avLst/>
+          </a:prstGeom>
+        </p:spPr>
+      </p:pic>
+    </p:spTree>
+    <p:extLst>
+      <p:ext uri="{BB962C8B-B14F-4D97-AF65-F5344CB8AC3E}">
+        <p14:creationId xmlns:p14="http://schemas.microsoft.com/office/powerpoint/2010/main" val="3429589757"/>
+      </p:ext>
+    </p:extLst>
+  </p:cSld>
+  <p:clrMapOvr>
+    <a:masterClrMapping/>
+  </p:clrMapOvr>
+</p:sld>
+</file>
+
+<file path=ppt/slides/slide23.xml><?xml version="1.0" encoding="utf-8"?>
+<p:sld xmlns:a="http://schemas.openxmlformats.org/drawingml/2006/main" xmlns:r="http://schemas.openxmlformats.org/officeDocument/2006/relationships" xmlns:p="http://schemas.openxmlformats.org/presentationml/2006/main">
+  <p:cSld>
+    <p:spTree>
+      <p:nvGrpSpPr>
+        <p:cNvPr id="1" name="">
+          <a:extLst>
+            <a:ext uri="{FF2B5EF4-FFF2-40B4-BE49-F238E27FC236}">
+              <a16:creationId xmlns:a16="http://schemas.microsoft.com/office/drawing/2014/main" id="{9E25CC0B-31F5-A0B9-CCA3-FFAEE2590B57}"/>
+            </a:ext>
+          </a:extLst>
+        </p:cNvPr>
+        <p:cNvGrpSpPr/>
+        <p:nvPr/>
+      </p:nvGrpSpPr>
+      <p:grpSpPr>
+        <a:xfrm>
+          <a:off x="0" y="0"/>
+          <a:ext cx="0" cy="0"/>
+          <a:chOff x="0" y="0"/>
+          <a:chExt cx="0" cy="0"/>
+        </a:xfrm>
+      </p:grpSpPr>
+      <p:sp>
+        <p:nvSpPr>
+          <p:cNvPr id="2" name="Shape 0">
+            <a:extLst>
+              <a:ext uri="{FF2B5EF4-FFF2-40B4-BE49-F238E27FC236}">
+                <a16:creationId xmlns:a16="http://schemas.microsoft.com/office/drawing/2014/main" id="{4C013C8F-728B-C367-E451-D743E8E33854}"/>
+              </a:ext>
+            </a:extLst>
+          </p:cNvPr>
+          <p:cNvSpPr/>
+          <p:nvPr/>
+        </p:nvSpPr>
+        <p:spPr>
+          <a:xfrm>
+            <a:off x="0" y="0"/>
+            <a:ext cx="9144000" cy="777240"/>
+          </a:xfrm>
+          <a:prstGeom prst="rect">
+            <a:avLst/>
+          </a:prstGeom>
+          <a:solidFill>
+            <a:srgbClr val="00A896"/>
+          </a:solidFill>
+          <a:ln w="12700">
+            <a:solidFill>
+              <a:srgbClr val="00A896"/>
+            </a:solidFill>
+            <a:prstDash val="solid"/>
+          </a:ln>
+        </p:spPr>
+        <p:txBody>
+          <a:bodyPr/>
+          <a:lstStyle/>
+          <a:p>
+            <a:endParaRPr lang="en-US" dirty="0"/>
+          </a:p>
+        </p:txBody>
+      </p:sp>
+      <p:sp>
+        <p:nvSpPr>
+          <p:cNvPr id="3" name="Text 1">
+            <a:extLst>
+              <a:ext uri="{FF2B5EF4-FFF2-40B4-BE49-F238E27FC236}">
+                <a16:creationId xmlns:a16="http://schemas.microsoft.com/office/drawing/2014/main" id="{C2F80BE0-3437-EEAA-A5DD-1A994ACF8286}"/>
+              </a:ext>
+            </a:extLst>
+          </p:cNvPr>
+          <p:cNvSpPr/>
+          <p:nvPr/>
+        </p:nvSpPr>
+        <p:spPr>
+          <a:xfrm>
+            <a:off x="365760" y="0"/>
+            <a:ext cx="8412480" cy="777240"/>
+          </a:xfrm>
+          <a:prstGeom prst="rect">
+            <a:avLst/>
+          </a:prstGeom>
+          <a:noFill/>
+          <a:ln/>
+        </p:spPr>
+        <p:txBody>
+          <a:bodyPr wrap="square" lIns="0" tIns="0" rIns="0" bIns="0" rtlCol="0" anchor="ctr"/>
+          <a:lstStyle/>
+          <a:p>
+            <a:pPr marL="0" indent="0">
+              <a:buNone/>
+            </a:pPr>
+            <a:r>
+              <a:rPr lang="en-US" sz="2400" b="1" dirty="0">
+                <a:solidFill>
+                  <a:srgbClr val="FFFFFF"/>
+                </a:solidFill>
+                <a:latin typeface="Calibri" pitchFamily="34" charset="0"/>
+                <a:ea typeface="Calibri" pitchFamily="34" charset="-122"/>
+                <a:cs typeface="Calibri" pitchFamily="34" charset="-120"/>
+              </a:rPr>
+              <a:t>Results and Answers (Test 1)</a:t>
+            </a:r>
+            <a:endParaRPr lang="en-US" sz="2400" dirty="0"/>
+          </a:p>
+        </p:txBody>
+      </p:sp>
+      <p:sp>
+        <p:nvSpPr>
+          <p:cNvPr id="6" name="TextBox 5">
+            <a:extLst>
+              <a:ext uri="{FF2B5EF4-FFF2-40B4-BE49-F238E27FC236}">
+                <a16:creationId xmlns:a16="http://schemas.microsoft.com/office/drawing/2014/main" id="{B28F6A4A-6586-484F-3404-82620BA489AE}"/>
+              </a:ext>
+            </a:extLst>
+          </p:cNvPr>
+          <p:cNvSpPr txBox="1"/>
+          <p:nvPr/>
+        </p:nvSpPr>
+        <p:spPr>
+          <a:xfrm>
+            <a:off x="236355" y="863798"/>
+            <a:ext cx="4578290" cy="3208571"/>
+          </a:xfrm>
+          <a:prstGeom prst="rect">
+            <a:avLst/>
+          </a:prstGeom>
+          <a:noFill/>
+        </p:spPr>
+        <p:txBody>
+          <a:bodyPr wrap="square">
+            <a:spAutoFit/>
+          </a:bodyPr>
+          <a:lstStyle/>
+          <a:p>
+            <a:pPr algn="l">
+              <a:spcBef>
+                <a:spcPts val="900"/>
+              </a:spcBef>
+              <a:spcAft>
+                <a:spcPts val="900"/>
+              </a:spcAft>
+              <a:buNone/>
+            </a:pPr>
+            <a:r>
+              <a:rPr lang="en-US" b="1" i="0" dirty="0">
+                <a:solidFill>
+                  <a:srgbClr val="273540"/>
+                </a:solidFill>
+                <a:effectLst/>
+                <a:latin typeface="Lato Extended"/>
+              </a:rPr>
+              <a:t>Question:</a:t>
+            </a:r>
+            <a:r>
+              <a:rPr lang="en-US" b="0" i="0" dirty="0">
+                <a:solidFill>
+                  <a:srgbClr val="273540"/>
+                </a:solidFill>
+                <a:effectLst/>
+                <a:latin typeface="Lato Extended"/>
+              </a:rPr>
+              <a:t> If we fix </a:t>
+            </a:r>
+            <a:r>
+              <a:rPr lang="en-US" b="0" i="0" dirty="0" err="1">
+                <a:solidFill>
+                  <a:srgbClr val="273540"/>
+                </a:solidFill>
+                <a:effectLst/>
+                <a:latin typeface="Lato Extended"/>
+              </a:rPr>
+              <a:t>n_proc</a:t>
+            </a:r>
+            <a:r>
+              <a:rPr lang="en-US" b="0" i="0" dirty="0">
+                <a:solidFill>
+                  <a:srgbClr val="273540"/>
+                </a:solidFill>
+                <a:effectLst/>
+                <a:latin typeface="Lato Extended"/>
+              </a:rPr>
+              <a:t> and </a:t>
+            </a:r>
+            <a:r>
+              <a:rPr lang="en-US" b="0" i="0" dirty="0" err="1">
+                <a:solidFill>
+                  <a:srgbClr val="273540"/>
+                </a:solidFill>
+                <a:effectLst/>
+                <a:latin typeface="Lato Extended"/>
+              </a:rPr>
+              <a:t>n_thread</a:t>
+            </a:r>
+            <a:r>
+              <a:rPr lang="en-US" b="0" i="0" dirty="0">
+                <a:solidFill>
+                  <a:srgbClr val="273540"/>
+                </a:solidFill>
+                <a:effectLst/>
+                <a:latin typeface="Lato Extended"/>
+              </a:rPr>
+              <a:t> to the same value, then which of the 4 functions take the least time? At which value of N does this behavior persist?</a:t>
+            </a:r>
+          </a:p>
+          <a:p>
+            <a:pPr algn="l">
+              <a:spcBef>
+                <a:spcPts val="900"/>
+              </a:spcBef>
+              <a:spcAft>
+                <a:spcPts val="900"/>
+              </a:spcAft>
+              <a:buNone/>
+            </a:pPr>
+            <a:r>
+              <a:rPr lang="en-US" b="1" dirty="0">
+                <a:solidFill>
+                  <a:srgbClr val="273540"/>
+                </a:solidFill>
+                <a:latin typeface="Lato Extended"/>
+              </a:rPr>
+              <a:t>Answer:</a:t>
+            </a:r>
+            <a:r>
+              <a:rPr lang="en-US" dirty="0">
+                <a:solidFill>
+                  <a:srgbClr val="273540"/>
+                </a:solidFill>
+                <a:latin typeface="Lato Extended"/>
+              </a:rPr>
+              <a:t> The </a:t>
+            </a:r>
+            <a:r>
+              <a:rPr lang="en-US" dirty="0" err="1">
+                <a:solidFill>
+                  <a:srgbClr val="00B050"/>
+                </a:solidFill>
+                <a:latin typeface="Lato Extended"/>
+              </a:rPr>
+              <a:t>threads_compute</a:t>
+            </a:r>
+            <a:r>
+              <a:rPr lang="en-US" dirty="0">
+                <a:solidFill>
+                  <a:srgbClr val="00B050"/>
+                </a:solidFill>
+                <a:latin typeface="Lato Extended"/>
+              </a:rPr>
+              <a:t> </a:t>
+            </a:r>
+            <a:r>
+              <a:rPr lang="en-US" dirty="0">
+                <a:solidFill>
+                  <a:srgbClr val="273540"/>
+                </a:solidFill>
+                <a:latin typeface="Lato Extended"/>
+              </a:rPr>
+              <a:t>function gives the best performance. It starts </a:t>
+            </a:r>
+            <a:r>
+              <a:rPr lang="en-US" i="1" dirty="0">
+                <a:solidFill>
+                  <a:srgbClr val="273540"/>
+                </a:solidFill>
+                <a:latin typeface="Lato Extended"/>
+              </a:rPr>
+              <a:t>consistently </a:t>
+            </a:r>
+            <a:r>
+              <a:rPr lang="en-US" dirty="0">
+                <a:solidFill>
+                  <a:srgbClr val="273540"/>
+                </a:solidFill>
+                <a:latin typeface="Lato Extended"/>
+              </a:rPr>
+              <a:t>outperforming at                     N = </a:t>
+            </a:r>
+            <a:r>
+              <a:rPr lang="en-US" dirty="0">
+                <a:solidFill>
+                  <a:srgbClr val="00B050"/>
+                </a:solidFill>
+                <a:latin typeface="Lato Extended"/>
+              </a:rPr>
+              <a:t>3,700,000</a:t>
+            </a:r>
+            <a:r>
+              <a:rPr lang="en-US" dirty="0">
+                <a:solidFill>
+                  <a:srgbClr val="273540"/>
+                </a:solidFill>
+                <a:latin typeface="Lato Extended"/>
+              </a:rPr>
+              <a:t>.</a:t>
+            </a:r>
+            <a:endParaRPr lang="en-US" b="0" i="0" dirty="0">
+              <a:solidFill>
+                <a:srgbClr val="273540"/>
+              </a:solidFill>
+              <a:effectLst/>
+              <a:latin typeface="Lato Extended"/>
+            </a:endParaRPr>
+          </a:p>
+          <a:p>
+            <a:pPr>
+              <a:buNone/>
+            </a:pPr>
+            <a:br>
+              <a:rPr lang="en-US" dirty="0"/>
+            </a:br>
+            <a:endParaRPr lang="en-US" dirty="0"/>
+          </a:p>
+        </p:txBody>
+      </p:sp>
+      <p:sp>
+        <p:nvSpPr>
+          <p:cNvPr id="7" name="TextBox 6">
+            <a:extLst>
+              <a:ext uri="{FF2B5EF4-FFF2-40B4-BE49-F238E27FC236}">
+                <a16:creationId xmlns:a16="http://schemas.microsoft.com/office/drawing/2014/main" id="{B6720FC1-56C3-64AE-BB91-9D708BED2264}"/>
+              </a:ext>
+            </a:extLst>
+          </p:cNvPr>
+          <p:cNvSpPr txBox="1"/>
+          <p:nvPr/>
+        </p:nvSpPr>
+        <p:spPr>
+          <a:xfrm>
+            <a:off x="285782" y="3382975"/>
+            <a:ext cx="3082954" cy="1200329"/>
+          </a:xfrm>
+          <a:prstGeom prst="rect">
+            <a:avLst/>
+          </a:prstGeom>
+          <a:noFill/>
+        </p:spPr>
+        <p:txBody>
+          <a:bodyPr wrap="square" rtlCol="0">
+            <a:spAutoFit/>
+          </a:bodyPr>
+          <a:lstStyle/>
+          <a:p>
+            <a:r>
+              <a:rPr lang="en-US" sz="1200" dirty="0">
+                <a:solidFill>
+                  <a:schemeClr val="tx1">
+                    <a:lumMod val="75000"/>
+                    <a:lumOff val="25000"/>
+                  </a:schemeClr>
+                </a:solidFill>
+              </a:rPr>
+              <a:t>Note: We can see that </a:t>
+            </a:r>
+            <a:r>
+              <a:rPr lang="en-US" sz="1200" dirty="0" err="1">
+                <a:solidFill>
+                  <a:schemeClr val="tx1">
+                    <a:lumMod val="75000"/>
+                    <a:lumOff val="25000"/>
+                  </a:schemeClr>
+                </a:solidFill>
+              </a:rPr>
+              <a:t>sequential_compute</a:t>
+            </a:r>
+            <a:r>
+              <a:rPr lang="en-US" sz="1200" dirty="0">
+                <a:solidFill>
+                  <a:schemeClr val="tx1">
+                    <a:lumMod val="75000"/>
+                    <a:lumOff val="25000"/>
+                  </a:schemeClr>
+                </a:solidFill>
+              </a:rPr>
+              <a:t> is outperformed at large values of N, followed by </a:t>
+            </a:r>
+            <a:r>
+              <a:rPr lang="en-US" sz="1200" dirty="0" err="1">
+                <a:solidFill>
+                  <a:schemeClr val="tx1">
+                    <a:lumMod val="75000"/>
+                    <a:lumOff val="25000"/>
+                  </a:schemeClr>
+                </a:solidFill>
+              </a:rPr>
+              <a:t>mmap</a:t>
+            </a:r>
+            <a:r>
+              <a:rPr lang="en-US" sz="1200" dirty="0">
+                <a:solidFill>
+                  <a:schemeClr val="tx1">
+                    <a:lumMod val="75000"/>
+                    <a:lumOff val="25000"/>
+                  </a:schemeClr>
+                </a:solidFill>
+              </a:rPr>
+              <a:t> and pipes. The reason why there wasn’t much of a difference between </a:t>
+            </a:r>
+            <a:r>
+              <a:rPr lang="en-US" sz="1200" dirty="0" err="1">
+                <a:solidFill>
+                  <a:schemeClr val="tx1">
+                    <a:lumMod val="75000"/>
+                    <a:lumOff val="25000"/>
+                  </a:schemeClr>
+                </a:solidFill>
+              </a:rPr>
+              <a:t>mmap</a:t>
+            </a:r>
+            <a:r>
+              <a:rPr lang="en-US" sz="1200" dirty="0">
+                <a:solidFill>
+                  <a:schemeClr val="tx1">
+                    <a:lumMod val="75000"/>
+                    <a:lumOff val="25000"/>
+                  </a:schemeClr>
+                </a:solidFill>
+              </a:rPr>
+              <a:t> and pipes is that the cost of communication is trivial compared to the N calculations</a:t>
+            </a:r>
+          </a:p>
+        </p:txBody>
+      </p:sp>
+      <p:graphicFrame>
+        <p:nvGraphicFramePr>
+          <p:cNvPr id="8" name="Chart 7">
+            <a:extLst>
+              <a:ext uri="{FF2B5EF4-FFF2-40B4-BE49-F238E27FC236}">
+                <a16:creationId xmlns:a16="http://schemas.microsoft.com/office/drawing/2014/main" id="{1B60F417-6EE2-CBEF-6939-E28B85D68B2C}"/>
+              </a:ext>
+            </a:extLst>
+          </p:cNvPr>
+          <p:cNvGraphicFramePr>
+            <a:graphicFrameLocks/>
+          </p:cNvGraphicFramePr>
+          <p:nvPr>
+            <p:extLst>
+              <p:ext uri="{D42A27DB-BD31-4B8C-83A1-F6EECF244321}">
+                <p14:modId xmlns:p14="http://schemas.microsoft.com/office/powerpoint/2010/main" val="3611885314"/>
+              </p:ext>
+            </p:extLst>
+          </p:nvPr>
+        </p:nvGraphicFramePr>
+        <p:xfrm>
+          <a:off x="4374292" y="1268626"/>
+          <a:ext cx="4685753" cy="3744098"/>
+        </p:xfrm>
+        <a:graphic>
+          <a:graphicData uri="http://schemas.openxmlformats.org/drawingml/2006/chart">
+            <c:chart xmlns:c="http://schemas.openxmlformats.org/drawingml/2006/chart" xmlns:r="http://schemas.openxmlformats.org/officeDocument/2006/relationships" r:id="rId3"/>
+          </a:graphicData>
+        </a:graphic>
+      </p:graphicFrame>
+    </p:spTree>
+    <p:extLst>
+      <p:ext uri="{BB962C8B-B14F-4D97-AF65-F5344CB8AC3E}">
+        <p14:creationId xmlns:p14="http://schemas.microsoft.com/office/powerpoint/2010/main" val="1851093017"/>
+      </p:ext>
+    </p:extLst>
+  </p:cSld>
+  <p:clrMapOvr>
+    <a:masterClrMapping/>
+  </p:clrMapOvr>
+</p:sld>
+</file>
+
+<file path=ppt/slides/slide24.xml><?xml version="1.0" encoding="utf-8"?>
+<p:sld xmlns:a="http://schemas.openxmlformats.org/drawingml/2006/main" xmlns:r="http://schemas.openxmlformats.org/officeDocument/2006/relationships" xmlns:p="http://schemas.openxmlformats.org/presentationml/2006/main">
+  <p:cSld>
+    <p:spTree>
+      <p:nvGrpSpPr>
+        <p:cNvPr id="1" name="">
+          <a:extLst>
+            <a:ext uri="{FF2B5EF4-FFF2-40B4-BE49-F238E27FC236}">
+              <a16:creationId xmlns:a16="http://schemas.microsoft.com/office/drawing/2014/main" id="{AC2AB153-CB4F-2DC1-4C4F-8603CC7E01B8}"/>
+            </a:ext>
+          </a:extLst>
+        </p:cNvPr>
+        <p:cNvGrpSpPr/>
+        <p:nvPr/>
+      </p:nvGrpSpPr>
+      <p:grpSpPr>
+        <a:xfrm>
+          <a:off x="0" y="0"/>
+          <a:ext cx="0" cy="0"/>
+          <a:chOff x="0" y="0"/>
+          <a:chExt cx="0" cy="0"/>
+        </a:xfrm>
+      </p:grpSpPr>
+      <p:sp>
+        <p:nvSpPr>
+          <p:cNvPr id="2" name="Shape 0">
+            <a:extLst>
+              <a:ext uri="{FF2B5EF4-FFF2-40B4-BE49-F238E27FC236}">
+                <a16:creationId xmlns:a16="http://schemas.microsoft.com/office/drawing/2014/main" id="{DE885F72-F7A5-9475-95C5-2D754324601E}"/>
+              </a:ext>
+            </a:extLst>
+          </p:cNvPr>
+          <p:cNvSpPr/>
+          <p:nvPr/>
+        </p:nvSpPr>
+        <p:spPr>
+          <a:xfrm>
+            <a:off x="0" y="0"/>
+            <a:ext cx="9144000" cy="777240"/>
+          </a:xfrm>
+          <a:prstGeom prst="rect">
+            <a:avLst/>
+          </a:prstGeom>
+          <a:solidFill>
+            <a:srgbClr val="00A896"/>
+          </a:solidFill>
+          <a:ln w="12700">
+            <a:solidFill>
+              <a:srgbClr val="00A896"/>
+            </a:solidFill>
+            <a:prstDash val="solid"/>
+          </a:ln>
+        </p:spPr>
+        <p:txBody>
+          <a:bodyPr/>
+          <a:lstStyle/>
+          <a:p>
+            <a:endParaRPr lang="en-US"/>
+          </a:p>
+        </p:txBody>
+      </p:sp>
+      <p:sp>
+        <p:nvSpPr>
+          <p:cNvPr id="3" name="Text 1">
+            <a:extLst>
+              <a:ext uri="{FF2B5EF4-FFF2-40B4-BE49-F238E27FC236}">
+                <a16:creationId xmlns:a16="http://schemas.microsoft.com/office/drawing/2014/main" id="{9BC26B48-2911-5A21-1EDA-A1A90F03456E}"/>
+              </a:ext>
+            </a:extLst>
+          </p:cNvPr>
+          <p:cNvSpPr/>
+          <p:nvPr/>
+        </p:nvSpPr>
+        <p:spPr>
+          <a:xfrm>
+            <a:off x="365760" y="0"/>
+            <a:ext cx="8412480" cy="777240"/>
+          </a:xfrm>
+          <a:prstGeom prst="rect">
+            <a:avLst/>
+          </a:prstGeom>
+          <a:noFill/>
+          <a:ln/>
+        </p:spPr>
+        <p:txBody>
+          <a:bodyPr wrap="square" lIns="0" tIns="0" rIns="0" bIns="0" rtlCol="0" anchor="ctr"/>
+          <a:lstStyle/>
+          <a:p>
+            <a:r>
+              <a:rPr lang="en-US" sz="2400" b="1" dirty="0">
+                <a:solidFill>
+                  <a:srgbClr val="FFFFFF"/>
+                </a:solidFill>
+                <a:latin typeface="Calibri" pitchFamily="34" charset="0"/>
+                <a:ea typeface="Calibri" pitchFamily="34" charset="-122"/>
+                <a:cs typeface="Calibri" pitchFamily="34" charset="-120"/>
+              </a:rPr>
+              <a:t>Results and Answers (Test 2)</a:t>
+            </a:r>
+            <a:endParaRPr lang="en-US" sz="2400" dirty="0"/>
+          </a:p>
+        </p:txBody>
+      </p:sp>
+      <p:sp>
+        <p:nvSpPr>
+          <p:cNvPr id="4" name="Shape 0">
+            <a:extLst>
+              <a:ext uri="{FF2B5EF4-FFF2-40B4-BE49-F238E27FC236}">
+                <a16:creationId xmlns:a16="http://schemas.microsoft.com/office/drawing/2014/main" id="{4A40FE1F-C2E9-2977-9479-7D5172A62DDE}"/>
+              </a:ext>
+            </a:extLst>
+          </p:cNvPr>
+          <p:cNvSpPr/>
+          <p:nvPr/>
+        </p:nvSpPr>
+        <p:spPr>
+          <a:xfrm>
+            <a:off x="0" y="0"/>
+            <a:ext cx="9144000" cy="777240"/>
+          </a:xfrm>
+          <a:prstGeom prst="rect">
+            <a:avLst/>
+          </a:prstGeom>
+          <a:solidFill>
+            <a:srgbClr val="00A896"/>
+          </a:solidFill>
+          <a:ln w="12700">
+            <a:solidFill>
+              <a:srgbClr val="00A896"/>
+            </a:solidFill>
+            <a:prstDash val="solid"/>
+          </a:ln>
+        </p:spPr>
+        <p:txBody>
+          <a:bodyPr/>
+          <a:lstStyle/>
+          <a:p>
+            <a:endParaRPr lang="en-US" dirty="0"/>
+          </a:p>
+        </p:txBody>
+      </p:sp>
+      <p:sp>
+        <p:nvSpPr>
+          <p:cNvPr id="5" name="Text 1">
+            <a:extLst>
+              <a:ext uri="{FF2B5EF4-FFF2-40B4-BE49-F238E27FC236}">
+                <a16:creationId xmlns:a16="http://schemas.microsoft.com/office/drawing/2014/main" id="{FB4FCC26-0227-B1D4-8EBE-D6CF080F430B}"/>
+              </a:ext>
+            </a:extLst>
+          </p:cNvPr>
+          <p:cNvSpPr/>
+          <p:nvPr/>
+        </p:nvSpPr>
+        <p:spPr>
+          <a:xfrm>
+            <a:off x="365760" y="0"/>
+            <a:ext cx="8412480" cy="777240"/>
+          </a:xfrm>
+          <a:prstGeom prst="rect">
+            <a:avLst/>
+          </a:prstGeom>
+          <a:noFill/>
+          <a:ln/>
+        </p:spPr>
+        <p:txBody>
+          <a:bodyPr wrap="square" lIns="0" tIns="0" rIns="0" bIns="0" rtlCol="0" anchor="ctr"/>
+          <a:lstStyle/>
+          <a:p>
+            <a:pPr marL="0" indent="0">
+              <a:buNone/>
+            </a:pPr>
+            <a:r>
+              <a:rPr lang="en-US" sz="2400" b="1" dirty="0">
+                <a:solidFill>
+                  <a:srgbClr val="FFFFFF"/>
+                </a:solidFill>
+                <a:latin typeface="Calibri" pitchFamily="34" charset="0"/>
+                <a:ea typeface="Calibri" pitchFamily="34" charset="-122"/>
+                <a:cs typeface="Calibri" pitchFamily="34" charset="-120"/>
+              </a:rPr>
+              <a:t>Results and Answers (Test 2)</a:t>
+            </a:r>
+            <a:endParaRPr lang="en-US" sz="2400" dirty="0"/>
+          </a:p>
+        </p:txBody>
+      </p:sp>
+      <p:sp>
+        <p:nvSpPr>
+          <p:cNvPr id="7" name="TextBox 6">
+            <a:extLst>
+              <a:ext uri="{FF2B5EF4-FFF2-40B4-BE49-F238E27FC236}">
+                <a16:creationId xmlns:a16="http://schemas.microsoft.com/office/drawing/2014/main" id="{F372E74A-FCF0-6C62-DFDC-B504535CF19A}"/>
+              </a:ext>
+            </a:extLst>
+          </p:cNvPr>
+          <p:cNvSpPr txBox="1"/>
+          <p:nvPr/>
+        </p:nvSpPr>
+        <p:spPr>
+          <a:xfrm>
+            <a:off x="208051" y="917343"/>
+            <a:ext cx="4363949" cy="2931572"/>
+          </a:xfrm>
+          <a:prstGeom prst="rect">
+            <a:avLst/>
+          </a:prstGeom>
+          <a:noFill/>
+        </p:spPr>
+        <p:txBody>
+          <a:bodyPr wrap="square">
+            <a:spAutoFit/>
+          </a:bodyPr>
+          <a:lstStyle/>
+          <a:p>
+            <a:pPr>
+              <a:spcBef>
+                <a:spcPts val="900"/>
+              </a:spcBef>
+              <a:spcAft>
+                <a:spcPts val="900"/>
+              </a:spcAft>
+            </a:pPr>
+            <a:r>
+              <a:rPr lang="en-US" b="1" i="0" dirty="0">
+                <a:solidFill>
+                  <a:srgbClr val="273540"/>
+                </a:solidFill>
+                <a:effectLst/>
+                <a:latin typeface="Lato Extended"/>
+              </a:rPr>
+              <a:t>Question:</a:t>
+            </a:r>
+            <a:r>
+              <a:rPr lang="en-US" b="0" i="0" dirty="0">
+                <a:solidFill>
+                  <a:srgbClr val="273540"/>
+                </a:solidFill>
+                <a:effectLst/>
+                <a:latin typeface="Lato Extended"/>
+              </a:rPr>
+              <a:t> </a:t>
+            </a:r>
+            <a:r>
+              <a:rPr lang="en-US" dirty="0"/>
+              <a:t>If we fix N to a large number, then which of the 4 functions take the least time? At which value of </a:t>
+            </a:r>
+            <a:r>
+              <a:rPr lang="en-US" dirty="0" err="1"/>
+              <a:t>n_proc</a:t>
+            </a:r>
+            <a:r>
+              <a:rPr lang="en-US" dirty="0"/>
+              <a:t> (</a:t>
+            </a:r>
+            <a:r>
+              <a:rPr lang="en-US" dirty="0" err="1"/>
+              <a:t>n_thread</a:t>
+            </a:r>
+            <a:r>
+              <a:rPr lang="en-US" dirty="0"/>
+              <a:t>) does this behavior persist? </a:t>
+            </a:r>
+          </a:p>
+          <a:p>
+            <a:pPr>
+              <a:spcBef>
+                <a:spcPts val="900"/>
+              </a:spcBef>
+              <a:spcAft>
+                <a:spcPts val="900"/>
+              </a:spcAft>
+            </a:pPr>
+            <a:r>
+              <a:rPr lang="en-US" b="1" dirty="0">
+                <a:solidFill>
+                  <a:srgbClr val="273540"/>
+                </a:solidFill>
+                <a:latin typeface="Lato Extended"/>
+              </a:rPr>
+              <a:t>Answer:</a:t>
+            </a:r>
+            <a:r>
+              <a:rPr lang="en-US" dirty="0">
+                <a:solidFill>
+                  <a:srgbClr val="273540"/>
+                </a:solidFill>
+                <a:latin typeface="Lato Extended"/>
+              </a:rPr>
+              <a:t> The </a:t>
+            </a:r>
+            <a:r>
+              <a:rPr lang="en-US" dirty="0" err="1">
+                <a:solidFill>
+                  <a:srgbClr val="273540"/>
+                </a:solidFill>
+                <a:latin typeface="Lato Extended"/>
+              </a:rPr>
+              <a:t>fuction</a:t>
+            </a:r>
+            <a:r>
+              <a:rPr lang="en-US" dirty="0">
+                <a:solidFill>
+                  <a:srgbClr val="273540"/>
+                </a:solidFill>
+                <a:latin typeface="Lato Extended"/>
+              </a:rPr>
+              <a:t> </a:t>
+            </a:r>
+            <a:r>
+              <a:rPr lang="en-US" dirty="0" err="1">
+                <a:solidFill>
+                  <a:srgbClr val="00B050"/>
+                </a:solidFill>
+                <a:latin typeface="Lato Extended"/>
+              </a:rPr>
+              <a:t>threads_compute</a:t>
+            </a:r>
+            <a:r>
+              <a:rPr lang="en-US" dirty="0">
+                <a:solidFill>
+                  <a:srgbClr val="00B050"/>
+                </a:solidFill>
+                <a:latin typeface="Lato Extended"/>
+              </a:rPr>
+              <a:t> </a:t>
+            </a:r>
+            <a:r>
+              <a:rPr lang="en-US" dirty="0">
+                <a:solidFill>
+                  <a:srgbClr val="273540"/>
+                </a:solidFill>
+                <a:latin typeface="Lato Extended"/>
+              </a:rPr>
+              <a:t>gives the best performance. It starts outperforming at </a:t>
+            </a:r>
+            <a:r>
+              <a:rPr lang="en-US" dirty="0" err="1">
+                <a:solidFill>
+                  <a:srgbClr val="273540"/>
+                </a:solidFill>
+                <a:latin typeface="Lato Extended"/>
+              </a:rPr>
+              <a:t>n_proc</a:t>
+            </a:r>
+            <a:r>
+              <a:rPr lang="en-US" dirty="0">
+                <a:solidFill>
+                  <a:srgbClr val="273540"/>
+                </a:solidFill>
+                <a:latin typeface="Lato Extended"/>
+              </a:rPr>
+              <a:t> = </a:t>
+            </a:r>
+            <a:r>
+              <a:rPr lang="en-US" dirty="0" err="1">
+                <a:solidFill>
+                  <a:srgbClr val="273540"/>
+                </a:solidFill>
+                <a:latin typeface="Lato Extended"/>
+              </a:rPr>
+              <a:t>n_thread</a:t>
+            </a:r>
+            <a:r>
+              <a:rPr lang="en-US" dirty="0">
+                <a:solidFill>
+                  <a:srgbClr val="273540"/>
+                </a:solidFill>
+                <a:latin typeface="Lato Extended"/>
+              </a:rPr>
+              <a:t> = </a:t>
+            </a:r>
+            <a:r>
+              <a:rPr lang="en-US" dirty="0">
+                <a:solidFill>
+                  <a:srgbClr val="00B050"/>
+                </a:solidFill>
+                <a:latin typeface="Lato Extended"/>
+              </a:rPr>
+              <a:t>2</a:t>
+            </a:r>
+            <a:r>
+              <a:rPr lang="en-US" dirty="0">
+                <a:solidFill>
+                  <a:srgbClr val="273540"/>
+                </a:solidFill>
+                <a:latin typeface="Lato Extended"/>
+              </a:rPr>
+              <a:t>.</a:t>
+            </a:r>
+            <a:endParaRPr lang="en-US" b="0" i="0" dirty="0">
+              <a:solidFill>
+                <a:srgbClr val="273540"/>
+              </a:solidFill>
+              <a:effectLst/>
+              <a:latin typeface="Lato Extended"/>
+            </a:endParaRPr>
+          </a:p>
+          <a:p>
+            <a:pPr>
+              <a:buNone/>
+            </a:pPr>
+            <a:br>
+              <a:rPr lang="en-US" dirty="0"/>
+            </a:br>
+            <a:endParaRPr lang="en-US" dirty="0"/>
+          </a:p>
+        </p:txBody>
+      </p:sp>
+      <p:sp>
+        <p:nvSpPr>
+          <p:cNvPr id="9" name="TextBox 8">
+            <a:extLst>
+              <a:ext uri="{FF2B5EF4-FFF2-40B4-BE49-F238E27FC236}">
+                <a16:creationId xmlns:a16="http://schemas.microsoft.com/office/drawing/2014/main" id="{3CCCD450-6E67-E17A-35C2-1ABEC6C4026A}"/>
+              </a:ext>
+            </a:extLst>
+          </p:cNvPr>
+          <p:cNvSpPr txBox="1"/>
+          <p:nvPr/>
+        </p:nvSpPr>
+        <p:spPr>
+          <a:xfrm>
+            <a:off x="445712" y="3477922"/>
+            <a:ext cx="3082954" cy="1169551"/>
+          </a:xfrm>
+          <a:prstGeom prst="rect">
+            <a:avLst/>
+          </a:prstGeom>
+          <a:noFill/>
+        </p:spPr>
+        <p:txBody>
+          <a:bodyPr wrap="square" rtlCol="0">
+            <a:spAutoFit/>
+          </a:bodyPr>
+          <a:lstStyle/>
+          <a:p>
+            <a:r>
+              <a:rPr lang="en-US" sz="1400" dirty="0">
+                <a:solidFill>
+                  <a:schemeClr val="tx1">
+                    <a:lumMod val="75000"/>
+                    <a:lumOff val="25000"/>
+                  </a:schemeClr>
+                </a:solidFill>
+              </a:rPr>
+              <a:t>Note: </a:t>
+            </a:r>
+            <a:r>
+              <a:rPr lang="en-US" sz="1400" dirty="0" err="1">
+                <a:solidFill>
+                  <a:schemeClr val="tx1">
+                    <a:lumMod val="75000"/>
+                    <a:lumOff val="25000"/>
+                  </a:schemeClr>
+                </a:solidFill>
+              </a:rPr>
+              <a:t>parallel_compute</a:t>
+            </a:r>
+            <a:r>
+              <a:rPr lang="en-US" sz="1400" dirty="0">
+                <a:solidFill>
+                  <a:schemeClr val="tx1">
+                    <a:lumMod val="75000"/>
+                    <a:lumOff val="25000"/>
+                  </a:schemeClr>
+                </a:solidFill>
+              </a:rPr>
+              <a:t> outperforms as long using extra processors compensate the fork and pipe operations overhead, but starts underperforming when </a:t>
+            </a:r>
+            <a:r>
+              <a:rPr lang="en-US" sz="1400" dirty="0" err="1">
+                <a:solidFill>
+                  <a:schemeClr val="tx1">
+                    <a:lumMod val="75000"/>
+                    <a:lumOff val="25000"/>
+                  </a:schemeClr>
+                </a:solidFill>
+              </a:rPr>
+              <a:t>n_proc</a:t>
+            </a:r>
+            <a:r>
+              <a:rPr lang="en-US" sz="1400" dirty="0">
+                <a:solidFill>
+                  <a:schemeClr val="tx1">
+                    <a:lumMod val="75000"/>
+                    <a:lumOff val="25000"/>
+                  </a:schemeClr>
+                </a:solidFill>
+              </a:rPr>
+              <a:t> exceeds idle processors</a:t>
+            </a:r>
+          </a:p>
+        </p:txBody>
+      </p:sp>
+      <p:graphicFrame>
+        <p:nvGraphicFramePr>
+          <p:cNvPr id="11" name="Chart 10">
+            <a:extLst>
+              <a:ext uri="{FF2B5EF4-FFF2-40B4-BE49-F238E27FC236}">
+                <a16:creationId xmlns:a16="http://schemas.microsoft.com/office/drawing/2014/main" id="{111E0A58-2879-2488-0FA8-74EBFE34CE88}"/>
+              </a:ext>
+            </a:extLst>
+          </p:cNvPr>
+          <p:cNvGraphicFramePr>
+            <a:graphicFrameLocks/>
+          </p:cNvGraphicFramePr>
+          <p:nvPr>
+            <p:extLst>
+              <p:ext uri="{D42A27DB-BD31-4B8C-83A1-F6EECF244321}">
+                <p14:modId xmlns:p14="http://schemas.microsoft.com/office/powerpoint/2010/main" val="1441507353"/>
+              </p:ext>
+            </p:extLst>
+          </p:nvPr>
+        </p:nvGraphicFramePr>
+        <p:xfrm>
+          <a:off x="4518453" y="1105157"/>
+          <a:ext cx="4487788" cy="3874616"/>
+        </p:xfrm>
+        <a:graphic>
+          <a:graphicData uri="http://schemas.openxmlformats.org/drawingml/2006/chart">
+            <c:chart xmlns:c="http://schemas.openxmlformats.org/drawingml/2006/chart" xmlns:r="http://schemas.openxmlformats.org/officeDocument/2006/relationships" r:id="rId3"/>
+          </a:graphicData>
+        </a:graphic>
+      </p:graphicFrame>
+    </p:spTree>
+    <p:extLst>
+      <p:ext uri="{BB962C8B-B14F-4D97-AF65-F5344CB8AC3E}">
+        <p14:creationId xmlns:p14="http://schemas.microsoft.com/office/powerpoint/2010/main" val="33646106"/>
+      </p:ext>
+    </p:extLst>
   </p:cSld>
   <p:clrMapOvr>
     <a:masterClrMapping/>

--- a/project_slides.pptx
+++ b/project_slides.pptx
@@ -5,33 +5,34 @@
     <p:sldMasterId id="2147483648" r:id="rId1"/>
   </p:sldMasterIdLst>
   <p:notesMasterIdLst>
-    <p:notesMasterId r:id="rId26"/>
+    <p:notesMasterId r:id="rId27"/>
   </p:notesMasterIdLst>
   <p:sldIdLst>
     <p:sldId id="256" r:id="rId2"/>
     <p:sldId id="257" r:id="rId3"/>
     <p:sldId id="258" r:id="rId4"/>
     <p:sldId id="259" r:id="rId5"/>
-    <p:sldId id="260" r:id="rId6"/>
-    <p:sldId id="268" r:id="rId7"/>
-    <p:sldId id="269" r:id="rId8"/>
-    <p:sldId id="273" r:id="rId9"/>
-    <p:sldId id="274" r:id="rId10"/>
-    <p:sldId id="261" r:id="rId11"/>
-    <p:sldId id="263" r:id="rId12"/>
-    <p:sldId id="264" r:id="rId13"/>
-    <p:sldId id="265" r:id="rId14"/>
-    <p:sldId id="266" r:id="rId15"/>
-    <p:sldId id="267" r:id="rId16"/>
-    <p:sldId id="262" r:id="rId17"/>
-    <p:sldId id="277" r:id="rId18"/>
-    <p:sldId id="276" r:id="rId19"/>
-    <p:sldId id="275" r:id="rId20"/>
-    <p:sldId id="270" r:id="rId21"/>
-    <p:sldId id="271" r:id="rId22"/>
-    <p:sldId id="278" r:id="rId23"/>
-    <p:sldId id="279" r:id="rId24"/>
-    <p:sldId id="280" r:id="rId25"/>
+    <p:sldId id="281" r:id="rId6"/>
+    <p:sldId id="260" r:id="rId7"/>
+    <p:sldId id="268" r:id="rId8"/>
+    <p:sldId id="269" r:id="rId9"/>
+    <p:sldId id="273" r:id="rId10"/>
+    <p:sldId id="274" r:id="rId11"/>
+    <p:sldId id="261" r:id="rId12"/>
+    <p:sldId id="263" r:id="rId13"/>
+    <p:sldId id="264" r:id="rId14"/>
+    <p:sldId id="265" r:id="rId15"/>
+    <p:sldId id="266" r:id="rId16"/>
+    <p:sldId id="267" r:id="rId17"/>
+    <p:sldId id="262" r:id="rId18"/>
+    <p:sldId id="277" r:id="rId19"/>
+    <p:sldId id="276" r:id="rId20"/>
+    <p:sldId id="275" r:id="rId21"/>
+    <p:sldId id="270" r:id="rId22"/>
+    <p:sldId id="271" r:id="rId23"/>
+    <p:sldId id="278" r:id="rId24"/>
+    <p:sldId id="279" r:id="rId25"/>
+    <p:sldId id="280" r:id="rId26"/>
   </p:sldIdLst>
   <p:sldSz cx="9144000" cy="5143500" type="screen16x9"/>
   <p:notesSz cx="5143500" cy="9144000"/>
@@ -6029,6 +6030,90 @@
   <p:cSld>
     <p:spTree>
       <p:nvGrpSpPr>
+        <p:cNvPr id="1" name=""/>
+        <p:cNvGrpSpPr/>
+        <p:nvPr/>
+      </p:nvGrpSpPr>
+      <p:grpSpPr>
+        <a:xfrm>
+          <a:off x="0" y="0"/>
+          <a:ext cx="0" cy="0"/>
+          <a:chOff x="0" y="0"/>
+          <a:chExt cx="0" cy="0"/>
+        </a:xfrm>
+      </p:grpSpPr>
+      <p:sp>
+        <p:nvSpPr>
+          <p:cNvPr id="2" name="Slide Image Placeholder 1"/>
+          <p:cNvSpPr>
+            <a:spLocks noGrp="1" noRot="1" noChangeAspect="1"/>
+          </p:cNvSpPr>
+          <p:nvPr>
+            <p:ph type="sldImg"/>
+          </p:nvPr>
+        </p:nvSpPr>
+        <p:spPr/>
+      </p:sp>
+      <p:sp>
+        <p:nvSpPr>
+          <p:cNvPr id="3" name="Notes Placeholder 2"/>
+          <p:cNvSpPr>
+            <a:spLocks noGrp="1"/>
+          </p:cNvSpPr>
+          <p:nvPr>
+            <p:ph type="body" idx="1"/>
+          </p:nvPr>
+        </p:nvSpPr>
+        <p:spPr/>
+        <p:txBody>
+          <a:bodyPr/>
+          <a:lstStyle/>
+          <a:p>
+            <a:endParaRPr lang="en-US" dirty="0"/>
+          </a:p>
+        </p:txBody>
+      </p:sp>
+      <p:sp>
+        <p:nvSpPr>
+          <p:cNvPr id="4" name="Slide Number Placeholder 3"/>
+          <p:cNvSpPr>
+            <a:spLocks noGrp="1"/>
+          </p:cNvSpPr>
+          <p:nvPr>
+            <p:ph type="sldNum" sz="quarter" idx="10"/>
+          </p:nvPr>
+        </p:nvSpPr>
+        <p:spPr/>
+        <p:txBody>
+          <a:bodyPr/>
+          <a:lstStyle/>
+          <a:p>
+            <a:fld id="{F7021451-1387-4CA6-816F-3879F97B5CBC}" type="slidenum">
+              <a:rPr lang="en-US"/>
+              <a:t>11</a:t>
+            </a:fld>
+            <a:endParaRPr lang="en-US"/>
+          </a:p>
+        </p:txBody>
+      </p:sp>
+    </p:spTree>
+    <p:extLst>
+      <p:ext uri="{BB962C8B-B14F-4D97-AF65-F5344CB8AC3E}">
+        <p14:creationId xmlns:p14="http://schemas.microsoft.com/office/powerpoint/2010/main" val="1024086991"/>
+      </p:ext>
+    </p:extLst>
+  </p:cSld>
+  <p:clrMapOvr>
+    <a:masterClrMapping/>
+  </p:clrMapOvr>
+</p:notes>
+</file>
+
+<file path=ppt/notesSlides/notesSlide12.xml><?xml version="1.0" encoding="utf-8"?>
+<p:notes xmlns:a="http://schemas.openxmlformats.org/drawingml/2006/main" xmlns:r="http://schemas.openxmlformats.org/officeDocument/2006/relationships" xmlns:p="http://schemas.openxmlformats.org/presentationml/2006/main">
+  <p:cSld>
+    <p:spTree>
+      <p:nvGrpSpPr>
         <p:cNvPr id="1" name="">
           <a:extLst>
             <a:ext uri="{FF2B5EF4-FFF2-40B4-BE49-F238E27FC236}">
@@ -6113,7 +6198,7 @@
           <a:p>
             <a:fld id="{F7021451-1387-4CA6-816F-3879F97B5CBC}" type="slidenum">
               <a:rPr lang="en-US"/>
-              <a:t>11</a:t>
+              <a:t>12</a:t>
             </a:fld>
             <a:endParaRPr lang="en-US"/>
           </a:p>
@@ -6132,7 +6217,7 @@
 </p:notes>
 </file>
 
-<file path=ppt/notesSlides/notesSlide12.xml><?xml version="1.0" encoding="utf-8"?>
+<file path=ppt/notesSlides/notesSlide13.xml><?xml version="1.0" encoding="utf-8"?>
 <p:notes xmlns:a="http://schemas.openxmlformats.org/drawingml/2006/main" xmlns:r="http://schemas.openxmlformats.org/officeDocument/2006/relationships" xmlns:p="http://schemas.openxmlformats.org/presentationml/2006/main">
   <p:cSld>
     <p:spTree>
@@ -6221,7 +6306,7 @@
           <a:p>
             <a:fld id="{F7021451-1387-4CA6-816F-3879F97B5CBC}" type="slidenum">
               <a:rPr lang="en-US"/>
-              <a:t>12</a:t>
+              <a:t>13</a:t>
             </a:fld>
             <a:endParaRPr lang="en-US"/>
           </a:p>
@@ -6240,7 +6325,7 @@
 </p:notes>
 </file>
 
-<file path=ppt/notesSlides/notesSlide13.xml><?xml version="1.0" encoding="utf-8"?>
+<file path=ppt/notesSlides/notesSlide14.xml><?xml version="1.0" encoding="utf-8"?>
 <p:notes xmlns:a="http://schemas.openxmlformats.org/drawingml/2006/main" xmlns:r="http://schemas.openxmlformats.org/officeDocument/2006/relationships" xmlns:p="http://schemas.openxmlformats.org/presentationml/2006/main">
   <p:cSld>
     <p:spTree>
@@ -6329,7 +6414,7 @@
           <a:p>
             <a:fld id="{F7021451-1387-4CA6-816F-3879F97B5CBC}" type="slidenum">
               <a:rPr lang="en-US"/>
-              <a:t>13</a:t>
+              <a:t>14</a:t>
             </a:fld>
             <a:endParaRPr lang="en-US"/>
           </a:p>
@@ -6348,7 +6433,7 @@
 </p:notes>
 </file>
 
-<file path=ppt/notesSlides/notesSlide14.xml><?xml version="1.0" encoding="utf-8"?>
+<file path=ppt/notesSlides/notesSlide15.xml><?xml version="1.0" encoding="utf-8"?>
 <p:notes xmlns:a="http://schemas.openxmlformats.org/drawingml/2006/main" xmlns:r="http://schemas.openxmlformats.org/officeDocument/2006/relationships" xmlns:p="http://schemas.openxmlformats.org/presentationml/2006/main">
   <p:cSld>
     <p:spTree>
@@ -6437,7 +6522,7 @@
           <a:p>
             <a:fld id="{F7021451-1387-4CA6-816F-3879F97B5CBC}" type="slidenum">
               <a:rPr lang="en-US"/>
-              <a:t>14</a:t>
+              <a:t>15</a:t>
             </a:fld>
             <a:endParaRPr lang="en-US"/>
           </a:p>
@@ -6456,7 +6541,7 @@
 </p:notes>
 </file>
 
-<file path=ppt/notesSlides/notesSlide15.xml><?xml version="1.0" encoding="utf-8"?>
+<file path=ppt/notesSlides/notesSlide16.xml><?xml version="1.0" encoding="utf-8"?>
 <p:notes xmlns:a="http://schemas.openxmlformats.org/drawingml/2006/main" xmlns:r="http://schemas.openxmlformats.org/officeDocument/2006/relationships" xmlns:p="http://schemas.openxmlformats.org/presentationml/2006/main">
   <p:cSld>
     <p:spTree>
@@ -6545,7 +6630,7 @@
           <a:p>
             <a:fld id="{F7021451-1387-4CA6-816F-3879F97B5CBC}" type="slidenum">
               <a:rPr lang="en-US"/>
-              <a:t>15</a:t>
+              <a:t>16</a:t>
             </a:fld>
             <a:endParaRPr lang="en-US"/>
           </a:p>
@@ -6564,7 +6649,7 @@
 </p:notes>
 </file>
 
-<file path=ppt/notesSlides/notesSlide16.xml><?xml version="1.0" encoding="utf-8"?>
+<file path=ppt/notesSlides/notesSlide17.xml><?xml version="1.0" encoding="utf-8"?>
 <p:notes xmlns:a="http://schemas.openxmlformats.org/drawingml/2006/main" xmlns:r="http://schemas.openxmlformats.org/officeDocument/2006/relationships" xmlns:p="http://schemas.openxmlformats.org/presentationml/2006/main">
   <p:cSld>
     <p:spTree>
@@ -6629,7 +6714,7 @@
           <a:p>
             <a:fld id="{F7021451-1387-4CA6-816F-3879F97B5CBC}" type="slidenum">
               <a:rPr lang="en-US"/>
-              <a:t>16</a:t>
+              <a:t>17</a:t>
             </a:fld>
             <a:endParaRPr lang="en-US"/>
           </a:p>
@@ -6648,7 +6733,7 @@
 </p:notes>
 </file>
 
-<file path=ppt/notesSlides/notesSlide17.xml><?xml version="1.0" encoding="utf-8"?>
+<file path=ppt/notesSlides/notesSlide18.xml><?xml version="1.0" encoding="utf-8"?>
 <p:notes xmlns:a="http://schemas.openxmlformats.org/drawingml/2006/main" xmlns:r="http://schemas.openxmlformats.org/officeDocument/2006/relationships" xmlns:p="http://schemas.openxmlformats.org/presentationml/2006/main">
   <p:cSld>
     <p:spTree>
@@ -6737,7 +6822,7 @@
           <a:p>
             <a:fld id="{F7021451-1387-4CA6-816F-3879F97B5CBC}" type="slidenum">
               <a:rPr lang="en-US"/>
-              <a:t>17</a:t>
+              <a:t>18</a:t>
             </a:fld>
             <a:endParaRPr lang="en-US"/>
           </a:p>
@@ -6756,7 +6841,7 @@
 </p:notes>
 </file>
 
-<file path=ppt/notesSlides/notesSlide18.xml><?xml version="1.0" encoding="utf-8"?>
+<file path=ppt/notesSlides/notesSlide19.xml><?xml version="1.0" encoding="utf-8"?>
 <p:notes xmlns:a="http://schemas.openxmlformats.org/drawingml/2006/main" xmlns:r="http://schemas.openxmlformats.org/officeDocument/2006/relationships" xmlns:p="http://schemas.openxmlformats.org/presentationml/2006/main">
   <p:cSld>
     <p:spTree>
@@ -6845,7 +6930,7 @@
           <a:p>
             <a:fld id="{F7021451-1387-4CA6-816F-3879F97B5CBC}" type="slidenum">
               <a:rPr lang="en-US"/>
-              <a:t>18</a:t>
+              <a:t>19</a:t>
             </a:fld>
             <a:endParaRPr lang="en-US"/>
           </a:p>
@@ -6855,90 +6940,6 @@
     <p:extLst>
       <p:ext uri="{BB962C8B-B14F-4D97-AF65-F5344CB8AC3E}">
         <p14:creationId xmlns:p14="http://schemas.microsoft.com/office/powerpoint/2010/main" val="1212680079"/>
-      </p:ext>
-    </p:extLst>
-  </p:cSld>
-  <p:clrMapOvr>
-    <a:masterClrMapping/>
-  </p:clrMapOvr>
-</p:notes>
-</file>
-
-<file path=ppt/notesSlides/notesSlide19.xml><?xml version="1.0" encoding="utf-8"?>
-<p:notes xmlns:a="http://schemas.openxmlformats.org/drawingml/2006/main" xmlns:r="http://schemas.openxmlformats.org/officeDocument/2006/relationships" xmlns:p="http://schemas.openxmlformats.org/presentationml/2006/main">
-  <p:cSld>
-    <p:spTree>
-      <p:nvGrpSpPr>
-        <p:cNvPr id="1" name=""/>
-        <p:cNvGrpSpPr/>
-        <p:nvPr/>
-      </p:nvGrpSpPr>
-      <p:grpSpPr>
-        <a:xfrm>
-          <a:off x="0" y="0"/>
-          <a:ext cx="0" cy="0"/>
-          <a:chOff x="0" y="0"/>
-          <a:chExt cx="0" cy="0"/>
-        </a:xfrm>
-      </p:grpSpPr>
-      <p:sp>
-        <p:nvSpPr>
-          <p:cNvPr id="2" name="Slide Image Placeholder 1"/>
-          <p:cNvSpPr>
-            <a:spLocks noGrp="1" noRot="1" noChangeAspect="1"/>
-          </p:cNvSpPr>
-          <p:nvPr>
-            <p:ph type="sldImg"/>
-          </p:nvPr>
-        </p:nvSpPr>
-        <p:spPr/>
-      </p:sp>
-      <p:sp>
-        <p:nvSpPr>
-          <p:cNvPr id="3" name="Notes Placeholder 2"/>
-          <p:cNvSpPr>
-            <a:spLocks noGrp="1"/>
-          </p:cNvSpPr>
-          <p:nvPr>
-            <p:ph type="body" idx="1"/>
-          </p:nvPr>
-        </p:nvSpPr>
-        <p:spPr/>
-        <p:txBody>
-          <a:bodyPr/>
-          <a:lstStyle/>
-          <a:p>
-            <a:endParaRPr lang="en-US" dirty="0"/>
-          </a:p>
-        </p:txBody>
-      </p:sp>
-      <p:sp>
-        <p:nvSpPr>
-          <p:cNvPr id="4" name="Slide Number Placeholder 3"/>
-          <p:cNvSpPr>
-            <a:spLocks noGrp="1"/>
-          </p:cNvSpPr>
-          <p:nvPr>
-            <p:ph type="sldNum" sz="quarter" idx="10"/>
-          </p:nvPr>
-        </p:nvSpPr>
-        <p:spPr/>
-        <p:txBody>
-          <a:bodyPr/>
-          <a:lstStyle/>
-          <a:p>
-            <a:fld id="{F7021451-1387-4CA6-816F-3879F97B5CBC}" type="slidenum">
-              <a:rPr lang="en-US"/>
-              <a:t>19</a:t>
-            </a:fld>
-            <a:endParaRPr lang="en-US"/>
-          </a:p>
-        </p:txBody>
-      </p:sp>
-    </p:spTree>
-    <p:extLst>
-      <p:ext uri="{BB962C8B-B14F-4D97-AF65-F5344CB8AC3E}">
-        <p14:creationId xmlns:p14="http://schemas.microsoft.com/office/powerpoint/2010/main" val="1024086991"/>
       </p:ext>
     </p:extLst>
   </p:cSld>
@@ -7037,6 +7038,90 @@
   <p:cSld>
     <p:spTree>
       <p:nvGrpSpPr>
+        <p:cNvPr id="1" name=""/>
+        <p:cNvGrpSpPr/>
+        <p:nvPr/>
+      </p:nvGrpSpPr>
+      <p:grpSpPr>
+        <a:xfrm>
+          <a:off x="0" y="0"/>
+          <a:ext cx="0" cy="0"/>
+          <a:chOff x="0" y="0"/>
+          <a:chExt cx="0" cy="0"/>
+        </a:xfrm>
+      </p:grpSpPr>
+      <p:sp>
+        <p:nvSpPr>
+          <p:cNvPr id="2" name="Slide Image Placeholder 1"/>
+          <p:cNvSpPr>
+            <a:spLocks noGrp="1" noRot="1" noChangeAspect="1"/>
+          </p:cNvSpPr>
+          <p:nvPr>
+            <p:ph type="sldImg"/>
+          </p:nvPr>
+        </p:nvSpPr>
+        <p:spPr/>
+      </p:sp>
+      <p:sp>
+        <p:nvSpPr>
+          <p:cNvPr id="3" name="Notes Placeholder 2"/>
+          <p:cNvSpPr>
+            <a:spLocks noGrp="1"/>
+          </p:cNvSpPr>
+          <p:nvPr>
+            <p:ph type="body" idx="1"/>
+          </p:nvPr>
+        </p:nvSpPr>
+        <p:spPr/>
+        <p:txBody>
+          <a:bodyPr/>
+          <a:lstStyle/>
+          <a:p>
+            <a:endParaRPr lang="en-US" dirty="0"/>
+          </a:p>
+        </p:txBody>
+      </p:sp>
+      <p:sp>
+        <p:nvSpPr>
+          <p:cNvPr id="4" name="Slide Number Placeholder 3"/>
+          <p:cNvSpPr>
+            <a:spLocks noGrp="1"/>
+          </p:cNvSpPr>
+          <p:nvPr>
+            <p:ph type="sldNum" sz="quarter" idx="10"/>
+          </p:nvPr>
+        </p:nvSpPr>
+        <p:spPr/>
+        <p:txBody>
+          <a:bodyPr/>
+          <a:lstStyle/>
+          <a:p>
+            <a:fld id="{F7021451-1387-4CA6-816F-3879F97B5CBC}" type="slidenum">
+              <a:rPr lang="en-US"/>
+              <a:t>20</a:t>
+            </a:fld>
+            <a:endParaRPr lang="en-US"/>
+          </a:p>
+        </p:txBody>
+      </p:sp>
+    </p:spTree>
+    <p:extLst>
+      <p:ext uri="{BB962C8B-B14F-4D97-AF65-F5344CB8AC3E}">
+        <p14:creationId xmlns:p14="http://schemas.microsoft.com/office/powerpoint/2010/main" val="1024086991"/>
+      </p:ext>
+    </p:extLst>
+  </p:cSld>
+  <p:clrMapOvr>
+    <a:masterClrMapping/>
+  </p:clrMapOvr>
+</p:notes>
+</file>
+
+<file path=ppt/notesSlides/notesSlide21.xml><?xml version="1.0" encoding="utf-8"?>
+<p:notes xmlns:a="http://schemas.openxmlformats.org/drawingml/2006/main" xmlns:r="http://schemas.openxmlformats.org/officeDocument/2006/relationships" xmlns:p="http://schemas.openxmlformats.org/presentationml/2006/main">
+  <p:cSld>
+    <p:spTree>
+      <p:nvGrpSpPr>
         <p:cNvPr id="1" name="">
           <a:extLst>
             <a:ext uri="{FF2B5EF4-FFF2-40B4-BE49-F238E27FC236}">
@@ -7168,7 +7253,7 @@
                 <a:tabLst/>
                 <a:defRPr/>
               </a:pPr>
-              <a:t>20</a:t>
+              <a:t>21</a:t>
             </a:fld>
             <a:endParaRPr kumimoji="0" lang="en-US" sz="1800" b="0" i="0" u="none" strike="noStrike" kern="1200" cap="none" spc="0" normalizeH="0" baseline="0" noProof="0">
               <a:ln>
@@ -7200,7 +7285,7 @@
 </p:notes>
 </file>
 
-<file path=ppt/notesSlides/notesSlide21.xml><?xml version="1.0" encoding="utf-8"?>
+<file path=ppt/notesSlides/notesSlide22.xml><?xml version="1.0" encoding="utf-8"?>
 <p:notes xmlns:a="http://schemas.openxmlformats.org/drawingml/2006/main" xmlns:r="http://schemas.openxmlformats.org/officeDocument/2006/relationships" xmlns:p="http://schemas.openxmlformats.org/presentationml/2006/main">
   <p:cSld>
     <p:spTree>
@@ -7289,7 +7374,7 @@
           <a:p>
             <a:fld id="{F7021451-1387-4CA6-816F-3879F97B5CBC}" type="slidenum">
               <a:rPr lang="en-US"/>
-              <a:t>21</a:t>
+              <a:t>22</a:t>
             </a:fld>
             <a:endParaRPr lang="en-US"/>
           </a:p>
@@ -7308,7 +7393,7 @@
 </p:notes>
 </file>
 
-<file path=ppt/notesSlides/notesSlide22.xml><?xml version="1.0" encoding="utf-8"?>
+<file path=ppt/notesSlides/notesSlide23.xml><?xml version="1.0" encoding="utf-8"?>
 <p:notes xmlns:a="http://schemas.openxmlformats.org/drawingml/2006/main" xmlns:r="http://schemas.openxmlformats.org/officeDocument/2006/relationships" xmlns:p="http://schemas.openxmlformats.org/presentationml/2006/main">
   <p:cSld>
     <p:spTree>
@@ -7397,7 +7482,7 @@
           <a:p>
             <a:fld id="{F7021451-1387-4CA6-816F-3879F97B5CBC}" type="slidenum">
               <a:rPr lang="en-US"/>
-              <a:t>22</a:t>
+              <a:t>23</a:t>
             </a:fld>
             <a:endParaRPr lang="en-US"/>
           </a:p>
@@ -7416,7 +7501,7 @@
 </p:notes>
 </file>
 
-<file path=ppt/notesSlides/notesSlide23.xml><?xml version="1.0" encoding="utf-8"?>
+<file path=ppt/notesSlides/notesSlide24.xml><?xml version="1.0" encoding="utf-8"?>
 <p:notes xmlns:a="http://schemas.openxmlformats.org/drawingml/2006/main" xmlns:r="http://schemas.openxmlformats.org/officeDocument/2006/relationships" xmlns:p="http://schemas.openxmlformats.org/presentationml/2006/main">
   <p:cSld>
     <p:spTree>
@@ -7505,7 +7590,7 @@
           <a:p>
             <a:fld id="{F7021451-1387-4CA6-816F-3879F97B5CBC}" type="slidenum">
               <a:rPr lang="en-US"/>
-              <a:t>23</a:t>
+              <a:t>24</a:t>
             </a:fld>
             <a:endParaRPr lang="en-US"/>
           </a:p>
@@ -7524,7 +7609,7 @@
 </p:notes>
 </file>
 
-<file path=ppt/notesSlides/notesSlide24.xml><?xml version="1.0" encoding="utf-8"?>
+<file path=ppt/notesSlides/notesSlide25.xml><?xml version="1.0" encoding="utf-8"?>
 <p:notes xmlns:a="http://schemas.openxmlformats.org/drawingml/2006/main" xmlns:r="http://schemas.openxmlformats.org/officeDocument/2006/relationships" xmlns:p="http://schemas.openxmlformats.org/presentationml/2006/main">
   <p:cSld>
     <p:spTree>
@@ -7613,7 +7698,7 @@
           <a:p>
             <a:fld id="{F7021451-1387-4CA6-816F-3879F97B5CBC}" type="slidenum">
               <a:rPr lang="en-US"/>
-              <a:t>24</a:t>
+              <a:t>25</a:t>
             </a:fld>
             <a:endParaRPr lang="en-US"/>
           </a:p>
@@ -7805,6 +7890,114 @@
   <p:cSld>
     <p:spTree>
       <p:nvGrpSpPr>
+        <p:cNvPr id="1" name="">
+          <a:extLst>
+            <a:ext uri="{FF2B5EF4-FFF2-40B4-BE49-F238E27FC236}">
+              <a16:creationId xmlns:a16="http://schemas.microsoft.com/office/drawing/2014/main" id="{61A0505C-66A2-4B2C-B123-617913FC3E62}"/>
+            </a:ext>
+          </a:extLst>
+        </p:cNvPr>
+        <p:cNvGrpSpPr/>
+        <p:nvPr/>
+      </p:nvGrpSpPr>
+      <p:grpSpPr>
+        <a:xfrm>
+          <a:off x="0" y="0"/>
+          <a:ext cx="0" cy="0"/>
+          <a:chOff x="0" y="0"/>
+          <a:chExt cx="0" cy="0"/>
+        </a:xfrm>
+      </p:grpSpPr>
+      <p:sp>
+        <p:nvSpPr>
+          <p:cNvPr id="2" name="Slide Image Placeholder 1">
+            <a:extLst>
+              <a:ext uri="{FF2B5EF4-FFF2-40B4-BE49-F238E27FC236}">
+                <a16:creationId xmlns:a16="http://schemas.microsoft.com/office/drawing/2014/main" id="{6A3F7420-4633-113D-23B8-B239C3687EB6}"/>
+              </a:ext>
+            </a:extLst>
+          </p:cNvPr>
+          <p:cNvSpPr>
+            <a:spLocks noGrp="1" noRot="1" noChangeAspect="1"/>
+          </p:cNvSpPr>
+          <p:nvPr>
+            <p:ph type="sldImg"/>
+          </p:nvPr>
+        </p:nvSpPr>
+        <p:spPr/>
+      </p:sp>
+      <p:sp>
+        <p:nvSpPr>
+          <p:cNvPr id="3" name="Notes Placeholder 2">
+            <a:extLst>
+              <a:ext uri="{FF2B5EF4-FFF2-40B4-BE49-F238E27FC236}">
+                <a16:creationId xmlns:a16="http://schemas.microsoft.com/office/drawing/2014/main" id="{4450EC84-4735-1CD7-494F-0EB4CDEF614B}"/>
+              </a:ext>
+            </a:extLst>
+          </p:cNvPr>
+          <p:cNvSpPr>
+            <a:spLocks noGrp="1"/>
+          </p:cNvSpPr>
+          <p:nvPr>
+            <p:ph type="body" idx="1"/>
+          </p:nvPr>
+        </p:nvSpPr>
+        <p:spPr/>
+        <p:txBody>
+          <a:bodyPr/>
+          <a:lstStyle/>
+          <a:p>
+            <a:endParaRPr lang="en-US" dirty="0"/>
+          </a:p>
+        </p:txBody>
+      </p:sp>
+      <p:sp>
+        <p:nvSpPr>
+          <p:cNvPr id="4" name="Slide Number Placeholder 3">
+            <a:extLst>
+              <a:ext uri="{FF2B5EF4-FFF2-40B4-BE49-F238E27FC236}">
+                <a16:creationId xmlns:a16="http://schemas.microsoft.com/office/drawing/2014/main" id="{37D63884-63FE-582C-1716-F2F5C19B989E}"/>
+              </a:ext>
+            </a:extLst>
+          </p:cNvPr>
+          <p:cNvSpPr>
+            <a:spLocks noGrp="1"/>
+          </p:cNvSpPr>
+          <p:nvPr>
+            <p:ph type="sldNum" sz="quarter" idx="10"/>
+          </p:nvPr>
+        </p:nvSpPr>
+        <p:spPr/>
+        <p:txBody>
+          <a:bodyPr/>
+          <a:lstStyle/>
+          <a:p>
+            <a:fld id="{F7021451-1387-4CA6-816F-3879F97B5CBC}" type="slidenum">
+              <a:rPr lang="en-US"/>
+              <a:t>5</a:t>
+            </a:fld>
+            <a:endParaRPr lang="en-US"/>
+          </a:p>
+        </p:txBody>
+      </p:sp>
+    </p:spTree>
+    <p:extLst>
+      <p:ext uri="{BB962C8B-B14F-4D97-AF65-F5344CB8AC3E}">
+        <p14:creationId xmlns:p14="http://schemas.microsoft.com/office/powerpoint/2010/main" val="681922992"/>
+      </p:ext>
+    </p:extLst>
+  </p:cSld>
+  <p:clrMapOvr>
+    <a:masterClrMapping/>
+  </p:clrMapOvr>
+</p:notes>
+</file>
+
+<file path=ppt/notesSlides/notesSlide6.xml><?xml version="1.0" encoding="utf-8"?>
+<p:notes xmlns:a="http://schemas.openxmlformats.org/drawingml/2006/main" xmlns:r="http://schemas.openxmlformats.org/officeDocument/2006/relationships" xmlns:p="http://schemas.openxmlformats.org/presentationml/2006/main">
+  <p:cSld>
+    <p:spTree>
+      <p:nvGrpSpPr>
         <p:cNvPr id="1" name=""/>
         <p:cNvGrpSpPr/>
         <p:nvPr/>
@@ -7865,7 +8058,7 @@
           <a:p>
             <a:fld id="{F7021451-1387-4CA6-816F-3879F97B5CBC}" type="slidenum">
               <a:rPr lang="en-US"/>
-              <a:t>5</a:t>
+              <a:t>6</a:t>
             </a:fld>
             <a:endParaRPr lang="en-US"/>
           </a:p>
@@ -7884,7 +8077,7 @@
 </p:notes>
 </file>
 
-<file path=ppt/notesSlides/notesSlide6.xml><?xml version="1.0" encoding="utf-8"?>
+<file path=ppt/notesSlides/notesSlide7.xml><?xml version="1.0" encoding="utf-8"?>
 <p:notes xmlns:a="http://schemas.openxmlformats.org/drawingml/2006/main" xmlns:r="http://schemas.openxmlformats.org/officeDocument/2006/relationships" xmlns:p="http://schemas.openxmlformats.org/presentationml/2006/main">
   <p:cSld>
     <p:spTree>
@@ -7973,7 +8166,7 @@
           <a:p>
             <a:fld id="{F7021451-1387-4CA6-816F-3879F97B5CBC}" type="slidenum">
               <a:rPr lang="en-US"/>
-              <a:t>6</a:t>
+              <a:t>7</a:t>
             </a:fld>
             <a:endParaRPr lang="en-US"/>
           </a:p>
@@ -7992,7 +8185,7 @@
 </p:notes>
 </file>
 
-<file path=ppt/notesSlides/notesSlide7.xml><?xml version="1.0" encoding="utf-8"?>
+<file path=ppt/notesSlides/notesSlide8.xml><?xml version="1.0" encoding="utf-8"?>
 <p:notes xmlns:a="http://schemas.openxmlformats.org/drawingml/2006/main" xmlns:r="http://schemas.openxmlformats.org/officeDocument/2006/relationships" xmlns:p="http://schemas.openxmlformats.org/presentationml/2006/main">
   <p:cSld>
     <p:spTree>
@@ -8057,7 +8250,7 @@
           <a:p>
             <a:fld id="{F7021451-1387-4CA6-816F-3879F97B5CBC}" type="slidenum">
               <a:rPr lang="en-US"/>
-              <a:t>7</a:t>
+              <a:t>8</a:t>
             </a:fld>
             <a:endParaRPr lang="en-US"/>
           </a:p>
@@ -8076,7 +8269,7 @@
 </p:notes>
 </file>
 
-<file path=ppt/notesSlides/notesSlide8.xml><?xml version="1.0" encoding="utf-8"?>
+<file path=ppt/notesSlides/notesSlide9.xml><?xml version="1.0" encoding="utf-8"?>
 <p:notes xmlns:a="http://schemas.openxmlformats.org/drawingml/2006/main" xmlns:r="http://schemas.openxmlformats.org/officeDocument/2006/relationships" xmlns:p="http://schemas.openxmlformats.org/presentationml/2006/main">
   <p:cSld>
     <p:spTree>
@@ -8165,7 +8358,7 @@
           <a:p>
             <a:fld id="{F7021451-1387-4CA6-816F-3879F97B5CBC}" type="slidenum">
               <a:rPr lang="en-US"/>
-              <a:t>8</a:t>
+              <a:t>9</a:t>
             </a:fld>
             <a:endParaRPr lang="en-US"/>
           </a:p>
@@ -8175,90 +8368,6 @@
     <p:extLst>
       <p:ext uri="{BB962C8B-B14F-4D97-AF65-F5344CB8AC3E}">
         <p14:creationId xmlns:p14="http://schemas.microsoft.com/office/powerpoint/2010/main" val="3630224614"/>
-      </p:ext>
-    </p:extLst>
-  </p:cSld>
-  <p:clrMapOvr>
-    <a:masterClrMapping/>
-  </p:clrMapOvr>
-</p:notes>
-</file>
-
-<file path=ppt/notesSlides/notesSlide9.xml><?xml version="1.0" encoding="utf-8"?>
-<p:notes xmlns:a="http://schemas.openxmlformats.org/drawingml/2006/main" xmlns:r="http://schemas.openxmlformats.org/officeDocument/2006/relationships" xmlns:p="http://schemas.openxmlformats.org/presentationml/2006/main">
-  <p:cSld>
-    <p:spTree>
-      <p:nvGrpSpPr>
-        <p:cNvPr id="1" name=""/>
-        <p:cNvGrpSpPr/>
-        <p:nvPr/>
-      </p:nvGrpSpPr>
-      <p:grpSpPr>
-        <a:xfrm>
-          <a:off x="0" y="0"/>
-          <a:ext cx="0" cy="0"/>
-          <a:chOff x="0" y="0"/>
-          <a:chExt cx="0" cy="0"/>
-        </a:xfrm>
-      </p:grpSpPr>
-      <p:sp>
-        <p:nvSpPr>
-          <p:cNvPr id="2" name="Slide Image Placeholder 1"/>
-          <p:cNvSpPr>
-            <a:spLocks noGrp="1" noRot="1" noChangeAspect="1"/>
-          </p:cNvSpPr>
-          <p:nvPr>
-            <p:ph type="sldImg"/>
-          </p:nvPr>
-        </p:nvSpPr>
-        <p:spPr/>
-      </p:sp>
-      <p:sp>
-        <p:nvSpPr>
-          <p:cNvPr id="3" name="Notes Placeholder 2"/>
-          <p:cNvSpPr>
-            <a:spLocks noGrp="1"/>
-          </p:cNvSpPr>
-          <p:nvPr>
-            <p:ph type="body" idx="1"/>
-          </p:nvPr>
-        </p:nvSpPr>
-        <p:spPr/>
-        <p:txBody>
-          <a:bodyPr/>
-          <a:lstStyle/>
-          <a:p>
-            <a:endParaRPr lang="en-US" dirty="0"/>
-          </a:p>
-        </p:txBody>
-      </p:sp>
-      <p:sp>
-        <p:nvSpPr>
-          <p:cNvPr id="4" name="Slide Number Placeholder 3"/>
-          <p:cNvSpPr>
-            <a:spLocks noGrp="1"/>
-          </p:cNvSpPr>
-          <p:nvPr>
-            <p:ph type="sldNum" sz="quarter" idx="10"/>
-          </p:nvPr>
-        </p:nvSpPr>
-        <p:spPr/>
-        <p:txBody>
-          <a:bodyPr/>
-          <a:lstStyle/>
-          <a:p>
-            <a:fld id="{F7021451-1387-4CA6-816F-3879F97B5CBC}" type="slidenum">
-              <a:rPr lang="en-US"/>
-              <a:t>9</a:t>
-            </a:fld>
-            <a:endParaRPr lang="en-US"/>
-          </a:p>
-        </p:txBody>
-      </p:sp>
-    </p:spTree>
-    <p:extLst>
-      <p:ext uri="{BB962C8B-B14F-4D97-AF65-F5344CB8AC3E}">
-        <p14:creationId xmlns:p14="http://schemas.microsoft.com/office/powerpoint/2010/main" val="1024086991"/>
       </p:ext>
     </p:extLst>
   </p:cSld>
@@ -8913,6 +9022,525 @@
 
 <file path=ppt/slides/slide10.xml><?xml version="1.0" encoding="utf-8"?>
 <p:sld xmlns:a="http://schemas.openxmlformats.org/drawingml/2006/main" xmlns:r="http://schemas.openxmlformats.org/officeDocument/2006/relationships" xmlns:p="http://schemas.openxmlformats.org/presentationml/2006/main">
+  <p:cSld>
+    <p:spTree>
+      <p:nvGrpSpPr>
+        <p:cNvPr id="1" name=""/>
+        <p:cNvGrpSpPr/>
+        <p:nvPr/>
+      </p:nvGrpSpPr>
+      <p:grpSpPr>
+        <a:xfrm>
+          <a:off x="0" y="0"/>
+          <a:ext cx="0" cy="0"/>
+          <a:chOff x="0" y="0"/>
+          <a:chExt cx="0" cy="0"/>
+        </a:xfrm>
+      </p:grpSpPr>
+      <p:sp>
+        <p:nvSpPr>
+          <p:cNvPr id="2" name="Shape 0"/>
+          <p:cNvSpPr/>
+          <p:nvPr/>
+        </p:nvSpPr>
+        <p:spPr>
+          <a:xfrm>
+            <a:off x="0" y="0"/>
+            <a:ext cx="9144000" cy="777240"/>
+          </a:xfrm>
+          <a:prstGeom prst="rect">
+            <a:avLst/>
+          </a:prstGeom>
+          <a:solidFill>
+            <a:srgbClr val="00A896"/>
+          </a:solidFill>
+          <a:ln w="12700">
+            <a:solidFill>
+              <a:srgbClr val="00A896"/>
+            </a:solidFill>
+            <a:prstDash val="solid"/>
+          </a:ln>
+        </p:spPr>
+        <p:txBody>
+          <a:bodyPr/>
+          <a:lstStyle/>
+          <a:p>
+            <a:endParaRPr lang="en-US"/>
+          </a:p>
+        </p:txBody>
+      </p:sp>
+      <p:sp>
+        <p:nvSpPr>
+          <p:cNvPr id="3" name="Text 1"/>
+          <p:cNvSpPr/>
+          <p:nvPr/>
+        </p:nvSpPr>
+        <p:spPr>
+          <a:xfrm>
+            <a:off x="365760" y="0"/>
+            <a:ext cx="8412480" cy="777240"/>
+          </a:xfrm>
+          <a:prstGeom prst="rect">
+            <a:avLst/>
+          </a:prstGeom>
+          <a:noFill/>
+          <a:ln/>
+        </p:spPr>
+        <p:txBody>
+          <a:bodyPr wrap="square" lIns="0" tIns="0" rIns="0" bIns="0" rtlCol="0" anchor="ctr"/>
+          <a:lstStyle/>
+          <a:p>
+            <a:pPr marL="0" indent="0">
+              <a:buNone/>
+            </a:pPr>
+            <a:r>
+              <a:rPr lang="en-US" sz="2400" b="1" dirty="0">
+                <a:solidFill>
+                  <a:srgbClr val="FFFFFF"/>
+                </a:solidFill>
+                <a:latin typeface="Calibri" pitchFamily="34" charset="0"/>
+                <a:ea typeface="Calibri" pitchFamily="34" charset="-122"/>
+                <a:cs typeface="Calibri" pitchFamily="34" charset="-120"/>
+              </a:rPr>
+              <a:t>02  parallel_compute — Pseudo-code</a:t>
+            </a:r>
+            <a:endParaRPr lang="en-US" sz="2400" dirty="0"/>
+          </a:p>
+        </p:txBody>
+      </p:sp>
+      <p:sp>
+        <p:nvSpPr>
+          <p:cNvPr id="4" name="Shape 2"/>
+          <p:cNvSpPr/>
+          <p:nvPr/>
+        </p:nvSpPr>
+        <p:spPr>
+          <a:xfrm>
+            <a:off x="320040" y="914400"/>
+            <a:ext cx="8503920" cy="3977640"/>
+          </a:xfrm>
+          <a:prstGeom prst="rect">
+            <a:avLst/>
+          </a:prstGeom>
+          <a:solidFill>
+            <a:srgbClr val="111D2A"/>
+          </a:solidFill>
+          <a:ln w="12700">
+            <a:solidFill>
+              <a:srgbClr val="3D5166"/>
+            </a:solidFill>
+            <a:prstDash val="solid"/>
+          </a:ln>
+          <a:effectLst>
+            <a:outerShdw blurRad="101600" dist="38100" dir="8100000" algn="bl" rotWithShape="0">
+              <a:srgbClr val="000000">
+                <a:alpha val="30000"/>
+              </a:srgbClr>
+            </a:outerShdw>
+          </a:effectLst>
+        </p:spPr>
+        <p:txBody>
+          <a:bodyPr/>
+          <a:lstStyle/>
+          <a:p>
+            <a:endParaRPr lang="en-US"/>
+          </a:p>
+        </p:txBody>
+      </p:sp>
+      <p:sp>
+        <p:nvSpPr>
+          <p:cNvPr id="5" name="Text 3"/>
+          <p:cNvSpPr/>
+          <p:nvPr/>
+        </p:nvSpPr>
+        <p:spPr>
+          <a:xfrm>
+            <a:off x="502920" y="1005840"/>
+            <a:ext cx="8229600" cy="3749040"/>
+          </a:xfrm>
+          <a:prstGeom prst="rect">
+            <a:avLst/>
+          </a:prstGeom>
+          <a:noFill/>
+          <a:ln/>
+        </p:spPr>
+        <p:txBody>
+          <a:bodyPr wrap="square" rtlCol="0" anchor="ctr"/>
+          <a:lstStyle/>
+          <a:p>
+            <a:pPr marL="0" indent="0" algn="l">
+              <a:buNone/>
+            </a:pPr>
+            <a:r>
+              <a:rPr lang="en-US" sz="1150" b="1" dirty="0">
+                <a:solidFill>
+                  <a:srgbClr val="FFB347"/>
+                </a:solidFill>
+                <a:latin typeface="Consolas" pitchFamily="34" charset="0"/>
+                <a:ea typeface="Consolas" pitchFamily="34" charset="-122"/>
+                <a:cs typeface="Consolas" pitchFamily="34" charset="-120"/>
+              </a:rPr>
+              <a:t>FUNCTION </a:t>
+            </a:r>
+            <a:r>
+              <a:rPr lang="en-US" sz="1150" b="1" dirty="0">
+                <a:solidFill>
+                  <a:srgbClr val="00C9A7"/>
+                </a:solidFill>
+                <a:latin typeface="Consolas" pitchFamily="34" charset="0"/>
+                <a:ea typeface="Consolas" pitchFamily="34" charset="-122"/>
+                <a:cs typeface="Consolas" pitchFamily="34" charset="-120"/>
+              </a:rPr>
+              <a:t>parallel_compute</a:t>
+            </a:r>
+            <a:r>
+              <a:rPr lang="en-US" sz="1150" dirty="0">
+                <a:solidFill>
+                  <a:srgbClr val="FFFFFF"/>
+                </a:solidFill>
+                <a:latin typeface="Consolas" pitchFamily="34" charset="0"/>
+                <a:ea typeface="Consolas" pitchFamily="34" charset="-122"/>
+                <a:cs typeface="Consolas" pitchFamily="34" charset="-120"/>
+              </a:rPr>
+              <a:t>(filepath, n_proc, f):
+    nums  ← </a:t>
+            </a:r>
+            <a:r>
+              <a:rPr lang="en-US" sz="1150" dirty="0">
+                <a:solidFill>
+                  <a:srgbClr val="00C9A7"/>
+                </a:solidFill>
+                <a:latin typeface="Consolas" pitchFamily="34" charset="0"/>
+                <a:ea typeface="Consolas" pitchFamily="34" charset="-122"/>
+                <a:cs typeface="Consolas" pitchFamily="34" charset="-120"/>
+              </a:rPr>
+              <a:t>read_numbers</a:t>
+            </a:r>
+            <a:r>
+              <a:rPr lang="en-US" sz="1150" dirty="0">
+                <a:solidFill>
+                  <a:srgbClr val="FFFFFF"/>
+                </a:solidFill>
+                <a:latin typeface="Consolas" pitchFamily="34" charset="0"/>
+                <a:ea typeface="Consolas" pitchFamily="34" charset="-122"/>
+                <a:cs typeface="Consolas" pitchFamily="34" charset="-120"/>
+              </a:rPr>
+              <a:t>(filepath)
+    chunk ← len(nums) / n_proc
+    remainder ← len(nums) % n_proc
+</a:t>
+            </a:r>
+            <a:r>
+              <a:rPr lang="en-US" sz="1150" dirty="0">
+                <a:solidFill>
+                  <a:srgbClr val="FFB347"/>
+                </a:solidFill>
+                <a:latin typeface="Consolas" pitchFamily="34" charset="0"/>
+                <a:ea typeface="Consolas" pitchFamily="34" charset="-122"/>
+                <a:cs typeface="Consolas" pitchFamily="34" charset="-120"/>
+              </a:rPr>
+              <a:t>    FOR </a:t>
+            </a:r>
+            <a:r>
+              <a:rPr lang="en-US" sz="1150" dirty="0">
+                <a:solidFill>
+                  <a:srgbClr val="FFFFFF"/>
+                </a:solidFill>
+                <a:latin typeface="Consolas" pitchFamily="34" charset="0"/>
+                <a:ea typeface="Consolas" pitchFamily="34" charset="-122"/>
+                <a:cs typeface="Consolas" pitchFamily="34" charset="-120"/>
+              </a:rPr>
+              <a:t>i = 0 </a:t>
+            </a:r>
+            <a:r>
+              <a:rPr lang="en-US" sz="1150" dirty="0">
+                <a:solidFill>
+                  <a:srgbClr val="FFB347"/>
+                </a:solidFill>
+                <a:latin typeface="Consolas" pitchFamily="34" charset="0"/>
+                <a:ea typeface="Consolas" pitchFamily="34" charset="-122"/>
+                <a:cs typeface="Consolas" pitchFamily="34" charset="-120"/>
+              </a:rPr>
+              <a:t>TO </a:t>
+            </a:r>
+            <a:r>
+              <a:rPr lang="en-US" sz="1150" dirty="0">
+                <a:solidFill>
+                  <a:srgbClr val="FFFFFF"/>
+                </a:solidFill>
+                <a:latin typeface="Consolas" pitchFamily="34" charset="0"/>
+                <a:ea typeface="Consolas" pitchFamily="34" charset="-122"/>
+                <a:cs typeface="Consolas" pitchFamily="34" charset="-120"/>
+              </a:rPr>
+              <a:t>n_proc - 1 :
+</a:t>
+            </a:r>
+            <a:r>
+              <a:rPr lang="en-US" sz="1150" dirty="0">
+                <a:solidFill>
+                  <a:srgbClr val="8BA3B8"/>
+                </a:solidFill>
+                <a:latin typeface="Consolas" pitchFamily="34" charset="0"/>
+                <a:ea typeface="Consolas" pitchFamily="34" charset="-122"/>
+                <a:cs typeface="Consolas" pitchFamily="34" charset="-120"/>
+              </a:rPr>
+              <a:t>        create ctrl_pipe[i], res_pipe[i]
+        fork child i
+</a:t>
+            </a:r>
+            <a:r>
+              <a:rPr lang="en-US" sz="1150" dirty="0">
+                <a:solidFill>
+                  <a:srgbClr val="FFB347"/>
+                </a:solidFill>
+                <a:latin typeface="Consolas" pitchFamily="34" charset="0"/>
+                <a:ea typeface="Consolas" pitchFamily="34" charset="-122"/>
+                <a:cs typeface="Consolas" pitchFamily="34" charset="-120"/>
+              </a:rPr>
+              <a:t>        IF </a:t>
+            </a:r>
+            <a:r>
+              <a:rPr lang="en-US" sz="1150" dirty="0">
+                <a:solidFill>
+                  <a:srgbClr val="FFFFFF"/>
+                </a:solidFill>
+                <a:latin typeface="Consolas" pitchFamily="34" charset="0"/>
+                <a:ea typeface="Consolas" pitchFamily="34" charset="-122"/>
+                <a:cs typeface="Consolas" pitchFamily="34" charset="-120"/>
+              </a:rPr>
+              <a:t>child :
+            start, end ← </a:t>
+            </a:r>
+            <a:r>
+              <a:rPr lang="en-US" sz="1150" dirty="0">
+                <a:solidFill>
+                  <a:srgbClr val="00C9A7"/>
+                </a:solidFill>
+                <a:latin typeface="Consolas" pitchFamily="34" charset="0"/>
+                <a:ea typeface="Consolas" pitchFamily="34" charset="-122"/>
+                <a:cs typeface="Consolas" pitchFamily="34" charset="-120"/>
+              </a:rPr>
+              <a:t>read</a:t>
+            </a:r>
+            <a:r>
+              <a:rPr lang="en-US" sz="1150" dirty="0">
+                <a:solidFill>
+                  <a:srgbClr val="8BA3B8"/>
+                </a:solidFill>
+                <a:latin typeface="Consolas" pitchFamily="34" charset="0"/>
+                <a:ea typeface="Consolas" pitchFamily="34" charset="-122"/>
+                <a:cs typeface="Consolas" pitchFamily="34" charset="-120"/>
+              </a:rPr>
+              <a:t>(ctrl_pipe[i])      // receive slice bounds
+</a:t>
+            </a:r>
+            <a:r>
+              <a:rPr lang="en-US" sz="1150" dirty="0">
+                <a:solidFill>
+                  <a:srgbClr val="FFFFFF"/>
+                </a:solidFill>
+                <a:latin typeface="Consolas" pitchFamily="34" charset="0"/>
+                <a:ea typeface="Consolas" pitchFamily="34" charset="-122"/>
+                <a:cs typeface="Consolas" pitchFamily="34" charset="-120"/>
+              </a:rPr>
+              <a:t>            partial ← sequential_compute(nums[start..end], f)
+            </a:t>
+            </a:r>
+            <a:r>
+              <a:rPr lang="en-US" sz="1150" dirty="0">
+                <a:solidFill>
+                  <a:srgbClr val="00C9A7"/>
+                </a:solidFill>
+                <a:latin typeface="Consolas" pitchFamily="34" charset="0"/>
+                <a:ea typeface="Consolas" pitchFamily="34" charset="-122"/>
+                <a:cs typeface="Consolas" pitchFamily="34" charset="-120"/>
+              </a:rPr>
+              <a:t>write</a:t>
+            </a:r>
+            <a:r>
+              <a:rPr lang="en-US" sz="1150" dirty="0">
+                <a:solidFill>
+                  <a:srgbClr val="FFFFFF"/>
+                </a:solidFill>
+                <a:latin typeface="Consolas" pitchFamily="34" charset="0"/>
+                <a:ea typeface="Consolas" pitchFamily="34" charset="-122"/>
+                <a:cs typeface="Consolas" pitchFamily="34" charset="-120"/>
+              </a:rPr>
+              <a:t>(res_pipe[i], partial) ; exit()
+</a:t>
+            </a:r>
+            <a:r>
+              <a:rPr lang="en-US" sz="1150" dirty="0">
+                <a:solidFill>
+                  <a:srgbClr val="FFB347"/>
+                </a:solidFill>
+                <a:latin typeface="Consolas" pitchFamily="34" charset="0"/>
+                <a:ea typeface="Consolas" pitchFamily="34" charset="-122"/>
+                <a:cs typeface="Consolas" pitchFamily="34" charset="-120"/>
+              </a:rPr>
+              <a:t>        ELSE </a:t>
+            </a:r>
+            <a:r>
+              <a:rPr lang="en-US" sz="1150" dirty="0">
+                <a:solidFill>
+                  <a:srgbClr val="FFFFFF"/>
+                </a:solidFill>
+                <a:latin typeface="Consolas" pitchFamily="34" charset="0"/>
+                <a:ea typeface="Consolas" pitchFamily="34" charset="-122"/>
+                <a:cs typeface="Consolas" pitchFamily="34" charset="-120"/>
+              </a:rPr>
+              <a:t>(parent) : </a:t>
+            </a:r>
+            <a:r>
+              <a:rPr lang="en-US" sz="1150" dirty="0">
+                <a:solidFill>
+                  <a:srgbClr val="00C9A7"/>
+                </a:solidFill>
+                <a:latin typeface="Consolas" pitchFamily="34" charset="0"/>
+                <a:ea typeface="Consolas" pitchFamily="34" charset="-122"/>
+                <a:cs typeface="Consolas" pitchFamily="34" charset="-120"/>
+              </a:rPr>
+              <a:t>write</a:t>
+            </a:r>
+            <a:r>
+              <a:rPr lang="en-US" sz="1150" dirty="0">
+                <a:solidFill>
+                  <a:srgbClr val="FFFFFF"/>
+                </a:solidFill>
+                <a:latin typeface="Consolas" pitchFamily="34" charset="0"/>
+                <a:ea typeface="Consolas" pitchFamily="34" charset="-122"/>
+                <a:cs typeface="Consolas" pitchFamily="34" charset="-120"/>
+              </a:rPr>
+              <a:t>(ctrl_pipe[i], start, end)
+</a:t>
+            </a:r>
+            <a:r>
+              <a:rPr lang="en-US" sz="1150" dirty="0">
+                <a:solidFill>
+                  <a:srgbClr val="00C9A7"/>
+                </a:solidFill>
+                <a:latin typeface="Consolas" pitchFamily="34" charset="0"/>
+                <a:ea typeface="Consolas" pitchFamily="34" charset="-122"/>
+                <a:cs typeface="Consolas" pitchFamily="34" charset="-120"/>
+              </a:rPr>
+              <a:t>    wait</a:t>
+            </a:r>
+            <a:r>
+              <a:rPr lang="en-US" sz="1150" dirty="0">
+                <a:solidFill>
+                  <a:srgbClr val="FFFFFF"/>
+                </a:solidFill>
+                <a:latin typeface="Consolas" pitchFamily="34" charset="0"/>
+                <a:ea typeface="Consolas" pitchFamily="34" charset="-122"/>
+                <a:cs typeface="Consolas" pitchFamily="34" charset="-120"/>
+              </a:rPr>
+              <a:t>() for all children
+    result ← </a:t>
+            </a:r>
+            <a:r>
+              <a:rPr lang="en-US" sz="1150" dirty="0">
+                <a:solidFill>
+                  <a:srgbClr val="00C9A7"/>
+                </a:solidFill>
+                <a:latin typeface="Consolas" pitchFamily="34" charset="0"/>
+                <a:ea typeface="Consolas" pitchFamily="34" charset="-122"/>
+                <a:cs typeface="Consolas" pitchFamily="34" charset="-120"/>
+              </a:rPr>
+              <a:t>read</a:t>
+            </a:r>
+            <a:r>
+              <a:rPr lang="en-US" sz="1150" dirty="0">
+                <a:solidFill>
+                  <a:srgbClr val="FFFFFF"/>
+                </a:solidFill>
+                <a:latin typeface="Consolas" pitchFamily="34" charset="0"/>
+                <a:ea typeface="Consolas" pitchFamily="34" charset="-122"/>
+                <a:cs typeface="Consolas" pitchFamily="34" charset="-120"/>
+              </a:rPr>
+              <a:t>(res_pipe[0])
+</a:t>
+            </a:r>
+            <a:r>
+              <a:rPr lang="en-US" sz="1150" dirty="0">
+                <a:solidFill>
+                  <a:srgbClr val="FFB347"/>
+                </a:solidFill>
+                <a:latin typeface="Consolas" pitchFamily="34" charset="0"/>
+                <a:ea typeface="Consolas" pitchFamily="34" charset="-122"/>
+                <a:cs typeface="Consolas" pitchFamily="34" charset="-120"/>
+              </a:rPr>
+              <a:t>    FOR </a:t>
+            </a:r>
+            <a:r>
+              <a:rPr lang="en-US" sz="1150" dirty="0">
+                <a:solidFill>
+                  <a:srgbClr val="FFFFFF"/>
+                </a:solidFill>
+                <a:latin typeface="Consolas" pitchFamily="34" charset="0"/>
+                <a:ea typeface="Consolas" pitchFamily="34" charset="-122"/>
+                <a:cs typeface="Consolas" pitchFamily="34" charset="-120"/>
+              </a:rPr>
+              <a:t>i = 1 TO n_proc-1 : result ← f(result, </a:t>
+            </a:r>
+            <a:r>
+              <a:rPr lang="en-US" sz="1150" dirty="0">
+                <a:solidFill>
+                  <a:srgbClr val="00C9A7"/>
+                </a:solidFill>
+                <a:latin typeface="Consolas" pitchFamily="34" charset="0"/>
+                <a:ea typeface="Consolas" pitchFamily="34" charset="-122"/>
+                <a:cs typeface="Consolas" pitchFamily="34" charset="-120"/>
+              </a:rPr>
+              <a:t>read</a:t>
+            </a:r>
+            <a:r>
+              <a:rPr lang="en-US" sz="1150" dirty="0">
+                <a:solidFill>
+                  <a:srgbClr val="FFFFFF"/>
+                </a:solidFill>
+                <a:latin typeface="Consolas" pitchFamily="34" charset="0"/>
+                <a:ea typeface="Consolas" pitchFamily="34" charset="-122"/>
+                <a:cs typeface="Consolas" pitchFamily="34" charset="-120"/>
+              </a:rPr>
+              <a:t>(res_pipe[i]))
+</a:t>
+            </a:r>
+            <a:r>
+              <a:rPr lang="en-US" sz="1150" dirty="0">
+                <a:solidFill>
+                  <a:srgbClr val="FFB347"/>
+                </a:solidFill>
+                <a:latin typeface="Consolas" pitchFamily="34" charset="0"/>
+                <a:ea typeface="Consolas" pitchFamily="34" charset="-122"/>
+                <a:cs typeface="Consolas" pitchFamily="34" charset="-120"/>
+              </a:rPr>
+              <a:t>    RETURN </a:t>
+            </a:r>
+            <a:r>
+              <a:rPr lang="en-US" sz="1150" dirty="0">
+                <a:solidFill>
+                  <a:srgbClr val="4CAF86"/>
+                </a:solidFill>
+                <a:latin typeface="Consolas" pitchFamily="34" charset="0"/>
+                <a:ea typeface="Consolas" pitchFamily="34" charset="-122"/>
+                <a:cs typeface="Consolas" pitchFamily="34" charset="-120"/>
+              </a:rPr>
+              <a:t>result</a:t>
+            </a:r>
+            <a:endParaRPr lang="en-US" sz="1150" dirty="0"/>
+          </a:p>
+        </p:txBody>
+      </p:sp>
+    </p:spTree>
+  </p:cSld>
+  <p:clrMapOvr>
+    <a:masterClrMapping/>
+  </p:clrMapOvr>
+</p:sld>
+</file>
+
+<file path=ppt/slides/slide11.xml><?xml version="1.0" encoding="utf-8"?>
+<p:sld xmlns:a="http://schemas.openxmlformats.org/drawingml/2006/main" xmlns:r="http://schemas.openxmlformats.org/officeDocument/2006/relationships" xmlns:p="http://schemas.openxmlformats.org/presentationml/2006/main">
   <p:cSld name="Slide 6">
     <p:bg>
       <p:bgPr>
@@ -10090,7 +10718,7 @@
 </p:sld>
 </file>
 
-<file path=ppt/slides/slide11.xml><?xml version="1.0" encoding="utf-8"?>
+<file path=ppt/slides/slide12.xml><?xml version="1.0" encoding="utf-8"?>
 <p:sld xmlns:a="http://schemas.openxmlformats.org/drawingml/2006/main" xmlns:r="http://schemas.openxmlformats.org/officeDocument/2006/relationships" xmlns:p="http://schemas.openxmlformats.org/presentationml/2006/main">
   <p:cSld>
     <p:bg>
@@ -10277,7 +10905,7 @@
 </p:sld>
 </file>
 
-<file path=ppt/slides/slide12.xml><?xml version="1.0" encoding="utf-8"?>
+<file path=ppt/slides/slide13.xml><?xml version="1.0" encoding="utf-8"?>
 <p:sld xmlns:a="http://schemas.openxmlformats.org/drawingml/2006/main" xmlns:r="http://schemas.openxmlformats.org/officeDocument/2006/relationships" xmlns:p="http://schemas.openxmlformats.org/presentationml/2006/main">
   <p:cSld>
     <p:bg>
@@ -10434,7 +11062,7 @@
 </p:sld>
 </file>
 
-<file path=ppt/slides/slide13.xml><?xml version="1.0" encoding="utf-8"?>
+<file path=ppt/slides/slide14.xml><?xml version="1.0" encoding="utf-8"?>
 <p:sld xmlns:a="http://schemas.openxmlformats.org/drawingml/2006/main" xmlns:r="http://schemas.openxmlformats.org/officeDocument/2006/relationships" xmlns:p="http://schemas.openxmlformats.org/presentationml/2006/main">
   <p:cSld>
     <p:bg>
@@ -10591,7 +11219,7 @@
 </p:sld>
 </file>
 
-<file path=ppt/slides/slide14.xml><?xml version="1.0" encoding="utf-8"?>
+<file path=ppt/slides/slide15.xml><?xml version="1.0" encoding="utf-8"?>
 <p:sld xmlns:a="http://schemas.openxmlformats.org/drawingml/2006/main" xmlns:r="http://schemas.openxmlformats.org/officeDocument/2006/relationships" xmlns:p="http://schemas.openxmlformats.org/presentationml/2006/main">
   <p:cSld>
     <p:bg>
@@ -10748,7 +11376,7 @@
 </p:sld>
 </file>
 
-<file path=ppt/slides/slide15.xml><?xml version="1.0" encoding="utf-8"?>
+<file path=ppt/slides/slide16.xml><?xml version="1.0" encoding="utf-8"?>
 <p:sld xmlns:a="http://schemas.openxmlformats.org/drawingml/2006/main" xmlns:r="http://schemas.openxmlformats.org/officeDocument/2006/relationships" xmlns:p="http://schemas.openxmlformats.org/presentationml/2006/main">
   <p:cSld>
     <p:bg>
@@ -10905,7 +11533,7 @@
 </p:sld>
 </file>
 
-<file path=ppt/slides/slide16.xml><?xml version="1.0" encoding="utf-8"?>
+<file path=ppt/slides/slide17.xml><?xml version="1.0" encoding="utf-8"?>
 <p:sld xmlns:a="http://schemas.openxmlformats.org/drawingml/2006/main" xmlns:r="http://schemas.openxmlformats.org/officeDocument/2006/relationships" xmlns:p="http://schemas.openxmlformats.org/presentationml/2006/main">
   <p:cSld name="Slide 7">
     <p:bg>
@@ -12345,7 +12973,7 @@
 </p:sld>
 </file>
 
-<file path=ppt/slides/slide17.xml><?xml version="1.0" encoding="utf-8"?>
+<file path=ppt/slides/slide18.xml><?xml version="1.0" encoding="utf-8"?>
 <p:sld xmlns:a="http://schemas.openxmlformats.org/drawingml/2006/main" xmlns:r="http://schemas.openxmlformats.org/officeDocument/2006/relationships" xmlns:p="http://schemas.openxmlformats.org/presentationml/2006/main">
   <p:cSld>
     <p:bg>
@@ -12502,7 +13130,7 @@
 </p:sld>
 </file>
 
-<file path=ppt/slides/slide18.xml><?xml version="1.0" encoding="utf-8"?>
+<file path=ppt/slides/slide19.xml><?xml version="1.0" encoding="utf-8"?>
 <p:sld xmlns:a="http://schemas.openxmlformats.org/drawingml/2006/main" xmlns:r="http://schemas.openxmlformats.org/officeDocument/2006/relationships" xmlns:p="http://schemas.openxmlformats.org/presentationml/2006/main">
   <p:cSld>
     <p:spTree>
@@ -12621,7 +13249,760 @@
 </p:sld>
 </file>
 
-<file path=ppt/slides/slide19.xml><?xml version="1.0" encoding="utf-8"?>
+<file path=ppt/slides/slide2.xml><?xml version="1.0" encoding="utf-8"?>
+<p:sld xmlns:a="http://schemas.openxmlformats.org/drawingml/2006/main" xmlns:r="http://schemas.openxmlformats.org/officeDocument/2006/relationships" xmlns:p="http://schemas.openxmlformats.org/presentationml/2006/main">
+  <p:cSld name="Slide 2">
+    <p:bg>
+      <p:bgPr>
+        <a:solidFill>
+          <a:srgbClr val="F0F4FF"/>
+        </a:solidFill>
+        <a:effectLst/>
+      </p:bgPr>
+    </p:bg>
+    <p:spTree>
+      <p:nvGrpSpPr>
+        <p:cNvPr id="1" name=""/>
+        <p:cNvGrpSpPr/>
+        <p:nvPr/>
+      </p:nvGrpSpPr>
+      <p:grpSpPr>
+        <a:xfrm>
+          <a:off x="0" y="0"/>
+          <a:ext cx="0" cy="0"/>
+          <a:chOff x="0" y="0"/>
+          <a:chExt cx="0" cy="0"/>
+        </a:xfrm>
+      </p:grpSpPr>
+      <p:sp>
+        <p:nvSpPr>
+          <p:cNvPr id="2" name="Shape 0"/>
+          <p:cNvSpPr/>
+          <p:nvPr/>
+        </p:nvSpPr>
+        <p:spPr>
+          <a:xfrm>
+            <a:off x="0" y="0"/>
+            <a:ext cx="9144000" cy="868680"/>
+          </a:xfrm>
+          <a:prstGeom prst="rect">
+            <a:avLst/>
+          </a:prstGeom>
+          <a:solidFill>
+            <a:srgbClr val="1A1F36"/>
+          </a:solidFill>
+          <a:ln w="12700">
+            <a:solidFill>
+              <a:srgbClr val="1A1F36"/>
+            </a:solidFill>
+            <a:prstDash val="solid"/>
+          </a:ln>
+        </p:spPr>
+        <p:txBody>
+          <a:bodyPr/>
+          <a:lstStyle/>
+          <a:p>
+            <a:endParaRPr lang="en-US"/>
+          </a:p>
+        </p:txBody>
+      </p:sp>
+      <p:sp>
+        <p:nvSpPr>
+          <p:cNvPr id="3" name="Text 1"/>
+          <p:cNvSpPr/>
+          <p:nvPr/>
+        </p:nvSpPr>
+        <p:spPr>
+          <a:xfrm>
+            <a:off x="365760" y="109728"/>
+            <a:ext cx="8229600" cy="640080"/>
+          </a:xfrm>
+          <a:prstGeom prst="rect">
+            <a:avLst/>
+          </a:prstGeom>
+          <a:noFill/>
+          <a:ln/>
+        </p:spPr>
+        <p:txBody>
+          <a:bodyPr wrap="square" lIns="0" tIns="0" rIns="0" bIns="0" rtlCol="0" anchor="ctr"/>
+          <a:lstStyle/>
+          <a:p>
+            <a:pPr marL="0" indent="0">
+              <a:buNone/>
+            </a:pPr>
+            <a:r>
+              <a:rPr lang="en-US" sz="2600" b="1" dirty="0">
+                <a:solidFill>
+                  <a:srgbClr val="FFFFFF"/>
+                </a:solidFill>
+                <a:latin typeface="Calibri" pitchFamily="34" charset="0"/>
+                <a:ea typeface="Calibri" pitchFamily="34" charset="-122"/>
+                <a:cs typeface="Calibri" pitchFamily="34" charset="-120"/>
+              </a:rPr>
+              <a:t>Team Roles</a:t>
+            </a:r>
+            <a:endParaRPr lang="en-US" sz="2600" dirty="0"/>
+          </a:p>
+        </p:txBody>
+      </p:sp>
+      <p:sp>
+        <p:nvSpPr>
+          <p:cNvPr id="4" name="Shape 2"/>
+          <p:cNvSpPr/>
+          <p:nvPr/>
+        </p:nvSpPr>
+        <p:spPr>
+          <a:xfrm>
+            <a:off x="274320" y="1005840"/>
+            <a:ext cx="4023360" cy="3749040"/>
+          </a:xfrm>
+          <a:prstGeom prst="rect">
+            <a:avLst/>
+          </a:prstGeom>
+          <a:solidFill>
+            <a:srgbClr val="FFFFFF"/>
+          </a:solidFill>
+          <a:ln w="12700">
+            <a:solidFill>
+              <a:srgbClr val="E0E6F8"/>
+            </a:solidFill>
+            <a:prstDash val="solid"/>
+          </a:ln>
+          <a:effectLst>
+            <a:outerShdw blurRad="101600" dist="38100" dir="8100000" algn="bl" rotWithShape="0">
+              <a:srgbClr val="000000">
+                <a:alpha val="18000"/>
+              </a:srgbClr>
+            </a:outerShdw>
+          </a:effectLst>
+        </p:spPr>
+        <p:txBody>
+          <a:bodyPr/>
+          <a:lstStyle/>
+          <a:p>
+            <a:endParaRPr lang="en-US"/>
+          </a:p>
+        </p:txBody>
+      </p:sp>
+      <p:sp>
+        <p:nvSpPr>
+          <p:cNvPr id="5" name="Shape 3"/>
+          <p:cNvSpPr/>
+          <p:nvPr/>
+        </p:nvSpPr>
+        <p:spPr>
+          <a:xfrm>
+            <a:off x="274320" y="1005840"/>
+            <a:ext cx="4023360" cy="109728"/>
+          </a:xfrm>
+          <a:prstGeom prst="rect">
+            <a:avLst/>
+          </a:prstGeom>
+          <a:solidFill>
+            <a:srgbClr val="4F8EF7"/>
+          </a:solidFill>
+          <a:ln w="12700">
+            <a:solidFill>
+              <a:srgbClr val="4F8EF7"/>
+            </a:solidFill>
+            <a:prstDash val="solid"/>
+          </a:ln>
+        </p:spPr>
+        <p:txBody>
+          <a:bodyPr/>
+          <a:lstStyle/>
+          <a:p>
+            <a:endParaRPr lang="en-US"/>
+          </a:p>
+        </p:txBody>
+      </p:sp>
+      <p:sp>
+        <p:nvSpPr>
+          <p:cNvPr id="6" name="Text 4"/>
+          <p:cNvSpPr/>
+          <p:nvPr/>
+        </p:nvSpPr>
+        <p:spPr>
+          <a:xfrm>
+            <a:off x="438912" y="1097280"/>
+            <a:ext cx="3657600" cy="320040"/>
+          </a:xfrm>
+          <a:prstGeom prst="rect">
+            <a:avLst/>
+          </a:prstGeom>
+          <a:noFill/>
+          <a:ln/>
+        </p:spPr>
+        <p:txBody>
+          <a:bodyPr wrap="square" lIns="0" tIns="0" rIns="0" bIns="0" rtlCol="0" anchor="ctr"/>
+          <a:lstStyle/>
+          <a:p>
+            <a:pPr marL="0" indent="0">
+              <a:buNone/>
+            </a:pPr>
+            <a:r>
+              <a:rPr lang="en-US" sz="1000" b="1" dirty="0">
+                <a:solidFill>
+                  <a:srgbClr val="4F8EF7"/>
+                </a:solidFill>
+                <a:latin typeface="Calibri" pitchFamily="34" charset="0"/>
+                <a:ea typeface="Calibri" pitchFamily="34" charset="-122"/>
+                <a:cs typeface="Calibri" pitchFamily="34" charset="-120"/>
+              </a:rPr>
+              <a:t>MEMBER 1 </a:t>
+            </a:r>
+            <a:endParaRPr lang="en-US" sz="1000" dirty="0"/>
+          </a:p>
+        </p:txBody>
+      </p:sp>
+      <p:sp>
+        <p:nvSpPr>
+          <p:cNvPr id="7" name="Text 5"/>
+          <p:cNvSpPr/>
+          <p:nvPr/>
+        </p:nvSpPr>
+        <p:spPr>
+          <a:xfrm>
+            <a:off x="438912" y="1417320"/>
+            <a:ext cx="3657600" cy="411480"/>
+          </a:xfrm>
+          <a:prstGeom prst="rect">
+            <a:avLst/>
+          </a:prstGeom>
+          <a:noFill/>
+          <a:ln/>
+        </p:spPr>
+        <p:txBody>
+          <a:bodyPr wrap="square" lIns="0" tIns="0" rIns="0" bIns="0" rtlCol="0" anchor="ctr"/>
+          <a:lstStyle/>
+          <a:p>
+            <a:pPr marL="0" indent="0">
+              <a:buNone/>
+            </a:pPr>
+            <a:r>
+              <a:rPr lang="en-US" sz="1800" b="1" dirty="0">
+                <a:solidFill>
+                  <a:srgbClr val="1A1F36"/>
+                </a:solidFill>
+                <a:latin typeface="Calibri" pitchFamily="34" charset="0"/>
+                <a:ea typeface="Calibri" pitchFamily="34" charset="-122"/>
+                <a:cs typeface="Calibri" pitchFamily="34" charset="-120"/>
+              </a:rPr>
+              <a:t>Sama Emad Abu Zahra</a:t>
+            </a:r>
+            <a:endParaRPr lang="en-US" sz="1800" dirty="0"/>
+          </a:p>
+        </p:txBody>
+      </p:sp>
+      <p:sp>
+        <p:nvSpPr>
+          <p:cNvPr id="8" name="Shape 6"/>
+          <p:cNvSpPr/>
+          <p:nvPr/>
+        </p:nvSpPr>
+        <p:spPr>
+          <a:xfrm>
+            <a:off x="438912" y="1874520"/>
+            <a:ext cx="3657600" cy="0"/>
+          </a:xfrm>
+          <a:prstGeom prst="line">
+            <a:avLst/>
+          </a:prstGeom>
+          <a:noFill/>
+          <a:ln w="12700">
+            <a:solidFill>
+              <a:srgbClr val="E0E6F8"/>
+            </a:solidFill>
+            <a:prstDash val="solid"/>
+          </a:ln>
+        </p:spPr>
+        <p:txBody>
+          <a:bodyPr/>
+          <a:lstStyle/>
+          <a:p>
+            <a:endParaRPr lang="en-US"/>
+          </a:p>
+        </p:txBody>
+      </p:sp>
+      <p:sp>
+        <p:nvSpPr>
+          <p:cNvPr id="9" name="Text 7"/>
+          <p:cNvSpPr/>
+          <p:nvPr/>
+        </p:nvSpPr>
+        <p:spPr>
+          <a:xfrm>
+            <a:off x="438912" y="1993392"/>
+            <a:ext cx="3657600" cy="2651760"/>
+          </a:xfrm>
+          <a:prstGeom prst="rect">
+            <a:avLst/>
+          </a:prstGeom>
+          <a:noFill/>
+          <a:ln/>
+        </p:spPr>
+        <p:txBody>
+          <a:bodyPr wrap="square" lIns="0" tIns="0" rIns="0" bIns="0" rtlCol="0" anchor="ctr"/>
+          <a:lstStyle/>
+          <a:p>
+            <a:pPr marL="342900" indent="-342900">
+              <a:spcAft>
+                <a:spcPts val="400"/>
+              </a:spcAft>
+              <a:buSzPct val="100000"/>
+              <a:buChar char="•"/>
+            </a:pPr>
+            <a:r>
+              <a:rPr lang="en-US" sz="1250" dirty="0">
+                <a:solidFill>
+                  <a:srgbClr val="1A1F36"/>
+                </a:solidFill>
+                <a:latin typeface="Calibri" pitchFamily="34" charset="0"/>
+                <a:ea typeface="Calibri" pitchFamily="34" charset="-122"/>
+                <a:cs typeface="Calibri" pitchFamily="34" charset="-120"/>
+              </a:rPr>
+              <a:t>Implemented mmap_compute</a:t>
+            </a:r>
+            <a:endParaRPr lang="en-US" sz="1250" dirty="0"/>
+          </a:p>
+          <a:p>
+            <a:pPr marL="342900" indent="-342900">
+              <a:spcAft>
+                <a:spcPts val="400"/>
+              </a:spcAft>
+              <a:buSzPct val="100000"/>
+              <a:buChar char="•"/>
+            </a:pPr>
+            <a:r>
+              <a:rPr lang="en-US" sz="1250" dirty="0">
+                <a:solidFill>
+                  <a:srgbClr val="1A1F36"/>
+                </a:solidFill>
+                <a:latin typeface="Calibri" pitchFamily="34" charset="0"/>
+                <a:ea typeface="Calibri" pitchFamily="34" charset="-122"/>
+                <a:cs typeface="Calibri" pitchFamily="34" charset="-120"/>
+              </a:rPr>
+              <a:t>Implemented threads_compute</a:t>
+            </a:r>
+            <a:endParaRPr lang="en-US" sz="1250" dirty="0"/>
+          </a:p>
+          <a:p>
+            <a:pPr marL="342900" indent="-342900">
+              <a:spcAft>
+                <a:spcPts val="400"/>
+              </a:spcAft>
+              <a:buSzPct val="100000"/>
+              <a:buChar char="•"/>
+            </a:pPr>
+            <a:r>
+              <a:rPr lang="en-US" sz="1250" dirty="0">
+                <a:solidFill>
+                  <a:srgbClr val="1A1F36"/>
+                </a:solidFill>
+                <a:latin typeface="Calibri" pitchFamily="34" charset="0"/>
+                <a:ea typeface="Calibri" pitchFamily="34" charset="-122"/>
+                <a:cs typeface="Calibri" pitchFamily="34" charset="-120"/>
+              </a:rPr>
+              <a:t>Updated parse.h (read_numbers_ul)</a:t>
+            </a:r>
+            <a:endParaRPr lang="en-US" sz="1250" dirty="0"/>
+          </a:p>
+          <a:p>
+            <a:pPr marL="342900" indent="-342900">
+              <a:spcAft>
+                <a:spcPts val="400"/>
+              </a:spcAft>
+              <a:buSzPct val="100000"/>
+              <a:buChar char="•"/>
+            </a:pPr>
+            <a:r>
+              <a:rPr lang="en-US" sz="1250" dirty="0">
+                <a:solidFill>
+                  <a:srgbClr val="1A1F36"/>
+                </a:solidFill>
+                <a:latin typeface="Calibri" pitchFamily="34" charset="0"/>
+                <a:ea typeface="Calibri" pitchFamily="34" charset="-122"/>
+                <a:cs typeface="Calibri" pitchFamily="34" charset="-120"/>
+              </a:rPr>
+              <a:t>Updated compute.h (ulfunc_t type)</a:t>
+            </a:r>
+            <a:endParaRPr lang="en-US" sz="1250" dirty="0"/>
+          </a:p>
+          <a:p>
+            <a:pPr marL="342900" indent="-342900">
+              <a:spcAft>
+                <a:spcPts val="400"/>
+              </a:spcAft>
+              <a:buSzPct val="100000"/>
+              <a:buChar char="•"/>
+            </a:pPr>
+            <a:r>
+              <a:rPr lang="en-US" sz="1250" dirty="0">
+                <a:solidFill>
+                  <a:srgbClr val="1A1F36"/>
+                </a:solidFill>
+                <a:latin typeface="Calibri" pitchFamily="34" charset="0"/>
+                <a:ea typeface="Calibri" pitchFamily="34" charset="-122"/>
+                <a:cs typeface="Calibri" pitchFamily="34" charset="-120"/>
+              </a:rPr>
+              <a:t>Wrote test_correctness.c for all 4 functions</a:t>
+            </a:r>
+            <a:endParaRPr lang="en-US" sz="1250" dirty="0"/>
+          </a:p>
+          <a:p>
+            <a:pPr marL="342900" indent="-342900">
+              <a:spcAft>
+                <a:spcPts val="400"/>
+              </a:spcAft>
+              <a:buSzPct val="100000"/>
+              <a:buChar char="•"/>
+            </a:pPr>
+            <a:r>
+              <a:rPr lang="en-US" sz="1250" dirty="0">
+                <a:solidFill>
+                  <a:srgbClr val="1A1F36"/>
+                </a:solidFill>
+                <a:latin typeface="Calibri" pitchFamily="34" charset="0"/>
+                <a:ea typeface="Calibri" pitchFamily="34" charset="-122"/>
+                <a:cs typeface="Calibri" pitchFamily="34" charset="-120"/>
+              </a:rPr>
+              <a:t>Verified correctness</a:t>
+            </a:r>
+            <a:endParaRPr lang="en-US" sz="1250" dirty="0"/>
+          </a:p>
+        </p:txBody>
+      </p:sp>
+      <p:sp>
+        <p:nvSpPr>
+          <p:cNvPr id="10" name="Shape 8"/>
+          <p:cNvSpPr/>
+          <p:nvPr/>
+        </p:nvSpPr>
+        <p:spPr>
+          <a:xfrm>
+            <a:off x="4846320" y="1005840"/>
+            <a:ext cx="4023360" cy="3749040"/>
+          </a:xfrm>
+          <a:prstGeom prst="rect">
+            <a:avLst/>
+          </a:prstGeom>
+          <a:solidFill>
+            <a:srgbClr val="FFFFFF"/>
+          </a:solidFill>
+          <a:ln w="12700">
+            <a:solidFill>
+              <a:srgbClr val="E0E6F8"/>
+            </a:solidFill>
+            <a:prstDash val="solid"/>
+          </a:ln>
+          <a:effectLst>
+            <a:outerShdw blurRad="101600" dist="38100" dir="8100000" algn="bl" rotWithShape="0">
+              <a:srgbClr val="000000">
+                <a:alpha val="18000"/>
+              </a:srgbClr>
+            </a:outerShdw>
+          </a:effectLst>
+        </p:spPr>
+        <p:txBody>
+          <a:bodyPr/>
+          <a:lstStyle/>
+          <a:p>
+            <a:endParaRPr lang="en-US" dirty="0"/>
+          </a:p>
+        </p:txBody>
+      </p:sp>
+      <p:sp>
+        <p:nvSpPr>
+          <p:cNvPr id="11" name="Shape 9"/>
+          <p:cNvSpPr/>
+          <p:nvPr/>
+        </p:nvSpPr>
+        <p:spPr>
+          <a:xfrm>
+            <a:off x="4846320" y="1005840"/>
+            <a:ext cx="4023360" cy="109728"/>
+          </a:xfrm>
+          <a:prstGeom prst="rect">
+            <a:avLst/>
+          </a:prstGeom>
+          <a:solidFill>
+            <a:srgbClr val="00B4D8"/>
+          </a:solidFill>
+          <a:ln w="12700">
+            <a:solidFill>
+              <a:srgbClr val="00B4D8"/>
+            </a:solidFill>
+            <a:prstDash val="solid"/>
+          </a:ln>
+        </p:spPr>
+        <p:txBody>
+          <a:bodyPr/>
+          <a:lstStyle/>
+          <a:p>
+            <a:endParaRPr lang="en-US"/>
+          </a:p>
+        </p:txBody>
+      </p:sp>
+      <p:sp>
+        <p:nvSpPr>
+          <p:cNvPr id="12" name="Text 10"/>
+          <p:cNvSpPr/>
+          <p:nvPr/>
+        </p:nvSpPr>
+        <p:spPr>
+          <a:xfrm>
+            <a:off x="5010912" y="1097280"/>
+            <a:ext cx="3657600" cy="320040"/>
+          </a:xfrm>
+          <a:prstGeom prst="rect">
+            <a:avLst/>
+          </a:prstGeom>
+          <a:noFill/>
+          <a:ln/>
+        </p:spPr>
+        <p:txBody>
+          <a:bodyPr wrap="square" lIns="0" tIns="0" rIns="0" bIns="0" rtlCol="0" anchor="ctr"/>
+          <a:lstStyle/>
+          <a:p>
+            <a:pPr marL="0" indent="0">
+              <a:buNone/>
+            </a:pPr>
+            <a:r>
+              <a:rPr lang="en-US" sz="1000" b="1" dirty="0">
+                <a:solidFill>
+                  <a:srgbClr val="00B4D8"/>
+                </a:solidFill>
+                <a:latin typeface="Calibri" pitchFamily="34" charset="0"/>
+                <a:ea typeface="Calibri" pitchFamily="34" charset="-122"/>
+                <a:cs typeface="Calibri" pitchFamily="34" charset="-120"/>
+              </a:rPr>
+              <a:t>MEMBER 2</a:t>
+            </a:r>
+            <a:endParaRPr lang="en-US" sz="1000" dirty="0"/>
+          </a:p>
+        </p:txBody>
+      </p:sp>
+      <p:sp>
+        <p:nvSpPr>
+          <p:cNvPr id="13" name="Text 11"/>
+          <p:cNvSpPr/>
+          <p:nvPr/>
+        </p:nvSpPr>
+        <p:spPr>
+          <a:xfrm>
+            <a:off x="5010912" y="1417320"/>
+            <a:ext cx="3657600" cy="411480"/>
+          </a:xfrm>
+          <a:prstGeom prst="rect">
+            <a:avLst/>
+          </a:prstGeom>
+          <a:noFill/>
+          <a:ln/>
+        </p:spPr>
+        <p:txBody>
+          <a:bodyPr wrap="square" lIns="0" tIns="0" rIns="0" bIns="0" rtlCol="0" anchor="ctr"/>
+          <a:lstStyle/>
+          <a:p>
+            <a:pPr marL="0" indent="0">
+              <a:buNone/>
+            </a:pPr>
+            <a:r>
+              <a:rPr lang="en-US" sz="1800" b="1" dirty="0">
+                <a:solidFill>
+                  <a:srgbClr val="1A1F36"/>
+                </a:solidFill>
+                <a:latin typeface="Calibri" pitchFamily="34" charset="0"/>
+                <a:ea typeface="Calibri" pitchFamily="34" charset="-122"/>
+                <a:cs typeface="Calibri" pitchFamily="34" charset="-120"/>
+              </a:rPr>
+              <a:t>Yara</a:t>
+            </a:r>
+            <a:endParaRPr lang="en-US" sz="1800" dirty="0"/>
+          </a:p>
+        </p:txBody>
+      </p:sp>
+      <p:sp>
+        <p:nvSpPr>
+          <p:cNvPr id="14" name="Shape 12"/>
+          <p:cNvSpPr/>
+          <p:nvPr/>
+        </p:nvSpPr>
+        <p:spPr>
+          <a:xfrm>
+            <a:off x="5010912" y="1874520"/>
+            <a:ext cx="3657600" cy="0"/>
+          </a:xfrm>
+          <a:prstGeom prst="line">
+            <a:avLst/>
+          </a:prstGeom>
+          <a:noFill/>
+          <a:ln w="12700">
+            <a:solidFill>
+              <a:srgbClr val="E0E6F8"/>
+            </a:solidFill>
+            <a:prstDash val="solid"/>
+          </a:ln>
+        </p:spPr>
+        <p:txBody>
+          <a:bodyPr/>
+          <a:lstStyle/>
+          <a:p>
+            <a:endParaRPr lang="en-US"/>
+          </a:p>
+        </p:txBody>
+      </p:sp>
+      <p:sp>
+        <p:nvSpPr>
+          <p:cNvPr id="15" name="Text 13"/>
+          <p:cNvSpPr/>
+          <p:nvPr/>
+        </p:nvSpPr>
+        <p:spPr>
+          <a:xfrm>
+            <a:off x="5010912" y="1993392"/>
+            <a:ext cx="3657600" cy="2651760"/>
+          </a:xfrm>
+          <a:prstGeom prst="rect">
+            <a:avLst/>
+          </a:prstGeom>
+          <a:noFill/>
+          <a:ln/>
+        </p:spPr>
+        <p:txBody>
+          <a:bodyPr wrap="square" lIns="0" tIns="0" rIns="0" bIns="0" rtlCol="0" anchor="ctr"/>
+          <a:lstStyle/>
+          <a:p>
+            <a:pPr marL="342900" indent="-342900">
+              <a:spcAft>
+                <a:spcPts val="400"/>
+              </a:spcAft>
+              <a:buSzPct val="100000"/>
+              <a:buChar char="•"/>
+            </a:pPr>
+            <a:endParaRPr lang="en-US" sz="1250" dirty="0"/>
+          </a:p>
+        </p:txBody>
+      </p:sp>
+      <p:sp>
+        <p:nvSpPr>
+          <p:cNvPr id="16" name="Text 7">
+            <a:extLst>
+              <a:ext uri="{FF2B5EF4-FFF2-40B4-BE49-F238E27FC236}">
+                <a16:creationId xmlns:a16="http://schemas.microsoft.com/office/drawing/2014/main" id="{87550E9F-D30B-F08A-054A-E036FBD0C477}"/>
+              </a:ext>
+            </a:extLst>
+          </p:cNvPr>
+          <p:cNvSpPr/>
+          <p:nvPr/>
+        </p:nvSpPr>
+        <p:spPr>
+          <a:xfrm>
+            <a:off x="5047488" y="1828800"/>
+            <a:ext cx="3657600" cy="2651760"/>
+          </a:xfrm>
+          <a:prstGeom prst="rect">
+            <a:avLst/>
+          </a:prstGeom>
+          <a:noFill/>
+          <a:ln/>
+        </p:spPr>
+        <p:txBody>
+          <a:bodyPr wrap="square" lIns="0" tIns="0" rIns="0" bIns="0" rtlCol="0" anchor="ctr"/>
+          <a:lstStyle/>
+          <a:p>
+            <a:pPr marL="342900" indent="-342900">
+              <a:spcAft>
+                <a:spcPts val="400"/>
+              </a:spcAft>
+              <a:buSzPct val="100000"/>
+              <a:buChar char="•"/>
+            </a:pPr>
+            <a:r>
+              <a:rPr lang="en-US" sz="1250" dirty="0">
+                <a:solidFill>
+                  <a:srgbClr val="1A1F36"/>
+                </a:solidFill>
+                <a:latin typeface="Calibri" pitchFamily="34" charset="0"/>
+                <a:ea typeface="Calibri" pitchFamily="34" charset="-122"/>
+                <a:cs typeface="Calibri" pitchFamily="34" charset="-120"/>
+              </a:rPr>
+              <a:t>Implemented Experiment_1</a:t>
+            </a:r>
+            <a:endParaRPr lang="en-US" sz="1250" dirty="0"/>
+          </a:p>
+          <a:p>
+            <a:pPr marL="342900" indent="-342900">
+              <a:spcAft>
+                <a:spcPts val="400"/>
+              </a:spcAft>
+              <a:buSzPct val="100000"/>
+              <a:buChar char="•"/>
+            </a:pPr>
+            <a:r>
+              <a:rPr lang="en-US" sz="1250" dirty="0">
+                <a:solidFill>
+                  <a:srgbClr val="1A1F36"/>
+                </a:solidFill>
+                <a:latin typeface="Calibri" pitchFamily="34" charset="0"/>
+                <a:ea typeface="Calibri" pitchFamily="34" charset="-122"/>
+                <a:cs typeface="Calibri" pitchFamily="34" charset="-120"/>
+              </a:rPr>
+              <a:t>Implemented Experiment_2</a:t>
+            </a:r>
+          </a:p>
+          <a:p>
+            <a:pPr marL="342900" indent="-342900">
+              <a:spcAft>
+                <a:spcPts val="400"/>
+              </a:spcAft>
+              <a:buSzPct val="100000"/>
+              <a:buChar char="•"/>
+            </a:pPr>
+            <a:r>
+              <a:rPr lang="en-US" sz="1250" dirty="0">
+                <a:solidFill>
+                  <a:srgbClr val="1A1F36"/>
+                </a:solidFill>
+                <a:latin typeface="Calibri" pitchFamily="34" charset="0"/>
+                <a:ea typeface="Calibri" pitchFamily="34" charset="-122"/>
+                <a:cs typeface="Calibri" pitchFamily="34" charset="-120"/>
+              </a:rPr>
+              <a:t>Ran both experiments and extracted results</a:t>
+            </a:r>
+            <a:endParaRPr lang="en-US" sz="1250" dirty="0"/>
+          </a:p>
+          <a:p>
+            <a:pPr marL="342900" indent="-342900">
+              <a:spcAft>
+                <a:spcPts val="400"/>
+              </a:spcAft>
+              <a:buSzPct val="100000"/>
+              <a:buChar char="•"/>
+            </a:pPr>
+            <a:r>
+              <a:rPr lang="en-US" sz="1250" dirty="0">
+                <a:solidFill>
+                  <a:srgbClr val="1A1F36"/>
+                </a:solidFill>
+                <a:latin typeface="Calibri" pitchFamily="34" charset="0"/>
+                <a:ea typeface="Calibri" pitchFamily="34" charset="-122"/>
+                <a:cs typeface="Calibri" pitchFamily="34" charset="-120"/>
+              </a:rPr>
+              <a:t>Updated sequential and parallel compute to match the new input function requirements</a:t>
+            </a:r>
+            <a:endParaRPr lang="en-US" sz="1250" dirty="0"/>
+          </a:p>
+        </p:txBody>
+      </p:sp>
+    </p:spTree>
+  </p:cSld>
+  <p:clrMapOvr>
+    <a:masterClrMapping/>
+  </p:clrMapOvr>
+</p:sld>
+</file>
+
+<file path=ppt/slides/slide20.xml><?xml version="1.0" encoding="utf-8"?>
 <p:sld xmlns:a="http://schemas.openxmlformats.org/drawingml/2006/main" xmlns:r="http://schemas.openxmlformats.org/officeDocument/2006/relationships" xmlns:p="http://schemas.openxmlformats.org/presentationml/2006/main">
   <p:cSld>
     <p:spTree>
@@ -12747,760 +14128,7 @@
 </p:sld>
 </file>
 
-<file path=ppt/slides/slide2.xml><?xml version="1.0" encoding="utf-8"?>
-<p:sld xmlns:a="http://schemas.openxmlformats.org/drawingml/2006/main" xmlns:r="http://schemas.openxmlformats.org/officeDocument/2006/relationships" xmlns:p="http://schemas.openxmlformats.org/presentationml/2006/main">
-  <p:cSld name="Slide 2">
-    <p:bg>
-      <p:bgPr>
-        <a:solidFill>
-          <a:srgbClr val="F0F4FF"/>
-        </a:solidFill>
-        <a:effectLst/>
-      </p:bgPr>
-    </p:bg>
-    <p:spTree>
-      <p:nvGrpSpPr>
-        <p:cNvPr id="1" name=""/>
-        <p:cNvGrpSpPr/>
-        <p:nvPr/>
-      </p:nvGrpSpPr>
-      <p:grpSpPr>
-        <a:xfrm>
-          <a:off x="0" y="0"/>
-          <a:ext cx="0" cy="0"/>
-          <a:chOff x="0" y="0"/>
-          <a:chExt cx="0" cy="0"/>
-        </a:xfrm>
-      </p:grpSpPr>
-      <p:sp>
-        <p:nvSpPr>
-          <p:cNvPr id="2" name="Shape 0"/>
-          <p:cNvSpPr/>
-          <p:nvPr/>
-        </p:nvSpPr>
-        <p:spPr>
-          <a:xfrm>
-            <a:off x="0" y="0"/>
-            <a:ext cx="9144000" cy="868680"/>
-          </a:xfrm>
-          <a:prstGeom prst="rect">
-            <a:avLst/>
-          </a:prstGeom>
-          <a:solidFill>
-            <a:srgbClr val="1A1F36"/>
-          </a:solidFill>
-          <a:ln w="12700">
-            <a:solidFill>
-              <a:srgbClr val="1A1F36"/>
-            </a:solidFill>
-            <a:prstDash val="solid"/>
-          </a:ln>
-        </p:spPr>
-        <p:txBody>
-          <a:bodyPr/>
-          <a:lstStyle/>
-          <a:p>
-            <a:endParaRPr lang="en-US"/>
-          </a:p>
-        </p:txBody>
-      </p:sp>
-      <p:sp>
-        <p:nvSpPr>
-          <p:cNvPr id="3" name="Text 1"/>
-          <p:cNvSpPr/>
-          <p:nvPr/>
-        </p:nvSpPr>
-        <p:spPr>
-          <a:xfrm>
-            <a:off x="365760" y="109728"/>
-            <a:ext cx="8229600" cy="640080"/>
-          </a:xfrm>
-          <a:prstGeom prst="rect">
-            <a:avLst/>
-          </a:prstGeom>
-          <a:noFill/>
-          <a:ln/>
-        </p:spPr>
-        <p:txBody>
-          <a:bodyPr wrap="square" lIns="0" tIns="0" rIns="0" bIns="0" rtlCol="0" anchor="ctr"/>
-          <a:lstStyle/>
-          <a:p>
-            <a:pPr marL="0" indent="0">
-              <a:buNone/>
-            </a:pPr>
-            <a:r>
-              <a:rPr lang="en-US" sz="2600" b="1" dirty="0">
-                <a:solidFill>
-                  <a:srgbClr val="FFFFFF"/>
-                </a:solidFill>
-                <a:latin typeface="Calibri" pitchFamily="34" charset="0"/>
-                <a:ea typeface="Calibri" pitchFamily="34" charset="-122"/>
-                <a:cs typeface="Calibri" pitchFamily="34" charset="-120"/>
-              </a:rPr>
-              <a:t>Team Roles</a:t>
-            </a:r>
-            <a:endParaRPr lang="en-US" sz="2600" dirty="0"/>
-          </a:p>
-        </p:txBody>
-      </p:sp>
-      <p:sp>
-        <p:nvSpPr>
-          <p:cNvPr id="4" name="Shape 2"/>
-          <p:cNvSpPr/>
-          <p:nvPr/>
-        </p:nvSpPr>
-        <p:spPr>
-          <a:xfrm>
-            <a:off x="274320" y="1005840"/>
-            <a:ext cx="4023360" cy="3749040"/>
-          </a:xfrm>
-          <a:prstGeom prst="rect">
-            <a:avLst/>
-          </a:prstGeom>
-          <a:solidFill>
-            <a:srgbClr val="FFFFFF"/>
-          </a:solidFill>
-          <a:ln w="12700">
-            <a:solidFill>
-              <a:srgbClr val="E0E6F8"/>
-            </a:solidFill>
-            <a:prstDash val="solid"/>
-          </a:ln>
-          <a:effectLst>
-            <a:outerShdw blurRad="101600" dist="38100" dir="8100000" algn="bl" rotWithShape="0">
-              <a:srgbClr val="000000">
-                <a:alpha val="18000"/>
-              </a:srgbClr>
-            </a:outerShdw>
-          </a:effectLst>
-        </p:spPr>
-        <p:txBody>
-          <a:bodyPr/>
-          <a:lstStyle/>
-          <a:p>
-            <a:endParaRPr lang="en-US"/>
-          </a:p>
-        </p:txBody>
-      </p:sp>
-      <p:sp>
-        <p:nvSpPr>
-          <p:cNvPr id="5" name="Shape 3"/>
-          <p:cNvSpPr/>
-          <p:nvPr/>
-        </p:nvSpPr>
-        <p:spPr>
-          <a:xfrm>
-            <a:off x="274320" y="1005840"/>
-            <a:ext cx="4023360" cy="109728"/>
-          </a:xfrm>
-          <a:prstGeom prst="rect">
-            <a:avLst/>
-          </a:prstGeom>
-          <a:solidFill>
-            <a:srgbClr val="4F8EF7"/>
-          </a:solidFill>
-          <a:ln w="12700">
-            <a:solidFill>
-              <a:srgbClr val="4F8EF7"/>
-            </a:solidFill>
-            <a:prstDash val="solid"/>
-          </a:ln>
-        </p:spPr>
-        <p:txBody>
-          <a:bodyPr/>
-          <a:lstStyle/>
-          <a:p>
-            <a:endParaRPr lang="en-US"/>
-          </a:p>
-        </p:txBody>
-      </p:sp>
-      <p:sp>
-        <p:nvSpPr>
-          <p:cNvPr id="6" name="Text 4"/>
-          <p:cNvSpPr/>
-          <p:nvPr/>
-        </p:nvSpPr>
-        <p:spPr>
-          <a:xfrm>
-            <a:off x="438912" y="1097280"/>
-            <a:ext cx="3657600" cy="320040"/>
-          </a:xfrm>
-          <a:prstGeom prst="rect">
-            <a:avLst/>
-          </a:prstGeom>
-          <a:noFill/>
-          <a:ln/>
-        </p:spPr>
-        <p:txBody>
-          <a:bodyPr wrap="square" lIns="0" tIns="0" rIns="0" bIns="0" rtlCol="0" anchor="ctr"/>
-          <a:lstStyle/>
-          <a:p>
-            <a:pPr marL="0" indent="0">
-              <a:buNone/>
-            </a:pPr>
-            <a:r>
-              <a:rPr lang="en-US" sz="1000" b="1" dirty="0">
-                <a:solidFill>
-                  <a:srgbClr val="4F8EF7"/>
-                </a:solidFill>
-                <a:latin typeface="Calibri" pitchFamily="34" charset="0"/>
-                <a:ea typeface="Calibri" pitchFamily="34" charset="-122"/>
-                <a:cs typeface="Calibri" pitchFamily="34" charset="-120"/>
-              </a:rPr>
-              <a:t>MEMBER 1 </a:t>
-            </a:r>
-            <a:endParaRPr lang="en-US" sz="1000" dirty="0"/>
-          </a:p>
-        </p:txBody>
-      </p:sp>
-      <p:sp>
-        <p:nvSpPr>
-          <p:cNvPr id="7" name="Text 5"/>
-          <p:cNvSpPr/>
-          <p:nvPr/>
-        </p:nvSpPr>
-        <p:spPr>
-          <a:xfrm>
-            <a:off x="438912" y="1417320"/>
-            <a:ext cx="3657600" cy="411480"/>
-          </a:xfrm>
-          <a:prstGeom prst="rect">
-            <a:avLst/>
-          </a:prstGeom>
-          <a:noFill/>
-          <a:ln/>
-        </p:spPr>
-        <p:txBody>
-          <a:bodyPr wrap="square" lIns="0" tIns="0" rIns="0" bIns="0" rtlCol="0" anchor="ctr"/>
-          <a:lstStyle/>
-          <a:p>
-            <a:pPr marL="0" indent="0">
-              <a:buNone/>
-            </a:pPr>
-            <a:r>
-              <a:rPr lang="en-US" sz="1800" b="1" dirty="0">
-                <a:solidFill>
-                  <a:srgbClr val="1A1F36"/>
-                </a:solidFill>
-                <a:latin typeface="Calibri" pitchFamily="34" charset="0"/>
-                <a:ea typeface="Calibri" pitchFamily="34" charset="-122"/>
-                <a:cs typeface="Calibri" pitchFamily="34" charset="-120"/>
-              </a:rPr>
-              <a:t>Sama Emad Abu Zahra</a:t>
-            </a:r>
-            <a:endParaRPr lang="en-US" sz="1800" dirty="0"/>
-          </a:p>
-        </p:txBody>
-      </p:sp>
-      <p:sp>
-        <p:nvSpPr>
-          <p:cNvPr id="8" name="Shape 6"/>
-          <p:cNvSpPr/>
-          <p:nvPr/>
-        </p:nvSpPr>
-        <p:spPr>
-          <a:xfrm>
-            <a:off x="438912" y="1874520"/>
-            <a:ext cx="3657600" cy="0"/>
-          </a:xfrm>
-          <a:prstGeom prst="line">
-            <a:avLst/>
-          </a:prstGeom>
-          <a:noFill/>
-          <a:ln w="12700">
-            <a:solidFill>
-              <a:srgbClr val="E0E6F8"/>
-            </a:solidFill>
-            <a:prstDash val="solid"/>
-          </a:ln>
-        </p:spPr>
-        <p:txBody>
-          <a:bodyPr/>
-          <a:lstStyle/>
-          <a:p>
-            <a:endParaRPr lang="en-US"/>
-          </a:p>
-        </p:txBody>
-      </p:sp>
-      <p:sp>
-        <p:nvSpPr>
-          <p:cNvPr id="9" name="Text 7"/>
-          <p:cNvSpPr/>
-          <p:nvPr/>
-        </p:nvSpPr>
-        <p:spPr>
-          <a:xfrm>
-            <a:off x="438912" y="1993392"/>
-            <a:ext cx="3657600" cy="2651760"/>
-          </a:xfrm>
-          <a:prstGeom prst="rect">
-            <a:avLst/>
-          </a:prstGeom>
-          <a:noFill/>
-          <a:ln/>
-        </p:spPr>
-        <p:txBody>
-          <a:bodyPr wrap="square" lIns="0" tIns="0" rIns="0" bIns="0" rtlCol="0" anchor="ctr"/>
-          <a:lstStyle/>
-          <a:p>
-            <a:pPr marL="342900" indent="-342900">
-              <a:spcAft>
-                <a:spcPts val="400"/>
-              </a:spcAft>
-              <a:buSzPct val="100000"/>
-              <a:buChar char="•"/>
-            </a:pPr>
-            <a:r>
-              <a:rPr lang="en-US" sz="1250" dirty="0">
-                <a:solidFill>
-                  <a:srgbClr val="1A1F36"/>
-                </a:solidFill>
-                <a:latin typeface="Calibri" pitchFamily="34" charset="0"/>
-                <a:ea typeface="Calibri" pitchFamily="34" charset="-122"/>
-                <a:cs typeface="Calibri" pitchFamily="34" charset="-120"/>
-              </a:rPr>
-              <a:t>Implemented mmap_compute</a:t>
-            </a:r>
-            <a:endParaRPr lang="en-US" sz="1250" dirty="0"/>
-          </a:p>
-          <a:p>
-            <a:pPr marL="342900" indent="-342900">
-              <a:spcAft>
-                <a:spcPts val="400"/>
-              </a:spcAft>
-              <a:buSzPct val="100000"/>
-              <a:buChar char="•"/>
-            </a:pPr>
-            <a:r>
-              <a:rPr lang="en-US" sz="1250" dirty="0">
-                <a:solidFill>
-                  <a:srgbClr val="1A1F36"/>
-                </a:solidFill>
-                <a:latin typeface="Calibri" pitchFamily="34" charset="0"/>
-                <a:ea typeface="Calibri" pitchFamily="34" charset="-122"/>
-                <a:cs typeface="Calibri" pitchFamily="34" charset="-120"/>
-              </a:rPr>
-              <a:t>Implemented threads_compute</a:t>
-            </a:r>
-            <a:endParaRPr lang="en-US" sz="1250" dirty="0"/>
-          </a:p>
-          <a:p>
-            <a:pPr marL="342900" indent="-342900">
-              <a:spcAft>
-                <a:spcPts val="400"/>
-              </a:spcAft>
-              <a:buSzPct val="100000"/>
-              <a:buChar char="•"/>
-            </a:pPr>
-            <a:r>
-              <a:rPr lang="en-US" sz="1250" dirty="0">
-                <a:solidFill>
-                  <a:srgbClr val="1A1F36"/>
-                </a:solidFill>
-                <a:latin typeface="Calibri" pitchFamily="34" charset="0"/>
-                <a:ea typeface="Calibri" pitchFamily="34" charset="-122"/>
-                <a:cs typeface="Calibri" pitchFamily="34" charset="-120"/>
-              </a:rPr>
-              <a:t>Updated parse.h (read_numbers_ul)</a:t>
-            </a:r>
-            <a:endParaRPr lang="en-US" sz="1250" dirty="0"/>
-          </a:p>
-          <a:p>
-            <a:pPr marL="342900" indent="-342900">
-              <a:spcAft>
-                <a:spcPts val="400"/>
-              </a:spcAft>
-              <a:buSzPct val="100000"/>
-              <a:buChar char="•"/>
-            </a:pPr>
-            <a:r>
-              <a:rPr lang="en-US" sz="1250" dirty="0">
-                <a:solidFill>
-                  <a:srgbClr val="1A1F36"/>
-                </a:solidFill>
-                <a:latin typeface="Calibri" pitchFamily="34" charset="0"/>
-                <a:ea typeface="Calibri" pitchFamily="34" charset="-122"/>
-                <a:cs typeface="Calibri" pitchFamily="34" charset="-120"/>
-              </a:rPr>
-              <a:t>Updated compute.h (ulfunc_t type)</a:t>
-            </a:r>
-            <a:endParaRPr lang="en-US" sz="1250" dirty="0"/>
-          </a:p>
-          <a:p>
-            <a:pPr marL="342900" indent="-342900">
-              <a:spcAft>
-                <a:spcPts val="400"/>
-              </a:spcAft>
-              <a:buSzPct val="100000"/>
-              <a:buChar char="•"/>
-            </a:pPr>
-            <a:r>
-              <a:rPr lang="en-US" sz="1250" dirty="0">
-                <a:solidFill>
-                  <a:srgbClr val="1A1F36"/>
-                </a:solidFill>
-                <a:latin typeface="Calibri" pitchFamily="34" charset="0"/>
-                <a:ea typeface="Calibri" pitchFamily="34" charset="-122"/>
-                <a:cs typeface="Calibri" pitchFamily="34" charset="-120"/>
-              </a:rPr>
-              <a:t>Wrote test_correctness.c for all 4 functions</a:t>
-            </a:r>
-            <a:endParaRPr lang="en-US" sz="1250" dirty="0"/>
-          </a:p>
-          <a:p>
-            <a:pPr marL="342900" indent="-342900">
-              <a:spcAft>
-                <a:spcPts val="400"/>
-              </a:spcAft>
-              <a:buSzPct val="100000"/>
-              <a:buChar char="•"/>
-            </a:pPr>
-            <a:r>
-              <a:rPr lang="en-US" sz="1250" dirty="0">
-                <a:solidFill>
-                  <a:srgbClr val="1A1F36"/>
-                </a:solidFill>
-                <a:latin typeface="Calibri" pitchFamily="34" charset="0"/>
-                <a:ea typeface="Calibri" pitchFamily="34" charset="-122"/>
-                <a:cs typeface="Calibri" pitchFamily="34" charset="-120"/>
-              </a:rPr>
-              <a:t>Verified correctness</a:t>
-            </a:r>
-            <a:endParaRPr lang="en-US" sz="1250" dirty="0"/>
-          </a:p>
-        </p:txBody>
-      </p:sp>
-      <p:sp>
-        <p:nvSpPr>
-          <p:cNvPr id="10" name="Shape 8"/>
-          <p:cNvSpPr/>
-          <p:nvPr/>
-        </p:nvSpPr>
-        <p:spPr>
-          <a:xfrm>
-            <a:off x="4846320" y="1005840"/>
-            <a:ext cx="4023360" cy="3749040"/>
-          </a:xfrm>
-          <a:prstGeom prst="rect">
-            <a:avLst/>
-          </a:prstGeom>
-          <a:solidFill>
-            <a:srgbClr val="FFFFFF"/>
-          </a:solidFill>
-          <a:ln w="12700">
-            <a:solidFill>
-              <a:srgbClr val="E0E6F8"/>
-            </a:solidFill>
-            <a:prstDash val="solid"/>
-          </a:ln>
-          <a:effectLst>
-            <a:outerShdw blurRad="101600" dist="38100" dir="8100000" algn="bl" rotWithShape="0">
-              <a:srgbClr val="000000">
-                <a:alpha val="18000"/>
-              </a:srgbClr>
-            </a:outerShdw>
-          </a:effectLst>
-        </p:spPr>
-        <p:txBody>
-          <a:bodyPr/>
-          <a:lstStyle/>
-          <a:p>
-            <a:endParaRPr lang="en-US" dirty="0"/>
-          </a:p>
-        </p:txBody>
-      </p:sp>
-      <p:sp>
-        <p:nvSpPr>
-          <p:cNvPr id="11" name="Shape 9"/>
-          <p:cNvSpPr/>
-          <p:nvPr/>
-        </p:nvSpPr>
-        <p:spPr>
-          <a:xfrm>
-            <a:off x="4846320" y="1005840"/>
-            <a:ext cx="4023360" cy="109728"/>
-          </a:xfrm>
-          <a:prstGeom prst="rect">
-            <a:avLst/>
-          </a:prstGeom>
-          <a:solidFill>
-            <a:srgbClr val="00B4D8"/>
-          </a:solidFill>
-          <a:ln w="12700">
-            <a:solidFill>
-              <a:srgbClr val="00B4D8"/>
-            </a:solidFill>
-            <a:prstDash val="solid"/>
-          </a:ln>
-        </p:spPr>
-        <p:txBody>
-          <a:bodyPr/>
-          <a:lstStyle/>
-          <a:p>
-            <a:endParaRPr lang="en-US"/>
-          </a:p>
-        </p:txBody>
-      </p:sp>
-      <p:sp>
-        <p:nvSpPr>
-          <p:cNvPr id="12" name="Text 10"/>
-          <p:cNvSpPr/>
-          <p:nvPr/>
-        </p:nvSpPr>
-        <p:spPr>
-          <a:xfrm>
-            <a:off x="5010912" y="1097280"/>
-            <a:ext cx="3657600" cy="320040"/>
-          </a:xfrm>
-          <a:prstGeom prst="rect">
-            <a:avLst/>
-          </a:prstGeom>
-          <a:noFill/>
-          <a:ln/>
-        </p:spPr>
-        <p:txBody>
-          <a:bodyPr wrap="square" lIns="0" tIns="0" rIns="0" bIns="0" rtlCol="0" anchor="ctr"/>
-          <a:lstStyle/>
-          <a:p>
-            <a:pPr marL="0" indent="0">
-              <a:buNone/>
-            </a:pPr>
-            <a:r>
-              <a:rPr lang="en-US" sz="1000" b="1" dirty="0">
-                <a:solidFill>
-                  <a:srgbClr val="00B4D8"/>
-                </a:solidFill>
-                <a:latin typeface="Calibri" pitchFamily="34" charset="0"/>
-                <a:ea typeface="Calibri" pitchFamily="34" charset="-122"/>
-                <a:cs typeface="Calibri" pitchFamily="34" charset="-120"/>
-              </a:rPr>
-              <a:t>MEMBER 2</a:t>
-            </a:r>
-            <a:endParaRPr lang="en-US" sz="1000" dirty="0"/>
-          </a:p>
-        </p:txBody>
-      </p:sp>
-      <p:sp>
-        <p:nvSpPr>
-          <p:cNvPr id="13" name="Text 11"/>
-          <p:cNvSpPr/>
-          <p:nvPr/>
-        </p:nvSpPr>
-        <p:spPr>
-          <a:xfrm>
-            <a:off x="5010912" y="1417320"/>
-            <a:ext cx="3657600" cy="411480"/>
-          </a:xfrm>
-          <a:prstGeom prst="rect">
-            <a:avLst/>
-          </a:prstGeom>
-          <a:noFill/>
-          <a:ln/>
-        </p:spPr>
-        <p:txBody>
-          <a:bodyPr wrap="square" lIns="0" tIns="0" rIns="0" bIns="0" rtlCol="0" anchor="ctr"/>
-          <a:lstStyle/>
-          <a:p>
-            <a:pPr marL="0" indent="0">
-              <a:buNone/>
-            </a:pPr>
-            <a:r>
-              <a:rPr lang="en-US" sz="1800" b="1" dirty="0">
-                <a:solidFill>
-                  <a:srgbClr val="1A1F36"/>
-                </a:solidFill>
-                <a:latin typeface="Calibri" pitchFamily="34" charset="0"/>
-                <a:ea typeface="Calibri" pitchFamily="34" charset="-122"/>
-                <a:cs typeface="Calibri" pitchFamily="34" charset="-120"/>
-              </a:rPr>
-              <a:t>Yara</a:t>
-            </a:r>
-            <a:endParaRPr lang="en-US" sz="1800" dirty="0"/>
-          </a:p>
-        </p:txBody>
-      </p:sp>
-      <p:sp>
-        <p:nvSpPr>
-          <p:cNvPr id="14" name="Shape 12"/>
-          <p:cNvSpPr/>
-          <p:nvPr/>
-        </p:nvSpPr>
-        <p:spPr>
-          <a:xfrm>
-            <a:off x="5010912" y="1874520"/>
-            <a:ext cx="3657600" cy="0"/>
-          </a:xfrm>
-          <a:prstGeom prst="line">
-            <a:avLst/>
-          </a:prstGeom>
-          <a:noFill/>
-          <a:ln w="12700">
-            <a:solidFill>
-              <a:srgbClr val="E0E6F8"/>
-            </a:solidFill>
-            <a:prstDash val="solid"/>
-          </a:ln>
-        </p:spPr>
-        <p:txBody>
-          <a:bodyPr/>
-          <a:lstStyle/>
-          <a:p>
-            <a:endParaRPr lang="en-US"/>
-          </a:p>
-        </p:txBody>
-      </p:sp>
-      <p:sp>
-        <p:nvSpPr>
-          <p:cNvPr id="15" name="Text 13"/>
-          <p:cNvSpPr/>
-          <p:nvPr/>
-        </p:nvSpPr>
-        <p:spPr>
-          <a:xfrm>
-            <a:off x="5010912" y="1993392"/>
-            <a:ext cx="3657600" cy="2651760"/>
-          </a:xfrm>
-          <a:prstGeom prst="rect">
-            <a:avLst/>
-          </a:prstGeom>
-          <a:noFill/>
-          <a:ln/>
-        </p:spPr>
-        <p:txBody>
-          <a:bodyPr wrap="square" lIns="0" tIns="0" rIns="0" bIns="0" rtlCol="0" anchor="ctr"/>
-          <a:lstStyle/>
-          <a:p>
-            <a:pPr marL="342900" indent="-342900">
-              <a:spcAft>
-                <a:spcPts val="400"/>
-              </a:spcAft>
-              <a:buSzPct val="100000"/>
-              <a:buChar char="•"/>
-            </a:pPr>
-            <a:endParaRPr lang="en-US" sz="1250" dirty="0"/>
-          </a:p>
-        </p:txBody>
-      </p:sp>
-      <p:sp>
-        <p:nvSpPr>
-          <p:cNvPr id="16" name="Text 7">
-            <a:extLst>
-              <a:ext uri="{FF2B5EF4-FFF2-40B4-BE49-F238E27FC236}">
-                <a16:creationId xmlns:a16="http://schemas.microsoft.com/office/drawing/2014/main" id="{87550E9F-D30B-F08A-054A-E036FBD0C477}"/>
-              </a:ext>
-            </a:extLst>
-          </p:cNvPr>
-          <p:cNvSpPr/>
-          <p:nvPr/>
-        </p:nvSpPr>
-        <p:spPr>
-          <a:xfrm>
-            <a:off x="5047488" y="1828800"/>
-            <a:ext cx="3657600" cy="2651760"/>
-          </a:xfrm>
-          <a:prstGeom prst="rect">
-            <a:avLst/>
-          </a:prstGeom>
-          <a:noFill/>
-          <a:ln/>
-        </p:spPr>
-        <p:txBody>
-          <a:bodyPr wrap="square" lIns="0" tIns="0" rIns="0" bIns="0" rtlCol="0" anchor="ctr"/>
-          <a:lstStyle/>
-          <a:p>
-            <a:pPr marL="342900" indent="-342900">
-              <a:spcAft>
-                <a:spcPts val="400"/>
-              </a:spcAft>
-              <a:buSzPct val="100000"/>
-              <a:buChar char="•"/>
-            </a:pPr>
-            <a:r>
-              <a:rPr lang="en-US" sz="1250" dirty="0">
-                <a:solidFill>
-                  <a:srgbClr val="1A1F36"/>
-                </a:solidFill>
-                <a:latin typeface="Calibri" pitchFamily="34" charset="0"/>
-                <a:ea typeface="Calibri" pitchFamily="34" charset="-122"/>
-                <a:cs typeface="Calibri" pitchFamily="34" charset="-120"/>
-              </a:rPr>
-              <a:t>Implemented Experiment_1</a:t>
-            </a:r>
-            <a:endParaRPr lang="en-US" sz="1250" dirty="0"/>
-          </a:p>
-          <a:p>
-            <a:pPr marL="342900" indent="-342900">
-              <a:spcAft>
-                <a:spcPts val="400"/>
-              </a:spcAft>
-              <a:buSzPct val="100000"/>
-              <a:buChar char="•"/>
-            </a:pPr>
-            <a:r>
-              <a:rPr lang="en-US" sz="1250" dirty="0">
-                <a:solidFill>
-                  <a:srgbClr val="1A1F36"/>
-                </a:solidFill>
-                <a:latin typeface="Calibri" pitchFamily="34" charset="0"/>
-                <a:ea typeface="Calibri" pitchFamily="34" charset="-122"/>
-                <a:cs typeface="Calibri" pitchFamily="34" charset="-120"/>
-              </a:rPr>
-              <a:t>Implemented Experiment_2</a:t>
-            </a:r>
-          </a:p>
-          <a:p>
-            <a:pPr marL="342900" indent="-342900">
-              <a:spcAft>
-                <a:spcPts val="400"/>
-              </a:spcAft>
-              <a:buSzPct val="100000"/>
-              <a:buChar char="•"/>
-            </a:pPr>
-            <a:r>
-              <a:rPr lang="en-US" sz="1250" dirty="0">
-                <a:solidFill>
-                  <a:srgbClr val="1A1F36"/>
-                </a:solidFill>
-                <a:latin typeface="Calibri" pitchFamily="34" charset="0"/>
-                <a:ea typeface="Calibri" pitchFamily="34" charset="-122"/>
-                <a:cs typeface="Calibri" pitchFamily="34" charset="-120"/>
-              </a:rPr>
-              <a:t>Ran both experiments and extracted results</a:t>
-            </a:r>
-            <a:endParaRPr lang="en-US" sz="1250" dirty="0"/>
-          </a:p>
-          <a:p>
-            <a:pPr marL="342900" indent="-342900">
-              <a:spcAft>
-                <a:spcPts val="400"/>
-              </a:spcAft>
-              <a:buSzPct val="100000"/>
-              <a:buChar char="•"/>
-            </a:pPr>
-            <a:r>
-              <a:rPr lang="en-US" sz="1250" dirty="0">
-                <a:solidFill>
-                  <a:srgbClr val="1A1F36"/>
-                </a:solidFill>
-                <a:latin typeface="Calibri" pitchFamily="34" charset="0"/>
-                <a:ea typeface="Calibri" pitchFamily="34" charset="-122"/>
-                <a:cs typeface="Calibri" pitchFamily="34" charset="-120"/>
-              </a:rPr>
-              <a:t>Updated sequential and parallel compute to match the new input function requirements</a:t>
-            </a:r>
-            <a:endParaRPr lang="en-US" sz="1250" dirty="0"/>
-          </a:p>
-        </p:txBody>
-      </p:sp>
-    </p:spTree>
-  </p:cSld>
-  <p:clrMapOvr>
-    <a:masterClrMapping/>
-  </p:clrMapOvr>
-</p:sld>
-</file>
-
-<file path=ppt/slides/slide20.xml><?xml version="1.0" encoding="utf-8"?>
+<file path=ppt/slides/slide21.xml><?xml version="1.0" encoding="utf-8"?>
 <p:sld xmlns:a="http://schemas.openxmlformats.org/drawingml/2006/main" xmlns:r="http://schemas.openxmlformats.org/officeDocument/2006/relationships" xmlns:p="http://schemas.openxmlformats.org/presentationml/2006/main">
   <p:cSld>
     <p:spTree>
@@ -13682,7 +14310,7 @@
 </p:sld>
 </file>
 
-<file path=ppt/slides/slide21.xml><?xml version="1.0" encoding="utf-8"?>
+<file path=ppt/slides/slide22.xml><?xml version="1.0" encoding="utf-8"?>
 <p:sld xmlns:a="http://schemas.openxmlformats.org/drawingml/2006/main" xmlns:r="http://schemas.openxmlformats.org/officeDocument/2006/relationships" xmlns:p="http://schemas.openxmlformats.org/presentationml/2006/main">
   <p:cSld>
     <p:spTree>
@@ -14094,7 +14722,7 @@
 </p:sld>
 </file>
 
-<file path=ppt/slides/slide22.xml><?xml version="1.0" encoding="utf-8"?>
+<file path=ppt/slides/slide23.xml><?xml version="1.0" encoding="utf-8"?>
 <p:sld xmlns:a="http://schemas.openxmlformats.org/drawingml/2006/main" xmlns:r="http://schemas.openxmlformats.org/officeDocument/2006/relationships" xmlns:p="http://schemas.openxmlformats.org/presentationml/2006/main">
   <p:cSld>
     <p:spTree>
@@ -14495,7 +15123,7 @@
 </p:sld>
 </file>
 
-<file path=ppt/slides/slide23.xml><?xml version="1.0" encoding="utf-8"?>
+<file path=ppt/slides/slide24.xml><?xml version="1.0" encoding="utf-8"?>
 <p:sld xmlns:a="http://schemas.openxmlformats.org/drawingml/2006/main" xmlns:r="http://schemas.openxmlformats.org/officeDocument/2006/relationships" xmlns:p="http://schemas.openxmlformats.org/presentationml/2006/main">
   <p:cSld>
     <p:spTree>
@@ -14960,7 +15588,7 @@
 </p:sld>
 </file>
 
-<file path=ppt/slides/slide24.xml><?xml version="1.0" encoding="utf-8"?>
+<file path=ppt/slides/slide25.xml><?xml version="1.0" encoding="utf-8"?>
 <p:sld xmlns:a="http://schemas.openxmlformats.org/drawingml/2006/main" xmlns:r="http://schemas.openxmlformats.org/officeDocument/2006/relationships" xmlns:p="http://schemas.openxmlformats.org/presentationml/2006/main">
   <p:cSld>
     <p:spTree>
@@ -18123,6 +18751,481 @@
 
 <file path=ppt/slides/slide5.xml><?xml version="1.0" encoding="utf-8"?>
 <p:sld xmlns:a="http://schemas.openxmlformats.org/drawingml/2006/main" xmlns:r="http://schemas.openxmlformats.org/officeDocument/2006/relationships" xmlns:p="http://schemas.openxmlformats.org/presentationml/2006/main">
+  <p:cSld>
+    <p:bg>
+      <p:bgPr>
+        <a:solidFill>
+          <a:srgbClr val="F0F4FF"/>
+        </a:solidFill>
+        <a:effectLst/>
+      </p:bgPr>
+    </p:bg>
+    <p:spTree>
+      <p:nvGrpSpPr>
+        <p:cNvPr id="1" name="">
+          <a:extLst>
+            <a:ext uri="{FF2B5EF4-FFF2-40B4-BE49-F238E27FC236}">
+              <a16:creationId xmlns:a16="http://schemas.microsoft.com/office/drawing/2014/main" id="{145F44F3-079A-9D47-92DA-4D571C8B85CD}"/>
+            </a:ext>
+          </a:extLst>
+        </p:cNvPr>
+        <p:cNvGrpSpPr/>
+        <p:nvPr/>
+      </p:nvGrpSpPr>
+      <p:grpSpPr>
+        <a:xfrm>
+          <a:off x="0" y="0"/>
+          <a:ext cx="0" cy="0"/>
+          <a:chOff x="0" y="0"/>
+          <a:chExt cx="0" cy="0"/>
+        </a:xfrm>
+      </p:grpSpPr>
+      <p:sp>
+        <p:nvSpPr>
+          <p:cNvPr id="2" name="Shape 0">
+            <a:extLst>
+              <a:ext uri="{FF2B5EF4-FFF2-40B4-BE49-F238E27FC236}">
+                <a16:creationId xmlns:a16="http://schemas.microsoft.com/office/drawing/2014/main" id="{F7271A21-82BD-7456-7DEA-33E9635A478E}"/>
+              </a:ext>
+            </a:extLst>
+          </p:cNvPr>
+          <p:cNvSpPr/>
+          <p:nvPr/>
+        </p:nvSpPr>
+        <p:spPr>
+          <a:xfrm>
+            <a:off x="0" y="0"/>
+            <a:ext cx="9144000" cy="868680"/>
+          </a:xfrm>
+          <a:prstGeom prst="rect">
+            <a:avLst/>
+          </a:prstGeom>
+          <a:solidFill>
+            <a:srgbClr val="1A1F36"/>
+          </a:solidFill>
+          <a:ln w="12700">
+            <a:solidFill>
+              <a:srgbClr val="1A1F36"/>
+            </a:solidFill>
+            <a:prstDash val="solid"/>
+          </a:ln>
+        </p:spPr>
+        <p:txBody>
+          <a:bodyPr/>
+          <a:lstStyle/>
+          <a:p>
+            <a:endParaRPr lang="en-US"/>
+          </a:p>
+        </p:txBody>
+      </p:sp>
+      <p:sp>
+        <p:nvSpPr>
+          <p:cNvPr id="3" name="Text 1">
+            <a:extLst>
+              <a:ext uri="{FF2B5EF4-FFF2-40B4-BE49-F238E27FC236}">
+                <a16:creationId xmlns:a16="http://schemas.microsoft.com/office/drawing/2014/main" id="{80C10F88-4DB5-F2E0-586F-5440AE72CBCD}"/>
+              </a:ext>
+            </a:extLst>
+          </p:cNvPr>
+          <p:cNvSpPr/>
+          <p:nvPr/>
+        </p:nvSpPr>
+        <p:spPr>
+          <a:xfrm>
+            <a:off x="365760" y="109728"/>
+            <a:ext cx="8412480" cy="640080"/>
+          </a:xfrm>
+          <a:prstGeom prst="rect">
+            <a:avLst/>
+          </a:prstGeom>
+          <a:noFill/>
+          <a:ln/>
+        </p:spPr>
+        <p:txBody>
+          <a:bodyPr wrap="square" lIns="0" tIns="0" rIns="0" bIns="0" rtlCol="0" anchor="ctr"/>
+          <a:lstStyle/>
+          <a:p>
+            <a:pPr marL="0" indent="0">
+              <a:buNone/>
+            </a:pPr>
+            <a:r>
+              <a:rPr lang="en-US" sz="2200" b="1" dirty="0">
+                <a:solidFill>
+                  <a:srgbClr val="FFFFFF"/>
+                </a:solidFill>
+                <a:latin typeface="Calibri" pitchFamily="34" charset="0"/>
+                <a:ea typeface="Calibri" pitchFamily="34" charset="-122"/>
+                <a:cs typeface="Calibri" pitchFamily="34" charset="-120"/>
+              </a:rPr>
+              <a:t>mmap_compute – side note</a:t>
+            </a:r>
+            <a:endParaRPr lang="en-US" sz="2200" dirty="0"/>
+          </a:p>
+        </p:txBody>
+      </p:sp>
+      <p:sp>
+        <p:nvSpPr>
+          <p:cNvPr id="4" name="Shape 2">
+            <a:extLst>
+              <a:ext uri="{FF2B5EF4-FFF2-40B4-BE49-F238E27FC236}">
+                <a16:creationId xmlns:a16="http://schemas.microsoft.com/office/drawing/2014/main" id="{235E5AD7-D6AF-304A-95F1-0150B2891D04}"/>
+              </a:ext>
+            </a:extLst>
+          </p:cNvPr>
+          <p:cNvSpPr/>
+          <p:nvPr/>
+        </p:nvSpPr>
+        <p:spPr>
+          <a:xfrm>
+            <a:off x="274320" y="960120"/>
+            <a:ext cx="8236634" cy="3886200"/>
+          </a:xfrm>
+          <a:prstGeom prst="rect">
+            <a:avLst/>
+          </a:prstGeom>
+          <a:solidFill>
+            <a:srgbClr val="FFFFFF"/>
+          </a:solidFill>
+          <a:ln w="12700">
+            <a:solidFill>
+              <a:srgbClr val="E0E6F8"/>
+            </a:solidFill>
+            <a:prstDash val="solid"/>
+          </a:ln>
+          <a:effectLst>
+            <a:outerShdw blurRad="101600" dist="38100" dir="8100000" algn="bl" rotWithShape="0">
+              <a:srgbClr val="000000">
+                <a:alpha val="18000"/>
+              </a:srgbClr>
+            </a:outerShdw>
+          </a:effectLst>
+        </p:spPr>
+        <p:txBody>
+          <a:bodyPr/>
+          <a:lstStyle/>
+          <a:p>
+            <a:endParaRPr lang="en-US"/>
+          </a:p>
+        </p:txBody>
+      </p:sp>
+      <p:sp>
+        <p:nvSpPr>
+          <p:cNvPr id="5" name="Shape 3">
+            <a:extLst>
+              <a:ext uri="{FF2B5EF4-FFF2-40B4-BE49-F238E27FC236}">
+                <a16:creationId xmlns:a16="http://schemas.microsoft.com/office/drawing/2014/main" id="{0D2E126B-3396-B78F-DD16-00618F2ECFCC}"/>
+              </a:ext>
+            </a:extLst>
+          </p:cNvPr>
+          <p:cNvSpPr/>
+          <p:nvPr/>
+        </p:nvSpPr>
+        <p:spPr>
+          <a:xfrm>
+            <a:off x="274320" y="960120"/>
+            <a:ext cx="3749040" cy="109728"/>
+          </a:xfrm>
+          <a:prstGeom prst="rect">
+            <a:avLst/>
+          </a:prstGeom>
+          <a:solidFill>
+            <a:srgbClr val="4F8EF7"/>
+          </a:solidFill>
+          <a:ln w="12700">
+            <a:solidFill>
+              <a:srgbClr val="4F8EF7"/>
+            </a:solidFill>
+            <a:prstDash val="solid"/>
+          </a:ln>
+        </p:spPr>
+        <p:txBody>
+          <a:bodyPr/>
+          <a:lstStyle/>
+          <a:p>
+            <a:endParaRPr lang="en-US"/>
+          </a:p>
+        </p:txBody>
+      </p:sp>
+      <p:sp>
+        <p:nvSpPr>
+          <p:cNvPr id="6" name="Text 4">
+            <a:extLst>
+              <a:ext uri="{FF2B5EF4-FFF2-40B4-BE49-F238E27FC236}">
+                <a16:creationId xmlns:a16="http://schemas.microsoft.com/office/drawing/2014/main" id="{5478A357-C34A-B008-7220-0C7182E54766}"/>
+              </a:ext>
+            </a:extLst>
+          </p:cNvPr>
+          <p:cNvSpPr/>
+          <p:nvPr/>
+        </p:nvSpPr>
+        <p:spPr>
+          <a:xfrm>
+            <a:off x="411480" y="1229867"/>
+            <a:ext cx="8008034" cy="3440607"/>
+          </a:xfrm>
+          <a:prstGeom prst="rect">
+            <a:avLst/>
+          </a:prstGeom>
+          <a:noFill/>
+          <a:ln/>
+        </p:spPr>
+        <p:txBody>
+          <a:bodyPr wrap="square" lIns="0" tIns="0" rIns="0" bIns="0" rtlCol="0" anchor="ctr"/>
+          <a:lstStyle/>
+          <a:p>
+            <a:r>
+              <a:rPr lang="en-US" b="1" dirty="0">
+                <a:solidFill>
+                  <a:srgbClr val="1A1F36"/>
+                </a:solidFill>
+                <a:latin typeface="Calibri" pitchFamily="34" charset="0"/>
+                <a:ea typeface="Calibri" pitchFamily="34" charset="-122"/>
+                <a:cs typeface="Calibri" pitchFamily="34" charset="-120"/>
+              </a:rPr>
+              <a:t>In this implementation, the partials array is declared as:</a:t>
+            </a:r>
+          </a:p>
+          <a:p>
+            <a:r>
+              <a:rPr lang="en-US" sz="1400" dirty="0">
+                <a:solidFill>
+                  <a:srgbClr val="4F8EF7"/>
+                </a:solidFill>
+                <a:latin typeface="Consolas" pitchFamily="34" charset="0"/>
+              </a:rPr>
+              <a:t>unsigned long *partials</a:t>
+            </a:r>
+          </a:p>
+          <a:p>
+            <a:endParaRPr lang="en-US" sz="1400" dirty="0">
+              <a:solidFill>
+                <a:srgbClr val="4F8EF7"/>
+              </a:solidFill>
+              <a:latin typeface="Consolas" pitchFamily="34" charset="0"/>
+            </a:endParaRPr>
+          </a:p>
+          <a:p>
+            <a:r>
+              <a:rPr lang="en-US" b="1" dirty="0">
+                <a:solidFill>
+                  <a:srgbClr val="1A1F36"/>
+                </a:solidFill>
+                <a:latin typeface="Calibri" pitchFamily="34" charset="0"/>
+                <a:ea typeface="Calibri" pitchFamily="34" charset="-122"/>
+                <a:cs typeface="Calibri" pitchFamily="34" charset="-120"/>
+              </a:rPr>
+              <a:t>However, when combining results, we cast values to int:</a:t>
+            </a:r>
+          </a:p>
+          <a:p>
+            <a:r>
+              <a:rPr lang="en-US" sz="1400" dirty="0">
+                <a:solidFill>
+                  <a:srgbClr val="4F8EF7"/>
+                </a:solidFill>
+                <a:latin typeface="Consolas" pitchFamily="34" charset="0"/>
+              </a:rPr>
+              <a:t>result = f((int)result, (int)partials[</a:t>
+            </a:r>
+            <a:r>
+              <a:rPr lang="en-US" sz="1400" dirty="0" err="1">
+                <a:solidFill>
+                  <a:srgbClr val="4F8EF7"/>
+                </a:solidFill>
+                <a:latin typeface="Consolas" pitchFamily="34" charset="0"/>
+              </a:rPr>
+              <a:t>i</a:t>
+            </a:r>
+            <a:r>
+              <a:rPr lang="en-US" sz="1400" dirty="0">
+                <a:solidFill>
+                  <a:srgbClr val="4F8EF7"/>
+                </a:solidFill>
+                <a:latin typeface="Consolas" pitchFamily="34" charset="0"/>
+              </a:rPr>
+              <a:t>]);</a:t>
+            </a:r>
+          </a:p>
+          <a:p>
+            <a:endParaRPr lang="en-US" sz="1400" dirty="0">
+              <a:solidFill>
+                <a:srgbClr val="4F8EF7"/>
+              </a:solidFill>
+              <a:latin typeface="Consolas" pitchFamily="34" charset="0"/>
+            </a:endParaRPr>
+          </a:p>
+          <a:p>
+            <a:endParaRPr lang="en-US" sz="1400" dirty="0">
+              <a:solidFill>
+                <a:srgbClr val="4F8EF7"/>
+              </a:solidFill>
+              <a:latin typeface="Consolas" pitchFamily="34" charset="0"/>
+            </a:endParaRPr>
+          </a:p>
+          <a:p>
+            <a:r>
+              <a:rPr lang="en-US" sz="1400" b="1" dirty="0"/>
+              <a:t>⚠️ </a:t>
+            </a:r>
+            <a:r>
+              <a:rPr lang="en-US" b="1" dirty="0">
+                <a:solidFill>
+                  <a:srgbClr val="1A1F36"/>
+                </a:solidFill>
+                <a:latin typeface="Calibri" pitchFamily="34" charset="0"/>
+                <a:ea typeface="Calibri" pitchFamily="34" charset="-122"/>
+                <a:cs typeface="Calibri" pitchFamily="34" charset="-120"/>
+              </a:rPr>
+              <a:t>Why this casting was used?</a:t>
+            </a:r>
+            <a:endParaRPr lang="en-US" dirty="0">
+              <a:solidFill>
+                <a:srgbClr val="1A1F36"/>
+              </a:solidFill>
+              <a:latin typeface="Calibri" pitchFamily="34" charset="0"/>
+              <a:ea typeface="Calibri" pitchFamily="34" charset="-122"/>
+              <a:cs typeface="Calibri" pitchFamily="34" charset="-120"/>
+            </a:endParaRPr>
+          </a:p>
+          <a:p>
+            <a:r>
+              <a:rPr lang="en-US" dirty="0">
+                <a:solidFill>
+                  <a:srgbClr val="1A1F36"/>
+                </a:solidFill>
+                <a:latin typeface="Calibri" pitchFamily="34" charset="0"/>
+                <a:ea typeface="Calibri" pitchFamily="34" charset="-122"/>
+                <a:cs typeface="Calibri" pitchFamily="34" charset="-120"/>
+              </a:rPr>
+              <a:t>The function f according to the project requirements is defined to accept:</a:t>
+            </a:r>
+          </a:p>
+          <a:p>
+            <a:r>
+              <a:rPr lang="en-US" dirty="0">
+                <a:solidFill>
+                  <a:srgbClr val="1A1F36"/>
+                </a:solidFill>
+                <a:latin typeface="Calibri" pitchFamily="34" charset="0"/>
+                <a:ea typeface="Calibri" pitchFamily="34" charset="-122"/>
+                <a:cs typeface="Calibri" pitchFamily="34" charset="-120"/>
+              </a:rPr>
+              <a:t>int, int → </a:t>
+            </a:r>
+            <a:r>
+              <a:rPr lang="en-US" dirty="0"/>
+              <a:t> unsigned long </a:t>
+            </a:r>
+            <a:endParaRPr lang="en-US" dirty="0">
+              <a:solidFill>
+                <a:srgbClr val="1A1F36"/>
+              </a:solidFill>
+              <a:latin typeface="Calibri" pitchFamily="34" charset="0"/>
+              <a:ea typeface="Calibri" pitchFamily="34" charset="-122"/>
+              <a:cs typeface="Calibri" pitchFamily="34" charset="-120"/>
+            </a:endParaRPr>
+          </a:p>
+          <a:p>
+            <a:r>
+              <a:rPr lang="en-US" dirty="0">
+                <a:solidFill>
+                  <a:srgbClr val="1A1F36"/>
+                </a:solidFill>
+                <a:latin typeface="Calibri" pitchFamily="34" charset="0"/>
+                <a:ea typeface="Calibri" pitchFamily="34" charset="-122"/>
+                <a:cs typeface="Calibri" pitchFamily="34" charset="-120"/>
+              </a:rPr>
+              <a:t>But intermediate results are stored as unsigned long </a:t>
+            </a:r>
+          </a:p>
+          <a:p>
+            <a:r>
+              <a:rPr lang="en-US" dirty="0">
+                <a:solidFill>
+                  <a:srgbClr val="1A1F36"/>
+                </a:solidFill>
+                <a:latin typeface="Calibri" pitchFamily="34" charset="0"/>
+                <a:ea typeface="Calibri" pitchFamily="34" charset="-122"/>
+                <a:cs typeface="Calibri" pitchFamily="34" charset="-120"/>
+              </a:rPr>
+              <a:t>Therefore, casting is required to match the required function signature</a:t>
+            </a:r>
+          </a:p>
+          <a:p>
+            <a:r>
+              <a:rPr lang="en-US" b="1" dirty="0">
+                <a:solidFill>
+                  <a:srgbClr val="1A1F36"/>
+                </a:solidFill>
+                <a:latin typeface="Calibri" pitchFamily="34" charset="0"/>
+                <a:ea typeface="Calibri" pitchFamily="34" charset="-122"/>
+                <a:cs typeface="Calibri" pitchFamily="34" charset="-120"/>
+              </a:rPr>
+              <a:t>To avoid casting, we should define a consistent function type:</a:t>
+            </a:r>
+          </a:p>
+          <a:p>
+            <a:r>
+              <a:rPr lang="en-US" sz="1400" dirty="0">
+                <a:solidFill>
+                  <a:srgbClr val="4F8EF7"/>
+                </a:solidFill>
+                <a:latin typeface="Consolas" pitchFamily="34" charset="0"/>
+              </a:rPr>
+              <a:t>unsigned long f(unsigned long a, unsigned long b);</a:t>
+            </a:r>
+          </a:p>
+        </p:txBody>
+      </p:sp>
+      <p:sp>
+        <p:nvSpPr>
+          <p:cNvPr id="7" name="Text 5">
+            <a:extLst>
+              <a:ext uri="{FF2B5EF4-FFF2-40B4-BE49-F238E27FC236}">
+                <a16:creationId xmlns:a16="http://schemas.microsoft.com/office/drawing/2014/main" id="{2E9EE1E0-08FE-DF3E-E3FB-F69E4A5A3D64}"/>
+              </a:ext>
+            </a:extLst>
+          </p:cNvPr>
+          <p:cNvSpPr/>
+          <p:nvPr/>
+        </p:nvSpPr>
+        <p:spPr>
+          <a:xfrm>
+            <a:off x="411480" y="1389888"/>
+            <a:ext cx="3474720" cy="3383280"/>
+          </a:xfrm>
+          <a:prstGeom prst="rect">
+            <a:avLst/>
+          </a:prstGeom>
+          <a:noFill/>
+          <a:ln/>
+        </p:spPr>
+        <p:txBody>
+          <a:bodyPr wrap="square" lIns="0" tIns="0" rIns="0" bIns="0" rtlCol="0" anchor="ctr"/>
+          <a:lstStyle/>
+          <a:p>
+            <a:pPr marL="0" indent="0">
+              <a:buNone/>
+            </a:pPr>
+            <a:endParaRPr lang="en-US" sz="1200" dirty="0"/>
+          </a:p>
+        </p:txBody>
+      </p:sp>
+    </p:spTree>
+    <p:extLst>
+      <p:ext uri="{BB962C8B-B14F-4D97-AF65-F5344CB8AC3E}">
+        <p14:creationId xmlns:p14="http://schemas.microsoft.com/office/powerpoint/2010/main" val="3682197118"/>
+      </p:ext>
+    </p:extLst>
+  </p:cSld>
+  <p:clrMapOvr>
+    <a:masterClrMapping/>
+  </p:clrMapOvr>
+</p:sld>
+</file>
+
+<file path=ppt/slides/slide6.xml><?xml version="1.0" encoding="utf-8"?>
+<p:sld xmlns:a="http://schemas.openxmlformats.org/drawingml/2006/main" xmlns:r="http://schemas.openxmlformats.org/officeDocument/2006/relationships" xmlns:p="http://schemas.openxmlformats.org/presentationml/2006/main">
   <p:cSld name="Slide 5">
     <p:bg>
       <p:bgPr>
@@ -19301,7 +20404,7 @@
 </p:sld>
 </file>
 
-<file path=ppt/slides/slide6.xml><?xml version="1.0" encoding="utf-8"?>
+<file path=ppt/slides/slide7.xml><?xml version="1.0" encoding="utf-8"?>
 <p:sld xmlns:a="http://schemas.openxmlformats.org/drawingml/2006/main" xmlns:r="http://schemas.openxmlformats.org/officeDocument/2006/relationships" xmlns:p="http://schemas.openxmlformats.org/presentationml/2006/main">
   <p:cSld>
     <p:bg>
@@ -19428,7 +20531,7 @@
 </p:sld>
 </file>
 
-<file path=ppt/slides/slide7.xml><?xml version="1.0" encoding="utf-8"?>
+<file path=ppt/slides/slide8.xml><?xml version="1.0" encoding="utf-8"?>
 <p:sld xmlns:a="http://schemas.openxmlformats.org/drawingml/2006/main" xmlns:r="http://schemas.openxmlformats.org/officeDocument/2006/relationships" xmlns:p="http://schemas.openxmlformats.org/presentationml/2006/main">
   <p:cSld>
     <p:spTree>
@@ -19999,7 +21102,7 @@
 </p:sld>
 </file>
 
-<file path=ppt/slides/slide8.xml><?xml version="1.0" encoding="utf-8"?>
+<file path=ppt/slides/slide9.xml><?xml version="1.0" encoding="utf-8"?>
 <p:sld xmlns:a="http://schemas.openxmlformats.org/drawingml/2006/main" xmlns:r="http://schemas.openxmlformats.org/officeDocument/2006/relationships" xmlns:p="http://schemas.openxmlformats.org/presentationml/2006/main">
   <p:cSld>
     <p:spTree>
@@ -20364,525 +21467,6 @@
         <p14:creationId xmlns:p14="http://schemas.microsoft.com/office/powerpoint/2010/main" val="1917002051"/>
       </p:ext>
     </p:extLst>
-  </p:cSld>
-  <p:clrMapOvr>
-    <a:masterClrMapping/>
-  </p:clrMapOvr>
-</p:sld>
-</file>
-
-<file path=ppt/slides/slide9.xml><?xml version="1.0" encoding="utf-8"?>
-<p:sld xmlns:a="http://schemas.openxmlformats.org/drawingml/2006/main" xmlns:r="http://schemas.openxmlformats.org/officeDocument/2006/relationships" xmlns:p="http://schemas.openxmlformats.org/presentationml/2006/main">
-  <p:cSld>
-    <p:spTree>
-      <p:nvGrpSpPr>
-        <p:cNvPr id="1" name=""/>
-        <p:cNvGrpSpPr/>
-        <p:nvPr/>
-      </p:nvGrpSpPr>
-      <p:grpSpPr>
-        <a:xfrm>
-          <a:off x="0" y="0"/>
-          <a:ext cx="0" cy="0"/>
-          <a:chOff x="0" y="0"/>
-          <a:chExt cx="0" cy="0"/>
-        </a:xfrm>
-      </p:grpSpPr>
-      <p:sp>
-        <p:nvSpPr>
-          <p:cNvPr id="2" name="Shape 0"/>
-          <p:cNvSpPr/>
-          <p:nvPr/>
-        </p:nvSpPr>
-        <p:spPr>
-          <a:xfrm>
-            <a:off x="0" y="0"/>
-            <a:ext cx="9144000" cy="777240"/>
-          </a:xfrm>
-          <a:prstGeom prst="rect">
-            <a:avLst/>
-          </a:prstGeom>
-          <a:solidFill>
-            <a:srgbClr val="00A896"/>
-          </a:solidFill>
-          <a:ln w="12700">
-            <a:solidFill>
-              <a:srgbClr val="00A896"/>
-            </a:solidFill>
-            <a:prstDash val="solid"/>
-          </a:ln>
-        </p:spPr>
-        <p:txBody>
-          <a:bodyPr/>
-          <a:lstStyle/>
-          <a:p>
-            <a:endParaRPr lang="en-US"/>
-          </a:p>
-        </p:txBody>
-      </p:sp>
-      <p:sp>
-        <p:nvSpPr>
-          <p:cNvPr id="3" name="Text 1"/>
-          <p:cNvSpPr/>
-          <p:nvPr/>
-        </p:nvSpPr>
-        <p:spPr>
-          <a:xfrm>
-            <a:off x="365760" y="0"/>
-            <a:ext cx="8412480" cy="777240"/>
-          </a:xfrm>
-          <a:prstGeom prst="rect">
-            <a:avLst/>
-          </a:prstGeom>
-          <a:noFill/>
-          <a:ln/>
-        </p:spPr>
-        <p:txBody>
-          <a:bodyPr wrap="square" lIns="0" tIns="0" rIns="0" bIns="0" rtlCol="0" anchor="ctr"/>
-          <a:lstStyle/>
-          <a:p>
-            <a:pPr marL="0" indent="0">
-              <a:buNone/>
-            </a:pPr>
-            <a:r>
-              <a:rPr lang="en-US" sz="2400" b="1" dirty="0">
-                <a:solidFill>
-                  <a:srgbClr val="FFFFFF"/>
-                </a:solidFill>
-                <a:latin typeface="Calibri" pitchFamily="34" charset="0"/>
-                <a:ea typeface="Calibri" pitchFamily="34" charset="-122"/>
-                <a:cs typeface="Calibri" pitchFamily="34" charset="-120"/>
-              </a:rPr>
-              <a:t>02  parallel_compute — Pseudo-code</a:t>
-            </a:r>
-            <a:endParaRPr lang="en-US" sz="2400" dirty="0"/>
-          </a:p>
-        </p:txBody>
-      </p:sp>
-      <p:sp>
-        <p:nvSpPr>
-          <p:cNvPr id="4" name="Shape 2"/>
-          <p:cNvSpPr/>
-          <p:nvPr/>
-        </p:nvSpPr>
-        <p:spPr>
-          <a:xfrm>
-            <a:off x="320040" y="914400"/>
-            <a:ext cx="8503920" cy="3977640"/>
-          </a:xfrm>
-          <a:prstGeom prst="rect">
-            <a:avLst/>
-          </a:prstGeom>
-          <a:solidFill>
-            <a:srgbClr val="111D2A"/>
-          </a:solidFill>
-          <a:ln w="12700">
-            <a:solidFill>
-              <a:srgbClr val="3D5166"/>
-            </a:solidFill>
-            <a:prstDash val="solid"/>
-          </a:ln>
-          <a:effectLst>
-            <a:outerShdw blurRad="101600" dist="38100" dir="8100000" algn="bl" rotWithShape="0">
-              <a:srgbClr val="000000">
-                <a:alpha val="30000"/>
-              </a:srgbClr>
-            </a:outerShdw>
-          </a:effectLst>
-        </p:spPr>
-        <p:txBody>
-          <a:bodyPr/>
-          <a:lstStyle/>
-          <a:p>
-            <a:endParaRPr lang="en-US"/>
-          </a:p>
-        </p:txBody>
-      </p:sp>
-      <p:sp>
-        <p:nvSpPr>
-          <p:cNvPr id="5" name="Text 3"/>
-          <p:cNvSpPr/>
-          <p:nvPr/>
-        </p:nvSpPr>
-        <p:spPr>
-          <a:xfrm>
-            <a:off x="502920" y="1005840"/>
-            <a:ext cx="8229600" cy="3749040"/>
-          </a:xfrm>
-          <a:prstGeom prst="rect">
-            <a:avLst/>
-          </a:prstGeom>
-          <a:noFill/>
-          <a:ln/>
-        </p:spPr>
-        <p:txBody>
-          <a:bodyPr wrap="square" rtlCol="0" anchor="ctr"/>
-          <a:lstStyle/>
-          <a:p>
-            <a:pPr marL="0" indent="0" algn="l">
-              <a:buNone/>
-            </a:pPr>
-            <a:r>
-              <a:rPr lang="en-US" sz="1150" b="1" dirty="0">
-                <a:solidFill>
-                  <a:srgbClr val="FFB347"/>
-                </a:solidFill>
-                <a:latin typeface="Consolas" pitchFamily="34" charset="0"/>
-                <a:ea typeface="Consolas" pitchFamily="34" charset="-122"/>
-                <a:cs typeface="Consolas" pitchFamily="34" charset="-120"/>
-              </a:rPr>
-              <a:t>FUNCTION </a:t>
-            </a:r>
-            <a:r>
-              <a:rPr lang="en-US" sz="1150" b="1" dirty="0">
-                <a:solidFill>
-                  <a:srgbClr val="00C9A7"/>
-                </a:solidFill>
-                <a:latin typeface="Consolas" pitchFamily="34" charset="0"/>
-                <a:ea typeface="Consolas" pitchFamily="34" charset="-122"/>
-                <a:cs typeface="Consolas" pitchFamily="34" charset="-120"/>
-              </a:rPr>
-              <a:t>parallel_compute</a:t>
-            </a:r>
-            <a:r>
-              <a:rPr lang="en-US" sz="1150" dirty="0">
-                <a:solidFill>
-                  <a:srgbClr val="FFFFFF"/>
-                </a:solidFill>
-                <a:latin typeface="Consolas" pitchFamily="34" charset="0"/>
-                <a:ea typeface="Consolas" pitchFamily="34" charset="-122"/>
-                <a:cs typeface="Consolas" pitchFamily="34" charset="-120"/>
-              </a:rPr>
-              <a:t>(filepath, n_proc, f):
-    nums  ← </a:t>
-            </a:r>
-            <a:r>
-              <a:rPr lang="en-US" sz="1150" dirty="0">
-                <a:solidFill>
-                  <a:srgbClr val="00C9A7"/>
-                </a:solidFill>
-                <a:latin typeface="Consolas" pitchFamily="34" charset="0"/>
-                <a:ea typeface="Consolas" pitchFamily="34" charset="-122"/>
-                <a:cs typeface="Consolas" pitchFamily="34" charset="-120"/>
-              </a:rPr>
-              <a:t>read_numbers</a:t>
-            </a:r>
-            <a:r>
-              <a:rPr lang="en-US" sz="1150" dirty="0">
-                <a:solidFill>
-                  <a:srgbClr val="FFFFFF"/>
-                </a:solidFill>
-                <a:latin typeface="Consolas" pitchFamily="34" charset="0"/>
-                <a:ea typeface="Consolas" pitchFamily="34" charset="-122"/>
-                <a:cs typeface="Consolas" pitchFamily="34" charset="-120"/>
-              </a:rPr>
-              <a:t>(filepath)
-    chunk ← len(nums) / n_proc
-    remainder ← len(nums) % n_proc
-</a:t>
-            </a:r>
-            <a:r>
-              <a:rPr lang="en-US" sz="1150" dirty="0">
-                <a:solidFill>
-                  <a:srgbClr val="FFB347"/>
-                </a:solidFill>
-                <a:latin typeface="Consolas" pitchFamily="34" charset="0"/>
-                <a:ea typeface="Consolas" pitchFamily="34" charset="-122"/>
-                <a:cs typeface="Consolas" pitchFamily="34" charset="-120"/>
-              </a:rPr>
-              <a:t>    FOR </a:t>
-            </a:r>
-            <a:r>
-              <a:rPr lang="en-US" sz="1150" dirty="0">
-                <a:solidFill>
-                  <a:srgbClr val="FFFFFF"/>
-                </a:solidFill>
-                <a:latin typeface="Consolas" pitchFamily="34" charset="0"/>
-                <a:ea typeface="Consolas" pitchFamily="34" charset="-122"/>
-                <a:cs typeface="Consolas" pitchFamily="34" charset="-120"/>
-              </a:rPr>
-              <a:t>i = 0 </a:t>
-            </a:r>
-            <a:r>
-              <a:rPr lang="en-US" sz="1150" dirty="0">
-                <a:solidFill>
-                  <a:srgbClr val="FFB347"/>
-                </a:solidFill>
-                <a:latin typeface="Consolas" pitchFamily="34" charset="0"/>
-                <a:ea typeface="Consolas" pitchFamily="34" charset="-122"/>
-                <a:cs typeface="Consolas" pitchFamily="34" charset="-120"/>
-              </a:rPr>
-              <a:t>TO </a:t>
-            </a:r>
-            <a:r>
-              <a:rPr lang="en-US" sz="1150" dirty="0">
-                <a:solidFill>
-                  <a:srgbClr val="FFFFFF"/>
-                </a:solidFill>
-                <a:latin typeface="Consolas" pitchFamily="34" charset="0"/>
-                <a:ea typeface="Consolas" pitchFamily="34" charset="-122"/>
-                <a:cs typeface="Consolas" pitchFamily="34" charset="-120"/>
-              </a:rPr>
-              <a:t>n_proc - 1 :
-</a:t>
-            </a:r>
-            <a:r>
-              <a:rPr lang="en-US" sz="1150" dirty="0">
-                <a:solidFill>
-                  <a:srgbClr val="8BA3B8"/>
-                </a:solidFill>
-                <a:latin typeface="Consolas" pitchFamily="34" charset="0"/>
-                <a:ea typeface="Consolas" pitchFamily="34" charset="-122"/>
-                <a:cs typeface="Consolas" pitchFamily="34" charset="-120"/>
-              </a:rPr>
-              <a:t>        create ctrl_pipe[i], res_pipe[i]
-        fork child i
-</a:t>
-            </a:r>
-            <a:r>
-              <a:rPr lang="en-US" sz="1150" dirty="0">
-                <a:solidFill>
-                  <a:srgbClr val="FFB347"/>
-                </a:solidFill>
-                <a:latin typeface="Consolas" pitchFamily="34" charset="0"/>
-                <a:ea typeface="Consolas" pitchFamily="34" charset="-122"/>
-                <a:cs typeface="Consolas" pitchFamily="34" charset="-120"/>
-              </a:rPr>
-              <a:t>        IF </a:t>
-            </a:r>
-            <a:r>
-              <a:rPr lang="en-US" sz="1150" dirty="0">
-                <a:solidFill>
-                  <a:srgbClr val="FFFFFF"/>
-                </a:solidFill>
-                <a:latin typeface="Consolas" pitchFamily="34" charset="0"/>
-                <a:ea typeface="Consolas" pitchFamily="34" charset="-122"/>
-                <a:cs typeface="Consolas" pitchFamily="34" charset="-120"/>
-              </a:rPr>
-              <a:t>child :
-            start, end ← </a:t>
-            </a:r>
-            <a:r>
-              <a:rPr lang="en-US" sz="1150" dirty="0">
-                <a:solidFill>
-                  <a:srgbClr val="00C9A7"/>
-                </a:solidFill>
-                <a:latin typeface="Consolas" pitchFamily="34" charset="0"/>
-                <a:ea typeface="Consolas" pitchFamily="34" charset="-122"/>
-                <a:cs typeface="Consolas" pitchFamily="34" charset="-120"/>
-              </a:rPr>
-              <a:t>read</a:t>
-            </a:r>
-            <a:r>
-              <a:rPr lang="en-US" sz="1150" dirty="0">
-                <a:solidFill>
-                  <a:srgbClr val="8BA3B8"/>
-                </a:solidFill>
-                <a:latin typeface="Consolas" pitchFamily="34" charset="0"/>
-                <a:ea typeface="Consolas" pitchFamily="34" charset="-122"/>
-                <a:cs typeface="Consolas" pitchFamily="34" charset="-120"/>
-              </a:rPr>
-              <a:t>(ctrl_pipe[i])      // receive slice bounds
-</a:t>
-            </a:r>
-            <a:r>
-              <a:rPr lang="en-US" sz="1150" dirty="0">
-                <a:solidFill>
-                  <a:srgbClr val="FFFFFF"/>
-                </a:solidFill>
-                <a:latin typeface="Consolas" pitchFamily="34" charset="0"/>
-                <a:ea typeface="Consolas" pitchFamily="34" charset="-122"/>
-                <a:cs typeface="Consolas" pitchFamily="34" charset="-120"/>
-              </a:rPr>
-              <a:t>            partial ← sequential_compute(nums[start..end], f)
-            </a:t>
-            </a:r>
-            <a:r>
-              <a:rPr lang="en-US" sz="1150" dirty="0">
-                <a:solidFill>
-                  <a:srgbClr val="00C9A7"/>
-                </a:solidFill>
-                <a:latin typeface="Consolas" pitchFamily="34" charset="0"/>
-                <a:ea typeface="Consolas" pitchFamily="34" charset="-122"/>
-                <a:cs typeface="Consolas" pitchFamily="34" charset="-120"/>
-              </a:rPr>
-              <a:t>write</a:t>
-            </a:r>
-            <a:r>
-              <a:rPr lang="en-US" sz="1150" dirty="0">
-                <a:solidFill>
-                  <a:srgbClr val="FFFFFF"/>
-                </a:solidFill>
-                <a:latin typeface="Consolas" pitchFamily="34" charset="0"/>
-                <a:ea typeface="Consolas" pitchFamily="34" charset="-122"/>
-                <a:cs typeface="Consolas" pitchFamily="34" charset="-120"/>
-              </a:rPr>
-              <a:t>(res_pipe[i], partial) ; exit()
-</a:t>
-            </a:r>
-            <a:r>
-              <a:rPr lang="en-US" sz="1150" dirty="0">
-                <a:solidFill>
-                  <a:srgbClr val="FFB347"/>
-                </a:solidFill>
-                <a:latin typeface="Consolas" pitchFamily="34" charset="0"/>
-                <a:ea typeface="Consolas" pitchFamily="34" charset="-122"/>
-                <a:cs typeface="Consolas" pitchFamily="34" charset="-120"/>
-              </a:rPr>
-              <a:t>        ELSE </a:t>
-            </a:r>
-            <a:r>
-              <a:rPr lang="en-US" sz="1150" dirty="0">
-                <a:solidFill>
-                  <a:srgbClr val="FFFFFF"/>
-                </a:solidFill>
-                <a:latin typeface="Consolas" pitchFamily="34" charset="0"/>
-                <a:ea typeface="Consolas" pitchFamily="34" charset="-122"/>
-                <a:cs typeface="Consolas" pitchFamily="34" charset="-120"/>
-              </a:rPr>
-              <a:t>(parent) : </a:t>
-            </a:r>
-            <a:r>
-              <a:rPr lang="en-US" sz="1150" dirty="0">
-                <a:solidFill>
-                  <a:srgbClr val="00C9A7"/>
-                </a:solidFill>
-                <a:latin typeface="Consolas" pitchFamily="34" charset="0"/>
-                <a:ea typeface="Consolas" pitchFamily="34" charset="-122"/>
-                <a:cs typeface="Consolas" pitchFamily="34" charset="-120"/>
-              </a:rPr>
-              <a:t>write</a:t>
-            </a:r>
-            <a:r>
-              <a:rPr lang="en-US" sz="1150" dirty="0">
-                <a:solidFill>
-                  <a:srgbClr val="FFFFFF"/>
-                </a:solidFill>
-                <a:latin typeface="Consolas" pitchFamily="34" charset="0"/>
-                <a:ea typeface="Consolas" pitchFamily="34" charset="-122"/>
-                <a:cs typeface="Consolas" pitchFamily="34" charset="-120"/>
-              </a:rPr>
-              <a:t>(ctrl_pipe[i], start, end)
-</a:t>
-            </a:r>
-            <a:r>
-              <a:rPr lang="en-US" sz="1150" dirty="0">
-                <a:solidFill>
-                  <a:srgbClr val="00C9A7"/>
-                </a:solidFill>
-                <a:latin typeface="Consolas" pitchFamily="34" charset="0"/>
-                <a:ea typeface="Consolas" pitchFamily="34" charset="-122"/>
-                <a:cs typeface="Consolas" pitchFamily="34" charset="-120"/>
-              </a:rPr>
-              <a:t>    wait</a:t>
-            </a:r>
-            <a:r>
-              <a:rPr lang="en-US" sz="1150" dirty="0">
-                <a:solidFill>
-                  <a:srgbClr val="FFFFFF"/>
-                </a:solidFill>
-                <a:latin typeface="Consolas" pitchFamily="34" charset="0"/>
-                <a:ea typeface="Consolas" pitchFamily="34" charset="-122"/>
-                <a:cs typeface="Consolas" pitchFamily="34" charset="-120"/>
-              </a:rPr>
-              <a:t>() for all children
-    result ← </a:t>
-            </a:r>
-            <a:r>
-              <a:rPr lang="en-US" sz="1150" dirty="0">
-                <a:solidFill>
-                  <a:srgbClr val="00C9A7"/>
-                </a:solidFill>
-                <a:latin typeface="Consolas" pitchFamily="34" charset="0"/>
-                <a:ea typeface="Consolas" pitchFamily="34" charset="-122"/>
-                <a:cs typeface="Consolas" pitchFamily="34" charset="-120"/>
-              </a:rPr>
-              <a:t>read</a:t>
-            </a:r>
-            <a:r>
-              <a:rPr lang="en-US" sz="1150" dirty="0">
-                <a:solidFill>
-                  <a:srgbClr val="FFFFFF"/>
-                </a:solidFill>
-                <a:latin typeface="Consolas" pitchFamily="34" charset="0"/>
-                <a:ea typeface="Consolas" pitchFamily="34" charset="-122"/>
-                <a:cs typeface="Consolas" pitchFamily="34" charset="-120"/>
-              </a:rPr>
-              <a:t>(res_pipe[0])
-</a:t>
-            </a:r>
-            <a:r>
-              <a:rPr lang="en-US" sz="1150" dirty="0">
-                <a:solidFill>
-                  <a:srgbClr val="FFB347"/>
-                </a:solidFill>
-                <a:latin typeface="Consolas" pitchFamily="34" charset="0"/>
-                <a:ea typeface="Consolas" pitchFamily="34" charset="-122"/>
-                <a:cs typeface="Consolas" pitchFamily="34" charset="-120"/>
-              </a:rPr>
-              <a:t>    FOR </a:t>
-            </a:r>
-            <a:r>
-              <a:rPr lang="en-US" sz="1150" dirty="0">
-                <a:solidFill>
-                  <a:srgbClr val="FFFFFF"/>
-                </a:solidFill>
-                <a:latin typeface="Consolas" pitchFamily="34" charset="0"/>
-                <a:ea typeface="Consolas" pitchFamily="34" charset="-122"/>
-                <a:cs typeface="Consolas" pitchFamily="34" charset="-120"/>
-              </a:rPr>
-              <a:t>i = 1 TO n_proc-1 : result ← f(result, </a:t>
-            </a:r>
-            <a:r>
-              <a:rPr lang="en-US" sz="1150" dirty="0">
-                <a:solidFill>
-                  <a:srgbClr val="00C9A7"/>
-                </a:solidFill>
-                <a:latin typeface="Consolas" pitchFamily="34" charset="0"/>
-                <a:ea typeface="Consolas" pitchFamily="34" charset="-122"/>
-                <a:cs typeface="Consolas" pitchFamily="34" charset="-120"/>
-              </a:rPr>
-              <a:t>read</a:t>
-            </a:r>
-            <a:r>
-              <a:rPr lang="en-US" sz="1150" dirty="0">
-                <a:solidFill>
-                  <a:srgbClr val="FFFFFF"/>
-                </a:solidFill>
-                <a:latin typeface="Consolas" pitchFamily="34" charset="0"/>
-                <a:ea typeface="Consolas" pitchFamily="34" charset="-122"/>
-                <a:cs typeface="Consolas" pitchFamily="34" charset="-120"/>
-              </a:rPr>
-              <a:t>(res_pipe[i]))
-</a:t>
-            </a:r>
-            <a:r>
-              <a:rPr lang="en-US" sz="1150" dirty="0">
-                <a:solidFill>
-                  <a:srgbClr val="FFB347"/>
-                </a:solidFill>
-                <a:latin typeface="Consolas" pitchFamily="34" charset="0"/>
-                <a:ea typeface="Consolas" pitchFamily="34" charset="-122"/>
-                <a:cs typeface="Consolas" pitchFamily="34" charset="-120"/>
-              </a:rPr>
-              <a:t>    RETURN </a:t>
-            </a:r>
-            <a:r>
-              <a:rPr lang="en-US" sz="1150" dirty="0">
-                <a:solidFill>
-                  <a:srgbClr val="4CAF86"/>
-                </a:solidFill>
-                <a:latin typeface="Consolas" pitchFamily="34" charset="0"/>
-                <a:ea typeface="Consolas" pitchFamily="34" charset="-122"/>
-                <a:cs typeface="Consolas" pitchFamily="34" charset="-120"/>
-              </a:rPr>
-              <a:t>result</a:t>
-            </a:r>
-            <a:endParaRPr lang="en-US" sz="1150" dirty="0"/>
-          </a:p>
-        </p:txBody>
-      </p:sp>
-    </p:spTree>
   </p:cSld>
   <p:clrMapOvr>
     <a:masterClrMapping/>

--- a/project_slides.pptx
+++ b/project_slides.pptx
@@ -5,34 +5,35 @@
     <p:sldMasterId id="2147483648" r:id="rId1"/>
   </p:sldMasterIdLst>
   <p:notesMasterIdLst>
-    <p:notesMasterId r:id="rId27"/>
+    <p:notesMasterId r:id="rId28"/>
   </p:notesMasterIdLst>
   <p:sldIdLst>
     <p:sldId id="256" r:id="rId2"/>
     <p:sldId id="257" r:id="rId3"/>
-    <p:sldId id="258" r:id="rId4"/>
-    <p:sldId id="259" r:id="rId5"/>
-    <p:sldId id="281" r:id="rId6"/>
-    <p:sldId id="260" r:id="rId7"/>
-    <p:sldId id="268" r:id="rId8"/>
-    <p:sldId id="269" r:id="rId9"/>
-    <p:sldId id="273" r:id="rId10"/>
-    <p:sldId id="274" r:id="rId11"/>
-    <p:sldId id="261" r:id="rId12"/>
-    <p:sldId id="263" r:id="rId13"/>
-    <p:sldId id="264" r:id="rId14"/>
-    <p:sldId id="265" r:id="rId15"/>
-    <p:sldId id="266" r:id="rId16"/>
-    <p:sldId id="267" r:id="rId17"/>
-    <p:sldId id="262" r:id="rId18"/>
-    <p:sldId id="277" r:id="rId19"/>
-    <p:sldId id="276" r:id="rId20"/>
-    <p:sldId id="275" r:id="rId21"/>
-    <p:sldId id="270" r:id="rId22"/>
-    <p:sldId id="271" r:id="rId23"/>
-    <p:sldId id="278" r:id="rId24"/>
-    <p:sldId id="279" r:id="rId25"/>
-    <p:sldId id="280" r:id="rId26"/>
+    <p:sldId id="282" r:id="rId4"/>
+    <p:sldId id="258" r:id="rId5"/>
+    <p:sldId id="259" r:id="rId6"/>
+    <p:sldId id="281" r:id="rId7"/>
+    <p:sldId id="260" r:id="rId8"/>
+    <p:sldId id="268" r:id="rId9"/>
+    <p:sldId id="269" r:id="rId10"/>
+    <p:sldId id="273" r:id="rId11"/>
+    <p:sldId id="274" r:id="rId12"/>
+    <p:sldId id="261" r:id="rId13"/>
+    <p:sldId id="263" r:id="rId14"/>
+    <p:sldId id="264" r:id="rId15"/>
+    <p:sldId id="265" r:id="rId16"/>
+    <p:sldId id="266" r:id="rId17"/>
+    <p:sldId id="267" r:id="rId18"/>
+    <p:sldId id="262" r:id="rId19"/>
+    <p:sldId id="277" r:id="rId20"/>
+    <p:sldId id="276" r:id="rId21"/>
+    <p:sldId id="275" r:id="rId22"/>
+    <p:sldId id="270" r:id="rId23"/>
+    <p:sldId id="271" r:id="rId24"/>
+    <p:sldId id="278" r:id="rId25"/>
+    <p:sldId id="279" r:id="rId26"/>
+    <p:sldId id="280" r:id="rId27"/>
   </p:sldIdLst>
   <p:sldSz cx="9144000" cy="5143500" type="screen16x9"/>
   <p:notesSz cx="5143500" cy="9144000"/>
@@ -5946,7 +5947,13 @@
   <p:cSld>
     <p:spTree>
       <p:nvGrpSpPr>
-        <p:cNvPr id="1" name=""/>
+        <p:cNvPr id="1" name="">
+          <a:extLst>
+            <a:ext uri="{FF2B5EF4-FFF2-40B4-BE49-F238E27FC236}">
+              <a16:creationId xmlns:a16="http://schemas.microsoft.com/office/drawing/2014/main" id="{56C8BBE2-7578-9BEB-14BD-464DB3ACA1AC}"/>
+            </a:ext>
+          </a:extLst>
+        </p:cNvPr>
         <p:cNvGrpSpPr/>
         <p:nvPr/>
       </p:nvGrpSpPr>
@@ -5960,7 +5967,13 @@
       </p:grpSpPr>
       <p:sp>
         <p:nvSpPr>
-          <p:cNvPr id="2" name="Slide Image Placeholder 1"/>
+          <p:cNvPr id="2" name="Slide Image Placeholder 1">
+            <a:extLst>
+              <a:ext uri="{FF2B5EF4-FFF2-40B4-BE49-F238E27FC236}">
+                <a16:creationId xmlns:a16="http://schemas.microsoft.com/office/drawing/2014/main" id="{2CB27920-DE4C-B486-AD25-3E2134243777}"/>
+              </a:ext>
+            </a:extLst>
+          </p:cNvPr>
           <p:cNvSpPr>
             <a:spLocks noGrp="1" noRot="1" noChangeAspect="1"/>
           </p:cNvSpPr>
@@ -5972,7 +5985,13 @@
       </p:sp>
       <p:sp>
         <p:nvSpPr>
-          <p:cNvPr id="3" name="Notes Placeholder 2"/>
+          <p:cNvPr id="3" name="Notes Placeholder 2">
+            <a:extLst>
+              <a:ext uri="{FF2B5EF4-FFF2-40B4-BE49-F238E27FC236}">
+                <a16:creationId xmlns:a16="http://schemas.microsoft.com/office/drawing/2014/main" id="{E6031FEF-273E-9FF7-5447-19A6D6A871CD}"/>
+              </a:ext>
+            </a:extLst>
+          </p:cNvPr>
           <p:cNvSpPr>
             <a:spLocks noGrp="1"/>
           </p:cNvSpPr>
@@ -5991,7 +6010,13 @@
       </p:sp>
       <p:sp>
         <p:nvSpPr>
-          <p:cNvPr id="4" name="Slide Number Placeholder 3"/>
+          <p:cNvPr id="4" name="Slide Number Placeholder 3">
+            <a:extLst>
+              <a:ext uri="{FF2B5EF4-FFF2-40B4-BE49-F238E27FC236}">
+                <a16:creationId xmlns:a16="http://schemas.microsoft.com/office/drawing/2014/main" id="{0009025C-3118-B675-5E42-3686485C2256}"/>
+              </a:ext>
+            </a:extLst>
+          </p:cNvPr>
           <p:cNvSpPr>
             <a:spLocks noGrp="1"/>
           </p:cNvSpPr>
@@ -6015,7 +6040,7 @@
     </p:spTree>
     <p:extLst>
       <p:ext uri="{BB962C8B-B14F-4D97-AF65-F5344CB8AC3E}">
-        <p14:creationId xmlns:p14="http://schemas.microsoft.com/office/powerpoint/2010/main" val="1024086991"/>
+        <p14:creationId xmlns:p14="http://schemas.microsoft.com/office/powerpoint/2010/main" val="3630224614"/>
       </p:ext>
     </p:extLst>
   </p:cSld>
@@ -6114,6 +6139,90 @@
   <p:cSld>
     <p:spTree>
       <p:nvGrpSpPr>
+        <p:cNvPr id="1" name=""/>
+        <p:cNvGrpSpPr/>
+        <p:nvPr/>
+      </p:nvGrpSpPr>
+      <p:grpSpPr>
+        <a:xfrm>
+          <a:off x="0" y="0"/>
+          <a:ext cx="0" cy="0"/>
+          <a:chOff x="0" y="0"/>
+          <a:chExt cx="0" cy="0"/>
+        </a:xfrm>
+      </p:grpSpPr>
+      <p:sp>
+        <p:nvSpPr>
+          <p:cNvPr id="2" name="Slide Image Placeholder 1"/>
+          <p:cNvSpPr>
+            <a:spLocks noGrp="1" noRot="1" noChangeAspect="1"/>
+          </p:cNvSpPr>
+          <p:nvPr>
+            <p:ph type="sldImg"/>
+          </p:nvPr>
+        </p:nvSpPr>
+        <p:spPr/>
+      </p:sp>
+      <p:sp>
+        <p:nvSpPr>
+          <p:cNvPr id="3" name="Notes Placeholder 2"/>
+          <p:cNvSpPr>
+            <a:spLocks noGrp="1"/>
+          </p:cNvSpPr>
+          <p:nvPr>
+            <p:ph type="body" idx="1"/>
+          </p:nvPr>
+        </p:nvSpPr>
+        <p:spPr/>
+        <p:txBody>
+          <a:bodyPr/>
+          <a:lstStyle/>
+          <a:p>
+            <a:endParaRPr lang="en-US" dirty="0"/>
+          </a:p>
+        </p:txBody>
+      </p:sp>
+      <p:sp>
+        <p:nvSpPr>
+          <p:cNvPr id="4" name="Slide Number Placeholder 3"/>
+          <p:cNvSpPr>
+            <a:spLocks noGrp="1"/>
+          </p:cNvSpPr>
+          <p:nvPr>
+            <p:ph type="sldNum" sz="quarter" idx="10"/>
+          </p:nvPr>
+        </p:nvSpPr>
+        <p:spPr/>
+        <p:txBody>
+          <a:bodyPr/>
+          <a:lstStyle/>
+          <a:p>
+            <a:fld id="{F7021451-1387-4CA6-816F-3879F97B5CBC}" type="slidenum">
+              <a:rPr lang="en-US"/>
+              <a:t>12</a:t>
+            </a:fld>
+            <a:endParaRPr lang="en-US"/>
+          </a:p>
+        </p:txBody>
+      </p:sp>
+    </p:spTree>
+    <p:extLst>
+      <p:ext uri="{BB962C8B-B14F-4D97-AF65-F5344CB8AC3E}">
+        <p14:creationId xmlns:p14="http://schemas.microsoft.com/office/powerpoint/2010/main" val="1024086991"/>
+      </p:ext>
+    </p:extLst>
+  </p:cSld>
+  <p:clrMapOvr>
+    <a:masterClrMapping/>
+  </p:clrMapOvr>
+</p:notes>
+</file>
+
+<file path=ppt/notesSlides/notesSlide13.xml><?xml version="1.0" encoding="utf-8"?>
+<p:notes xmlns:a="http://schemas.openxmlformats.org/drawingml/2006/main" xmlns:r="http://schemas.openxmlformats.org/officeDocument/2006/relationships" xmlns:p="http://schemas.openxmlformats.org/presentationml/2006/main">
+  <p:cSld>
+    <p:spTree>
+      <p:nvGrpSpPr>
         <p:cNvPr id="1" name="">
           <a:extLst>
             <a:ext uri="{FF2B5EF4-FFF2-40B4-BE49-F238E27FC236}">
@@ -6198,7 +6307,7 @@
           <a:p>
             <a:fld id="{F7021451-1387-4CA6-816F-3879F97B5CBC}" type="slidenum">
               <a:rPr lang="en-US"/>
-              <a:t>12</a:t>
+              <a:t>13</a:t>
             </a:fld>
             <a:endParaRPr lang="en-US"/>
           </a:p>
@@ -6217,7 +6326,7 @@
 </p:notes>
 </file>
 
-<file path=ppt/notesSlides/notesSlide13.xml><?xml version="1.0" encoding="utf-8"?>
+<file path=ppt/notesSlides/notesSlide14.xml><?xml version="1.0" encoding="utf-8"?>
 <p:notes xmlns:a="http://schemas.openxmlformats.org/drawingml/2006/main" xmlns:r="http://schemas.openxmlformats.org/officeDocument/2006/relationships" xmlns:p="http://schemas.openxmlformats.org/presentationml/2006/main">
   <p:cSld>
     <p:spTree>
@@ -6306,7 +6415,7 @@
           <a:p>
             <a:fld id="{F7021451-1387-4CA6-816F-3879F97B5CBC}" type="slidenum">
               <a:rPr lang="en-US"/>
-              <a:t>13</a:t>
+              <a:t>14</a:t>
             </a:fld>
             <a:endParaRPr lang="en-US"/>
           </a:p>
@@ -6325,7 +6434,7 @@
 </p:notes>
 </file>
 
-<file path=ppt/notesSlides/notesSlide14.xml><?xml version="1.0" encoding="utf-8"?>
+<file path=ppt/notesSlides/notesSlide15.xml><?xml version="1.0" encoding="utf-8"?>
 <p:notes xmlns:a="http://schemas.openxmlformats.org/drawingml/2006/main" xmlns:r="http://schemas.openxmlformats.org/officeDocument/2006/relationships" xmlns:p="http://schemas.openxmlformats.org/presentationml/2006/main">
   <p:cSld>
     <p:spTree>
@@ -6414,7 +6523,7 @@
           <a:p>
             <a:fld id="{F7021451-1387-4CA6-816F-3879F97B5CBC}" type="slidenum">
               <a:rPr lang="en-US"/>
-              <a:t>14</a:t>
+              <a:t>15</a:t>
             </a:fld>
             <a:endParaRPr lang="en-US"/>
           </a:p>
@@ -6433,7 +6542,7 @@
 </p:notes>
 </file>
 
-<file path=ppt/notesSlides/notesSlide15.xml><?xml version="1.0" encoding="utf-8"?>
+<file path=ppt/notesSlides/notesSlide16.xml><?xml version="1.0" encoding="utf-8"?>
 <p:notes xmlns:a="http://schemas.openxmlformats.org/drawingml/2006/main" xmlns:r="http://schemas.openxmlformats.org/officeDocument/2006/relationships" xmlns:p="http://schemas.openxmlformats.org/presentationml/2006/main">
   <p:cSld>
     <p:spTree>
@@ -6522,7 +6631,7 @@
           <a:p>
             <a:fld id="{F7021451-1387-4CA6-816F-3879F97B5CBC}" type="slidenum">
               <a:rPr lang="en-US"/>
-              <a:t>15</a:t>
+              <a:t>16</a:t>
             </a:fld>
             <a:endParaRPr lang="en-US"/>
           </a:p>
@@ -6541,7 +6650,7 @@
 </p:notes>
 </file>
 
-<file path=ppt/notesSlides/notesSlide16.xml><?xml version="1.0" encoding="utf-8"?>
+<file path=ppt/notesSlides/notesSlide17.xml><?xml version="1.0" encoding="utf-8"?>
 <p:notes xmlns:a="http://schemas.openxmlformats.org/drawingml/2006/main" xmlns:r="http://schemas.openxmlformats.org/officeDocument/2006/relationships" xmlns:p="http://schemas.openxmlformats.org/presentationml/2006/main">
   <p:cSld>
     <p:spTree>
@@ -6630,7 +6739,7 @@
           <a:p>
             <a:fld id="{F7021451-1387-4CA6-816F-3879F97B5CBC}" type="slidenum">
               <a:rPr lang="en-US"/>
-              <a:t>16</a:t>
+              <a:t>17</a:t>
             </a:fld>
             <a:endParaRPr lang="en-US"/>
           </a:p>
@@ -6649,7 +6758,7 @@
 </p:notes>
 </file>
 
-<file path=ppt/notesSlides/notesSlide17.xml><?xml version="1.0" encoding="utf-8"?>
+<file path=ppt/notesSlides/notesSlide18.xml><?xml version="1.0" encoding="utf-8"?>
 <p:notes xmlns:a="http://schemas.openxmlformats.org/drawingml/2006/main" xmlns:r="http://schemas.openxmlformats.org/officeDocument/2006/relationships" xmlns:p="http://schemas.openxmlformats.org/presentationml/2006/main">
   <p:cSld>
     <p:spTree>
@@ -6714,7 +6823,7 @@
           <a:p>
             <a:fld id="{F7021451-1387-4CA6-816F-3879F97B5CBC}" type="slidenum">
               <a:rPr lang="en-US"/>
-              <a:t>17</a:t>
+              <a:t>18</a:t>
             </a:fld>
             <a:endParaRPr lang="en-US"/>
           </a:p>
@@ -6733,7 +6842,7 @@
 </p:notes>
 </file>
 
-<file path=ppt/notesSlides/notesSlide18.xml><?xml version="1.0" encoding="utf-8"?>
+<file path=ppt/notesSlides/notesSlide19.xml><?xml version="1.0" encoding="utf-8"?>
 <p:notes xmlns:a="http://schemas.openxmlformats.org/drawingml/2006/main" xmlns:r="http://schemas.openxmlformats.org/officeDocument/2006/relationships" xmlns:p="http://schemas.openxmlformats.org/presentationml/2006/main">
   <p:cSld>
     <p:spTree>
@@ -6822,7 +6931,7 @@
           <a:p>
             <a:fld id="{F7021451-1387-4CA6-816F-3879F97B5CBC}" type="slidenum">
               <a:rPr lang="en-US"/>
-              <a:t>18</a:t>
+              <a:t>19</a:t>
             </a:fld>
             <a:endParaRPr lang="en-US"/>
           </a:p>
@@ -6832,114 +6941,6 @@
     <p:extLst>
       <p:ext uri="{BB962C8B-B14F-4D97-AF65-F5344CB8AC3E}">
         <p14:creationId xmlns:p14="http://schemas.microsoft.com/office/powerpoint/2010/main" val="1051995170"/>
-      </p:ext>
-    </p:extLst>
-  </p:cSld>
-  <p:clrMapOvr>
-    <a:masterClrMapping/>
-  </p:clrMapOvr>
-</p:notes>
-</file>
-
-<file path=ppt/notesSlides/notesSlide19.xml><?xml version="1.0" encoding="utf-8"?>
-<p:notes xmlns:a="http://schemas.openxmlformats.org/drawingml/2006/main" xmlns:r="http://schemas.openxmlformats.org/officeDocument/2006/relationships" xmlns:p="http://schemas.openxmlformats.org/presentationml/2006/main">
-  <p:cSld>
-    <p:spTree>
-      <p:nvGrpSpPr>
-        <p:cNvPr id="1" name="">
-          <a:extLst>
-            <a:ext uri="{FF2B5EF4-FFF2-40B4-BE49-F238E27FC236}">
-              <a16:creationId xmlns:a16="http://schemas.microsoft.com/office/drawing/2014/main" id="{8EEECF95-0FFF-AF7E-D63B-A342C012B726}"/>
-            </a:ext>
-          </a:extLst>
-        </p:cNvPr>
-        <p:cNvGrpSpPr/>
-        <p:nvPr/>
-      </p:nvGrpSpPr>
-      <p:grpSpPr>
-        <a:xfrm>
-          <a:off x="0" y="0"/>
-          <a:ext cx="0" cy="0"/>
-          <a:chOff x="0" y="0"/>
-          <a:chExt cx="0" cy="0"/>
-        </a:xfrm>
-      </p:grpSpPr>
-      <p:sp>
-        <p:nvSpPr>
-          <p:cNvPr id="2" name="Slide Image Placeholder 1">
-            <a:extLst>
-              <a:ext uri="{FF2B5EF4-FFF2-40B4-BE49-F238E27FC236}">
-                <a16:creationId xmlns:a16="http://schemas.microsoft.com/office/drawing/2014/main" id="{40C31A08-1589-DFE0-DF70-6E0B5677F14C}"/>
-              </a:ext>
-            </a:extLst>
-          </p:cNvPr>
-          <p:cNvSpPr>
-            <a:spLocks noGrp="1" noRot="1" noChangeAspect="1"/>
-          </p:cNvSpPr>
-          <p:nvPr>
-            <p:ph type="sldImg"/>
-          </p:nvPr>
-        </p:nvSpPr>
-        <p:spPr/>
-      </p:sp>
-      <p:sp>
-        <p:nvSpPr>
-          <p:cNvPr id="3" name="Notes Placeholder 2">
-            <a:extLst>
-              <a:ext uri="{FF2B5EF4-FFF2-40B4-BE49-F238E27FC236}">
-                <a16:creationId xmlns:a16="http://schemas.microsoft.com/office/drawing/2014/main" id="{B9F6F86F-BACD-6D2A-D2D5-A49398FF7027}"/>
-              </a:ext>
-            </a:extLst>
-          </p:cNvPr>
-          <p:cNvSpPr>
-            <a:spLocks noGrp="1"/>
-          </p:cNvSpPr>
-          <p:nvPr>
-            <p:ph type="body" idx="1"/>
-          </p:nvPr>
-        </p:nvSpPr>
-        <p:spPr/>
-        <p:txBody>
-          <a:bodyPr/>
-          <a:lstStyle/>
-          <a:p>
-            <a:endParaRPr lang="en-US" dirty="0"/>
-          </a:p>
-        </p:txBody>
-      </p:sp>
-      <p:sp>
-        <p:nvSpPr>
-          <p:cNvPr id="4" name="Slide Number Placeholder 3">
-            <a:extLst>
-              <a:ext uri="{FF2B5EF4-FFF2-40B4-BE49-F238E27FC236}">
-                <a16:creationId xmlns:a16="http://schemas.microsoft.com/office/drawing/2014/main" id="{7DA6E4E8-6CE6-07EE-B311-373B9954E2BC}"/>
-              </a:ext>
-            </a:extLst>
-          </p:cNvPr>
-          <p:cNvSpPr>
-            <a:spLocks noGrp="1"/>
-          </p:cNvSpPr>
-          <p:nvPr>
-            <p:ph type="sldNum" sz="quarter" idx="10"/>
-          </p:nvPr>
-        </p:nvSpPr>
-        <p:spPr/>
-        <p:txBody>
-          <a:bodyPr/>
-          <a:lstStyle/>
-          <a:p>
-            <a:fld id="{F7021451-1387-4CA6-816F-3879F97B5CBC}" type="slidenum">
-              <a:rPr lang="en-US"/>
-              <a:t>19</a:t>
-            </a:fld>
-            <a:endParaRPr lang="en-US"/>
-          </a:p>
-        </p:txBody>
-      </p:sp>
-    </p:spTree>
-    <p:extLst>
-      <p:ext uri="{BB962C8B-B14F-4D97-AF65-F5344CB8AC3E}">
-        <p14:creationId xmlns:p14="http://schemas.microsoft.com/office/powerpoint/2010/main" val="1212680079"/>
       </p:ext>
     </p:extLst>
   </p:cSld>
@@ -7038,6 +7039,114 @@
   <p:cSld>
     <p:spTree>
       <p:nvGrpSpPr>
+        <p:cNvPr id="1" name="">
+          <a:extLst>
+            <a:ext uri="{FF2B5EF4-FFF2-40B4-BE49-F238E27FC236}">
+              <a16:creationId xmlns:a16="http://schemas.microsoft.com/office/drawing/2014/main" id="{8EEECF95-0FFF-AF7E-D63B-A342C012B726}"/>
+            </a:ext>
+          </a:extLst>
+        </p:cNvPr>
+        <p:cNvGrpSpPr/>
+        <p:nvPr/>
+      </p:nvGrpSpPr>
+      <p:grpSpPr>
+        <a:xfrm>
+          <a:off x="0" y="0"/>
+          <a:ext cx="0" cy="0"/>
+          <a:chOff x="0" y="0"/>
+          <a:chExt cx="0" cy="0"/>
+        </a:xfrm>
+      </p:grpSpPr>
+      <p:sp>
+        <p:nvSpPr>
+          <p:cNvPr id="2" name="Slide Image Placeholder 1">
+            <a:extLst>
+              <a:ext uri="{FF2B5EF4-FFF2-40B4-BE49-F238E27FC236}">
+                <a16:creationId xmlns:a16="http://schemas.microsoft.com/office/drawing/2014/main" id="{40C31A08-1589-DFE0-DF70-6E0B5677F14C}"/>
+              </a:ext>
+            </a:extLst>
+          </p:cNvPr>
+          <p:cNvSpPr>
+            <a:spLocks noGrp="1" noRot="1" noChangeAspect="1"/>
+          </p:cNvSpPr>
+          <p:nvPr>
+            <p:ph type="sldImg"/>
+          </p:nvPr>
+        </p:nvSpPr>
+        <p:spPr/>
+      </p:sp>
+      <p:sp>
+        <p:nvSpPr>
+          <p:cNvPr id="3" name="Notes Placeholder 2">
+            <a:extLst>
+              <a:ext uri="{FF2B5EF4-FFF2-40B4-BE49-F238E27FC236}">
+                <a16:creationId xmlns:a16="http://schemas.microsoft.com/office/drawing/2014/main" id="{B9F6F86F-BACD-6D2A-D2D5-A49398FF7027}"/>
+              </a:ext>
+            </a:extLst>
+          </p:cNvPr>
+          <p:cNvSpPr>
+            <a:spLocks noGrp="1"/>
+          </p:cNvSpPr>
+          <p:nvPr>
+            <p:ph type="body" idx="1"/>
+          </p:nvPr>
+        </p:nvSpPr>
+        <p:spPr/>
+        <p:txBody>
+          <a:bodyPr/>
+          <a:lstStyle/>
+          <a:p>
+            <a:endParaRPr lang="en-US" dirty="0"/>
+          </a:p>
+        </p:txBody>
+      </p:sp>
+      <p:sp>
+        <p:nvSpPr>
+          <p:cNvPr id="4" name="Slide Number Placeholder 3">
+            <a:extLst>
+              <a:ext uri="{FF2B5EF4-FFF2-40B4-BE49-F238E27FC236}">
+                <a16:creationId xmlns:a16="http://schemas.microsoft.com/office/drawing/2014/main" id="{7DA6E4E8-6CE6-07EE-B311-373B9954E2BC}"/>
+              </a:ext>
+            </a:extLst>
+          </p:cNvPr>
+          <p:cNvSpPr>
+            <a:spLocks noGrp="1"/>
+          </p:cNvSpPr>
+          <p:nvPr>
+            <p:ph type="sldNum" sz="quarter" idx="10"/>
+          </p:nvPr>
+        </p:nvSpPr>
+        <p:spPr/>
+        <p:txBody>
+          <a:bodyPr/>
+          <a:lstStyle/>
+          <a:p>
+            <a:fld id="{F7021451-1387-4CA6-816F-3879F97B5CBC}" type="slidenum">
+              <a:rPr lang="en-US"/>
+              <a:t>20</a:t>
+            </a:fld>
+            <a:endParaRPr lang="en-US"/>
+          </a:p>
+        </p:txBody>
+      </p:sp>
+    </p:spTree>
+    <p:extLst>
+      <p:ext uri="{BB962C8B-B14F-4D97-AF65-F5344CB8AC3E}">
+        <p14:creationId xmlns:p14="http://schemas.microsoft.com/office/powerpoint/2010/main" val="1212680079"/>
+      </p:ext>
+    </p:extLst>
+  </p:cSld>
+  <p:clrMapOvr>
+    <a:masterClrMapping/>
+  </p:clrMapOvr>
+</p:notes>
+</file>
+
+<file path=ppt/notesSlides/notesSlide21.xml><?xml version="1.0" encoding="utf-8"?>
+<p:notes xmlns:a="http://schemas.openxmlformats.org/drawingml/2006/main" xmlns:r="http://schemas.openxmlformats.org/officeDocument/2006/relationships" xmlns:p="http://schemas.openxmlformats.org/presentationml/2006/main">
+  <p:cSld>
+    <p:spTree>
+      <p:nvGrpSpPr>
         <p:cNvPr id="1" name=""/>
         <p:cNvGrpSpPr/>
         <p:nvPr/>
@@ -7098,7 +7207,7 @@
           <a:p>
             <a:fld id="{F7021451-1387-4CA6-816F-3879F97B5CBC}" type="slidenum">
               <a:rPr lang="en-US"/>
-              <a:t>20</a:t>
+              <a:t>21</a:t>
             </a:fld>
             <a:endParaRPr lang="en-US"/>
           </a:p>
@@ -7117,7 +7226,7 @@
 </p:notes>
 </file>
 
-<file path=ppt/notesSlides/notesSlide21.xml><?xml version="1.0" encoding="utf-8"?>
+<file path=ppt/notesSlides/notesSlide22.xml><?xml version="1.0" encoding="utf-8"?>
 <p:notes xmlns:a="http://schemas.openxmlformats.org/drawingml/2006/main" xmlns:r="http://schemas.openxmlformats.org/officeDocument/2006/relationships" xmlns:p="http://schemas.openxmlformats.org/presentationml/2006/main">
   <p:cSld>
     <p:spTree>
@@ -7253,7 +7362,7 @@
                 <a:tabLst/>
                 <a:defRPr/>
               </a:pPr>
-              <a:t>21</a:t>
+              <a:t>22</a:t>
             </a:fld>
             <a:endParaRPr kumimoji="0" lang="en-US" sz="1800" b="0" i="0" u="none" strike="noStrike" kern="1200" cap="none" spc="0" normalizeH="0" baseline="0" noProof="0">
               <a:ln>
@@ -7285,7 +7394,7 @@
 </p:notes>
 </file>
 
-<file path=ppt/notesSlides/notesSlide22.xml><?xml version="1.0" encoding="utf-8"?>
+<file path=ppt/notesSlides/notesSlide23.xml><?xml version="1.0" encoding="utf-8"?>
 <p:notes xmlns:a="http://schemas.openxmlformats.org/drawingml/2006/main" xmlns:r="http://schemas.openxmlformats.org/officeDocument/2006/relationships" xmlns:p="http://schemas.openxmlformats.org/presentationml/2006/main">
   <p:cSld>
     <p:spTree>
@@ -7374,7 +7483,7 @@
           <a:p>
             <a:fld id="{F7021451-1387-4CA6-816F-3879F97B5CBC}" type="slidenum">
               <a:rPr lang="en-US"/>
-              <a:t>22</a:t>
+              <a:t>23</a:t>
             </a:fld>
             <a:endParaRPr lang="en-US"/>
           </a:p>
@@ -7393,7 +7502,7 @@
 </p:notes>
 </file>
 
-<file path=ppt/notesSlides/notesSlide23.xml><?xml version="1.0" encoding="utf-8"?>
+<file path=ppt/notesSlides/notesSlide24.xml><?xml version="1.0" encoding="utf-8"?>
 <p:notes xmlns:a="http://schemas.openxmlformats.org/drawingml/2006/main" xmlns:r="http://schemas.openxmlformats.org/officeDocument/2006/relationships" xmlns:p="http://schemas.openxmlformats.org/presentationml/2006/main">
   <p:cSld>
     <p:spTree>
@@ -7482,7 +7591,7 @@
           <a:p>
             <a:fld id="{F7021451-1387-4CA6-816F-3879F97B5CBC}" type="slidenum">
               <a:rPr lang="en-US"/>
-              <a:t>23</a:t>
+              <a:t>24</a:t>
             </a:fld>
             <a:endParaRPr lang="en-US"/>
           </a:p>
@@ -7501,7 +7610,7 @@
 </p:notes>
 </file>
 
-<file path=ppt/notesSlides/notesSlide24.xml><?xml version="1.0" encoding="utf-8"?>
+<file path=ppt/notesSlides/notesSlide25.xml><?xml version="1.0" encoding="utf-8"?>
 <p:notes xmlns:a="http://schemas.openxmlformats.org/drawingml/2006/main" xmlns:r="http://schemas.openxmlformats.org/officeDocument/2006/relationships" xmlns:p="http://schemas.openxmlformats.org/presentationml/2006/main">
   <p:cSld>
     <p:spTree>
@@ -7590,7 +7699,7 @@
           <a:p>
             <a:fld id="{F7021451-1387-4CA6-816F-3879F97B5CBC}" type="slidenum">
               <a:rPr lang="en-US"/>
-              <a:t>24</a:t>
+              <a:t>25</a:t>
             </a:fld>
             <a:endParaRPr lang="en-US"/>
           </a:p>
@@ -7609,7 +7718,7 @@
 </p:notes>
 </file>
 
-<file path=ppt/notesSlides/notesSlide25.xml><?xml version="1.0" encoding="utf-8"?>
+<file path=ppt/notesSlides/notesSlide26.xml><?xml version="1.0" encoding="utf-8"?>
 <p:notes xmlns:a="http://schemas.openxmlformats.org/drawingml/2006/main" xmlns:r="http://schemas.openxmlformats.org/officeDocument/2006/relationships" xmlns:p="http://schemas.openxmlformats.org/presentationml/2006/main">
   <p:cSld>
     <p:spTree>
@@ -7698,7 +7807,7 @@
           <a:p>
             <a:fld id="{F7021451-1387-4CA6-816F-3879F97B5CBC}" type="slidenum">
               <a:rPr lang="en-US"/>
-              <a:t>25</a:t>
+              <a:t>26</a:t>
             </a:fld>
             <a:endParaRPr lang="en-US"/>
           </a:p>
@@ -7722,7 +7831,13 @@
   <p:cSld>
     <p:spTree>
       <p:nvGrpSpPr>
-        <p:cNvPr id="1" name=""/>
+        <p:cNvPr id="1" name="">
+          <a:extLst>
+            <a:ext uri="{FF2B5EF4-FFF2-40B4-BE49-F238E27FC236}">
+              <a16:creationId xmlns:a16="http://schemas.microsoft.com/office/drawing/2014/main" id="{AC44768D-33E9-D2FD-8428-A75204FE5C57}"/>
+            </a:ext>
+          </a:extLst>
+        </p:cNvPr>
         <p:cNvGrpSpPr/>
         <p:nvPr/>
       </p:nvGrpSpPr>
@@ -7736,7 +7851,13 @@
       </p:grpSpPr>
       <p:sp>
         <p:nvSpPr>
-          <p:cNvPr id="2" name="Slide Image Placeholder 1"/>
+          <p:cNvPr id="2" name="Slide Image Placeholder 1">
+            <a:extLst>
+              <a:ext uri="{FF2B5EF4-FFF2-40B4-BE49-F238E27FC236}">
+                <a16:creationId xmlns:a16="http://schemas.microsoft.com/office/drawing/2014/main" id="{D68C863F-F82C-13E3-BD8C-CD676F6FDD31}"/>
+              </a:ext>
+            </a:extLst>
+          </p:cNvPr>
           <p:cNvSpPr>
             <a:spLocks noGrp="1" noRot="1" noChangeAspect="1"/>
           </p:cNvSpPr>
@@ -7748,7 +7869,13 @@
       </p:sp>
       <p:sp>
         <p:nvSpPr>
-          <p:cNvPr id="3" name="Notes Placeholder 2"/>
+          <p:cNvPr id="3" name="Notes Placeholder 2">
+            <a:extLst>
+              <a:ext uri="{FF2B5EF4-FFF2-40B4-BE49-F238E27FC236}">
+                <a16:creationId xmlns:a16="http://schemas.microsoft.com/office/drawing/2014/main" id="{27A525F9-94A6-2AE4-E9CE-A803A31A5AFC}"/>
+              </a:ext>
+            </a:extLst>
+          </p:cNvPr>
           <p:cNvSpPr>
             <a:spLocks noGrp="1"/>
           </p:cNvSpPr>
@@ -7767,7 +7894,13 @@
       </p:sp>
       <p:sp>
         <p:nvSpPr>
-          <p:cNvPr id="4" name="Slide Number Placeholder 3"/>
+          <p:cNvPr id="4" name="Slide Number Placeholder 3">
+            <a:extLst>
+              <a:ext uri="{FF2B5EF4-FFF2-40B4-BE49-F238E27FC236}">
+                <a16:creationId xmlns:a16="http://schemas.microsoft.com/office/drawing/2014/main" id="{ED9C13AA-27F8-0350-011A-4075D1CB4AC2}"/>
+              </a:ext>
+            </a:extLst>
+          </p:cNvPr>
           <p:cNvSpPr>
             <a:spLocks noGrp="1"/>
           </p:cNvSpPr>
@@ -7791,7 +7924,7 @@
     </p:spTree>
     <p:extLst>
       <p:ext uri="{BB962C8B-B14F-4D97-AF65-F5344CB8AC3E}">
-        <p14:creationId xmlns:p14="http://schemas.microsoft.com/office/powerpoint/2010/main" val="1024086991"/>
+        <p14:creationId xmlns:p14="http://schemas.microsoft.com/office/powerpoint/2010/main" val="2746938789"/>
       </p:ext>
     </p:extLst>
   </p:cSld>
@@ -7890,6 +8023,90 @@
   <p:cSld>
     <p:spTree>
       <p:nvGrpSpPr>
+        <p:cNvPr id="1" name=""/>
+        <p:cNvGrpSpPr/>
+        <p:nvPr/>
+      </p:nvGrpSpPr>
+      <p:grpSpPr>
+        <a:xfrm>
+          <a:off x="0" y="0"/>
+          <a:ext cx="0" cy="0"/>
+          <a:chOff x="0" y="0"/>
+          <a:chExt cx="0" cy="0"/>
+        </a:xfrm>
+      </p:grpSpPr>
+      <p:sp>
+        <p:nvSpPr>
+          <p:cNvPr id="2" name="Slide Image Placeholder 1"/>
+          <p:cNvSpPr>
+            <a:spLocks noGrp="1" noRot="1" noChangeAspect="1"/>
+          </p:cNvSpPr>
+          <p:nvPr>
+            <p:ph type="sldImg"/>
+          </p:nvPr>
+        </p:nvSpPr>
+        <p:spPr/>
+      </p:sp>
+      <p:sp>
+        <p:nvSpPr>
+          <p:cNvPr id="3" name="Notes Placeholder 2"/>
+          <p:cNvSpPr>
+            <a:spLocks noGrp="1"/>
+          </p:cNvSpPr>
+          <p:nvPr>
+            <p:ph type="body" idx="1"/>
+          </p:nvPr>
+        </p:nvSpPr>
+        <p:spPr/>
+        <p:txBody>
+          <a:bodyPr/>
+          <a:lstStyle/>
+          <a:p>
+            <a:endParaRPr lang="en-US" dirty="0"/>
+          </a:p>
+        </p:txBody>
+      </p:sp>
+      <p:sp>
+        <p:nvSpPr>
+          <p:cNvPr id="4" name="Slide Number Placeholder 3"/>
+          <p:cNvSpPr>
+            <a:spLocks noGrp="1"/>
+          </p:cNvSpPr>
+          <p:nvPr>
+            <p:ph type="sldNum" sz="quarter" idx="10"/>
+          </p:nvPr>
+        </p:nvSpPr>
+        <p:spPr/>
+        <p:txBody>
+          <a:bodyPr/>
+          <a:lstStyle/>
+          <a:p>
+            <a:fld id="{F7021451-1387-4CA6-816F-3879F97B5CBC}" type="slidenum">
+              <a:rPr lang="en-US"/>
+              <a:t>5</a:t>
+            </a:fld>
+            <a:endParaRPr lang="en-US"/>
+          </a:p>
+        </p:txBody>
+      </p:sp>
+    </p:spTree>
+    <p:extLst>
+      <p:ext uri="{BB962C8B-B14F-4D97-AF65-F5344CB8AC3E}">
+        <p14:creationId xmlns:p14="http://schemas.microsoft.com/office/powerpoint/2010/main" val="1024086991"/>
+      </p:ext>
+    </p:extLst>
+  </p:cSld>
+  <p:clrMapOvr>
+    <a:masterClrMapping/>
+  </p:clrMapOvr>
+</p:notes>
+</file>
+
+<file path=ppt/notesSlides/notesSlide6.xml><?xml version="1.0" encoding="utf-8"?>
+<p:notes xmlns:a="http://schemas.openxmlformats.org/drawingml/2006/main" xmlns:r="http://schemas.openxmlformats.org/officeDocument/2006/relationships" xmlns:p="http://schemas.openxmlformats.org/presentationml/2006/main">
+  <p:cSld>
+    <p:spTree>
+      <p:nvGrpSpPr>
         <p:cNvPr id="1" name="">
           <a:extLst>
             <a:ext uri="{FF2B5EF4-FFF2-40B4-BE49-F238E27FC236}">
@@ -7974,7 +8191,7 @@
           <a:p>
             <a:fld id="{F7021451-1387-4CA6-816F-3879F97B5CBC}" type="slidenum">
               <a:rPr lang="en-US"/>
-              <a:t>5</a:t>
+              <a:t>6</a:t>
             </a:fld>
             <a:endParaRPr lang="en-US"/>
           </a:p>
@@ -7993,7 +8210,7 @@
 </p:notes>
 </file>
 
-<file path=ppt/notesSlides/notesSlide6.xml><?xml version="1.0" encoding="utf-8"?>
+<file path=ppt/notesSlides/notesSlide7.xml><?xml version="1.0" encoding="utf-8"?>
 <p:notes xmlns:a="http://schemas.openxmlformats.org/drawingml/2006/main" xmlns:r="http://schemas.openxmlformats.org/officeDocument/2006/relationships" xmlns:p="http://schemas.openxmlformats.org/presentationml/2006/main">
   <p:cSld>
     <p:spTree>
@@ -8058,7 +8275,7 @@
           <a:p>
             <a:fld id="{F7021451-1387-4CA6-816F-3879F97B5CBC}" type="slidenum">
               <a:rPr lang="en-US"/>
-              <a:t>6</a:t>
+              <a:t>7</a:t>
             </a:fld>
             <a:endParaRPr lang="en-US"/>
           </a:p>
@@ -8077,7 +8294,7 @@
 </p:notes>
 </file>
 
-<file path=ppt/notesSlides/notesSlide7.xml><?xml version="1.0" encoding="utf-8"?>
+<file path=ppt/notesSlides/notesSlide8.xml><?xml version="1.0" encoding="utf-8"?>
 <p:notes xmlns:a="http://schemas.openxmlformats.org/drawingml/2006/main" xmlns:r="http://schemas.openxmlformats.org/officeDocument/2006/relationships" xmlns:p="http://schemas.openxmlformats.org/presentationml/2006/main">
   <p:cSld>
     <p:spTree>
@@ -8166,7 +8383,7 @@
           <a:p>
             <a:fld id="{F7021451-1387-4CA6-816F-3879F97B5CBC}" type="slidenum">
               <a:rPr lang="en-US"/>
-              <a:t>7</a:t>
+              <a:t>8</a:t>
             </a:fld>
             <a:endParaRPr lang="en-US"/>
           </a:p>
@@ -8185,7 +8402,7 @@
 </p:notes>
 </file>
 
-<file path=ppt/notesSlides/notesSlide8.xml><?xml version="1.0" encoding="utf-8"?>
+<file path=ppt/notesSlides/notesSlide9.xml><?xml version="1.0" encoding="utf-8"?>
 <p:notes xmlns:a="http://schemas.openxmlformats.org/drawingml/2006/main" xmlns:r="http://schemas.openxmlformats.org/officeDocument/2006/relationships" xmlns:p="http://schemas.openxmlformats.org/presentationml/2006/main">
   <p:cSld>
     <p:spTree>
@@ -8250,7 +8467,7 @@
           <a:p>
             <a:fld id="{F7021451-1387-4CA6-816F-3879F97B5CBC}" type="slidenum">
               <a:rPr lang="en-US"/>
-              <a:t>8</a:t>
+              <a:t>9</a:t>
             </a:fld>
             <a:endParaRPr lang="en-US"/>
           </a:p>
@@ -8260,114 +8477,6 @@
     <p:extLst>
       <p:ext uri="{BB962C8B-B14F-4D97-AF65-F5344CB8AC3E}">
         <p14:creationId xmlns:p14="http://schemas.microsoft.com/office/powerpoint/2010/main" val="1024086991"/>
-      </p:ext>
-    </p:extLst>
-  </p:cSld>
-  <p:clrMapOvr>
-    <a:masterClrMapping/>
-  </p:clrMapOvr>
-</p:notes>
-</file>
-
-<file path=ppt/notesSlides/notesSlide9.xml><?xml version="1.0" encoding="utf-8"?>
-<p:notes xmlns:a="http://schemas.openxmlformats.org/drawingml/2006/main" xmlns:r="http://schemas.openxmlformats.org/officeDocument/2006/relationships" xmlns:p="http://schemas.openxmlformats.org/presentationml/2006/main">
-  <p:cSld>
-    <p:spTree>
-      <p:nvGrpSpPr>
-        <p:cNvPr id="1" name="">
-          <a:extLst>
-            <a:ext uri="{FF2B5EF4-FFF2-40B4-BE49-F238E27FC236}">
-              <a16:creationId xmlns:a16="http://schemas.microsoft.com/office/drawing/2014/main" id="{56C8BBE2-7578-9BEB-14BD-464DB3ACA1AC}"/>
-            </a:ext>
-          </a:extLst>
-        </p:cNvPr>
-        <p:cNvGrpSpPr/>
-        <p:nvPr/>
-      </p:nvGrpSpPr>
-      <p:grpSpPr>
-        <a:xfrm>
-          <a:off x="0" y="0"/>
-          <a:ext cx="0" cy="0"/>
-          <a:chOff x="0" y="0"/>
-          <a:chExt cx="0" cy="0"/>
-        </a:xfrm>
-      </p:grpSpPr>
-      <p:sp>
-        <p:nvSpPr>
-          <p:cNvPr id="2" name="Slide Image Placeholder 1">
-            <a:extLst>
-              <a:ext uri="{FF2B5EF4-FFF2-40B4-BE49-F238E27FC236}">
-                <a16:creationId xmlns:a16="http://schemas.microsoft.com/office/drawing/2014/main" id="{2CB27920-DE4C-B486-AD25-3E2134243777}"/>
-              </a:ext>
-            </a:extLst>
-          </p:cNvPr>
-          <p:cNvSpPr>
-            <a:spLocks noGrp="1" noRot="1" noChangeAspect="1"/>
-          </p:cNvSpPr>
-          <p:nvPr>
-            <p:ph type="sldImg"/>
-          </p:nvPr>
-        </p:nvSpPr>
-        <p:spPr/>
-      </p:sp>
-      <p:sp>
-        <p:nvSpPr>
-          <p:cNvPr id="3" name="Notes Placeholder 2">
-            <a:extLst>
-              <a:ext uri="{FF2B5EF4-FFF2-40B4-BE49-F238E27FC236}">
-                <a16:creationId xmlns:a16="http://schemas.microsoft.com/office/drawing/2014/main" id="{E6031FEF-273E-9FF7-5447-19A6D6A871CD}"/>
-              </a:ext>
-            </a:extLst>
-          </p:cNvPr>
-          <p:cNvSpPr>
-            <a:spLocks noGrp="1"/>
-          </p:cNvSpPr>
-          <p:nvPr>
-            <p:ph type="body" idx="1"/>
-          </p:nvPr>
-        </p:nvSpPr>
-        <p:spPr/>
-        <p:txBody>
-          <a:bodyPr/>
-          <a:lstStyle/>
-          <a:p>
-            <a:endParaRPr lang="en-US" dirty="0"/>
-          </a:p>
-        </p:txBody>
-      </p:sp>
-      <p:sp>
-        <p:nvSpPr>
-          <p:cNvPr id="4" name="Slide Number Placeholder 3">
-            <a:extLst>
-              <a:ext uri="{FF2B5EF4-FFF2-40B4-BE49-F238E27FC236}">
-                <a16:creationId xmlns:a16="http://schemas.microsoft.com/office/drawing/2014/main" id="{0009025C-3118-B675-5E42-3686485C2256}"/>
-              </a:ext>
-            </a:extLst>
-          </p:cNvPr>
-          <p:cNvSpPr>
-            <a:spLocks noGrp="1"/>
-          </p:cNvSpPr>
-          <p:nvPr>
-            <p:ph type="sldNum" sz="quarter" idx="10"/>
-          </p:nvPr>
-        </p:nvSpPr>
-        <p:spPr/>
-        <p:txBody>
-          <a:bodyPr/>
-          <a:lstStyle/>
-          <a:p>
-            <a:fld id="{F7021451-1387-4CA6-816F-3879F97B5CBC}" type="slidenum">
-              <a:rPr lang="en-US"/>
-              <a:t>9</a:t>
-            </a:fld>
-            <a:endParaRPr lang="en-US"/>
-          </a:p>
-        </p:txBody>
-      </p:sp>
-    </p:spTree>
-    <p:extLst>
-      <p:ext uri="{BB962C8B-B14F-4D97-AF65-F5344CB8AC3E}">
-        <p14:creationId xmlns:p14="http://schemas.microsoft.com/office/powerpoint/2010/main" val="3630224614"/>
       </p:ext>
     </p:extLst>
   </p:cSld>
@@ -9025,6 +9134,378 @@
   <p:cSld>
     <p:spTree>
       <p:nvGrpSpPr>
+        <p:cNvPr id="1" name="">
+          <a:extLst>
+            <a:ext uri="{FF2B5EF4-FFF2-40B4-BE49-F238E27FC236}">
+              <a16:creationId xmlns:a16="http://schemas.microsoft.com/office/drawing/2014/main" id="{725B3854-6ADE-1361-C926-BC58365BF789}"/>
+            </a:ext>
+          </a:extLst>
+        </p:cNvPr>
+        <p:cNvGrpSpPr/>
+        <p:nvPr/>
+      </p:nvGrpSpPr>
+      <p:grpSpPr>
+        <a:xfrm>
+          <a:off x="0" y="0"/>
+          <a:ext cx="0" cy="0"/>
+          <a:chOff x="0" y="0"/>
+          <a:chExt cx="0" cy="0"/>
+        </a:xfrm>
+      </p:grpSpPr>
+      <p:sp>
+        <p:nvSpPr>
+          <p:cNvPr id="2" name="Shape 0">
+            <a:extLst>
+              <a:ext uri="{FF2B5EF4-FFF2-40B4-BE49-F238E27FC236}">
+                <a16:creationId xmlns:a16="http://schemas.microsoft.com/office/drawing/2014/main" id="{6478A43A-06D6-0B79-0B1C-69F930775618}"/>
+              </a:ext>
+            </a:extLst>
+          </p:cNvPr>
+          <p:cNvSpPr/>
+          <p:nvPr/>
+        </p:nvSpPr>
+        <p:spPr>
+          <a:xfrm>
+            <a:off x="0" y="0"/>
+            <a:ext cx="9144000" cy="777240"/>
+          </a:xfrm>
+          <a:prstGeom prst="rect">
+            <a:avLst/>
+          </a:prstGeom>
+          <a:solidFill>
+            <a:srgbClr val="00A896"/>
+          </a:solidFill>
+          <a:ln w="12700">
+            <a:solidFill>
+              <a:srgbClr val="00A896"/>
+            </a:solidFill>
+            <a:prstDash val="solid"/>
+          </a:ln>
+        </p:spPr>
+        <p:txBody>
+          <a:bodyPr/>
+          <a:lstStyle/>
+          <a:p>
+            <a:endParaRPr lang="en-US"/>
+          </a:p>
+        </p:txBody>
+      </p:sp>
+      <p:sp>
+        <p:nvSpPr>
+          <p:cNvPr id="3" name="Text 1">
+            <a:extLst>
+              <a:ext uri="{FF2B5EF4-FFF2-40B4-BE49-F238E27FC236}">
+                <a16:creationId xmlns:a16="http://schemas.microsoft.com/office/drawing/2014/main" id="{320303AF-3C5C-D3B3-2594-B705F57EB492}"/>
+              </a:ext>
+            </a:extLst>
+          </p:cNvPr>
+          <p:cNvSpPr/>
+          <p:nvPr/>
+        </p:nvSpPr>
+        <p:spPr>
+          <a:xfrm>
+            <a:off x="365760" y="0"/>
+            <a:ext cx="8412480" cy="777240"/>
+          </a:xfrm>
+          <a:prstGeom prst="rect">
+            <a:avLst/>
+          </a:prstGeom>
+          <a:noFill/>
+          <a:ln/>
+        </p:spPr>
+        <p:txBody>
+          <a:bodyPr wrap="square" lIns="0" tIns="0" rIns="0" bIns="0" rtlCol="0" anchor="ctr"/>
+          <a:lstStyle/>
+          <a:p>
+            <a:pPr marL="0" indent="0">
+              <a:buNone/>
+            </a:pPr>
+            <a:r>
+              <a:rPr lang="en-US" sz="2400" b="1" dirty="0">
+                <a:solidFill>
+                  <a:srgbClr val="FFFFFF"/>
+                </a:solidFill>
+                <a:latin typeface="Calibri" pitchFamily="34" charset="0"/>
+                <a:ea typeface="Calibri" pitchFamily="34" charset="-122"/>
+                <a:cs typeface="Calibri" pitchFamily="34" charset="-120"/>
+              </a:rPr>
+              <a:t>02  Parallel Compute - Description</a:t>
+            </a:r>
+            <a:endParaRPr lang="en-US" sz="2400" dirty="0"/>
+          </a:p>
+        </p:txBody>
+      </p:sp>
+      <p:sp>
+        <p:nvSpPr>
+          <p:cNvPr id="4" name="Shape 2">
+            <a:extLst>
+              <a:ext uri="{FF2B5EF4-FFF2-40B4-BE49-F238E27FC236}">
+                <a16:creationId xmlns:a16="http://schemas.microsoft.com/office/drawing/2014/main" id="{AA68B348-F7F1-BA22-450B-F651397AFFD9}"/>
+              </a:ext>
+            </a:extLst>
+          </p:cNvPr>
+          <p:cNvSpPr/>
+          <p:nvPr/>
+        </p:nvSpPr>
+        <p:spPr>
+          <a:xfrm>
+            <a:off x="457200" y="1325880"/>
+            <a:ext cx="8015068" cy="3017521"/>
+          </a:xfrm>
+          <a:prstGeom prst="rect">
+            <a:avLst/>
+          </a:prstGeom>
+          <a:solidFill>
+            <a:srgbClr val="1C2E3E"/>
+          </a:solidFill>
+          <a:ln w="12700">
+            <a:solidFill>
+              <a:srgbClr val="3D5166"/>
+            </a:solidFill>
+            <a:prstDash val="solid"/>
+          </a:ln>
+        </p:spPr>
+        <p:txBody>
+          <a:bodyPr/>
+          <a:lstStyle/>
+          <a:p>
+            <a:endParaRPr lang="en-US"/>
+          </a:p>
+        </p:txBody>
+      </p:sp>
+      <p:sp>
+        <p:nvSpPr>
+          <p:cNvPr id="5" name="Text 3">
+            <a:extLst>
+              <a:ext uri="{FF2B5EF4-FFF2-40B4-BE49-F238E27FC236}">
+                <a16:creationId xmlns:a16="http://schemas.microsoft.com/office/drawing/2014/main" id="{B3B31F22-1334-30EB-0ED4-0FC625DB0246}"/>
+              </a:ext>
+            </a:extLst>
+          </p:cNvPr>
+          <p:cNvSpPr/>
+          <p:nvPr/>
+        </p:nvSpPr>
+        <p:spPr>
+          <a:xfrm>
+            <a:off x="594360" y="1456008"/>
+            <a:ext cx="3657600" cy="365760"/>
+          </a:xfrm>
+          <a:prstGeom prst="rect">
+            <a:avLst/>
+          </a:prstGeom>
+          <a:noFill/>
+          <a:ln/>
+        </p:spPr>
+        <p:txBody>
+          <a:bodyPr wrap="square" rtlCol="0" anchor="ctr"/>
+          <a:lstStyle/>
+          <a:p>
+            <a:pPr marL="0" indent="0">
+              <a:buNone/>
+            </a:pPr>
+            <a:r>
+              <a:rPr lang="en-US" sz="2000" b="1" dirty="0">
+                <a:solidFill>
+                  <a:srgbClr val="00C9A7"/>
+                </a:solidFill>
+                <a:latin typeface="Calibri" pitchFamily="34" charset="0"/>
+                <a:ea typeface="Calibri" pitchFamily="34" charset="-122"/>
+                <a:cs typeface="Calibri" pitchFamily="34" charset="-120"/>
+              </a:rPr>
+              <a:t>What it does</a:t>
+            </a:r>
+            <a:endParaRPr lang="en-US" sz="2000" dirty="0"/>
+          </a:p>
+        </p:txBody>
+      </p:sp>
+      <p:sp>
+        <p:nvSpPr>
+          <p:cNvPr id="6" name="Text 4">
+            <a:extLst>
+              <a:ext uri="{FF2B5EF4-FFF2-40B4-BE49-F238E27FC236}">
+                <a16:creationId xmlns:a16="http://schemas.microsoft.com/office/drawing/2014/main" id="{ADA7DDB5-7839-A085-F6AE-B26DCE933E60}"/>
+              </a:ext>
+            </a:extLst>
+          </p:cNvPr>
+          <p:cNvSpPr/>
+          <p:nvPr/>
+        </p:nvSpPr>
+        <p:spPr>
+          <a:xfrm>
+            <a:off x="1041009" y="2440745"/>
+            <a:ext cx="7336302" cy="1515794"/>
+          </a:xfrm>
+          <a:prstGeom prst="rect">
+            <a:avLst/>
+          </a:prstGeom>
+          <a:noFill/>
+          <a:ln/>
+        </p:spPr>
+        <p:txBody>
+          <a:bodyPr wrap="square" rtlCol="0" anchor="ctr"/>
+          <a:lstStyle/>
+          <a:p>
+            <a:r>
+              <a:rPr lang="en-US" dirty="0">
+                <a:solidFill>
+                  <a:schemeClr val="bg1"/>
+                </a:solidFill>
+              </a:rPr>
+              <a:t>Takes:</a:t>
+            </a:r>
+            <a:endParaRPr lang="en-US" sz="1400" dirty="0">
+              <a:solidFill>
+                <a:schemeClr val="bg1"/>
+              </a:solidFill>
+            </a:endParaRPr>
+          </a:p>
+          <a:p>
+            <a:pPr marL="285750" indent="-285750" fontAlgn="base">
+              <a:buFontTx/>
+              <a:buChar char="-"/>
+            </a:pPr>
+            <a:r>
+              <a:rPr lang="en-US" dirty="0">
+                <a:solidFill>
+                  <a:schemeClr val="bg1"/>
+                </a:solidFill>
+              </a:rPr>
+              <a:t>The path of a file containing N numbers separated by new lines (or commas)</a:t>
+            </a:r>
+          </a:p>
+          <a:p>
+            <a:pPr marL="285750" indent="-285750" fontAlgn="base">
+              <a:buFontTx/>
+              <a:buChar char="-"/>
+            </a:pPr>
+            <a:r>
+              <a:rPr lang="en-US" dirty="0">
+                <a:solidFill>
+                  <a:schemeClr val="bg1"/>
+                </a:solidFill>
+              </a:rPr>
+              <a:t>Number of processes </a:t>
+            </a:r>
+            <a:r>
+              <a:rPr lang="en-US" dirty="0" err="1">
+                <a:solidFill>
+                  <a:schemeClr val="bg1"/>
+                </a:solidFill>
+              </a:rPr>
+              <a:t>n_proc</a:t>
+            </a:r>
+            <a:r>
+              <a:rPr lang="en-US" dirty="0">
+                <a:solidFill>
+                  <a:schemeClr val="bg1"/>
+                </a:solidFill>
+              </a:rPr>
+              <a:t>.</a:t>
+            </a:r>
+          </a:p>
+          <a:p>
+            <a:pPr marL="285750" indent="-285750" fontAlgn="base">
+              <a:buFontTx/>
+              <a:buChar char="-"/>
+            </a:pPr>
+            <a:r>
+              <a:rPr lang="en-US" dirty="0">
+                <a:solidFill>
+                  <a:schemeClr val="bg1"/>
+                </a:solidFill>
+              </a:rPr>
+              <a:t>A pointer to a function f that takes 2 numbers and returns a number.</a:t>
+            </a:r>
+          </a:p>
+          <a:p>
+            <a:pPr fontAlgn="base"/>
+            <a:endParaRPr lang="en-US" dirty="0">
+              <a:solidFill>
+                <a:schemeClr val="bg1"/>
+              </a:solidFill>
+            </a:endParaRPr>
+          </a:p>
+          <a:p>
+            <a:r>
+              <a:rPr lang="en-US" dirty="0">
+                <a:solidFill>
+                  <a:schemeClr val="bg1"/>
+                </a:solidFill>
+              </a:rPr>
+              <a:t>then does the same as </a:t>
+            </a:r>
+            <a:r>
+              <a:rPr lang="en-US" dirty="0" err="1">
+                <a:solidFill>
+                  <a:schemeClr val="bg1"/>
+                </a:solidFill>
+              </a:rPr>
+              <a:t>sequential_compute</a:t>
+            </a:r>
+            <a:r>
+              <a:rPr lang="en-US" dirty="0">
+                <a:solidFill>
+                  <a:schemeClr val="bg1"/>
+                </a:solidFill>
+              </a:rPr>
+              <a:t> except that it splits the computation over </a:t>
+            </a:r>
+            <a:r>
+              <a:rPr lang="en-US" dirty="0" err="1">
+                <a:solidFill>
+                  <a:schemeClr val="bg1"/>
+                </a:solidFill>
+              </a:rPr>
+              <a:t>n_proc</a:t>
+            </a:r>
+            <a:r>
+              <a:rPr lang="en-US" dirty="0">
+                <a:solidFill>
+                  <a:schemeClr val="bg1"/>
+                </a:solidFill>
+              </a:rPr>
+              <a:t> processes as evenly as possible.</a:t>
+            </a:r>
+            <a:endParaRPr lang="en-US" sz="1400" dirty="0">
+              <a:solidFill>
+                <a:schemeClr val="bg1"/>
+              </a:solidFill>
+            </a:endParaRPr>
+          </a:p>
+          <a:p>
+            <a:br>
+              <a:rPr lang="en-US" sz="1400" dirty="0">
+                <a:solidFill>
+                  <a:schemeClr val="bg1"/>
+                </a:solidFill>
+              </a:rPr>
+            </a:br>
+            <a:endParaRPr lang="en-US" sz="1400" dirty="0">
+              <a:solidFill>
+                <a:schemeClr val="bg1"/>
+              </a:solidFill>
+            </a:endParaRPr>
+          </a:p>
+        </p:txBody>
+      </p:sp>
+    </p:spTree>
+    <p:extLst>
+      <p:ext uri="{BB962C8B-B14F-4D97-AF65-F5344CB8AC3E}">
+        <p14:creationId xmlns:p14="http://schemas.microsoft.com/office/powerpoint/2010/main" val="1917002051"/>
+      </p:ext>
+    </p:extLst>
+  </p:cSld>
+  <p:clrMapOvr>
+    <a:masterClrMapping/>
+  </p:clrMapOvr>
+</p:sld>
+</file>
+
+<file path=ppt/slides/slide11.xml><?xml version="1.0" encoding="utf-8"?>
+<p:sld xmlns:a="http://schemas.openxmlformats.org/drawingml/2006/main" xmlns:r="http://schemas.openxmlformats.org/officeDocument/2006/relationships" xmlns:p="http://schemas.openxmlformats.org/presentationml/2006/main">
+  <p:cSld>
+    <p:spTree>
+      <p:nvGrpSpPr>
         <p:cNvPr id="1" name=""/>
         <p:cNvGrpSpPr/>
         <p:nvPr/>
@@ -9539,7 +10020,7 @@
 </p:sld>
 </file>
 
-<file path=ppt/slides/slide11.xml><?xml version="1.0" encoding="utf-8"?>
+<file path=ppt/slides/slide12.xml><?xml version="1.0" encoding="utf-8"?>
 <p:sld xmlns:a="http://schemas.openxmlformats.org/drawingml/2006/main" xmlns:r="http://schemas.openxmlformats.org/officeDocument/2006/relationships" xmlns:p="http://schemas.openxmlformats.org/presentationml/2006/main">
   <p:cSld name="Slide 6">
     <p:bg>
@@ -10718,7 +11199,7 @@
 </p:sld>
 </file>
 
-<file path=ppt/slides/slide12.xml><?xml version="1.0" encoding="utf-8"?>
+<file path=ppt/slides/slide13.xml><?xml version="1.0" encoding="utf-8"?>
 <p:sld xmlns:a="http://schemas.openxmlformats.org/drawingml/2006/main" xmlns:r="http://schemas.openxmlformats.org/officeDocument/2006/relationships" xmlns:p="http://schemas.openxmlformats.org/presentationml/2006/main">
   <p:cSld>
     <p:bg>
@@ -10905,7 +11386,7 @@
 </p:sld>
 </file>
 
-<file path=ppt/slides/slide13.xml><?xml version="1.0" encoding="utf-8"?>
+<file path=ppt/slides/slide14.xml><?xml version="1.0" encoding="utf-8"?>
 <p:sld xmlns:a="http://schemas.openxmlformats.org/drawingml/2006/main" xmlns:r="http://schemas.openxmlformats.org/officeDocument/2006/relationships" xmlns:p="http://schemas.openxmlformats.org/presentationml/2006/main">
   <p:cSld>
     <p:bg>
@@ -11062,7 +11543,7 @@
 </p:sld>
 </file>
 
-<file path=ppt/slides/slide14.xml><?xml version="1.0" encoding="utf-8"?>
+<file path=ppt/slides/slide15.xml><?xml version="1.0" encoding="utf-8"?>
 <p:sld xmlns:a="http://schemas.openxmlformats.org/drawingml/2006/main" xmlns:r="http://schemas.openxmlformats.org/officeDocument/2006/relationships" xmlns:p="http://schemas.openxmlformats.org/presentationml/2006/main">
   <p:cSld>
     <p:bg>
@@ -11219,7 +11700,7 @@
 </p:sld>
 </file>
 
-<file path=ppt/slides/slide15.xml><?xml version="1.0" encoding="utf-8"?>
+<file path=ppt/slides/slide16.xml><?xml version="1.0" encoding="utf-8"?>
 <p:sld xmlns:a="http://schemas.openxmlformats.org/drawingml/2006/main" xmlns:r="http://schemas.openxmlformats.org/officeDocument/2006/relationships" xmlns:p="http://schemas.openxmlformats.org/presentationml/2006/main">
   <p:cSld>
     <p:bg>
@@ -11376,7 +11857,7 @@
 </p:sld>
 </file>
 
-<file path=ppt/slides/slide16.xml><?xml version="1.0" encoding="utf-8"?>
+<file path=ppt/slides/slide17.xml><?xml version="1.0" encoding="utf-8"?>
 <p:sld xmlns:a="http://schemas.openxmlformats.org/drawingml/2006/main" xmlns:r="http://schemas.openxmlformats.org/officeDocument/2006/relationships" xmlns:p="http://schemas.openxmlformats.org/presentationml/2006/main">
   <p:cSld>
     <p:bg>
@@ -11533,7 +12014,7 @@
 </p:sld>
 </file>
 
-<file path=ppt/slides/slide17.xml><?xml version="1.0" encoding="utf-8"?>
+<file path=ppt/slides/slide18.xml><?xml version="1.0" encoding="utf-8"?>
 <p:sld xmlns:a="http://schemas.openxmlformats.org/drawingml/2006/main" xmlns:r="http://schemas.openxmlformats.org/officeDocument/2006/relationships" xmlns:p="http://schemas.openxmlformats.org/presentationml/2006/main">
   <p:cSld name="Slide 7">
     <p:bg>
@@ -12973,7 +13454,7 @@
 </p:sld>
 </file>
 
-<file path=ppt/slides/slide18.xml><?xml version="1.0" encoding="utf-8"?>
+<file path=ppt/slides/slide19.xml><?xml version="1.0" encoding="utf-8"?>
 <p:sld xmlns:a="http://schemas.openxmlformats.org/drawingml/2006/main" xmlns:r="http://schemas.openxmlformats.org/officeDocument/2006/relationships" xmlns:p="http://schemas.openxmlformats.org/presentationml/2006/main">
   <p:cSld>
     <p:bg>
@@ -13130,125 +13611,6 @@
 </p:sld>
 </file>
 
-<file path=ppt/slides/slide19.xml><?xml version="1.0" encoding="utf-8"?>
-<p:sld xmlns:a="http://schemas.openxmlformats.org/drawingml/2006/main" xmlns:r="http://schemas.openxmlformats.org/officeDocument/2006/relationships" xmlns:p="http://schemas.openxmlformats.org/presentationml/2006/main">
-  <p:cSld>
-    <p:spTree>
-      <p:nvGrpSpPr>
-        <p:cNvPr id="1" name="">
-          <a:extLst>
-            <a:ext uri="{FF2B5EF4-FFF2-40B4-BE49-F238E27FC236}">
-              <a16:creationId xmlns:a16="http://schemas.microsoft.com/office/drawing/2014/main" id="{E326FC6C-D093-832E-0B3B-B500D302448F}"/>
-            </a:ext>
-          </a:extLst>
-        </p:cNvPr>
-        <p:cNvGrpSpPr/>
-        <p:nvPr/>
-      </p:nvGrpSpPr>
-      <p:grpSpPr>
-        <a:xfrm>
-          <a:off x="0" y="0"/>
-          <a:ext cx="0" cy="0"/>
-          <a:chOff x="0" y="0"/>
-          <a:chExt cx="0" cy="0"/>
-        </a:xfrm>
-      </p:grpSpPr>
-      <p:sp>
-        <p:nvSpPr>
-          <p:cNvPr id="2" name="Shape 0">
-            <a:extLst>
-              <a:ext uri="{FF2B5EF4-FFF2-40B4-BE49-F238E27FC236}">
-                <a16:creationId xmlns:a16="http://schemas.microsoft.com/office/drawing/2014/main" id="{14C6021D-8419-C0B9-C931-A025F26BA5DC}"/>
-              </a:ext>
-            </a:extLst>
-          </p:cNvPr>
-          <p:cNvSpPr/>
-          <p:nvPr/>
-        </p:nvSpPr>
-        <p:spPr>
-          <a:xfrm>
-            <a:off x="0" y="2137410"/>
-            <a:ext cx="9144000" cy="868680"/>
-          </a:xfrm>
-          <a:prstGeom prst="rect">
-            <a:avLst/>
-          </a:prstGeom>
-          <a:solidFill>
-            <a:srgbClr val="1A1F36"/>
-          </a:solidFill>
-          <a:ln w="12700">
-            <a:solidFill>
-              <a:srgbClr val="1A1F36"/>
-            </a:solidFill>
-            <a:prstDash val="solid"/>
-          </a:ln>
-        </p:spPr>
-        <p:txBody>
-          <a:bodyPr/>
-          <a:lstStyle/>
-          <a:p>
-            <a:endParaRPr lang="en-US"/>
-          </a:p>
-        </p:txBody>
-      </p:sp>
-      <p:sp>
-        <p:nvSpPr>
-          <p:cNvPr id="3" name="Text 1">
-            <a:extLst>
-              <a:ext uri="{FF2B5EF4-FFF2-40B4-BE49-F238E27FC236}">
-                <a16:creationId xmlns:a16="http://schemas.microsoft.com/office/drawing/2014/main" id="{F7D57CF1-F629-C6FB-D2AA-59CB795B6E81}"/>
-              </a:ext>
-            </a:extLst>
-          </p:cNvPr>
-          <p:cNvSpPr/>
-          <p:nvPr/>
-        </p:nvSpPr>
-        <p:spPr>
-          <a:xfrm>
-            <a:off x="365760" y="2247138"/>
-            <a:ext cx="8412480" cy="640080"/>
-          </a:xfrm>
-          <a:prstGeom prst="rect">
-            <a:avLst/>
-          </a:prstGeom>
-          <a:noFill/>
-          <a:ln/>
-        </p:spPr>
-        <p:txBody>
-          <a:bodyPr wrap="square" lIns="0" tIns="0" rIns="0" bIns="0" rtlCol="0" anchor="ctr"/>
-          <a:lstStyle/>
-          <a:p>
-            <a:pPr marL="0" indent="0" algn="ctr">
-              <a:buNone/>
-            </a:pPr>
-            <a:r>
-              <a:rPr lang="en-US" sz="4000" b="1" dirty="0">
-                <a:solidFill>
-                  <a:srgbClr val="FFFFFF"/>
-                </a:solidFill>
-                <a:latin typeface="Calibri" pitchFamily="34" charset="0"/>
-                <a:ea typeface="Calibri" pitchFamily="34" charset="-122"/>
-                <a:cs typeface="Calibri" pitchFamily="34" charset="-120"/>
-              </a:rPr>
-              <a:t>From the pervious project</a:t>
-            </a:r>
-            <a:endParaRPr lang="en-US" sz="4000" dirty="0"/>
-          </a:p>
-        </p:txBody>
-      </p:sp>
-    </p:spTree>
-    <p:extLst>
-      <p:ext uri="{BB962C8B-B14F-4D97-AF65-F5344CB8AC3E}">
-        <p14:creationId xmlns:p14="http://schemas.microsoft.com/office/powerpoint/2010/main" val="898139506"/>
-      </p:ext>
-    </p:extLst>
-  </p:cSld>
-  <p:clrMapOvr>
-    <a:masterClrMapping/>
-  </p:clrMapOvr>
-</p:sld>
-</file>
-
 <file path=ppt/slides/slide2.xml><?xml version="1.0" encoding="utf-8"?>
 <p:sld xmlns:a="http://schemas.openxmlformats.org/drawingml/2006/main" xmlns:r="http://schemas.openxmlformats.org/officeDocument/2006/relationships" xmlns:p="http://schemas.openxmlformats.org/presentationml/2006/main">
   <p:cSld name="Slide 2">
@@ -13582,9 +13944,27 @@
                 <a:ea typeface="Calibri" pitchFamily="34" charset="-122"/>
                 <a:cs typeface="Calibri" pitchFamily="34" charset="-120"/>
               </a:rPr>
-              <a:t>Implemented threads_compute</a:t>
-            </a:r>
-            <a:endParaRPr lang="en-US" sz="1250" dirty="0"/>
+              <a:t>Implemented </a:t>
+            </a:r>
+            <a:r>
+              <a:rPr lang="en-US" sz="1250" dirty="0" err="1">
+                <a:solidFill>
+                  <a:srgbClr val="1A1F36"/>
+                </a:solidFill>
+                <a:latin typeface="Calibri" pitchFamily="34" charset="0"/>
+                <a:ea typeface="Calibri" pitchFamily="34" charset="-122"/>
+                <a:cs typeface="Calibri" pitchFamily="34" charset="-120"/>
+              </a:rPr>
+              <a:t>threads_compute</a:t>
+            </a:r>
+            <a:endParaRPr lang="en-US" sz="1250" dirty="0">
+              <a:solidFill>
+                <a:srgbClr val="1A1F36"/>
+              </a:solidFill>
+              <a:latin typeface="Calibri" pitchFamily="34" charset="0"/>
+              <a:ea typeface="Calibri" pitchFamily="34" charset="-122"/>
+              <a:cs typeface="Calibri" pitchFamily="34" charset="-120"/>
+            </a:endParaRPr>
           </a:p>
           <a:p>
             <a:pPr marL="342900" indent="-342900">
@@ -13603,9 +13983,8 @@
                 <a:ea typeface="Calibri" pitchFamily="34" charset="-122"/>
                 <a:cs typeface="Calibri" pitchFamily="34" charset="-120"/>
               </a:rPr>
-              <a:t>Updated parse.h (read_numbers_ul)</a:t>
-            </a:r>
-            <a:endParaRPr lang="en-US" sz="1250" dirty="0"/>
+              <a:t>Requirements 2, 3, 4, and 5 in the slides.</a:t>
+            </a:r>
           </a:p>
           <a:p>
             <a:pPr marL="342900" indent="-342900">
@@ -14003,6 +14382,125 @@
 </file>
 
 <file path=ppt/slides/slide20.xml><?xml version="1.0" encoding="utf-8"?>
+<p:sld xmlns:a="http://schemas.openxmlformats.org/drawingml/2006/main" xmlns:r="http://schemas.openxmlformats.org/officeDocument/2006/relationships" xmlns:p="http://schemas.openxmlformats.org/presentationml/2006/main">
+  <p:cSld>
+    <p:spTree>
+      <p:nvGrpSpPr>
+        <p:cNvPr id="1" name="">
+          <a:extLst>
+            <a:ext uri="{FF2B5EF4-FFF2-40B4-BE49-F238E27FC236}">
+              <a16:creationId xmlns:a16="http://schemas.microsoft.com/office/drawing/2014/main" id="{E326FC6C-D093-832E-0B3B-B500D302448F}"/>
+            </a:ext>
+          </a:extLst>
+        </p:cNvPr>
+        <p:cNvGrpSpPr/>
+        <p:nvPr/>
+      </p:nvGrpSpPr>
+      <p:grpSpPr>
+        <a:xfrm>
+          <a:off x="0" y="0"/>
+          <a:ext cx="0" cy="0"/>
+          <a:chOff x="0" y="0"/>
+          <a:chExt cx="0" cy="0"/>
+        </a:xfrm>
+      </p:grpSpPr>
+      <p:sp>
+        <p:nvSpPr>
+          <p:cNvPr id="2" name="Shape 0">
+            <a:extLst>
+              <a:ext uri="{FF2B5EF4-FFF2-40B4-BE49-F238E27FC236}">
+                <a16:creationId xmlns:a16="http://schemas.microsoft.com/office/drawing/2014/main" id="{14C6021D-8419-C0B9-C931-A025F26BA5DC}"/>
+              </a:ext>
+            </a:extLst>
+          </p:cNvPr>
+          <p:cNvSpPr/>
+          <p:nvPr/>
+        </p:nvSpPr>
+        <p:spPr>
+          <a:xfrm>
+            <a:off x="0" y="2137410"/>
+            <a:ext cx="9144000" cy="868680"/>
+          </a:xfrm>
+          <a:prstGeom prst="rect">
+            <a:avLst/>
+          </a:prstGeom>
+          <a:solidFill>
+            <a:srgbClr val="1A1F36"/>
+          </a:solidFill>
+          <a:ln w="12700">
+            <a:solidFill>
+              <a:srgbClr val="1A1F36"/>
+            </a:solidFill>
+            <a:prstDash val="solid"/>
+          </a:ln>
+        </p:spPr>
+        <p:txBody>
+          <a:bodyPr/>
+          <a:lstStyle/>
+          <a:p>
+            <a:endParaRPr lang="en-US"/>
+          </a:p>
+        </p:txBody>
+      </p:sp>
+      <p:sp>
+        <p:nvSpPr>
+          <p:cNvPr id="3" name="Text 1">
+            <a:extLst>
+              <a:ext uri="{FF2B5EF4-FFF2-40B4-BE49-F238E27FC236}">
+                <a16:creationId xmlns:a16="http://schemas.microsoft.com/office/drawing/2014/main" id="{F7D57CF1-F629-C6FB-D2AA-59CB795B6E81}"/>
+              </a:ext>
+            </a:extLst>
+          </p:cNvPr>
+          <p:cNvSpPr/>
+          <p:nvPr/>
+        </p:nvSpPr>
+        <p:spPr>
+          <a:xfrm>
+            <a:off x="365760" y="2247138"/>
+            <a:ext cx="8412480" cy="640080"/>
+          </a:xfrm>
+          <a:prstGeom prst="rect">
+            <a:avLst/>
+          </a:prstGeom>
+          <a:noFill/>
+          <a:ln/>
+        </p:spPr>
+        <p:txBody>
+          <a:bodyPr wrap="square" lIns="0" tIns="0" rIns="0" bIns="0" rtlCol="0" anchor="ctr"/>
+          <a:lstStyle/>
+          <a:p>
+            <a:pPr marL="0" indent="0" algn="ctr">
+              <a:buNone/>
+            </a:pPr>
+            <a:r>
+              <a:rPr lang="en-US" sz="4000" b="1" dirty="0">
+                <a:solidFill>
+                  <a:srgbClr val="FFFFFF"/>
+                </a:solidFill>
+                <a:latin typeface="Calibri" pitchFamily="34" charset="0"/>
+                <a:ea typeface="Calibri" pitchFamily="34" charset="-122"/>
+                <a:cs typeface="Calibri" pitchFamily="34" charset="-120"/>
+              </a:rPr>
+              <a:t>From the pervious project</a:t>
+            </a:r>
+            <a:endParaRPr lang="en-US" sz="4000" dirty="0"/>
+          </a:p>
+        </p:txBody>
+      </p:sp>
+    </p:spTree>
+    <p:extLst>
+      <p:ext uri="{BB962C8B-B14F-4D97-AF65-F5344CB8AC3E}">
+        <p14:creationId xmlns:p14="http://schemas.microsoft.com/office/powerpoint/2010/main" val="898139506"/>
+      </p:ext>
+    </p:extLst>
+  </p:cSld>
+  <p:clrMapOvr>
+    <a:masterClrMapping/>
+  </p:clrMapOvr>
+</p:sld>
+</file>
+
+<file path=ppt/slides/slide21.xml><?xml version="1.0" encoding="utf-8"?>
 <p:sld xmlns:a="http://schemas.openxmlformats.org/drawingml/2006/main" xmlns:r="http://schemas.openxmlformats.org/officeDocument/2006/relationships" xmlns:p="http://schemas.openxmlformats.org/presentationml/2006/main">
   <p:cSld>
     <p:spTree>
@@ -14128,7 +14626,7 @@
 </p:sld>
 </file>
 
-<file path=ppt/slides/slide21.xml><?xml version="1.0" encoding="utf-8"?>
+<file path=ppt/slides/slide22.xml><?xml version="1.0" encoding="utf-8"?>
 <p:sld xmlns:a="http://schemas.openxmlformats.org/drawingml/2006/main" xmlns:r="http://schemas.openxmlformats.org/officeDocument/2006/relationships" xmlns:p="http://schemas.openxmlformats.org/presentationml/2006/main">
   <p:cSld>
     <p:spTree>
@@ -14310,7 +14808,7 @@
 </p:sld>
 </file>
 
-<file path=ppt/slides/slide22.xml><?xml version="1.0" encoding="utf-8"?>
+<file path=ppt/slides/slide23.xml><?xml version="1.0" encoding="utf-8"?>
 <p:sld xmlns:a="http://schemas.openxmlformats.org/drawingml/2006/main" xmlns:r="http://schemas.openxmlformats.org/officeDocument/2006/relationships" xmlns:p="http://schemas.openxmlformats.org/presentationml/2006/main">
   <p:cSld>
     <p:spTree>
@@ -14722,7 +15220,7 @@
 </p:sld>
 </file>
 
-<file path=ppt/slides/slide23.xml><?xml version="1.0" encoding="utf-8"?>
+<file path=ppt/slides/slide24.xml><?xml version="1.0" encoding="utf-8"?>
 <p:sld xmlns:a="http://schemas.openxmlformats.org/drawingml/2006/main" xmlns:r="http://schemas.openxmlformats.org/officeDocument/2006/relationships" xmlns:p="http://schemas.openxmlformats.org/presentationml/2006/main">
   <p:cSld>
     <p:spTree>
@@ -15123,7 +15621,7 @@
 </p:sld>
 </file>
 
-<file path=ppt/slides/slide24.xml><?xml version="1.0" encoding="utf-8"?>
+<file path=ppt/slides/slide25.xml><?xml version="1.0" encoding="utf-8"?>
 <p:sld xmlns:a="http://schemas.openxmlformats.org/drawingml/2006/main" xmlns:r="http://schemas.openxmlformats.org/officeDocument/2006/relationships" xmlns:p="http://schemas.openxmlformats.org/presentationml/2006/main">
   <p:cSld>
     <p:spTree>
@@ -15588,7 +16086,7 @@
 </p:sld>
 </file>
 
-<file path=ppt/slides/slide25.xml><?xml version="1.0" encoding="utf-8"?>
+<file path=ppt/slides/slide26.xml><?xml version="1.0" encoding="utf-8"?>
 <p:sld xmlns:a="http://schemas.openxmlformats.org/drawingml/2006/main" xmlns:r="http://schemas.openxmlformats.org/officeDocument/2006/relationships" xmlns:p="http://schemas.openxmlformats.org/presentationml/2006/main">
   <p:cSld>
     <p:spTree>
@@ -16126,6 +16624,269 @@
 </file>
 
 <file path=ppt/slides/slide3.xml><?xml version="1.0" encoding="utf-8"?>
+<p:sld xmlns:a="http://schemas.openxmlformats.org/drawingml/2006/main" xmlns:r="http://schemas.openxmlformats.org/officeDocument/2006/relationships" xmlns:p="http://schemas.openxmlformats.org/presentationml/2006/main">
+  <p:cSld>
+    <p:bg>
+      <p:bgPr>
+        <a:solidFill>
+          <a:srgbClr val="F0F4FF"/>
+        </a:solidFill>
+        <a:effectLst/>
+      </p:bgPr>
+    </p:bg>
+    <p:spTree>
+      <p:nvGrpSpPr>
+        <p:cNvPr id="1" name="">
+          <a:extLst>
+            <a:ext uri="{FF2B5EF4-FFF2-40B4-BE49-F238E27FC236}">
+              <a16:creationId xmlns:a16="http://schemas.microsoft.com/office/drawing/2014/main" id="{0D6A99A5-72B3-62AA-23C7-C811F24472B1}"/>
+            </a:ext>
+          </a:extLst>
+        </p:cNvPr>
+        <p:cNvGrpSpPr/>
+        <p:nvPr/>
+      </p:nvGrpSpPr>
+      <p:grpSpPr>
+        <a:xfrm>
+          <a:off x="0" y="0"/>
+          <a:ext cx="0" cy="0"/>
+          <a:chOff x="0" y="0"/>
+          <a:chExt cx="0" cy="0"/>
+        </a:xfrm>
+      </p:grpSpPr>
+      <p:sp>
+        <p:nvSpPr>
+          <p:cNvPr id="2" name="Shape 0">
+            <a:extLst>
+              <a:ext uri="{FF2B5EF4-FFF2-40B4-BE49-F238E27FC236}">
+                <a16:creationId xmlns:a16="http://schemas.microsoft.com/office/drawing/2014/main" id="{A141E49C-97F8-210D-B9EC-89D735E099BC}"/>
+              </a:ext>
+            </a:extLst>
+          </p:cNvPr>
+          <p:cNvSpPr/>
+          <p:nvPr/>
+        </p:nvSpPr>
+        <p:spPr>
+          <a:xfrm>
+            <a:off x="0" y="0"/>
+            <a:ext cx="9144000" cy="868680"/>
+          </a:xfrm>
+          <a:prstGeom prst="rect">
+            <a:avLst/>
+          </a:prstGeom>
+          <a:solidFill>
+            <a:srgbClr val="1A1F36"/>
+          </a:solidFill>
+          <a:ln w="12700">
+            <a:solidFill>
+              <a:srgbClr val="1A1F36"/>
+            </a:solidFill>
+            <a:prstDash val="solid"/>
+          </a:ln>
+        </p:spPr>
+        <p:txBody>
+          <a:bodyPr/>
+          <a:lstStyle/>
+          <a:p>
+            <a:endParaRPr lang="en-US"/>
+          </a:p>
+        </p:txBody>
+      </p:sp>
+      <p:sp>
+        <p:nvSpPr>
+          <p:cNvPr id="3" name="Text 1">
+            <a:extLst>
+              <a:ext uri="{FF2B5EF4-FFF2-40B4-BE49-F238E27FC236}">
+                <a16:creationId xmlns:a16="http://schemas.microsoft.com/office/drawing/2014/main" id="{F8AEE429-C215-621B-D23C-639C79692D31}"/>
+              </a:ext>
+            </a:extLst>
+          </p:cNvPr>
+          <p:cNvSpPr/>
+          <p:nvPr/>
+        </p:nvSpPr>
+        <p:spPr>
+          <a:xfrm>
+            <a:off x="365760" y="109728"/>
+            <a:ext cx="8229600" cy="640080"/>
+          </a:xfrm>
+          <a:prstGeom prst="rect">
+            <a:avLst/>
+          </a:prstGeom>
+          <a:noFill/>
+          <a:ln/>
+        </p:spPr>
+        <p:txBody>
+          <a:bodyPr wrap="square" lIns="0" tIns="0" rIns="0" bIns="0" rtlCol="0" anchor="ctr"/>
+          <a:lstStyle/>
+          <a:p>
+            <a:pPr marL="0" indent="0">
+              <a:buNone/>
+            </a:pPr>
+            <a:r>
+              <a:rPr lang="en-US" sz="2600" b="1" dirty="0" err="1">
+                <a:solidFill>
+                  <a:srgbClr val="FFFFFF"/>
+                </a:solidFill>
+                <a:latin typeface="Calibri" pitchFamily="34" charset="0"/>
+                <a:ea typeface="Calibri" pitchFamily="34" charset="-122"/>
+                <a:cs typeface="Calibri" pitchFamily="34" charset="-120"/>
+              </a:rPr>
+              <a:t>Github</a:t>
+            </a:r>
+            <a:r>
+              <a:rPr lang="en-US" sz="2600" b="1" dirty="0">
+                <a:solidFill>
+                  <a:srgbClr val="FFFFFF"/>
+                </a:solidFill>
+                <a:latin typeface="Calibri" pitchFamily="34" charset="0"/>
+                <a:ea typeface="Calibri" pitchFamily="34" charset="-122"/>
+                <a:cs typeface="Calibri" pitchFamily="34" charset="-120"/>
+              </a:rPr>
+              <a:t> Repo Link:</a:t>
+            </a:r>
+            <a:endParaRPr lang="en-US" sz="2600" dirty="0"/>
+          </a:p>
+        </p:txBody>
+      </p:sp>
+      <p:sp>
+        <p:nvSpPr>
+          <p:cNvPr id="4" name="Shape 2">
+            <a:extLst>
+              <a:ext uri="{FF2B5EF4-FFF2-40B4-BE49-F238E27FC236}">
+                <a16:creationId xmlns:a16="http://schemas.microsoft.com/office/drawing/2014/main" id="{8727915E-1074-3BBF-FBF7-53C47BADE9CA}"/>
+              </a:ext>
+            </a:extLst>
+          </p:cNvPr>
+          <p:cNvSpPr/>
+          <p:nvPr/>
+        </p:nvSpPr>
+        <p:spPr>
+          <a:xfrm>
+            <a:off x="495886" y="2235356"/>
+            <a:ext cx="8152228" cy="1456006"/>
+          </a:xfrm>
+          <a:prstGeom prst="rect">
+            <a:avLst/>
+          </a:prstGeom>
+          <a:solidFill>
+            <a:srgbClr val="FFFFFF"/>
+          </a:solidFill>
+          <a:ln w="12700">
+            <a:solidFill>
+              <a:srgbClr val="E0E6F8"/>
+            </a:solidFill>
+            <a:prstDash val="solid"/>
+          </a:ln>
+          <a:effectLst>
+            <a:outerShdw blurRad="101600" dist="38100" dir="8100000" algn="bl" rotWithShape="0">
+              <a:srgbClr val="000000">
+                <a:alpha val="18000"/>
+              </a:srgbClr>
+            </a:outerShdw>
+          </a:effectLst>
+        </p:spPr>
+        <p:txBody>
+          <a:bodyPr/>
+          <a:lstStyle/>
+          <a:p>
+            <a:endParaRPr lang="en-US"/>
+          </a:p>
+        </p:txBody>
+      </p:sp>
+      <p:sp>
+        <p:nvSpPr>
+          <p:cNvPr id="5" name="Shape 3">
+            <a:extLst>
+              <a:ext uri="{FF2B5EF4-FFF2-40B4-BE49-F238E27FC236}">
+                <a16:creationId xmlns:a16="http://schemas.microsoft.com/office/drawing/2014/main" id="{977CFD76-40EE-D0BD-7B1C-0A874B2662EA}"/>
+              </a:ext>
+            </a:extLst>
+          </p:cNvPr>
+          <p:cNvSpPr/>
+          <p:nvPr/>
+        </p:nvSpPr>
+        <p:spPr>
+          <a:xfrm>
+            <a:off x="495886" y="2243796"/>
+            <a:ext cx="4023360" cy="109728"/>
+          </a:xfrm>
+          <a:prstGeom prst="rect">
+            <a:avLst/>
+          </a:prstGeom>
+          <a:solidFill>
+            <a:srgbClr val="4F8EF7"/>
+          </a:solidFill>
+          <a:ln w="12700">
+            <a:solidFill>
+              <a:srgbClr val="4F8EF7"/>
+            </a:solidFill>
+            <a:prstDash val="solid"/>
+          </a:ln>
+        </p:spPr>
+        <p:txBody>
+          <a:bodyPr/>
+          <a:lstStyle/>
+          <a:p>
+            <a:endParaRPr lang="en-US"/>
+          </a:p>
+        </p:txBody>
+      </p:sp>
+      <p:sp>
+        <p:nvSpPr>
+          <p:cNvPr id="6" name="Text 4">
+            <a:extLst>
+              <a:ext uri="{FF2B5EF4-FFF2-40B4-BE49-F238E27FC236}">
+                <a16:creationId xmlns:a16="http://schemas.microsoft.com/office/drawing/2014/main" id="{7BD92DE5-5EF3-18E4-1642-DAA58437744A}"/>
+              </a:ext>
+            </a:extLst>
+          </p:cNvPr>
+          <p:cNvSpPr/>
+          <p:nvPr/>
+        </p:nvSpPr>
+        <p:spPr>
+          <a:xfrm>
+            <a:off x="993178" y="2838508"/>
+            <a:ext cx="7600775" cy="320040"/>
+          </a:xfrm>
+          <a:prstGeom prst="rect">
+            <a:avLst/>
+          </a:prstGeom>
+          <a:noFill/>
+          <a:ln/>
+        </p:spPr>
+        <p:txBody>
+          <a:bodyPr wrap="square" lIns="0" tIns="0" rIns="0" bIns="0" rtlCol="0" anchor="ctr"/>
+          <a:lstStyle/>
+          <a:p>
+            <a:r>
+              <a:rPr lang="en-US" sz="1600" b="1" dirty="0">
+                <a:solidFill>
+                  <a:srgbClr val="4F8EF7"/>
+                </a:solidFill>
+                <a:latin typeface="Calibri" pitchFamily="34" charset="0"/>
+                <a:ea typeface="Calibri" pitchFamily="34" charset="-122"/>
+                <a:cs typeface="Calibri" pitchFamily="34" charset="-120"/>
+              </a:rPr>
+              <a:t>https://github.com/Sama3mad/Project-5---IPC-via-Shared-Memory-POSIX-Threads-.git</a:t>
+            </a:r>
+            <a:endParaRPr lang="en-US" sz="1600" dirty="0"/>
+          </a:p>
+        </p:txBody>
+      </p:sp>
+    </p:spTree>
+    <p:extLst>
+      <p:ext uri="{BB962C8B-B14F-4D97-AF65-F5344CB8AC3E}">
+        <p14:creationId xmlns:p14="http://schemas.microsoft.com/office/powerpoint/2010/main" val="1925994685"/>
+      </p:ext>
+    </p:extLst>
+  </p:cSld>
+  <p:clrMapOvr>
+    <a:masterClrMapping/>
+  </p:clrMapOvr>
+</p:sld>
+</file>
+
+<file path=ppt/slides/slide4.xml><?xml version="1.0" encoding="utf-8"?>
 <p:sld xmlns:a="http://schemas.openxmlformats.org/drawingml/2006/main" xmlns:r="http://schemas.openxmlformats.org/officeDocument/2006/relationships" xmlns:p="http://schemas.openxmlformats.org/presentationml/2006/main">
   <p:cSld name="Slide 3">
     <p:bg>
@@ -17905,7 +18666,7 @@
 </p:sld>
 </file>
 
-<file path=ppt/slides/slide4.xml><?xml version="1.0" encoding="utf-8"?>
+<file path=ppt/slides/slide5.xml><?xml version="1.0" encoding="utf-8"?>
 <p:sld xmlns:a="http://schemas.openxmlformats.org/drawingml/2006/main" xmlns:r="http://schemas.openxmlformats.org/officeDocument/2006/relationships" xmlns:p="http://schemas.openxmlformats.org/presentationml/2006/main">
   <p:cSld name="Slide 4">
     <p:bg>
@@ -18749,7 +19510,7 @@
 </p:sld>
 </file>
 
-<file path=ppt/slides/slide5.xml><?xml version="1.0" encoding="utf-8"?>
+<file path=ppt/slides/slide6.xml><?xml version="1.0" encoding="utf-8"?>
 <p:sld xmlns:a="http://schemas.openxmlformats.org/drawingml/2006/main" xmlns:r="http://schemas.openxmlformats.org/officeDocument/2006/relationships" xmlns:p="http://schemas.openxmlformats.org/presentationml/2006/main">
   <p:cSld>
     <p:bg>
@@ -19224,7 +19985,7 @@
 </p:sld>
 </file>
 
-<file path=ppt/slides/slide6.xml><?xml version="1.0" encoding="utf-8"?>
+<file path=ppt/slides/slide7.xml><?xml version="1.0" encoding="utf-8"?>
 <p:sld xmlns:a="http://schemas.openxmlformats.org/drawingml/2006/main" xmlns:r="http://schemas.openxmlformats.org/officeDocument/2006/relationships" xmlns:p="http://schemas.openxmlformats.org/presentationml/2006/main">
   <p:cSld name="Slide 5">
     <p:bg>
@@ -20404,7 +21165,7 @@
 </p:sld>
 </file>
 
-<file path=ppt/slides/slide7.xml><?xml version="1.0" encoding="utf-8"?>
+<file path=ppt/slides/slide8.xml><?xml version="1.0" encoding="utf-8"?>
 <p:sld xmlns:a="http://schemas.openxmlformats.org/drawingml/2006/main" xmlns:r="http://schemas.openxmlformats.org/officeDocument/2006/relationships" xmlns:p="http://schemas.openxmlformats.org/presentationml/2006/main">
   <p:cSld>
     <p:bg>
@@ -20531,7 +21292,7 @@
 </p:sld>
 </file>
 
-<file path=ppt/slides/slide8.xml><?xml version="1.0" encoding="utf-8"?>
+<file path=ppt/slides/slide9.xml><?xml version="1.0" encoding="utf-8"?>
 <p:sld xmlns:a="http://schemas.openxmlformats.org/drawingml/2006/main" xmlns:r="http://schemas.openxmlformats.org/officeDocument/2006/relationships" xmlns:p="http://schemas.openxmlformats.org/presentationml/2006/main">
   <p:cSld>
     <p:spTree>
@@ -21095,378 +21856,6 @@
         </p:txBody>
       </p:sp>
     </p:spTree>
-  </p:cSld>
-  <p:clrMapOvr>
-    <a:masterClrMapping/>
-  </p:clrMapOvr>
-</p:sld>
-</file>
-
-<file path=ppt/slides/slide9.xml><?xml version="1.0" encoding="utf-8"?>
-<p:sld xmlns:a="http://schemas.openxmlformats.org/drawingml/2006/main" xmlns:r="http://schemas.openxmlformats.org/officeDocument/2006/relationships" xmlns:p="http://schemas.openxmlformats.org/presentationml/2006/main">
-  <p:cSld>
-    <p:spTree>
-      <p:nvGrpSpPr>
-        <p:cNvPr id="1" name="">
-          <a:extLst>
-            <a:ext uri="{FF2B5EF4-FFF2-40B4-BE49-F238E27FC236}">
-              <a16:creationId xmlns:a16="http://schemas.microsoft.com/office/drawing/2014/main" id="{725B3854-6ADE-1361-C926-BC58365BF789}"/>
-            </a:ext>
-          </a:extLst>
-        </p:cNvPr>
-        <p:cNvGrpSpPr/>
-        <p:nvPr/>
-      </p:nvGrpSpPr>
-      <p:grpSpPr>
-        <a:xfrm>
-          <a:off x="0" y="0"/>
-          <a:ext cx="0" cy="0"/>
-          <a:chOff x="0" y="0"/>
-          <a:chExt cx="0" cy="0"/>
-        </a:xfrm>
-      </p:grpSpPr>
-      <p:sp>
-        <p:nvSpPr>
-          <p:cNvPr id="2" name="Shape 0">
-            <a:extLst>
-              <a:ext uri="{FF2B5EF4-FFF2-40B4-BE49-F238E27FC236}">
-                <a16:creationId xmlns:a16="http://schemas.microsoft.com/office/drawing/2014/main" id="{6478A43A-06D6-0B79-0B1C-69F930775618}"/>
-              </a:ext>
-            </a:extLst>
-          </p:cNvPr>
-          <p:cNvSpPr/>
-          <p:nvPr/>
-        </p:nvSpPr>
-        <p:spPr>
-          <a:xfrm>
-            <a:off x="0" y="0"/>
-            <a:ext cx="9144000" cy="777240"/>
-          </a:xfrm>
-          <a:prstGeom prst="rect">
-            <a:avLst/>
-          </a:prstGeom>
-          <a:solidFill>
-            <a:srgbClr val="00A896"/>
-          </a:solidFill>
-          <a:ln w="12700">
-            <a:solidFill>
-              <a:srgbClr val="00A896"/>
-            </a:solidFill>
-            <a:prstDash val="solid"/>
-          </a:ln>
-        </p:spPr>
-        <p:txBody>
-          <a:bodyPr/>
-          <a:lstStyle/>
-          <a:p>
-            <a:endParaRPr lang="en-US"/>
-          </a:p>
-        </p:txBody>
-      </p:sp>
-      <p:sp>
-        <p:nvSpPr>
-          <p:cNvPr id="3" name="Text 1">
-            <a:extLst>
-              <a:ext uri="{FF2B5EF4-FFF2-40B4-BE49-F238E27FC236}">
-                <a16:creationId xmlns:a16="http://schemas.microsoft.com/office/drawing/2014/main" id="{320303AF-3C5C-D3B3-2594-B705F57EB492}"/>
-              </a:ext>
-            </a:extLst>
-          </p:cNvPr>
-          <p:cNvSpPr/>
-          <p:nvPr/>
-        </p:nvSpPr>
-        <p:spPr>
-          <a:xfrm>
-            <a:off x="365760" y="0"/>
-            <a:ext cx="8412480" cy="777240"/>
-          </a:xfrm>
-          <a:prstGeom prst="rect">
-            <a:avLst/>
-          </a:prstGeom>
-          <a:noFill/>
-          <a:ln/>
-        </p:spPr>
-        <p:txBody>
-          <a:bodyPr wrap="square" lIns="0" tIns="0" rIns="0" bIns="0" rtlCol="0" anchor="ctr"/>
-          <a:lstStyle/>
-          <a:p>
-            <a:pPr marL="0" indent="0">
-              <a:buNone/>
-            </a:pPr>
-            <a:r>
-              <a:rPr lang="en-US" sz="2400" b="1" dirty="0">
-                <a:solidFill>
-                  <a:srgbClr val="FFFFFF"/>
-                </a:solidFill>
-                <a:latin typeface="Calibri" pitchFamily="34" charset="0"/>
-                <a:ea typeface="Calibri" pitchFamily="34" charset="-122"/>
-                <a:cs typeface="Calibri" pitchFamily="34" charset="-120"/>
-              </a:rPr>
-              <a:t>02  Parallel Compute - Description</a:t>
-            </a:r>
-            <a:endParaRPr lang="en-US" sz="2400" dirty="0"/>
-          </a:p>
-        </p:txBody>
-      </p:sp>
-      <p:sp>
-        <p:nvSpPr>
-          <p:cNvPr id="4" name="Shape 2">
-            <a:extLst>
-              <a:ext uri="{FF2B5EF4-FFF2-40B4-BE49-F238E27FC236}">
-                <a16:creationId xmlns:a16="http://schemas.microsoft.com/office/drawing/2014/main" id="{AA68B348-F7F1-BA22-450B-F651397AFFD9}"/>
-              </a:ext>
-            </a:extLst>
-          </p:cNvPr>
-          <p:cNvSpPr/>
-          <p:nvPr/>
-        </p:nvSpPr>
-        <p:spPr>
-          <a:xfrm>
-            <a:off x="457200" y="1325880"/>
-            <a:ext cx="8015068" cy="3017521"/>
-          </a:xfrm>
-          <a:prstGeom prst="rect">
-            <a:avLst/>
-          </a:prstGeom>
-          <a:solidFill>
-            <a:srgbClr val="1C2E3E"/>
-          </a:solidFill>
-          <a:ln w="12700">
-            <a:solidFill>
-              <a:srgbClr val="3D5166"/>
-            </a:solidFill>
-            <a:prstDash val="solid"/>
-          </a:ln>
-        </p:spPr>
-        <p:txBody>
-          <a:bodyPr/>
-          <a:lstStyle/>
-          <a:p>
-            <a:endParaRPr lang="en-US"/>
-          </a:p>
-        </p:txBody>
-      </p:sp>
-      <p:sp>
-        <p:nvSpPr>
-          <p:cNvPr id="5" name="Text 3">
-            <a:extLst>
-              <a:ext uri="{FF2B5EF4-FFF2-40B4-BE49-F238E27FC236}">
-                <a16:creationId xmlns:a16="http://schemas.microsoft.com/office/drawing/2014/main" id="{B3B31F22-1334-30EB-0ED4-0FC625DB0246}"/>
-              </a:ext>
-            </a:extLst>
-          </p:cNvPr>
-          <p:cNvSpPr/>
-          <p:nvPr/>
-        </p:nvSpPr>
-        <p:spPr>
-          <a:xfrm>
-            <a:off x="594360" y="1456008"/>
-            <a:ext cx="3657600" cy="365760"/>
-          </a:xfrm>
-          <a:prstGeom prst="rect">
-            <a:avLst/>
-          </a:prstGeom>
-          <a:noFill/>
-          <a:ln/>
-        </p:spPr>
-        <p:txBody>
-          <a:bodyPr wrap="square" rtlCol="0" anchor="ctr"/>
-          <a:lstStyle/>
-          <a:p>
-            <a:pPr marL="0" indent="0">
-              <a:buNone/>
-            </a:pPr>
-            <a:r>
-              <a:rPr lang="en-US" sz="2000" b="1" dirty="0">
-                <a:solidFill>
-                  <a:srgbClr val="00C9A7"/>
-                </a:solidFill>
-                <a:latin typeface="Calibri" pitchFamily="34" charset="0"/>
-                <a:ea typeface="Calibri" pitchFamily="34" charset="-122"/>
-                <a:cs typeface="Calibri" pitchFamily="34" charset="-120"/>
-              </a:rPr>
-              <a:t>What it does</a:t>
-            </a:r>
-            <a:endParaRPr lang="en-US" sz="2000" dirty="0"/>
-          </a:p>
-        </p:txBody>
-      </p:sp>
-      <p:sp>
-        <p:nvSpPr>
-          <p:cNvPr id="6" name="Text 4">
-            <a:extLst>
-              <a:ext uri="{FF2B5EF4-FFF2-40B4-BE49-F238E27FC236}">
-                <a16:creationId xmlns:a16="http://schemas.microsoft.com/office/drawing/2014/main" id="{ADA7DDB5-7839-A085-F6AE-B26DCE933E60}"/>
-              </a:ext>
-            </a:extLst>
-          </p:cNvPr>
-          <p:cNvSpPr/>
-          <p:nvPr/>
-        </p:nvSpPr>
-        <p:spPr>
-          <a:xfrm>
-            <a:off x="1041009" y="2440745"/>
-            <a:ext cx="7336302" cy="1515794"/>
-          </a:xfrm>
-          <a:prstGeom prst="rect">
-            <a:avLst/>
-          </a:prstGeom>
-          <a:noFill/>
-          <a:ln/>
-        </p:spPr>
-        <p:txBody>
-          <a:bodyPr wrap="square" rtlCol="0" anchor="ctr"/>
-          <a:lstStyle/>
-          <a:p>
-            <a:r>
-              <a:rPr lang="en-US" dirty="0">
-                <a:solidFill>
-                  <a:schemeClr val="bg1"/>
-                </a:solidFill>
-              </a:rPr>
-              <a:t>Takes:</a:t>
-            </a:r>
-            <a:endParaRPr lang="en-US" sz="1400" dirty="0">
-              <a:solidFill>
-                <a:schemeClr val="bg1"/>
-              </a:solidFill>
-            </a:endParaRPr>
-          </a:p>
-          <a:p>
-            <a:pPr marL="285750" indent="-285750" fontAlgn="base">
-              <a:buFontTx/>
-              <a:buChar char="-"/>
-            </a:pPr>
-            <a:r>
-              <a:rPr lang="en-US" dirty="0">
-                <a:solidFill>
-                  <a:schemeClr val="bg1"/>
-                </a:solidFill>
-              </a:rPr>
-              <a:t>The path of a file containing N numbers separated by new lines (or commas)</a:t>
-            </a:r>
-          </a:p>
-          <a:p>
-            <a:pPr marL="285750" indent="-285750" fontAlgn="base">
-              <a:buFontTx/>
-              <a:buChar char="-"/>
-            </a:pPr>
-            <a:r>
-              <a:rPr lang="en-US" dirty="0">
-                <a:solidFill>
-                  <a:schemeClr val="bg1"/>
-                </a:solidFill>
-              </a:rPr>
-              <a:t>Number of processes </a:t>
-            </a:r>
-            <a:r>
-              <a:rPr lang="en-US" dirty="0" err="1">
-                <a:solidFill>
-                  <a:schemeClr val="bg1"/>
-                </a:solidFill>
-              </a:rPr>
-              <a:t>n_proc</a:t>
-            </a:r>
-            <a:r>
-              <a:rPr lang="en-US" dirty="0">
-                <a:solidFill>
-                  <a:schemeClr val="bg1"/>
-                </a:solidFill>
-              </a:rPr>
-              <a:t>.</a:t>
-            </a:r>
-          </a:p>
-          <a:p>
-            <a:pPr marL="285750" indent="-285750" fontAlgn="base">
-              <a:buFontTx/>
-              <a:buChar char="-"/>
-            </a:pPr>
-            <a:r>
-              <a:rPr lang="en-US" dirty="0">
-                <a:solidFill>
-                  <a:schemeClr val="bg1"/>
-                </a:solidFill>
-              </a:rPr>
-              <a:t>A pointer to a function f that takes 2 numbers and returns a number.</a:t>
-            </a:r>
-          </a:p>
-          <a:p>
-            <a:pPr fontAlgn="base"/>
-            <a:endParaRPr lang="en-US" dirty="0">
-              <a:solidFill>
-                <a:schemeClr val="bg1"/>
-              </a:solidFill>
-            </a:endParaRPr>
-          </a:p>
-          <a:p>
-            <a:r>
-              <a:rPr lang="en-US" dirty="0">
-                <a:solidFill>
-                  <a:schemeClr val="bg1"/>
-                </a:solidFill>
-              </a:rPr>
-              <a:t>then does the same as </a:t>
-            </a:r>
-            <a:r>
-              <a:rPr lang="en-US" dirty="0" err="1">
-                <a:solidFill>
-                  <a:schemeClr val="bg1"/>
-                </a:solidFill>
-              </a:rPr>
-              <a:t>sequential_compute</a:t>
-            </a:r>
-            <a:r>
-              <a:rPr lang="en-US" dirty="0">
-                <a:solidFill>
-                  <a:schemeClr val="bg1"/>
-                </a:solidFill>
-              </a:rPr>
-              <a:t> except that it splits the computation over </a:t>
-            </a:r>
-            <a:r>
-              <a:rPr lang="en-US" dirty="0" err="1">
-                <a:solidFill>
-                  <a:schemeClr val="bg1"/>
-                </a:solidFill>
-              </a:rPr>
-              <a:t>n_proc</a:t>
-            </a:r>
-            <a:r>
-              <a:rPr lang="en-US" dirty="0">
-                <a:solidFill>
-                  <a:schemeClr val="bg1"/>
-                </a:solidFill>
-              </a:rPr>
-              <a:t> processes as evenly as possible.</a:t>
-            </a:r>
-            <a:endParaRPr lang="en-US" sz="1400" dirty="0">
-              <a:solidFill>
-                <a:schemeClr val="bg1"/>
-              </a:solidFill>
-            </a:endParaRPr>
-          </a:p>
-          <a:p>
-            <a:br>
-              <a:rPr lang="en-US" sz="1400" dirty="0">
-                <a:solidFill>
-                  <a:schemeClr val="bg1"/>
-                </a:solidFill>
-              </a:rPr>
-            </a:br>
-            <a:endParaRPr lang="en-US" sz="1400" dirty="0">
-              <a:solidFill>
-                <a:schemeClr val="bg1"/>
-              </a:solidFill>
-            </a:endParaRPr>
-          </a:p>
-        </p:txBody>
-      </p:sp>
-    </p:spTree>
-    <p:extLst>
-      <p:ext uri="{BB962C8B-B14F-4D97-AF65-F5344CB8AC3E}">
-        <p14:creationId xmlns:p14="http://schemas.microsoft.com/office/powerpoint/2010/main" val="1917002051"/>
-      </p:ext>
-    </p:extLst>
   </p:cSld>
   <p:clrMapOvr>
     <a:masterClrMapping/>
